--- a/docs/figures_reference_matching_20260914/figures_reference_matching_20260914.pptx
+++ b/docs/figures_reference_matching_20260914/figures_reference_matching_20260914.pptx
@@ -2,19 +2,19 @@
 <file path=ppt/presentation.xml><?xml version="1.0" encoding="utf-8"?>
 <p:presentation xmlns:p="http://schemas.openxmlformats.org/presentationml/2006/main">
   <p:sldMasterIdLst>
-    <p:sldMasterId xmlns:r="http://schemas.openxmlformats.org/officeDocument/2006/relationships" id="2147483648" r:id="R5a8c3d38ddb44689"/>
+    <p:sldMasterId xmlns:r="http://schemas.openxmlformats.org/officeDocument/2006/relationships" id="2147483648" r:id="R51345835b1254a87"/>
   </p:sldMasterIdLst>
   <p:notesMasterIdLst>
-    <p:notesMasterId xmlns:r="http://schemas.openxmlformats.org/officeDocument/2006/relationships" r:id="R1fad4e8bfc0e4865"/>
+    <p:notesMasterId xmlns:r="http://schemas.openxmlformats.org/officeDocument/2006/relationships" r:id="Rc153a6f544a94409"/>
   </p:notesMasterIdLst>
   <p:sldIdLst>
-    <p:sldId xmlns:r="http://schemas.openxmlformats.org/officeDocument/2006/relationships" id="256" r:id="Ra171262e71cd4338"/>
-    <p:sldId xmlns:r="http://schemas.openxmlformats.org/officeDocument/2006/relationships" id="257" r:id="R7c58963bb4a040c0"/>
-    <p:sldId xmlns:r="http://schemas.openxmlformats.org/officeDocument/2006/relationships" id="258" r:id="R9cbbbf33b03140cd"/>
-    <p:sldId xmlns:r="http://schemas.openxmlformats.org/officeDocument/2006/relationships" id="259" r:id="R00ca49816e3b4a3e"/>
-    <p:sldId xmlns:r="http://schemas.openxmlformats.org/officeDocument/2006/relationships" id="260" r:id="Rd8bf2e59d8b3438b"/>
-    <p:sldId xmlns:r="http://schemas.openxmlformats.org/officeDocument/2006/relationships" id="261" r:id="R413945b431f34733"/>
-    <p:sldId xmlns:r="http://schemas.openxmlformats.org/officeDocument/2006/relationships" id="262" r:id="R0ce59b28709941ad"/>
+    <p:sldId xmlns:r="http://schemas.openxmlformats.org/officeDocument/2006/relationships" id="256" r:id="Rda00e838b94040d1"/>
+    <p:sldId xmlns:r="http://schemas.openxmlformats.org/officeDocument/2006/relationships" id="257" r:id="R6940997d303c4911"/>
+    <p:sldId xmlns:r="http://schemas.openxmlformats.org/officeDocument/2006/relationships" id="258" r:id="Ra05200208a3d43f4"/>
+    <p:sldId xmlns:r="http://schemas.openxmlformats.org/officeDocument/2006/relationships" id="259" r:id="R3aae4ddca0b94722"/>
+    <p:sldId xmlns:r="http://schemas.openxmlformats.org/officeDocument/2006/relationships" id="260" r:id="Re16bf98538e946c6"/>
+    <p:sldId xmlns:r="http://schemas.openxmlformats.org/officeDocument/2006/relationships" id="261" r:id="Rc82ded8d6f144ee1"/>
+    <p:sldId xmlns:r="http://schemas.openxmlformats.org/officeDocument/2006/relationships" id="262" r:id="Re118d787522a4214"/>
   </p:sldIdLst>
   <p:sldSz cx="12192000" cy="8572500"/>
   <p:notesSz cx="6858000" cy="9144000"/>
@@ -658,7 +658,7 @@
           <a:lstStyle xmlns:a="http://schemas.openxmlformats.org/drawingml/2006/main"/>
           <a:p xmlns:a="http://schemas.openxmlformats.org/drawingml/2006/main">
             <a:r>
-              <a:t>Figure 4. (a) the direct interaction I = E_L - E_J for every encoder instance of the extra slot, together with the 95% interval each source file carries; MVTec and VisA cells are reserved and empty because the four-dataset aggregation has not produced a table yet. (b) representation-swap effects E = P(new) - P(control) for the pre-specified S and D branches. (c) the interaction of the two matching rules per seed for seeds 0-7; seeds 3-7 share one query resampling block and are therefore not independent replicates of the query stream. Sources: 05_extra_encoders/encoder_comparison_three.csv (S, D, E1, E2, E3), 02_interaction/representation_effects.csv (S), 04_new_encoder/representation_effects_new_encoder.csv (D) and seeds_extension_20260917/interaction_by_seed.csv (8 seeds). Bars and points are point estimates; S and D intervals are the unadjusted 95% paired bootstrap intervals of the source files, the E1/E2/E3 intervals are that file's 95% level (its 98.75% level is the family-adjusted one), and the eight-seed panel has no interval because one run per seed exists. S uses 12 MPDD conditions and 8 BTAD conditions, D and the E branches use 4 conditions (seed {0,1} x K {1,4}), so the rows are not on identical grids and this is stated rather than hidden. BTAD uses the corrected geometry revision. The dashed guide marks 0.005 macro pixel AP, a project-internal practical scale, not an industrial standard.</a:t>
+              <a:t>Figure 4. (a) representation-swap effects E = P(new) - P(control) for the pre-specified S and D branches, each with the unadjusted 95% paired bootstrap interval of its source file. (b) the direct interaction I = E_L - E_J for every encoder instance of the extra slot; the MPDD and BTAD rows carry the per-encoder S, D, E1, E2 and E3 lanes, and the MVTec and VisA rows are drawn from the four-dataset aggregation generalization_mvtec_visa_20260915/interaction_generalization.csv as the GEN lane (bootstrap mean with its 95% bootstrap interval). Sources: 05_extra_encoders/encoder_comparison_three.csv (S, D, E1, E2, E3), 02_interaction/representation_effects.csv (S), 04_new_encoder/representation_effects_new_encoder.csv (D) and generalization_mvtec_visa_20260915/interaction_generalization.csv (MVTec/VisA, four-dataset aggregation). Bars and points are point estimates; S and D intervals are the unadjusted 95% paired bootstrap intervals of the source files, the E1/E2/E3 intervals are that file's 95% level (its 98.75% level is the family-adjusted one). S uses 12 MPDD conditions and 8 BTAD conditions, D and the E branches use 4 conditions (seed {0,1} x K {1,4}), so the rows are not on identical grids and this is stated rather than hidden. BTAD uses the corrected geometry revision. The dashed guide marks 0.005 macro pixel AP, a project-internal practical scale, not an industrial standard.</a:t>
             </a:r>
           </a:p>
         </p:txBody>
@@ -936,7 +936,7 @@
   </p:cSld>
   <p:clrMap bg1="lt1" tx1="dk1" bg2="lt2" tx2="dk2" accent1="accent1" accent2="accent2" accent3="accent3" accent4="accent4" accent5="accent5" accent6="accent6" hlink="hlink" folHlink="folHlink"/>
   <p:sldLayoutIdLst>
-    <p:sldLayoutId xmlns:r="http://schemas.openxmlformats.org/officeDocument/2006/relationships" id="2147483649" r:id="Refa3acb8e6254d04"/>
+    <p:sldLayoutId xmlns:r="http://schemas.openxmlformats.org/officeDocument/2006/relationships" id="2147483649" r:id="R566c22330b6d4987"/>
   </p:sldLayoutIdLst>
   <p:txStyles>
     <p:titleStyle>
@@ -1487,7 +1487,7 @@
           <p:cNvPr id="139" name="band-a">
             <a:extLst xmlns:a="http://schemas.openxmlformats.org/drawingml/2006/main">
               <a:ext uri="{FF2B5EF4-FFF2-40B4-BE49-F238E27FC236}">
-                <a16:creationId xmlns:a16="http://schemas.microsoft.com/office/drawing/2014/main" id="{B2EB9FF2-9544-4C62-A816-6E635A2ACF72}"/>
+                <a16:creationId xmlns:a16="http://schemas.microsoft.com/office/drawing/2014/main" id="{32F4A424-BAA8-4C40-A49C-963FC8603925}"/>
               </a:ext>
             </a:extLst>
           </p:cNvPr>
@@ -1518,7 +1518,7 @@
           <p:cNvPr id="2" name="band-b">
             <a:extLst xmlns:a="http://schemas.openxmlformats.org/drawingml/2006/main">
               <a:ext uri="{FF2B5EF4-FFF2-40B4-BE49-F238E27FC236}">
-                <a16:creationId xmlns:a16="http://schemas.microsoft.com/office/drawing/2014/main" id="{7D59F9CC-4E77-4AFF-A8B2-51BDB3772D8B}"/>
+                <a16:creationId xmlns:a16="http://schemas.microsoft.com/office/drawing/2014/main" id="{BE97A55B-57EE-4728-8865-796F5F6305AC}"/>
               </a:ext>
             </a:extLst>
           </p:cNvPr>
@@ -1549,7 +1549,7 @@
           <p:cNvPr id="3" name="band-footer">
             <a:extLst xmlns:a="http://schemas.openxmlformats.org/drawingml/2006/main">
               <a:ext uri="{FF2B5EF4-FFF2-40B4-BE49-F238E27FC236}">
-                <a16:creationId xmlns:a16="http://schemas.microsoft.com/office/drawing/2014/main" id="{6B549C5A-9912-4848-A378-B997D70AD9D1}"/>
+                <a16:creationId xmlns:a16="http://schemas.microsoft.com/office/drawing/2014/main" id="{823204AB-494B-4E82-A241-CE000DCAEEE2}"/>
               </a:ext>
             </a:extLst>
           </p:cNvPr>
@@ -1580,7 +1580,7 @@
           <p:cNvPr id="4" name="sec-a-chip">
             <a:extLst xmlns:a="http://schemas.openxmlformats.org/drawingml/2006/main">
               <a:ext uri="{FF2B5EF4-FFF2-40B4-BE49-F238E27FC236}">
-                <a16:creationId xmlns:a16="http://schemas.microsoft.com/office/drawing/2014/main" id="{E2B956D8-206C-4C5F-945C-DF2E5DF6B4F6}"/>
+                <a16:creationId xmlns:a16="http://schemas.microsoft.com/office/drawing/2014/main" id="{3BA57BD5-F0FB-444C-835C-88E889F80A4E}"/>
               </a:ext>
             </a:extLst>
           </p:cNvPr>
@@ -1615,7 +1615,7 @@
           <p:cNvPr id="5" name="sec-a-chip-text">
             <a:extLst xmlns:a="http://schemas.openxmlformats.org/drawingml/2006/main">
               <a:ext uri="{FF2B5EF4-FFF2-40B4-BE49-F238E27FC236}">
-                <a16:creationId xmlns:a16="http://schemas.microsoft.com/office/drawing/2014/main" id="{4CA94F02-7EAF-4EF2-B676-8DA7B915E6FD}"/>
+                <a16:creationId xmlns:a16="http://schemas.microsoft.com/office/drawing/2014/main" id="{67B052AD-2DDC-449F-9201-6000AF71E8D6}"/>
               </a:ext>
             </a:extLst>
           </p:cNvPr>
@@ -1677,7 +1677,7 @@
           <p:cNvPr id="6" name="sec-a">
             <a:extLst xmlns:a="http://schemas.openxmlformats.org/drawingml/2006/main">
               <a:ext uri="{FF2B5EF4-FFF2-40B4-BE49-F238E27FC236}">
-                <a16:creationId xmlns:a16="http://schemas.microsoft.com/office/drawing/2014/main" id="{B4E9B68C-4193-4A17-94F9-1C6E53709A3B}"/>
+                <a16:creationId xmlns:a16="http://schemas.microsoft.com/office/drawing/2014/main" id="{BB204BC2-46EA-40B9-9A7C-CAB8384F508E}"/>
               </a:ext>
             </a:extLst>
           </p:cNvPr>
@@ -1739,7 +1739,7 @@
           <p:cNvPr id="7" name="support-surface">
             <a:extLst xmlns:a="http://schemas.openxmlformats.org/drawingml/2006/main">
               <a:ext uri="{FF2B5EF4-FFF2-40B4-BE49-F238E27FC236}">
-                <a16:creationId xmlns:a16="http://schemas.microsoft.com/office/drawing/2014/main" id="{6D49C829-28BC-4B2C-9807-4CD0F5958332}"/>
+                <a16:creationId xmlns:a16="http://schemas.microsoft.com/office/drawing/2014/main" id="{BB94F1A1-81E3-4D31-898B-243674E557D0}"/>
               </a:ext>
             </a:extLst>
           </p:cNvPr>
@@ -1778,7 +1778,7 @@
           <p:nvPr/>
         </p:nvPicPr>
         <p:blipFill>
-          <a:blip xmlns:r="http://schemas.openxmlformats.org/officeDocument/2006/relationships" xmlns:a="http://schemas.openxmlformats.org/drawingml/2006/main" r:embed="R80b975c1a98f4d13"/>
+          <a:blip xmlns:r="http://schemas.openxmlformats.org/officeDocument/2006/relationships" xmlns:a="http://schemas.openxmlformats.org/drawingml/2006/main" r:embed="Rec97a8f9dc3a4845"/>
           <a:srcRect xmlns:a="http://schemas.openxmlformats.org/drawingml/2006/main" l="0" t="0" r="0" b="0"/>
           <a:stretch xmlns:a="http://schemas.openxmlformats.org/drawingml/2006/main">
             <a:fillRect l="0" t="0" r="0" b="0"/>
@@ -1799,7 +1799,7 @@
           <p:cNvPr id="9" name="support-frame-0">
             <a:extLst xmlns:a="http://schemas.openxmlformats.org/drawingml/2006/main">
               <a:ext uri="{FF2B5EF4-FFF2-40B4-BE49-F238E27FC236}">
-                <a16:creationId xmlns:a16="http://schemas.microsoft.com/office/drawing/2014/main" id="{C38A6B4F-71F2-4A81-8EA8-7EFDCA0DF0BE}"/>
+                <a16:creationId xmlns:a16="http://schemas.microsoft.com/office/drawing/2014/main" id="{4FF02B3D-57E4-4B54-A4BC-F7360FEBE176}"/>
               </a:ext>
             </a:extLst>
           </p:cNvPr>
@@ -1834,7 +1834,7 @@
           <p:nvPr/>
         </p:nvPicPr>
         <p:blipFill>
-          <a:blip xmlns:r="http://schemas.openxmlformats.org/officeDocument/2006/relationships" xmlns:a="http://schemas.openxmlformats.org/drawingml/2006/main" r:embed="R5b0f2a3f21e14c67"/>
+          <a:blip xmlns:r="http://schemas.openxmlformats.org/officeDocument/2006/relationships" xmlns:a="http://schemas.openxmlformats.org/drawingml/2006/main" r:embed="Ra1e771340ef84510"/>
           <a:srcRect xmlns:a="http://schemas.openxmlformats.org/drawingml/2006/main" l="0" t="0" r="0" b="0"/>
           <a:stretch xmlns:a="http://schemas.openxmlformats.org/drawingml/2006/main">
             <a:fillRect l="0" t="0" r="0" b="0"/>
@@ -1855,7 +1855,7 @@
           <p:cNvPr id="11" name="support-frame-1">
             <a:extLst xmlns:a="http://schemas.openxmlformats.org/drawingml/2006/main">
               <a:ext uri="{FF2B5EF4-FFF2-40B4-BE49-F238E27FC236}">
-                <a16:creationId xmlns:a16="http://schemas.microsoft.com/office/drawing/2014/main" id="{59593FF2-5673-4283-AC94-C886CC5A8CFC}"/>
+                <a16:creationId xmlns:a16="http://schemas.microsoft.com/office/drawing/2014/main" id="{9B58F190-8AD8-468E-9593-362DF5D2A3E2}"/>
               </a:ext>
             </a:extLst>
           </p:cNvPr>
@@ -1890,7 +1890,7 @@
           <p:nvPr/>
         </p:nvPicPr>
         <p:blipFill>
-          <a:blip xmlns:r="http://schemas.openxmlformats.org/officeDocument/2006/relationships" xmlns:a="http://schemas.openxmlformats.org/drawingml/2006/main" r:embed="R17b2a2660c0f4559"/>
+          <a:blip xmlns:r="http://schemas.openxmlformats.org/officeDocument/2006/relationships" xmlns:a="http://schemas.openxmlformats.org/drawingml/2006/main" r:embed="R0e275b2fd297425f"/>
           <a:srcRect xmlns:a="http://schemas.openxmlformats.org/drawingml/2006/main" l="0" t="0" r="0" b="0"/>
           <a:stretch xmlns:a="http://schemas.openxmlformats.org/drawingml/2006/main">
             <a:fillRect l="0" t="0" r="0" b="0"/>
@@ -1911,7 +1911,7 @@
           <p:cNvPr id="13" name="support-frame-2">
             <a:extLst xmlns:a="http://schemas.openxmlformats.org/drawingml/2006/main">
               <a:ext uri="{FF2B5EF4-FFF2-40B4-BE49-F238E27FC236}">
-                <a16:creationId xmlns:a16="http://schemas.microsoft.com/office/drawing/2014/main" id="{165A38DF-126A-4EA3-94AD-14CB0555FEE2}"/>
+                <a16:creationId xmlns:a16="http://schemas.microsoft.com/office/drawing/2014/main" id="{E9463DC3-3EE4-4B4B-9A9C-ECE444C7A035}"/>
               </a:ext>
             </a:extLst>
           </p:cNvPr>
@@ -1942,7 +1942,7 @@
           <p:cNvPr id="14" name="support-ellipsis">
             <a:extLst xmlns:a="http://schemas.openxmlformats.org/drawingml/2006/main">
               <a:ext uri="{FF2B5EF4-FFF2-40B4-BE49-F238E27FC236}">
-                <a16:creationId xmlns:a16="http://schemas.microsoft.com/office/drawing/2014/main" id="{27C837E6-C518-4693-9267-BFE569614E88}"/>
+                <a16:creationId xmlns:a16="http://schemas.microsoft.com/office/drawing/2014/main" id="{3F159C69-4B5A-4F9A-B698-6E36A0E59FF0}"/>
               </a:ext>
             </a:extLst>
           </p:cNvPr>
@@ -2004,7 +2004,7 @@
           <p:cNvPr id="15" name="anchor-0">
             <a:extLst xmlns:a="http://schemas.openxmlformats.org/drawingml/2006/main">
               <a:ext uri="{FF2B5EF4-FFF2-40B4-BE49-F238E27FC236}">
-                <a16:creationId xmlns:a16="http://schemas.microsoft.com/office/drawing/2014/main" id="{CE317C79-6CB8-40D8-B928-1DC8CF83F443}"/>
+                <a16:creationId xmlns:a16="http://schemas.microsoft.com/office/drawing/2014/main" id="{CA06FC7C-CA7A-44A0-9CB3-193A28D43309}"/>
               </a:ext>
             </a:extLst>
           </p:cNvPr>
@@ -2033,7 +2033,7 @@
           <p:cNvPr id="16" name="anchor-1">
             <a:extLst xmlns:a="http://schemas.openxmlformats.org/drawingml/2006/main">
               <a:ext uri="{FF2B5EF4-FFF2-40B4-BE49-F238E27FC236}">
-                <a16:creationId xmlns:a16="http://schemas.microsoft.com/office/drawing/2014/main" id="{D9C61D1B-7607-415E-8C83-466D8ABCC4EC}"/>
+                <a16:creationId xmlns:a16="http://schemas.microsoft.com/office/drawing/2014/main" id="{E032310E-053A-41DB-B741-3E40449EEC6E}"/>
               </a:ext>
             </a:extLst>
           </p:cNvPr>
@@ -2088,7 +2088,7 @@
           <p:cNvPr id="18" name="branches-surface">
             <a:extLst xmlns:a="http://schemas.openxmlformats.org/drawingml/2006/main">
               <a:ext uri="{FF2B5EF4-FFF2-40B4-BE49-F238E27FC236}">
-                <a16:creationId xmlns:a16="http://schemas.microsoft.com/office/drawing/2014/main" id="{13190544-C354-465C-BBF4-EC1C1820FD1F}"/>
+                <a16:creationId xmlns:a16="http://schemas.microsoft.com/office/drawing/2014/main" id="{D0196C23-E542-40FF-A9BB-77FEA7122538}"/>
               </a:ext>
             </a:extLst>
           </p:cNvPr>
@@ -2123,7 +2123,7 @@
           <p:cNvPr id="19" name="branches-title">
             <a:extLst xmlns:a="http://schemas.openxmlformats.org/drawingml/2006/main">
               <a:ext uri="{FF2B5EF4-FFF2-40B4-BE49-F238E27FC236}">
-                <a16:creationId xmlns:a16="http://schemas.microsoft.com/office/drawing/2014/main" id="{ACA38290-094E-427F-BE3E-747712234BFE}"/>
+                <a16:creationId xmlns:a16="http://schemas.microsoft.com/office/drawing/2014/main" id="{86230A79-96DC-42CB-AB3C-7CCA8A23850E}"/>
               </a:ext>
             </a:extLst>
           </p:cNvPr>
@@ -2185,7 +2185,7 @@
           <p:cNvPr id="20" name="branch-B">
             <a:extLst xmlns:a="http://schemas.openxmlformats.org/drawingml/2006/main">
               <a:ext uri="{FF2B5EF4-FFF2-40B4-BE49-F238E27FC236}">
-                <a16:creationId xmlns:a16="http://schemas.microsoft.com/office/drawing/2014/main" id="{527F7535-F212-48A4-906C-FE2ECAE6D5C4}"/>
+                <a16:creationId xmlns:a16="http://schemas.microsoft.com/office/drawing/2014/main" id="{478A9D86-9E92-4FA8-9FF3-43F8083BCDF2}"/>
               </a:ext>
             </a:extLst>
           </p:cNvPr>
@@ -2220,7 +2220,7 @@
           <p:cNvPr id="21" name="branch-B-text">
             <a:extLst xmlns:a="http://schemas.openxmlformats.org/drawingml/2006/main">
               <a:ext uri="{FF2B5EF4-FFF2-40B4-BE49-F238E27FC236}">
-                <a16:creationId xmlns:a16="http://schemas.microsoft.com/office/drawing/2014/main" id="{34A6DABB-29C6-46E1-97F9-F1E91D6AA3EC}"/>
+                <a16:creationId xmlns:a16="http://schemas.microsoft.com/office/drawing/2014/main" id="{6A2E025A-569F-4B13-A9B2-1BBA43247A26}"/>
               </a:ext>
             </a:extLst>
           </p:cNvPr>
@@ -2304,7 +2304,7 @@
           <p:cNvPr id="22" name="branch-C">
             <a:extLst xmlns:a="http://schemas.openxmlformats.org/drawingml/2006/main">
               <a:ext uri="{FF2B5EF4-FFF2-40B4-BE49-F238E27FC236}">
-                <a16:creationId xmlns:a16="http://schemas.microsoft.com/office/drawing/2014/main" id="{1C877F05-9147-484C-9AF6-12551A525441}"/>
+                <a16:creationId xmlns:a16="http://schemas.microsoft.com/office/drawing/2014/main" id="{C60CCC0A-A1E0-474C-84C8-822892CE72CB}"/>
               </a:ext>
             </a:extLst>
           </p:cNvPr>
@@ -2339,7 +2339,7 @@
           <p:cNvPr id="23" name="branch-C-text">
             <a:extLst xmlns:a="http://schemas.openxmlformats.org/drawingml/2006/main">
               <a:ext uri="{FF2B5EF4-FFF2-40B4-BE49-F238E27FC236}">
-                <a16:creationId xmlns:a16="http://schemas.microsoft.com/office/drawing/2014/main" id="{2666350A-C25B-42AA-B4EC-817C46CFFA1C}"/>
+                <a16:creationId xmlns:a16="http://schemas.microsoft.com/office/drawing/2014/main" id="{09DC2EF2-3DB4-47D8-A147-A40558421DAC}"/>
               </a:ext>
             </a:extLst>
           </p:cNvPr>
@@ -2412,7 +2412,7 @@
           <p:cNvPr id="24" name="branch-X">
             <a:extLst xmlns:a="http://schemas.openxmlformats.org/drawingml/2006/main">
               <a:ext uri="{FF2B5EF4-FFF2-40B4-BE49-F238E27FC236}">
-                <a16:creationId xmlns:a16="http://schemas.microsoft.com/office/drawing/2014/main" id="{6932AD57-2456-4838-812E-24CF0C5F2BF2}"/>
+                <a16:creationId xmlns:a16="http://schemas.microsoft.com/office/drawing/2014/main" id="{E27FF220-6144-431A-823C-FAE65F425617}"/>
               </a:ext>
             </a:extLst>
           </p:cNvPr>
@@ -2447,7 +2447,7 @@
           <p:cNvPr id="25" name="branch-X-text">
             <a:extLst xmlns:a="http://schemas.openxmlformats.org/drawingml/2006/main">
               <a:ext uri="{FF2B5EF4-FFF2-40B4-BE49-F238E27FC236}">
-                <a16:creationId xmlns:a16="http://schemas.microsoft.com/office/drawing/2014/main" id="{A509BB21-1A60-4977-B72F-FB421EE90840}"/>
+                <a16:creationId xmlns:a16="http://schemas.microsoft.com/office/drawing/2014/main" id="{9DCDCAEB-0AF1-4F37-B615-0882FFF53DF0}"/>
               </a:ext>
             </a:extLst>
           </p:cNvPr>
@@ -2542,7 +2542,7 @@
           <p:cNvPr id="26" name="anchor-2">
             <a:extLst xmlns:a="http://schemas.openxmlformats.org/drawingml/2006/main">
               <a:ext uri="{FF2B5EF4-FFF2-40B4-BE49-F238E27FC236}">
-                <a16:creationId xmlns:a16="http://schemas.microsoft.com/office/drawing/2014/main" id="{A6EDD70F-24C9-4953-A5BE-85B533531A1F}"/>
+                <a16:creationId xmlns:a16="http://schemas.microsoft.com/office/drawing/2014/main" id="{7FD0AFE3-CF23-471A-8263-10E43FF04535}"/>
               </a:ext>
             </a:extLst>
           </p:cNvPr>
@@ -2571,7 +2571,7 @@
           <p:cNvPr id="27" name="anchor-3">
             <a:extLst xmlns:a="http://schemas.openxmlformats.org/drawingml/2006/main">
               <a:ext uri="{FF2B5EF4-FFF2-40B4-BE49-F238E27FC236}">
-                <a16:creationId xmlns:a16="http://schemas.microsoft.com/office/drawing/2014/main" id="{B66AA4F0-ECE4-47FA-BFC0-77A47B78846B}"/>
+                <a16:creationId xmlns:a16="http://schemas.microsoft.com/office/drawing/2014/main" id="{44935177-2C5A-4ADD-BD13-27CB82A649D8}"/>
               </a:ext>
             </a:extLst>
           </p:cNvPr>
@@ -2626,7 +2626,7 @@
           <p:cNvPr id="29" name="align-surface">
             <a:extLst xmlns:a="http://schemas.openxmlformats.org/drawingml/2006/main">
               <a:ext uri="{FF2B5EF4-FFF2-40B4-BE49-F238E27FC236}">
-                <a16:creationId xmlns:a16="http://schemas.microsoft.com/office/drawing/2014/main" id="{6534F9DA-5046-48CF-8912-F4C73891AA94}"/>
+                <a16:creationId xmlns:a16="http://schemas.microsoft.com/office/drawing/2014/main" id="{70F445DF-DF07-45DC-BD8A-C4F17C7A9509}"/>
               </a:ext>
             </a:extLst>
           </p:cNvPr>
@@ -2661,7 +2661,7 @@
           <p:cNvPr id="30" name="align-title">
             <a:extLst xmlns:a="http://schemas.openxmlformats.org/drawingml/2006/main">
               <a:ext uri="{FF2B5EF4-FFF2-40B4-BE49-F238E27FC236}">
-                <a16:creationId xmlns:a16="http://schemas.microsoft.com/office/drawing/2014/main" id="{A948FA41-5911-456D-B850-D2F20F1D8F94}"/>
+                <a16:creationId xmlns:a16="http://schemas.microsoft.com/office/drawing/2014/main" id="{3ABEA350-4F7E-4297-BF2C-CBD43E996A0E}"/>
               </a:ext>
             </a:extLst>
           </p:cNvPr>
@@ -2723,7 +2723,7 @@
           <p:cNvPr id="31" name="align-grid-0-0">
             <a:extLst xmlns:a="http://schemas.openxmlformats.org/drawingml/2006/main">
               <a:ext uri="{FF2B5EF4-FFF2-40B4-BE49-F238E27FC236}">
-                <a16:creationId xmlns:a16="http://schemas.microsoft.com/office/drawing/2014/main" id="{C0DB765B-E974-468F-8DCA-2C7BBD9C4C27}"/>
+                <a16:creationId xmlns:a16="http://schemas.microsoft.com/office/drawing/2014/main" id="{9756F0D9-EE3E-45F6-8666-1324C2755171}"/>
               </a:ext>
             </a:extLst>
           </p:cNvPr>
@@ -2756,7 +2756,7 @@
           <p:cNvPr id="32" name="align-grid-0-1">
             <a:extLst xmlns:a="http://schemas.openxmlformats.org/drawingml/2006/main">
               <a:ext uri="{FF2B5EF4-FFF2-40B4-BE49-F238E27FC236}">
-                <a16:creationId xmlns:a16="http://schemas.microsoft.com/office/drawing/2014/main" id="{F495ECB7-0FA4-4167-9727-1C813EA905F5}"/>
+                <a16:creationId xmlns:a16="http://schemas.microsoft.com/office/drawing/2014/main" id="{991871AF-50C7-4696-98FF-3539ECE2FDEA}"/>
               </a:ext>
             </a:extLst>
           </p:cNvPr>
@@ -2789,7 +2789,7 @@
           <p:cNvPr id="33" name="align-grid-0-2">
             <a:extLst xmlns:a="http://schemas.openxmlformats.org/drawingml/2006/main">
               <a:ext uri="{FF2B5EF4-FFF2-40B4-BE49-F238E27FC236}">
-                <a16:creationId xmlns:a16="http://schemas.microsoft.com/office/drawing/2014/main" id="{308A9F49-81F6-476A-A73B-61B916582460}"/>
+                <a16:creationId xmlns:a16="http://schemas.microsoft.com/office/drawing/2014/main" id="{14DB638F-8EF7-4A45-9F9D-D256EC8EE9AC}"/>
               </a:ext>
             </a:extLst>
           </p:cNvPr>
@@ -2822,7 +2822,7 @@
           <p:cNvPr id="34" name="align-grid-1-0">
             <a:extLst xmlns:a="http://schemas.openxmlformats.org/drawingml/2006/main">
               <a:ext uri="{FF2B5EF4-FFF2-40B4-BE49-F238E27FC236}">
-                <a16:creationId xmlns:a16="http://schemas.microsoft.com/office/drawing/2014/main" id="{938DC98F-228B-4530-95F6-F5990A04835B}"/>
+                <a16:creationId xmlns:a16="http://schemas.microsoft.com/office/drawing/2014/main" id="{C22BC8F3-E304-4524-B2B9-CF2B2A390BAE}"/>
               </a:ext>
             </a:extLst>
           </p:cNvPr>
@@ -2855,7 +2855,7 @@
           <p:cNvPr id="35" name="align-grid-1-1">
             <a:extLst xmlns:a="http://schemas.openxmlformats.org/drawingml/2006/main">
               <a:ext uri="{FF2B5EF4-FFF2-40B4-BE49-F238E27FC236}">
-                <a16:creationId xmlns:a16="http://schemas.microsoft.com/office/drawing/2014/main" id="{BB1E0E5B-B558-4FED-999E-360C193AA32B}"/>
+                <a16:creationId xmlns:a16="http://schemas.microsoft.com/office/drawing/2014/main" id="{4A7F2F82-97A0-4AC9-A689-1096CA5F8B59}"/>
               </a:ext>
             </a:extLst>
           </p:cNvPr>
@@ -2888,7 +2888,7 @@
           <p:cNvPr id="36" name="align-grid-1-2">
             <a:extLst xmlns:a="http://schemas.openxmlformats.org/drawingml/2006/main">
               <a:ext uri="{FF2B5EF4-FFF2-40B4-BE49-F238E27FC236}">
-                <a16:creationId xmlns:a16="http://schemas.microsoft.com/office/drawing/2014/main" id="{633CA340-CC74-41C3-B9E8-EB5338293A42}"/>
+                <a16:creationId xmlns:a16="http://schemas.microsoft.com/office/drawing/2014/main" id="{8FE3B2B4-47DC-4D89-97AB-F440DFC0B6DE}"/>
               </a:ext>
             </a:extLst>
           </p:cNvPr>
@@ -2921,7 +2921,7 @@
           <p:cNvPr id="37" name="align-grid-2-0">
             <a:extLst xmlns:a="http://schemas.openxmlformats.org/drawingml/2006/main">
               <a:ext uri="{FF2B5EF4-FFF2-40B4-BE49-F238E27FC236}">
-                <a16:creationId xmlns:a16="http://schemas.microsoft.com/office/drawing/2014/main" id="{1B539EA6-2B9F-46B2-BCA8-5FB40C2555C1}"/>
+                <a16:creationId xmlns:a16="http://schemas.microsoft.com/office/drawing/2014/main" id="{23902F82-F99C-4720-8D84-C735DBC7FEA4}"/>
               </a:ext>
             </a:extLst>
           </p:cNvPr>
@@ -2954,7 +2954,7 @@
           <p:cNvPr id="38" name="align-grid-2-1">
             <a:extLst xmlns:a="http://schemas.openxmlformats.org/drawingml/2006/main">
               <a:ext uri="{FF2B5EF4-FFF2-40B4-BE49-F238E27FC236}">
-                <a16:creationId xmlns:a16="http://schemas.microsoft.com/office/drawing/2014/main" id="{802BF9E8-41F0-420D-978E-0651CF13E3FA}"/>
+                <a16:creationId xmlns:a16="http://schemas.microsoft.com/office/drawing/2014/main" id="{87A74F8F-140B-4F29-B1AC-0F58D5952A3A}"/>
               </a:ext>
             </a:extLst>
           </p:cNvPr>
@@ -2987,7 +2987,7 @@
           <p:cNvPr id="39" name="align-grid-2-2">
             <a:extLst xmlns:a="http://schemas.openxmlformats.org/drawingml/2006/main">
               <a:ext uri="{FF2B5EF4-FFF2-40B4-BE49-F238E27FC236}">
-                <a16:creationId xmlns:a16="http://schemas.microsoft.com/office/drawing/2014/main" id="{14A99FB3-961F-411E-BCDD-9375FF2C64B9}"/>
+                <a16:creationId xmlns:a16="http://schemas.microsoft.com/office/drawing/2014/main" id="{06C9BAFE-6CDC-4748-8C3D-145A4EB119AA}"/>
               </a:ext>
             </a:extLst>
           </p:cNvPr>
@@ -3020,7 +3020,7 @@
           <p:cNvPr id="40" name="anchor-4">
             <a:extLst xmlns:a="http://schemas.openxmlformats.org/drawingml/2006/main">
               <a:ext uri="{FF2B5EF4-FFF2-40B4-BE49-F238E27FC236}">
-                <a16:creationId xmlns:a16="http://schemas.microsoft.com/office/drawing/2014/main" id="{8A681197-6D91-4163-A321-9008FBF5FAD3}"/>
+                <a16:creationId xmlns:a16="http://schemas.microsoft.com/office/drawing/2014/main" id="{11C053DB-DC3F-474F-B229-8DC60A8CED50}"/>
               </a:ext>
             </a:extLst>
           </p:cNvPr>
@@ -3049,7 +3049,7 @@
           <p:cNvPr id="41" name="anchor-5">
             <a:extLst xmlns:a="http://schemas.openxmlformats.org/drawingml/2006/main">
               <a:ext uri="{FF2B5EF4-FFF2-40B4-BE49-F238E27FC236}">
-                <a16:creationId xmlns:a16="http://schemas.microsoft.com/office/drawing/2014/main" id="{A660E2CF-530C-4432-99EA-5BE254F7F775}"/>
+                <a16:creationId xmlns:a16="http://schemas.microsoft.com/office/drawing/2014/main" id="{C6186CFB-6D2D-4128-BFE5-D4014408C2F8}"/>
               </a:ext>
             </a:extLst>
           </p:cNvPr>
@@ -3104,7 +3104,7 @@
           <p:cNvPr id="43" name="bank-surface">
             <a:extLst xmlns:a="http://schemas.openxmlformats.org/drawingml/2006/main">
               <a:ext uri="{FF2B5EF4-FFF2-40B4-BE49-F238E27FC236}">
-                <a16:creationId xmlns:a16="http://schemas.microsoft.com/office/drawing/2014/main" id="{C70033A3-97F2-483B-91F9-9D125FB6DFE5}"/>
+                <a16:creationId xmlns:a16="http://schemas.microsoft.com/office/drawing/2014/main" id="{3EDC9166-1E60-483B-ABBF-C4932E445D34}"/>
               </a:ext>
             </a:extLst>
           </p:cNvPr>
@@ -3139,7 +3139,7 @@
           <p:cNvPr id="44" name="bank-title">
             <a:extLst xmlns:a="http://schemas.openxmlformats.org/drawingml/2006/main">
               <a:ext uri="{FF2B5EF4-FFF2-40B4-BE49-F238E27FC236}">
-                <a16:creationId xmlns:a16="http://schemas.microsoft.com/office/drawing/2014/main" id="{55235CD3-AF31-4EB4-938D-A8C6228BB479}"/>
+                <a16:creationId xmlns:a16="http://schemas.microsoft.com/office/drawing/2014/main" id="{A5CB301E-7F94-4F2E-9128-1E3C436AC35F}"/>
               </a:ext>
             </a:extLst>
           </p:cNvPr>
@@ -3201,7 +3201,7 @@
           <p:cNvPr id="45" name="bank-row-0-0">
             <a:extLst xmlns:a="http://schemas.openxmlformats.org/drawingml/2006/main">
               <a:ext uri="{FF2B5EF4-FFF2-40B4-BE49-F238E27FC236}">
-                <a16:creationId xmlns:a16="http://schemas.microsoft.com/office/drawing/2014/main" id="{3F06248A-1A0C-4735-B231-C934C5D8A3C3}"/>
+                <a16:creationId xmlns:a16="http://schemas.microsoft.com/office/drawing/2014/main" id="{D7837610-4C77-4179-8BDE-DB57045755BA}"/>
               </a:ext>
             </a:extLst>
           </p:cNvPr>
@@ -3234,7 +3234,7 @@
           <p:cNvPr id="46" name="bank-row-0-1">
             <a:extLst xmlns:a="http://schemas.openxmlformats.org/drawingml/2006/main">
               <a:ext uri="{FF2B5EF4-FFF2-40B4-BE49-F238E27FC236}">
-                <a16:creationId xmlns:a16="http://schemas.microsoft.com/office/drawing/2014/main" id="{065C783A-AE3C-484A-9981-BCE1B66B8501}"/>
+                <a16:creationId xmlns:a16="http://schemas.microsoft.com/office/drawing/2014/main" id="{F8FBBB16-668B-4550-91B8-024A8719CB5E}"/>
               </a:ext>
             </a:extLst>
           </p:cNvPr>
@@ -3267,7 +3267,7 @@
           <p:cNvPr id="47" name="bank-row-0-2">
             <a:extLst xmlns:a="http://schemas.openxmlformats.org/drawingml/2006/main">
               <a:ext uri="{FF2B5EF4-FFF2-40B4-BE49-F238E27FC236}">
-                <a16:creationId xmlns:a16="http://schemas.microsoft.com/office/drawing/2014/main" id="{92CCFAD9-EE41-4F3C-B710-8E3427134B8A}"/>
+                <a16:creationId xmlns:a16="http://schemas.microsoft.com/office/drawing/2014/main" id="{30F87F3F-8CDB-4752-B187-B8FE70127435}"/>
               </a:ext>
             </a:extLst>
           </p:cNvPr>
@@ -3300,7 +3300,7 @@
           <p:cNvPr id="48" name="bank-row-0-3">
             <a:extLst xmlns:a="http://schemas.openxmlformats.org/drawingml/2006/main">
               <a:ext uri="{FF2B5EF4-FFF2-40B4-BE49-F238E27FC236}">
-                <a16:creationId xmlns:a16="http://schemas.microsoft.com/office/drawing/2014/main" id="{F67385F4-C5C3-4F46-8EC8-0C599BDE37CE}"/>
+                <a16:creationId xmlns:a16="http://schemas.microsoft.com/office/drawing/2014/main" id="{4EAD4AD1-03CE-4554-B210-B6F280B04EB8}"/>
               </a:ext>
             </a:extLst>
           </p:cNvPr>
@@ -3333,7 +3333,7 @@
           <p:cNvPr id="49" name="bank-row-0-4">
             <a:extLst xmlns:a="http://schemas.openxmlformats.org/drawingml/2006/main">
               <a:ext uri="{FF2B5EF4-FFF2-40B4-BE49-F238E27FC236}">
-                <a16:creationId xmlns:a16="http://schemas.microsoft.com/office/drawing/2014/main" id="{96BB411B-72B7-499D-BE33-C8E034E24EB0}"/>
+                <a16:creationId xmlns:a16="http://schemas.microsoft.com/office/drawing/2014/main" id="{94421900-E826-4094-BCA3-BD159B619D3A}"/>
               </a:ext>
             </a:extLst>
           </p:cNvPr>
@@ -3366,7 +3366,7 @@
           <p:cNvPr id="50" name="bank-row-0-5">
             <a:extLst xmlns:a="http://schemas.openxmlformats.org/drawingml/2006/main">
               <a:ext uri="{FF2B5EF4-FFF2-40B4-BE49-F238E27FC236}">
-                <a16:creationId xmlns:a16="http://schemas.microsoft.com/office/drawing/2014/main" id="{2FA32908-2375-42EC-AAD0-148E719E29EF}"/>
+                <a16:creationId xmlns:a16="http://schemas.microsoft.com/office/drawing/2014/main" id="{6113855D-0A3A-4E6D-91E4-DADAA65807E0}"/>
               </a:ext>
             </a:extLst>
           </p:cNvPr>
@@ -3399,7 +3399,7 @@
           <p:cNvPr id="51" name="bank-row-1-0">
             <a:extLst xmlns:a="http://schemas.openxmlformats.org/drawingml/2006/main">
               <a:ext uri="{FF2B5EF4-FFF2-40B4-BE49-F238E27FC236}">
-                <a16:creationId xmlns:a16="http://schemas.microsoft.com/office/drawing/2014/main" id="{DC4CB15E-2783-40E1-AF71-7A8E5068B0CB}"/>
+                <a16:creationId xmlns:a16="http://schemas.microsoft.com/office/drawing/2014/main" id="{9382367C-FCD3-43BF-B649-EB26B48FAF1E}"/>
               </a:ext>
             </a:extLst>
           </p:cNvPr>
@@ -3432,7 +3432,7 @@
           <p:cNvPr id="52" name="bank-row-1-1">
             <a:extLst xmlns:a="http://schemas.openxmlformats.org/drawingml/2006/main">
               <a:ext uri="{FF2B5EF4-FFF2-40B4-BE49-F238E27FC236}">
-                <a16:creationId xmlns:a16="http://schemas.microsoft.com/office/drawing/2014/main" id="{77403794-C6FF-4B27-863B-294135BD1035}"/>
+                <a16:creationId xmlns:a16="http://schemas.microsoft.com/office/drawing/2014/main" id="{1C258443-407A-4218-ABE2-0EE8192FBD85}"/>
               </a:ext>
             </a:extLst>
           </p:cNvPr>
@@ -3465,7 +3465,7 @@
           <p:cNvPr id="53" name="bank-row-1-2">
             <a:extLst xmlns:a="http://schemas.openxmlformats.org/drawingml/2006/main">
               <a:ext uri="{FF2B5EF4-FFF2-40B4-BE49-F238E27FC236}">
-                <a16:creationId xmlns:a16="http://schemas.microsoft.com/office/drawing/2014/main" id="{9908E7E2-261F-4F36-B907-45918EE2E651}"/>
+                <a16:creationId xmlns:a16="http://schemas.microsoft.com/office/drawing/2014/main" id="{F6DEBE71-3178-467A-96D4-8C4B65D965F8}"/>
               </a:ext>
             </a:extLst>
           </p:cNvPr>
@@ -3498,7 +3498,7 @@
           <p:cNvPr id="54" name="bank-row-1-3">
             <a:extLst xmlns:a="http://schemas.openxmlformats.org/drawingml/2006/main">
               <a:ext uri="{FF2B5EF4-FFF2-40B4-BE49-F238E27FC236}">
-                <a16:creationId xmlns:a16="http://schemas.microsoft.com/office/drawing/2014/main" id="{5F0368B9-D273-497C-9195-A67807FE901C}"/>
+                <a16:creationId xmlns:a16="http://schemas.microsoft.com/office/drawing/2014/main" id="{154BFB7A-3CDC-42A1-86A4-32F6DA8ADB58}"/>
               </a:ext>
             </a:extLst>
           </p:cNvPr>
@@ -3531,7 +3531,7 @@
           <p:cNvPr id="55" name="bank-row-1-4">
             <a:extLst xmlns:a="http://schemas.openxmlformats.org/drawingml/2006/main">
               <a:ext uri="{FF2B5EF4-FFF2-40B4-BE49-F238E27FC236}">
-                <a16:creationId xmlns:a16="http://schemas.microsoft.com/office/drawing/2014/main" id="{6CA4EBA6-F9F1-4F47-9D8C-8DA55B7BACE0}"/>
+                <a16:creationId xmlns:a16="http://schemas.microsoft.com/office/drawing/2014/main" id="{2732962E-F3DC-4C36-B66B-B587FEAA7999}"/>
               </a:ext>
             </a:extLst>
           </p:cNvPr>
@@ -3564,7 +3564,7 @@
           <p:cNvPr id="56" name="bank-row-1-5">
             <a:extLst xmlns:a="http://schemas.openxmlformats.org/drawingml/2006/main">
               <a:ext uri="{FF2B5EF4-FFF2-40B4-BE49-F238E27FC236}">
-                <a16:creationId xmlns:a16="http://schemas.microsoft.com/office/drawing/2014/main" id="{AE4983EC-32B0-4E0D-A427-16DCF1CAE115}"/>
+                <a16:creationId xmlns:a16="http://schemas.microsoft.com/office/drawing/2014/main" id="{1F9236F2-1CDA-47FB-AD9F-19748D7BB7D5}"/>
               </a:ext>
             </a:extLst>
           </p:cNvPr>
@@ -3597,7 +3597,7 @@
           <p:cNvPr id="57" name="bank-row-2-0">
             <a:extLst xmlns:a="http://schemas.openxmlformats.org/drawingml/2006/main">
               <a:ext uri="{FF2B5EF4-FFF2-40B4-BE49-F238E27FC236}">
-                <a16:creationId xmlns:a16="http://schemas.microsoft.com/office/drawing/2014/main" id="{BF5185BF-F3C7-4E45-B313-7E344D1192A4}"/>
+                <a16:creationId xmlns:a16="http://schemas.microsoft.com/office/drawing/2014/main" id="{0B59079D-8799-4653-893C-EB27C0D76E5F}"/>
               </a:ext>
             </a:extLst>
           </p:cNvPr>
@@ -3630,7 +3630,7 @@
           <p:cNvPr id="58" name="bank-row-2-1">
             <a:extLst xmlns:a="http://schemas.openxmlformats.org/drawingml/2006/main">
               <a:ext uri="{FF2B5EF4-FFF2-40B4-BE49-F238E27FC236}">
-                <a16:creationId xmlns:a16="http://schemas.microsoft.com/office/drawing/2014/main" id="{43D74304-196E-476B-A103-D2AD10B274E3}"/>
+                <a16:creationId xmlns:a16="http://schemas.microsoft.com/office/drawing/2014/main" id="{277B0B68-91C0-4A23-81AE-DD7186B5836B}"/>
               </a:ext>
             </a:extLst>
           </p:cNvPr>
@@ -3663,7 +3663,7 @@
           <p:cNvPr id="59" name="bank-row-2-2">
             <a:extLst xmlns:a="http://schemas.openxmlformats.org/drawingml/2006/main">
               <a:ext uri="{FF2B5EF4-FFF2-40B4-BE49-F238E27FC236}">
-                <a16:creationId xmlns:a16="http://schemas.microsoft.com/office/drawing/2014/main" id="{02033532-05F0-49CF-8487-2A8173C9871C}"/>
+                <a16:creationId xmlns:a16="http://schemas.microsoft.com/office/drawing/2014/main" id="{ED7F9181-F8A8-403B-93AC-5A7DD24B7D72}"/>
               </a:ext>
             </a:extLst>
           </p:cNvPr>
@@ -3696,7 +3696,7 @@
           <p:cNvPr id="60" name="bank-row-2-3">
             <a:extLst xmlns:a="http://schemas.openxmlformats.org/drawingml/2006/main">
               <a:ext uri="{FF2B5EF4-FFF2-40B4-BE49-F238E27FC236}">
-                <a16:creationId xmlns:a16="http://schemas.microsoft.com/office/drawing/2014/main" id="{D40FC751-6FAF-4887-A6B8-000634F009EE}"/>
+                <a16:creationId xmlns:a16="http://schemas.microsoft.com/office/drawing/2014/main" id="{23537C91-CA0E-4DFF-A7FA-2CEC49ABA6F1}"/>
               </a:ext>
             </a:extLst>
           </p:cNvPr>
@@ -3729,7 +3729,7 @@
           <p:cNvPr id="61" name="bank-row-2-4">
             <a:extLst xmlns:a="http://schemas.openxmlformats.org/drawingml/2006/main">
               <a:ext uri="{FF2B5EF4-FFF2-40B4-BE49-F238E27FC236}">
-                <a16:creationId xmlns:a16="http://schemas.microsoft.com/office/drawing/2014/main" id="{B7E5EA71-6C2C-40D0-9CED-8EDC7A6A2120}"/>
+                <a16:creationId xmlns:a16="http://schemas.microsoft.com/office/drawing/2014/main" id="{FCE8B75B-3E04-488D-AF41-768D2E7DF28C}"/>
               </a:ext>
             </a:extLst>
           </p:cNvPr>
@@ -3762,7 +3762,7 @@
           <p:cNvPr id="62" name="bank-row-2-5">
             <a:extLst xmlns:a="http://schemas.openxmlformats.org/drawingml/2006/main">
               <a:ext uri="{FF2B5EF4-FFF2-40B4-BE49-F238E27FC236}">
-                <a16:creationId xmlns:a16="http://schemas.microsoft.com/office/drawing/2014/main" id="{82D4F712-F740-4BFE-A941-E5BC87995537}"/>
+                <a16:creationId xmlns:a16="http://schemas.microsoft.com/office/drawing/2014/main" id="{CFD2C839-CDDE-4A7A-9F8E-1A64C4A99E35}"/>
               </a:ext>
             </a:extLst>
           </p:cNvPr>
@@ -3795,7 +3795,7 @@
           <p:cNvPr id="63" name="bank-row-accent">
             <a:extLst xmlns:a="http://schemas.openxmlformats.org/drawingml/2006/main">
               <a:ext uri="{FF2B5EF4-FFF2-40B4-BE49-F238E27FC236}">
-                <a16:creationId xmlns:a16="http://schemas.microsoft.com/office/drawing/2014/main" id="{A4694FFC-98A9-4226-8126-2E49FA117D96}"/>
+                <a16:creationId xmlns:a16="http://schemas.microsoft.com/office/drawing/2014/main" id="{E126E419-35F8-4725-9012-033896CA5182}"/>
               </a:ext>
             </a:extLst>
           </p:cNvPr>
@@ -3826,7 +3826,7 @@
           <p:cNvPr id="64" name="bank-row-label">
             <a:extLst xmlns:a="http://schemas.openxmlformats.org/drawingml/2006/main">
               <a:ext uri="{FF2B5EF4-FFF2-40B4-BE49-F238E27FC236}">
-                <a16:creationId xmlns:a16="http://schemas.microsoft.com/office/drawing/2014/main" id="{572FF0E0-98AA-4ED9-8FA8-E1DF1C7C5C47}"/>
+                <a16:creationId xmlns:a16="http://schemas.microsoft.com/office/drawing/2014/main" id="{ED8595CF-2E62-48C6-A119-1BA1596AFF66}"/>
               </a:ext>
             </a:extLst>
           </p:cNvPr>
@@ -3899,7 +3899,7 @@
           <p:cNvPr id="65" name="support-label">
             <a:extLst xmlns:a="http://schemas.openxmlformats.org/drawingml/2006/main">
               <a:ext uri="{FF2B5EF4-FFF2-40B4-BE49-F238E27FC236}">
-                <a16:creationId xmlns:a16="http://schemas.microsoft.com/office/drawing/2014/main" id="{7ECE4640-2BD5-4C79-8BD0-40798CFF55B9}"/>
+                <a16:creationId xmlns:a16="http://schemas.microsoft.com/office/drawing/2014/main" id="{4E7AE344-02AF-44D7-9A08-CB0E59EE8D09}"/>
               </a:ext>
             </a:extLst>
           </p:cNvPr>
@@ -3999,7 +3999,7 @@
           <p:cNvPr id="66" name="branches-label">
             <a:extLst xmlns:a="http://schemas.openxmlformats.org/drawingml/2006/main">
               <a:ext uri="{FF2B5EF4-FFF2-40B4-BE49-F238E27FC236}">
-                <a16:creationId xmlns:a16="http://schemas.microsoft.com/office/drawing/2014/main" id="{784127E1-FFE3-4704-898A-9758A6F4377B}"/>
+                <a16:creationId xmlns:a16="http://schemas.microsoft.com/office/drawing/2014/main" id="{64DE9F0D-7053-4601-91C5-7E47BE13733C}"/>
               </a:ext>
             </a:extLst>
           </p:cNvPr>
@@ -4088,7 +4088,7 @@
           <p:cNvPr id="67" name="align-label">
             <a:extLst xmlns:a="http://schemas.openxmlformats.org/drawingml/2006/main">
               <a:ext uri="{FF2B5EF4-FFF2-40B4-BE49-F238E27FC236}">
-                <a16:creationId xmlns:a16="http://schemas.microsoft.com/office/drawing/2014/main" id="{057E7C2E-F62C-4244-93EB-E9085018A54E}"/>
+                <a16:creationId xmlns:a16="http://schemas.microsoft.com/office/drawing/2014/main" id="{753530B6-6C0A-4C99-954D-34C3F96E5FD1}"/>
               </a:ext>
             </a:extLst>
           </p:cNvPr>
@@ -4177,7 +4177,7 @@
           <p:cNvPr id="68" name="bank-label">
             <a:extLst xmlns:a="http://schemas.openxmlformats.org/drawingml/2006/main">
               <a:ext uri="{FF2B5EF4-FFF2-40B4-BE49-F238E27FC236}">
-                <a16:creationId xmlns:a16="http://schemas.microsoft.com/office/drawing/2014/main" id="{03D2FC09-933A-4F17-A145-802615814534}"/>
+                <a16:creationId xmlns:a16="http://schemas.microsoft.com/office/drawing/2014/main" id="{FA24F5F0-F16C-4F6D-B6DA-A07F2FCF530F}"/>
               </a:ext>
             </a:extLst>
           </p:cNvPr>
@@ -4266,7 +4266,7 @@
           <p:cNvPr id="69" name="sec-b-chip">
             <a:extLst xmlns:a="http://schemas.openxmlformats.org/drawingml/2006/main">
               <a:ext uri="{FF2B5EF4-FFF2-40B4-BE49-F238E27FC236}">
-                <a16:creationId xmlns:a16="http://schemas.microsoft.com/office/drawing/2014/main" id="{ACC4BF32-7A2D-4B93-A0E8-7E2E1BAF030E}"/>
+                <a16:creationId xmlns:a16="http://schemas.microsoft.com/office/drawing/2014/main" id="{75168FA5-749A-4364-8A00-5794C5E382DD}"/>
               </a:ext>
             </a:extLst>
           </p:cNvPr>
@@ -4301,7 +4301,7 @@
           <p:cNvPr id="70" name="sec-b-chip-text">
             <a:extLst xmlns:a="http://schemas.openxmlformats.org/drawingml/2006/main">
               <a:ext uri="{FF2B5EF4-FFF2-40B4-BE49-F238E27FC236}">
-                <a16:creationId xmlns:a16="http://schemas.microsoft.com/office/drawing/2014/main" id="{F02BB277-8556-4F48-BC95-2F5DC22396D7}"/>
+                <a16:creationId xmlns:a16="http://schemas.microsoft.com/office/drawing/2014/main" id="{1CDB4929-588D-4946-A571-F62BA93A80AA}"/>
               </a:ext>
             </a:extLst>
           </p:cNvPr>
@@ -4363,7 +4363,7 @@
           <p:cNvPr id="71" name="sec-b">
             <a:extLst xmlns:a="http://schemas.openxmlformats.org/drawingml/2006/main">
               <a:ext uri="{FF2B5EF4-FFF2-40B4-BE49-F238E27FC236}">
-                <a16:creationId xmlns:a16="http://schemas.microsoft.com/office/drawing/2014/main" id="{DC78CA95-477F-489E-AB0D-AA7396496A08}"/>
+                <a16:creationId xmlns:a16="http://schemas.microsoft.com/office/drawing/2014/main" id="{4D6C8338-1D80-4E99-B3B1-255C6704949C}"/>
               </a:ext>
             </a:extLst>
           </p:cNvPr>
@@ -4425,7 +4425,7 @@
           <p:cNvPr id="72" name="query-surface">
             <a:extLst xmlns:a="http://schemas.openxmlformats.org/drawingml/2006/main">
               <a:ext uri="{FF2B5EF4-FFF2-40B4-BE49-F238E27FC236}">
-                <a16:creationId xmlns:a16="http://schemas.microsoft.com/office/drawing/2014/main" id="{8918061A-60B3-4B2C-A28F-780FFC26336A}"/>
+                <a16:creationId xmlns:a16="http://schemas.microsoft.com/office/drawing/2014/main" id="{44250B73-212B-454F-AD30-871D81D62BE7}"/>
               </a:ext>
             </a:extLst>
           </p:cNvPr>
@@ -4464,7 +4464,7 @@
           <p:nvPr/>
         </p:nvPicPr>
         <p:blipFill>
-          <a:blip xmlns:r="http://schemas.openxmlformats.org/officeDocument/2006/relationships" xmlns:a="http://schemas.openxmlformats.org/drawingml/2006/main" r:embed="R8f78a4bb9fcf40e7"/>
+          <a:blip xmlns:r="http://schemas.openxmlformats.org/officeDocument/2006/relationships" xmlns:a="http://schemas.openxmlformats.org/drawingml/2006/main" r:embed="Rfc0c39cf0a23485e"/>
           <a:srcRect xmlns:a="http://schemas.openxmlformats.org/drawingml/2006/main" l="0" t="0" r="0" b="0"/>
           <a:stretch xmlns:a="http://schemas.openxmlformats.org/drawingml/2006/main">
             <a:fillRect l="0" t="0" r="0" b="0"/>
@@ -4485,7 +4485,7 @@
           <p:cNvPr id="74" name="query-frame">
             <a:extLst xmlns:a="http://schemas.openxmlformats.org/drawingml/2006/main">
               <a:ext uri="{FF2B5EF4-FFF2-40B4-BE49-F238E27FC236}">
-                <a16:creationId xmlns:a16="http://schemas.microsoft.com/office/drawing/2014/main" id="{BBC3C704-F619-46C8-88E9-1E1CC1C0F5AE}"/>
+                <a16:creationId xmlns:a16="http://schemas.microsoft.com/office/drawing/2014/main" id="{CEFAD342-CF98-4D51-877C-7BFA48432853}"/>
               </a:ext>
             </a:extLst>
           </p:cNvPr>
@@ -4516,7 +4516,7 @@
           <p:cNvPr id="75" name="anchor-6">
             <a:extLst xmlns:a="http://schemas.openxmlformats.org/drawingml/2006/main">
               <a:ext uri="{FF2B5EF4-FFF2-40B4-BE49-F238E27FC236}">
-                <a16:creationId xmlns:a16="http://schemas.microsoft.com/office/drawing/2014/main" id="{91D53C41-4164-486B-8D31-F1E922A063E2}"/>
+                <a16:creationId xmlns:a16="http://schemas.microsoft.com/office/drawing/2014/main" id="{88FDF0EC-565A-4CFF-974E-D9DE1716B09B}"/>
               </a:ext>
             </a:extLst>
           </p:cNvPr>
@@ -4545,7 +4545,7 @@
           <p:cNvPr id="76" name="anchor-7">
             <a:extLst xmlns:a="http://schemas.openxmlformats.org/drawingml/2006/main">
               <a:ext uri="{FF2B5EF4-FFF2-40B4-BE49-F238E27FC236}">
-                <a16:creationId xmlns:a16="http://schemas.microsoft.com/office/drawing/2014/main" id="{949213A8-925A-4944-9BE2-78E3613CB892}"/>
+                <a16:creationId xmlns:a16="http://schemas.microsoft.com/office/drawing/2014/main" id="{AA97FE18-C05B-403A-99E4-52A18DFBE662}"/>
               </a:ext>
             </a:extLst>
           </p:cNvPr>
@@ -4600,7 +4600,7 @@
           <p:cNvPr id="78" name="qb-surface">
             <a:extLst xmlns:a="http://schemas.openxmlformats.org/drawingml/2006/main">
               <a:ext uri="{FF2B5EF4-FFF2-40B4-BE49-F238E27FC236}">
-                <a16:creationId xmlns:a16="http://schemas.microsoft.com/office/drawing/2014/main" id="{2CC6541D-5651-4657-9CFA-D2A5320F1E7B}"/>
+                <a16:creationId xmlns:a16="http://schemas.microsoft.com/office/drawing/2014/main" id="{EEED2F6D-C557-4EB2-89D8-F3C02814E82F}"/>
               </a:ext>
             </a:extLst>
           </p:cNvPr>
@@ -4635,7 +4635,7 @@
           <p:cNvPr id="79" name="qb-title">
             <a:extLst xmlns:a="http://schemas.openxmlformats.org/drawingml/2006/main">
               <a:ext uri="{FF2B5EF4-FFF2-40B4-BE49-F238E27FC236}">
-                <a16:creationId xmlns:a16="http://schemas.microsoft.com/office/drawing/2014/main" id="{8099FCED-22B4-4EDF-BE08-FE37C9ED46A9}"/>
+                <a16:creationId xmlns:a16="http://schemas.microsoft.com/office/drawing/2014/main" id="{FC2E6DE5-2210-4E9F-B839-9DD540E375BE}"/>
               </a:ext>
             </a:extLst>
           </p:cNvPr>
@@ -4697,7 +4697,7 @@
           <p:cNvPr id="80" name="qb-B">
             <a:extLst xmlns:a="http://schemas.openxmlformats.org/drawingml/2006/main">
               <a:ext uri="{FF2B5EF4-FFF2-40B4-BE49-F238E27FC236}">
-                <a16:creationId xmlns:a16="http://schemas.microsoft.com/office/drawing/2014/main" id="{445BD8BA-AEA3-496B-8636-7E5D70A93500}"/>
+                <a16:creationId xmlns:a16="http://schemas.microsoft.com/office/drawing/2014/main" id="{B842E75A-F1AD-4E48-A1B3-EDA7114178D3}"/>
               </a:ext>
             </a:extLst>
           </p:cNvPr>
@@ -4732,7 +4732,7 @@
           <p:cNvPr id="81" name="qb-B-text">
             <a:extLst xmlns:a="http://schemas.openxmlformats.org/drawingml/2006/main">
               <a:ext uri="{FF2B5EF4-FFF2-40B4-BE49-F238E27FC236}">
-                <a16:creationId xmlns:a16="http://schemas.microsoft.com/office/drawing/2014/main" id="{8B51E173-D9FB-4D87-B120-CAC34B9F0AAF}"/>
+                <a16:creationId xmlns:a16="http://schemas.microsoft.com/office/drawing/2014/main" id="{1C2C1FDD-1689-4449-B637-0E3A2C68762E}"/>
               </a:ext>
             </a:extLst>
           </p:cNvPr>
@@ -4816,7 +4816,7 @@
           <p:cNvPr id="82" name="qb-C">
             <a:extLst xmlns:a="http://schemas.openxmlformats.org/drawingml/2006/main">
               <a:ext uri="{FF2B5EF4-FFF2-40B4-BE49-F238E27FC236}">
-                <a16:creationId xmlns:a16="http://schemas.microsoft.com/office/drawing/2014/main" id="{29283330-87DB-4D06-BDEA-118CC9DC3E9F}"/>
+                <a16:creationId xmlns:a16="http://schemas.microsoft.com/office/drawing/2014/main" id="{084A6071-2CDA-4900-9D60-0EC79D292134}"/>
               </a:ext>
             </a:extLst>
           </p:cNvPr>
@@ -4851,7 +4851,7 @@
           <p:cNvPr id="83" name="qb-C-text">
             <a:extLst xmlns:a="http://schemas.openxmlformats.org/drawingml/2006/main">
               <a:ext uri="{FF2B5EF4-FFF2-40B4-BE49-F238E27FC236}">
-                <a16:creationId xmlns:a16="http://schemas.microsoft.com/office/drawing/2014/main" id="{AC10C14D-B559-48C9-B0D4-3279C238BDA9}"/>
+                <a16:creationId xmlns:a16="http://schemas.microsoft.com/office/drawing/2014/main" id="{FDCAD68B-81F0-434A-899D-4F63AC6C0D2B}"/>
               </a:ext>
             </a:extLst>
           </p:cNvPr>
@@ -4924,7 +4924,7 @@
           <p:cNvPr id="84" name="qb-X">
             <a:extLst xmlns:a="http://schemas.openxmlformats.org/drawingml/2006/main">
               <a:ext uri="{FF2B5EF4-FFF2-40B4-BE49-F238E27FC236}">
-                <a16:creationId xmlns:a16="http://schemas.microsoft.com/office/drawing/2014/main" id="{E3E02F62-F618-4794-93C9-8378C2E17AEE}"/>
+                <a16:creationId xmlns:a16="http://schemas.microsoft.com/office/drawing/2014/main" id="{15D7D7A2-C680-431C-979C-12030780CB4E}"/>
               </a:ext>
             </a:extLst>
           </p:cNvPr>
@@ -4959,7 +4959,7 @@
           <p:cNvPr id="85" name="qb-X-text">
             <a:extLst xmlns:a="http://schemas.openxmlformats.org/drawingml/2006/main">
               <a:ext uri="{FF2B5EF4-FFF2-40B4-BE49-F238E27FC236}">
-                <a16:creationId xmlns:a16="http://schemas.microsoft.com/office/drawing/2014/main" id="{E7E3D486-904C-4C24-81E2-CD81EC67B071}"/>
+                <a16:creationId xmlns:a16="http://schemas.microsoft.com/office/drawing/2014/main" id="{31D6F99C-4DEB-4D39-BAC4-F0CBD395CE38}"/>
               </a:ext>
             </a:extLst>
           </p:cNvPr>
@@ -5054,7 +5054,7 @@
           <p:cNvPr id="86" name="anchor-8">
             <a:extLst xmlns:a="http://schemas.openxmlformats.org/drawingml/2006/main">
               <a:ext uri="{FF2B5EF4-FFF2-40B4-BE49-F238E27FC236}">
-                <a16:creationId xmlns:a16="http://schemas.microsoft.com/office/drawing/2014/main" id="{B3B0A214-D80C-406F-9475-895C380D26AE}"/>
+                <a16:creationId xmlns:a16="http://schemas.microsoft.com/office/drawing/2014/main" id="{EEE0798F-AF4F-4E65-8A48-5C6AA549FCF3}"/>
               </a:ext>
             </a:extLst>
           </p:cNvPr>
@@ -5083,7 +5083,7 @@
           <p:cNvPr id="87" name="anchor-9">
             <a:extLst xmlns:a="http://schemas.openxmlformats.org/drawingml/2006/main">
               <a:ext uri="{FF2B5EF4-FFF2-40B4-BE49-F238E27FC236}">
-                <a16:creationId xmlns:a16="http://schemas.microsoft.com/office/drawing/2014/main" id="{9BEC7D69-AA4A-44F9-905A-5C9B67A1E914}"/>
+                <a16:creationId xmlns:a16="http://schemas.microsoft.com/office/drawing/2014/main" id="{1E744EC6-D8A8-47C9-BBC9-C0EC5FC15D19}"/>
               </a:ext>
             </a:extLst>
           </p:cNvPr>
@@ -5138,7 +5138,7 @@
           <p:cNvPr id="89" name="qa-surface">
             <a:extLst xmlns:a="http://schemas.openxmlformats.org/drawingml/2006/main">
               <a:ext uri="{FF2B5EF4-FFF2-40B4-BE49-F238E27FC236}">
-                <a16:creationId xmlns:a16="http://schemas.microsoft.com/office/drawing/2014/main" id="{0E32101C-1566-4EE4-8E72-FEA6A9F49075}"/>
+                <a16:creationId xmlns:a16="http://schemas.microsoft.com/office/drawing/2014/main" id="{91073B08-3A87-45A4-807C-9CCE3ABDC2F9}"/>
               </a:ext>
             </a:extLst>
           </p:cNvPr>
@@ -5173,7 +5173,7 @@
           <p:cNvPr id="90" name="qa-title">
             <a:extLst xmlns:a="http://schemas.openxmlformats.org/drawingml/2006/main">
               <a:ext uri="{FF2B5EF4-FFF2-40B4-BE49-F238E27FC236}">
-                <a16:creationId xmlns:a16="http://schemas.microsoft.com/office/drawing/2014/main" id="{5ACE4B60-6401-4726-ADC7-FABB4F1E131E}"/>
+                <a16:creationId xmlns:a16="http://schemas.microsoft.com/office/drawing/2014/main" id="{F788D1DE-F446-48CC-860F-E6603D058FFD}"/>
               </a:ext>
             </a:extLst>
           </p:cNvPr>
@@ -5262,7 +5262,7 @@
           <p:cNvPr id="91" name="qa-grid-0-0">
             <a:extLst xmlns:a="http://schemas.openxmlformats.org/drawingml/2006/main">
               <a:ext uri="{FF2B5EF4-FFF2-40B4-BE49-F238E27FC236}">
-                <a16:creationId xmlns:a16="http://schemas.microsoft.com/office/drawing/2014/main" id="{C44A384B-182A-45E6-BE57-B9677687BF6C}"/>
+                <a16:creationId xmlns:a16="http://schemas.microsoft.com/office/drawing/2014/main" id="{C8ACC242-B23B-4560-AEA6-3C1BB77617A4}"/>
               </a:ext>
             </a:extLst>
           </p:cNvPr>
@@ -5295,7 +5295,7 @@
           <p:cNvPr id="92" name="qa-grid-0-1">
             <a:extLst xmlns:a="http://schemas.openxmlformats.org/drawingml/2006/main">
               <a:ext uri="{FF2B5EF4-FFF2-40B4-BE49-F238E27FC236}">
-                <a16:creationId xmlns:a16="http://schemas.microsoft.com/office/drawing/2014/main" id="{1C5AB256-BCA9-4D53-888A-AE91BCFDF591}"/>
+                <a16:creationId xmlns:a16="http://schemas.microsoft.com/office/drawing/2014/main" id="{7D0BA900-6AFC-41B9-8751-F2761C887A61}"/>
               </a:ext>
             </a:extLst>
           </p:cNvPr>
@@ -5328,7 +5328,7 @@
           <p:cNvPr id="93" name="qa-grid-0-2">
             <a:extLst xmlns:a="http://schemas.openxmlformats.org/drawingml/2006/main">
               <a:ext uri="{FF2B5EF4-FFF2-40B4-BE49-F238E27FC236}">
-                <a16:creationId xmlns:a16="http://schemas.microsoft.com/office/drawing/2014/main" id="{CA175287-A91D-4C8F-88A1-6F7B97EF5B98}"/>
+                <a16:creationId xmlns:a16="http://schemas.microsoft.com/office/drawing/2014/main" id="{33F2BF73-B3B4-48A1-8DCB-C0846958821D}"/>
               </a:ext>
             </a:extLst>
           </p:cNvPr>
@@ -5361,7 +5361,7 @@
           <p:cNvPr id="94" name="qa-grid-1-0">
             <a:extLst xmlns:a="http://schemas.openxmlformats.org/drawingml/2006/main">
               <a:ext uri="{FF2B5EF4-FFF2-40B4-BE49-F238E27FC236}">
-                <a16:creationId xmlns:a16="http://schemas.microsoft.com/office/drawing/2014/main" id="{1BFF5136-DE16-4953-BF5A-1BD6212C0BD5}"/>
+                <a16:creationId xmlns:a16="http://schemas.microsoft.com/office/drawing/2014/main" id="{2A429139-71C1-4C59-9CC6-839EE8081307}"/>
               </a:ext>
             </a:extLst>
           </p:cNvPr>
@@ -5394,7 +5394,7 @@
           <p:cNvPr id="95" name="qa-grid-1-1">
             <a:extLst xmlns:a="http://schemas.openxmlformats.org/drawingml/2006/main">
               <a:ext uri="{FF2B5EF4-FFF2-40B4-BE49-F238E27FC236}">
-                <a16:creationId xmlns:a16="http://schemas.microsoft.com/office/drawing/2014/main" id="{DD6BE8B7-D10C-4298-8791-967E2E403212}"/>
+                <a16:creationId xmlns:a16="http://schemas.microsoft.com/office/drawing/2014/main" id="{47A52D67-288E-4FE9-926E-23D5586CDB50}"/>
               </a:ext>
             </a:extLst>
           </p:cNvPr>
@@ -5427,7 +5427,7 @@
           <p:cNvPr id="96" name="qa-grid-1-2">
             <a:extLst xmlns:a="http://schemas.openxmlformats.org/drawingml/2006/main">
               <a:ext uri="{FF2B5EF4-FFF2-40B4-BE49-F238E27FC236}">
-                <a16:creationId xmlns:a16="http://schemas.microsoft.com/office/drawing/2014/main" id="{C6A39648-A9F5-4D75-9774-7C8B307C2FB1}"/>
+                <a16:creationId xmlns:a16="http://schemas.microsoft.com/office/drawing/2014/main" id="{914B2A1F-4077-4C0B-838E-FD2874FDED8B}"/>
               </a:ext>
             </a:extLst>
           </p:cNvPr>
@@ -5460,7 +5460,7 @@
           <p:cNvPr id="97" name="qa-grid-2-0">
             <a:extLst xmlns:a="http://schemas.openxmlformats.org/drawingml/2006/main">
               <a:ext uri="{FF2B5EF4-FFF2-40B4-BE49-F238E27FC236}">
-                <a16:creationId xmlns:a16="http://schemas.microsoft.com/office/drawing/2014/main" id="{B8004ED2-B401-4B78-A0C3-06CD0B38E230}"/>
+                <a16:creationId xmlns:a16="http://schemas.microsoft.com/office/drawing/2014/main" id="{82110CC7-5DC5-471F-92D2-1450462FBE72}"/>
               </a:ext>
             </a:extLst>
           </p:cNvPr>
@@ -5493,7 +5493,7 @@
           <p:cNvPr id="98" name="qa-grid-2-1">
             <a:extLst xmlns:a="http://schemas.openxmlformats.org/drawingml/2006/main">
               <a:ext uri="{FF2B5EF4-FFF2-40B4-BE49-F238E27FC236}">
-                <a16:creationId xmlns:a16="http://schemas.microsoft.com/office/drawing/2014/main" id="{2E448C4D-4B11-4BC4-8B51-9140D6419BC8}"/>
+                <a16:creationId xmlns:a16="http://schemas.microsoft.com/office/drawing/2014/main" id="{57CD400E-5A45-4091-8628-27D526BFEC79}"/>
               </a:ext>
             </a:extLst>
           </p:cNvPr>
@@ -5526,7 +5526,7 @@
           <p:cNvPr id="99" name="qa-grid-2-2">
             <a:extLst xmlns:a="http://schemas.openxmlformats.org/drawingml/2006/main">
               <a:ext uri="{FF2B5EF4-FFF2-40B4-BE49-F238E27FC236}">
-                <a16:creationId xmlns:a16="http://schemas.microsoft.com/office/drawing/2014/main" id="{1D99C314-A55D-45E7-B5B9-9B58E157C4C9}"/>
+                <a16:creationId xmlns:a16="http://schemas.microsoft.com/office/drawing/2014/main" id="{B9449E69-091E-44A1-9CB3-F7658620111F}"/>
               </a:ext>
             </a:extLst>
           </p:cNvPr>
@@ -5559,7 +5559,7 @@
           <p:cNvPr id="100" name="anchor-10">
             <a:extLst xmlns:a="http://schemas.openxmlformats.org/drawingml/2006/main">
               <a:ext uri="{FF2B5EF4-FFF2-40B4-BE49-F238E27FC236}">
-                <a16:creationId xmlns:a16="http://schemas.microsoft.com/office/drawing/2014/main" id="{C70C1F2A-7691-4646-B4FB-CB59A62B1AE2}"/>
+                <a16:creationId xmlns:a16="http://schemas.microsoft.com/office/drawing/2014/main" id="{C0E89369-FAE4-4E74-8847-CAD9D62C7A7C}"/>
               </a:ext>
             </a:extLst>
           </p:cNvPr>
@@ -5588,7 +5588,7 @@
           <p:cNvPr id="101" name="anchor-11">
             <a:extLst xmlns:a="http://schemas.openxmlformats.org/drawingml/2006/main">
               <a:ext uri="{FF2B5EF4-FFF2-40B4-BE49-F238E27FC236}">
-                <a16:creationId xmlns:a16="http://schemas.microsoft.com/office/drawing/2014/main" id="{2C642BC7-EE3B-4486-A9E7-08B6ACFE0458}"/>
+                <a16:creationId xmlns:a16="http://schemas.microsoft.com/office/drawing/2014/main" id="{4D2E7A46-8101-4D51-9B8D-C3AE578C8B8A}"/>
               </a:ext>
             </a:extLst>
           </p:cNvPr>
@@ -5643,7 +5643,7 @@
           <p:cNvPr id="103" name="match-surface">
             <a:extLst xmlns:a="http://schemas.openxmlformats.org/drawingml/2006/main">
               <a:ext uri="{FF2B5EF4-FFF2-40B4-BE49-F238E27FC236}">
-                <a16:creationId xmlns:a16="http://schemas.microsoft.com/office/drawing/2014/main" id="{2EB94635-D00E-4BA8-9938-7152922E18F0}"/>
+                <a16:creationId xmlns:a16="http://schemas.microsoft.com/office/drawing/2014/main" id="{3EDEE6EC-65FD-4577-8C4B-9A3F6282310A}"/>
               </a:ext>
             </a:extLst>
           </p:cNvPr>
@@ -5678,7 +5678,7 @@
           <p:cNvPr id="104" name="match-title">
             <a:extLst xmlns:a="http://schemas.openxmlformats.org/drawingml/2006/main">
               <a:ext uri="{FF2B5EF4-FFF2-40B4-BE49-F238E27FC236}">
-                <a16:creationId xmlns:a16="http://schemas.microsoft.com/office/drawing/2014/main" id="{03169FB1-7024-440C-96F6-844C80B8FC0F}"/>
+                <a16:creationId xmlns:a16="http://schemas.microsoft.com/office/drawing/2014/main" id="{F424287C-D36D-4CED-B318-CBD2409A04AA}"/>
               </a:ext>
             </a:extLst>
           </p:cNvPr>
@@ -5740,7 +5740,7 @@
           <p:cNvPr id="105" name="rule-J">
             <a:extLst xmlns:a="http://schemas.openxmlformats.org/drawingml/2006/main">
               <a:ext uri="{FF2B5EF4-FFF2-40B4-BE49-F238E27FC236}">
-                <a16:creationId xmlns:a16="http://schemas.microsoft.com/office/drawing/2014/main" id="{01F94FD9-4797-41F1-9D97-B5BFB67CC7BD}"/>
+                <a16:creationId xmlns:a16="http://schemas.microsoft.com/office/drawing/2014/main" id="{8B07CEAA-16F9-4098-B90A-2C3FEE9B6CAE}"/>
               </a:ext>
             </a:extLst>
           </p:cNvPr>
@@ -5775,7 +5775,7 @@
           <p:cNvPr id="106" name="rule-J-formula">
             <a:extLst xmlns:a="http://schemas.openxmlformats.org/drawingml/2006/main">
               <a:ext uri="{FF2B5EF4-FFF2-40B4-BE49-F238E27FC236}">
-                <a16:creationId xmlns:a16="http://schemas.microsoft.com/office/drawing/2014/main" id="{600705D4-B6EB-43C0-B269-FE6F22A23B6A}"/>
+                <a16:creationId xmlns:a16="http://schemas.microsoft.com/office/drawing/2014/main" id="{84530DB9-2528-473C-A01C-C78417890C26}"/>
               </a:ext>
             </a:extLst>
           </p:cNvPr>
@@ -5892,7 +5892,7 @@
           <p:cNvPr id="107" name="rule-L">
             <a:extLst xmlns:a="http://schemas.openxmlformats.org/drawingml/2006/main">
               <a:ext uri="{FF2B5EF4-FFF2-40B4-BE49-F238E27FC236}">
-                <a16:creationId xmlns:a16="http://schemas.microsoft.com/office/drawing/2014/main" id="{58633F59-B2AA-49BD-8B6D-2F8A6BDF2DCF}"/>
+                <a16:creationId xmlns:a16="http://schemas.microsoft.com/office/drawing/2014/main" id="{28C158E7-9AB5-44DA-B13D-83247AEE7801}"/>
               </a:ext>
             </a:extLst>
           </p:cNvPr>
@@ -5927,7 +5927,7 @@
           <p:cNvPr id="108" name="rule-L-formula">
             <a:extLst xmlns:a="http://schemas.openxmlformats.org/drawingml/2006/main">
               <a:ext uri="{FF2B5EF4-FFF2-40B4-BE49-F238E27FC236}">
-                <a16:creationId xmlns:a16="http://schemas.microsoft.com/office/drawing/2014/main" id="{44B573B9-E2D2-4899-A43A-A8A67F094877}"/>
+                <a16:creationId xmlns:a16="http://schemas.microsoft.com/office/drawing/2014/main" id="{CD439A1F-B777-40BE-B326-BCA9FC0D25A3}"/>
               </a:ext>
             </a:extLst>
           </p:cNvPr>
@@ -6044,7 +6044,7 @@
           <p:cNvPr id="109" name="anchor-12">
             <a:extLst xmlns:a="http://schemas.openxmlformats.org/drawingml/2006/main">
               <a:ext uri="{FF2B5EF4-FFF2-40B4-BE49-F238E27FC236}">
-                <a16:creationId xmlns:a16="http://schemas.microsoft.com/office/drawing/2014/main" id="{09E57DC4-E9D0-4FE7-927C-4C81A1D1A1CE}"/>
+                <a16:creationId xmlns:a16="http://schemas.microsoft.com/office/drawing/2014/main" id="{8AF9329B-E929-4909-B7E2-8466FDF28871}"/>
               </a:ext>
             </a:extLst>
           </p:cNvPr>
@@ -6073,7 +6073,7 @@
           <p:cNvPr id="110" name="anchor-13">
             <a:extLst xmlns:a="http://schemas.openxmlformats.org/drawingml/2006/main">
               <a:ext uri="{FF2B5EF4-FFF2-40B4-BE49-F238E27FC236}">
-                <a16:creationId xmlns:a16="http://schemas.microsoft.com/office/drawing/2014/main" id="{974D3AC5-3603-4627-9E7C-3E33CA4A1E91}"/>
+                <a16:creationId xmlns:a16="http://schemas.microsoft.com/office/drawing/2014/main" id="{32791165-BB3B-4679-BFA7-C2565D8CC9B2}"/>
               </a:ext>
             </a:extLst>
           </p:cNvPr>
@@ -6128,7 +6128,7 @@
           <p:cNvPr id="112" name="out-surface">
             <a:extLst xmlns:a="http://schemas.openxmlformats.org/drawingml/2006/main">
               <a:ext uri="{FF2B5EF4-FFF2-40B4-BE49-F238E27FC236}">
-                <a16:creationId xmlns:a16="http://schemas.microsoft.com/office/drawing/2014/main" id="{C365001F-C68B-4F2A-B109-9C2A7FA8C048}"/>
+                <a16:creationId xmlns:a16="http://schemas.microsoft.com/office/drawing/2014/main" id="{0DD6AE2D-F520-48AF-A023-92043B9F05AB}"/>
               </a:ext>
             </a:extLst>
           </p:cNvPr>
@@ -6167,7 +6167,7 @@
           <p:nvPr/>
         </p:nvPicPr>
         <p:blipFill>
-          <a:blip xmlns:r="http://schemas.openxmlformats.org/officeDocument/2006/relationships" xmlns:a="http://schemas.openxmlformats.org/drawingml/2006/main" r:embed="R9411e59384984d3b"/>
+          <a:blip xmlns:r="http://schemas.openxmlformats.org/officeDocument/2006/relationships" xmlns:a="http://schemas.openxmlformats.org/drawingml/2006/main" r:embed="Rcc65d874482f4b6b"/>
           <a:srcRect xmlns:a="http://schemas.openxmlformats.org/drawingml/2006/main" l="0" t="0" r="0" b="0"/>
           <a:stretch xmlns:a="http://schemas.openxmlformats.org/drawingml/2006/main">
             <a:fillRect l="0" t="0" r="0" b="0"/>
@@ -6188,7 +6188,7 @@
           <p:cNvPr id="114" name="out-heatmap-frame">
             <a:extLst xmlns:a="http://schemas.openxmlformats.org/drawingml/2006/main">
               <a:ext uri="{FF2B5EF4-FFF2-40B4-BE49-F238E27FC236}">
-                <a16:creationId xmlns:a16="http://schemas.microsoft.com/office/drawing/2014/main" id="{9BAE9AD5-4B80-45FF-AFC4-1859249945A4}"/>
+                <a16:creationId xmlns:a16="http://schemas.microsoft.com/office/drawing/2014/main" id="{90162BA4-239B-4527-A3B7-0BB013AB51AB}"/>
               </a:ext>
             </a:extLst>
           </p:cNvPr>
@@ -6223,7 +6223,7 @@
           <p:nvPr/>
         </p:nvPicPr>
         <p:blipFill>
-          <a:blip xmlns:r="http://schemas.openxmlformats.org/officeDocument/2006/relationships" xmlns:a="http://schemas.openxmlformats.org/drawingml/2006/main" r:embed="R51265f902c7b4b8f"/>
+          <a:blip xmlns:r="http://schemas.openxmlformats.org/officeDocument/2006/relationships" xmlns:a="http://schemas.openxmlformats.org/drawingml/2006/main" r:embed="Rb2ef4d9700bd454c"/>
           <a:srcRect xmlns:a="http://schemas.openxmlformats.org/drawingml/2006/main" l="0" t="0" r="0" b="0"/>
           <a:stretch xmlns:a="http://schemas.openxmlformats.org/drawingml/2006/main">
             <a:fillRect l="0" t="0" r="0" b="0"/>
@@ -6244,7 +6244,7 @@
           <p:cNvPr id="116" name="out-contour-contour">
             <a:extLst xmlns:a="http://schemas.openxmlformats.org/drawingml/2006/main">
               <a:ext uri="{FF2B5EF4-FFF2-40B4-BE49-F238E27FC236}">
-                <a16:creationId xmlns:a16="http://schemas.microsoft.com/office/drawing/2014/main" id="{99E915F6-103B-4A4E-AF81-7B63063B95CC}"/>
+                <a16:creationId xmlns:a16="http://schemas.microsoft.com/office/drawing/2014/main" id="{0DB4FBFA-A6D2-470B-A2B1-8057EDE9D109}"/>
               </a:ext>
             </a:extLst>
           </p:cNvPr>
@@ -10751,7 +10751,7 @@
           <p:cNvPr id="117" name="out-contour-frame">
             <a:extLst xmlns:a="http://schemas.openxmlformats.org/drawingml/2006/main">
               <a:ext uri="{FF2B5EF4-FFF2-40B4-BE49-F238E27FC236}">
-                <a16:creationId xmlns:a16="http://schemas.microsoft.com/office/drawing/2014/main" id="{1CAC8220-9746-4CFA-B1B4-EC69E9B1807F}"/>
+                <a16:creationId xmlns:a16="http://schemas.microsoft.com/office/drawing/2014/main" id="{C3B41BE8-2012-4494-B989-B4395E25F4E4}"/>
               </a:ext>
             </a:extLst>
           </p:cNvPr>
@@ -10782,7 +10782,7 @@
           <p:cNvPr id="118" name="out-heatmap-label">
             <a:extLst xmlns:a="http://schemas.openxmlformats.org/drawingml/2006/main">
               <a:ext uri="{FF2B5EF4-FFF2-40B4-BE49-F238E27FC236}">
-                <a16:creationId xmlns:a16="http://schemas.microsoft.com/office/drawing/2014/main" id="{7E3F8E40-2993-4BB0-B496-A26E6C1AA68B}"/>
+                <a16:creationId xmlns:a16="http://schemas.microsoft.com/office/drawing/2014/main" id="{982DA9D4-1CB8-45E9-A568-1C5F5E74CF31}"/>
               </a:ext>
             </a:extLst>
           </p:cNvPr>
@@ -10871,7 +10871,7 @@
           <p:cNvPr id="119" name="out-contour-label">
             <a:extLst xmlns:a="http://schemas.openxmlformats.org/drawingml/2006/main">
               <a:ext uri="{FF2B5EF4-FFF2-40B4-BE49-F238E27FC236}">
-                <a16:creationId xmlns:a16="http://schemas.microsoft.com/office/drawing/2014/main" id="{1A87ED40-B0E5-47C4-97F6-5B66F6A6B7BA}"/>
+                <a16:creationId xmlns:a16="http://schemas.microsoft.com/office/drawing/2014/main" id="{96D77672-FDA4-4647-9189-D03532874786}"/>
               </a:ext>
             </a:extLst>
           </p:cNvPr>
@@ -10933,7 +10933,7 @@
           <p:cNvPr id="120" name="query-label">
             <a:extLst xmlns:a="http://schemas.openxmlformats.org/drawingml/2006/main">
               <a:ext uri="{FF2B5EF4-FFF2-40B4-BE49-F238E27FC236}">
-                <a16:creationId xmlns:a16="http://schemas.microsoft.com/office/drawing/2014/main" id="{223D4CDD-AEA6-45F5-B5DB-03D7BB64A6DF}"/>
+                <a16:creationId xmlns:a16="http://schemas.microsoft.com/office/drawing/2014/main" id="{AE782497-545E-438C-8C6E-6B859C7C6C38}"/>
               </a:ext>
             </a:extLst>
           </p:cNvPr>
@@ -11022,7 +11022,7 @@
           <p:cNvPr id="121" name="qb-label">
             <a:extLst xmlns:a="http://schemas.openxmlformats.org/drawingml/2006/main">
               <a:ext uri="{FF2B5EF4-FFF2-40B4-BE49-F238E27FC236}">
-                <a16:creationId xmlns:a16="http://schemas.microsoft.com/office/drawing/2014/main" id="{04B36F48-BACE-4A31-909F-E0CCB018FE05}"/>
+                <a16:creationId xmlns:a16="http://schemas.microsoft.com/office/drawing/2014/main" id="{BB6A1AD3-8AC0-471C-B870-D2BC51F4FF2E}"/>
               </a:ext>
             </a:extLst>
           </p:cNvPr>
@@ -11111,7 +11111,7 @@
           <p:cNvPr id="122" name="qa-label">
             <a:extLst xmlns:a="http://schemas.openxmlformats.org/drawingml/2006/main">
               <a:ext uri="{FF2B5EF4-FFF2-40B4-BE49-F238E27FC236}">
-                <a16:creationId xmlns:a16="http://schemas.microsoft.com/office/drawing/2014/main" id="{405E5BED-886D-4227-ACA9-B22435573ADD}"/>
+                <a16:creationId xmlns:a16="http://schemas.microsoft.com/office/drawing/2014/main" id="{AB34C9E9-23ED-4645-8756-52CD80574C17}"/>
               </a:ext>
             </a:extLst>
           </p:cNvPr>
@@ -11200,7 +11200,7 @@
           <p:cNvPr id="123" name="match-label">
             <a:extLst xmlns:a="http://schemas.openxmlformats.org/drawingml/2006/main">
               <a:ext uri="{FF2B5EF4-FFF2-40B4-BE49-F238E27FC236}">
-                <a16:creationId xmlns:a16="http://schemas.microsoft.com/office/drawing/2014/main" id="{EFC5F346-879E-4B9E-9D73-14A6C7FE2E4B}"/>
+                <a16:creationId xmlns:a16="http://schemas.microsoft.com/office/drawing/2014/main" id="{1C76F81B-DBED-4590-8056-9611F3B096CF}"/>
               </a:ext>
             </a:extLst>
           </p:cNvPr>
@@ -11311,7 +11311,7 @@
           <p:cNvPr id="124" name="out-label">
             <a:extLst xmlns:a="http://schemas.openxmlformats.org/drawingml/2006/main">
               <a:ext uri="{FF2B5EF4-FFF2-40B4-BE49-F238E27FC236}">
-                <a16:creationId xmlns:a16="http://schemas.microsoft.com/office/drawing/2014/main" id="{DDAA2E75-63A8-491C-B996-018A2397AD83}"/>
+                <a16:creationId xmlns:a16="http://schemas.microsoft.com/office/drawing/2014/main" id="{2DD2E009-4E09-405E-9668-FBA433398B1D}"/>
               </a:ext>
             </a:extLst>
           </p:cNvPr>
@@ -11400,7 +11400,7 @@
           <p:cNvPr id="125" name="anchor-14">
             <a:extLst xmlns:a="http://schemas.openxmlformats.org/drawingml/2006/main">
               <a:ext uri="{FF2B5EF4-FFF2-40B4-BE49-F238E27FC236}">
-                <a16:creationId xmlns:a16="http://schemas.microsoft.com/office/drawing/2014/main" id="{A0035D57-932C-4D42-9E4C-41E5E6FC1D01}"/>
+                <a16:creationId xmlns:a16="http://schemas.microsoft.com/office/drawing/2014/main" id="{4C1FD8E9-9E92-4B81-89AB-1CAAF1DA6FBA}"/>
               </a:ext>
             </a:extLst>
           </p:cNvPr>
@@ -11429,7 +11429,7 @@
           <p:cNvPr id="126" name="anchor-15">
             <a:extLst xmlns:a="http://schemas.openxmlformats.org/drawingml/2006/main">
               <a:ext uri="{FF2B5EF4-FFF2-40B4-BE49-F238E27FC236}">
-                <a16:creationId xmlns:a16="http://schemas.microsoft.com/office/drawing/2014/main" id="{EE837811-EF33-4327-8FB4-766D262649ED}"/>
+                <a16:creationId xmlns:a16="http://schemas.microsoft.com/office/drawing/2014/main" id="{55A3B3E2-D602-45CB-8716-9259340300C2}"/>
               </a:ext>
             </a:extLst>
           </p:cNvPr>
@@ -11484,7 +11484,7 @@
           <p:cNvPr id="128" name="anchor-16">
             <a:extLst xmlns:a="http://schemas.openxmlformats.org/drawingml/2006/main">
               <a:ext uri="{FF2B5EF4-FFF2-40B4-BE49-F238E27FC236}">
-                <a16:creationId xmlns:a16="http://schemas.microsoft.com/office/drawing/2014/main" id="{64658969-FE18-42B1-8622-E723F9B4C25E}"/>
+                <a16:creationId xmlns:a16="http://schemas.microsoft.com/office/drawing/2014/main" id="{9C47E43A-4605-4B69-992B-B9918284C216}"/>
               </a:ext>
             </a:extLst>
           </p:cNvPr>
@@ -11513,7 +11513,7 @@
           <p:cNvPr id="129" name="anchor-17">
             <a:extLst xmlns:a="http://schemas.openxmlformats.org/drawingml/2006/main">
               <a:ext uri="{FF2B5EF4-FFF2-40B4-BE49-F238E27FC236}">
-                <a16:creationId xmlns:a16="http://schemas.microsoft.com/office/drawing/2014/main" id="{FE4C104C-60DF-4C54-91B6-B121968C5954}"/>
+                <a16:creationId xmlns:a16="http://schemas.microsoft.com/office/drawing/2014/main" id="{68033CB5-0580-4695-BA62-489A6D48C9F0}"/>
               </a:ext>
             </a:extLst>
           </p:cNvPr>
@@ -11568,7 +11568,7 @@
           <p:cNvPr id="131" name="anchor-18">
             <a:extLst xmlns:a="http://schemas.openxmlformats.org/drawingml/2006/main">
               <a:ext uri="{FF2B5EF4-FFF2-40B4-BE49-F238E27FC236}">
-                <a16:creationId xmlns:a16="http://schemas.microsoft.com/office/drawing/2014/main" id="{5E920F6F-8CDD-4837-A62C-645106239355}"/>
+                <a16:creationId xmlns:a16="http://schemas.microsoft.com/office/drawing/2014/main" id="{9DB9EEC6-224C-4AF7-A223-82F07BB29621}"/>
               </a:ext>
             </a:extLst>
           </p:cNvPr>
@@ -11597,7 +11597,7 @@
           <p:cNvPr id="132" name="anchor-19">
             <a:extLst xmlns:a="http://schemas.openxmlformats.org/drawingml/2006/main">
               <a:ext uri="{FF2B5EF4-FFF2-40B4-BE49-F238E27FC236}">
-                <a16:creationId xmlns:a16="http://schemas.microsoft.com/office/drawing/2014/main" id="{F315F5F8-CD41-4FDF-B47A-5D0D74428A26}"/>
+                <a16:creationId xmlns:a16="http://schemas.microsoft.com/office/drawing/2014/main" id="{E4C0CD04-AED7-49E9-96EB-2931D0C5D510}"/>
               </a:ext>
             </a:extLst>
           </p:cNvPr>
@@ -11652,7 +11652,7 @@
           <p:cNvPr id="134" name="read-guide-label">
             <a:extLst xmlns:a="http://schemas.openxmlformats.org/drawingml/2006/main">
               <a:ext uri="{FF2B5EF4-FFF2-40B4-BE49-F238E27FC236}">
-                <a16:creationId xmlns:a16="http://schemas.microsoft.com/office/drawing/2014/main" id="{2EA271DA-F29B-41E0-8C96-6E525514156C}"/>
+                <a16:creationId xmlns:a16="http://schemas.microsoft.com/office/drawing/2014/main" id="{BC4FE1FC-1038-4178-B086-DCEEE69B5298}"/>
               </a:ext>
             </a:extLst>
           </p:cNvPr>
@@ -11714,7 +11714,7 @@
           <p:cNvPr id="135" name="footer-line-1">
             <a:extLst xmlns:a="http://schemas.openxmlformats.org/drawingml/2006/main">
               <a:ext uri="{FF2B5EF4-FFF2-40B4-BE49-F238E27FC236}">
-                <a16:creationId xmlns:a16="http://schemas.microsoft.com/office/drawing/2014/main" id="{6A1B09CB-60DF-4518-9227-845A7D3FFC2D}"/>
+                <a16:creationId xmlns:a16="http://schemas.microsoft.com/office/drawing/2014/main" id="{CD0CCCD6-7C52-4412-A635-80C2DEDB5832}"/>
               </a:ext>
             </a:extLst>
           </p:cNvPr>
@@ -11820,7 +11820,7 @@
           <p:cNvPr id="136" name="footer-line-2">
             <a:extLst xmlns:a="http://schemas.openxmlformats.org/drawingml/2006/main">
               <a:ext uri="{FF2B5EF4-FFF2-40B4-BE49-F238E27FC236}">
-                <a16:creationId xmlns:a16="http://schemas.microsoft.com/office/drawing/2014/main" id="{5F771A9B-2C5D-4470-A05F-2B76517A7158}"/>
+                <a16:creationId xmlns:a16="http://schemas.microsoft.com/office/drawing/2014/main" id="{094D191B-AD64-4F11-B4F6-46DF9E9456B1}"/>
               </a:ext>
             </a:extLst>
           </p:cNvPr>
@@ -11882,7 +11882,7 @@
           <p:cNvPr id="137" name="footer-line-3">
             <a:extLst xmlns:a="http://schemas.openxmlformats.org/drawingml/2006/main">
               <a:ext uri="{FF2B5EF4-FFF2-40B4-BE49-F238E27FC236}">
-                <a16:creationId xmlns:a16="http://schemas.microsoft.com/office/drawing/2014/main" id="{387D36A1-CCB4-4E0E-9CD1-E02405314286}"/>
+                <a16:creationId xmlns:a16="http://schemas.microsoft.com/office/drawing/2014/main" id="{7C4142F3-15C1-4886-9FEA-5F59B580FDEB}"/>
               </a:ext>
             </a:extLst>
           </p:cNvPr>
@@ -11944,7 +11944,7 @@
           <p:cNvPr id="138" name="footer-line-4">
             <a:extLst xmlns:a="http://schemas.openxmlformats.org/drawingml/2006/main">
               <a:ext uri="{FF2B5EF4-FFF2-40B4-BE49-F238E27FC236}">
-                <a16:creationId xmlns:a16="http://schemas.microsoft.com/office/drawing/2014/main" id="{F24F7EA2-3119-4DE2-9D3E-5930DD985467}"/>
+                <a16:creationId xmlns:a16="http://schemas.microsoft.com/office/drawing/2014/main" id="{1DA5F8FF-BB2B-4C96-89E1-2669D672ABAA}"/>
               </a:ext>
             </a:extLst>
           </p:cNvPr>
@@ -12015,7 +12015,7 @@
     </p:spTree>
     <p:extLst>
       <p:ext uri="{BB962C8B-B14F-4D97-AF65-F5344CB8AC3E}">
-        <p14:creationId xmlns:p14="http://schemas.microsoft.com/office/powerpoint/2010/main" val="651098403"/>
+        <p14:creationId xmlns:p14="http://schemas.microsoft.com/office/powerpoint/2010/main" val="1041142296"/>
       </p:ext>
     </p:extLst>
   </p:cSld>
@@ -12046,7 +12046,7 @@
           <p:cNvPr id="102" name="band-a">
             <a:extLst xmlns:a="http://schemas.openxmlformats.org/drawingml/2006/main">
               <a:ext uri="{FF2B5EF4-FFF2-40B4-BE49-F238E27FC236}">
-                <a16:creationId xmlns:a16="http://schemas.microsoft.com/office/drawing/2014/main" id="{3C5E026A-DFFA-4C62-A4CF-27A4BBD5F9CD}"/>
+                <a16:creationId xmlns:a16="http://schemas.microsoft.com/office/drawing/2014/main" id="{FBF03228-5D89-4391-8625-C7EA47C271CD}"/>
               </a:ext>
             </a:extLst>
           </p:cNvPr>
@@ -12077,7 +12077,7 @@
           <p:cNvPr id="2" name="band-b">
             <a:extLst xmlns:a="http://schemas.openxmlformats.org/drawingml/2006/main">
               <a:ext uri="{FF2B5EF4-FFF2-40B4-BE49-F238E27FC236}">
-                <a16:creationId xmlns:a16="http://schemas.microsoft.com/office/drawing/2014/main" id="{C9BE9416-7D8A-46A8-8129-6925AD31C1E8}"/>
+                <a16:creationId xmlns:a16="http://schemas.microsoft.com/office/drawing/2014/main" id="{C2C7B28D-7017-4B49-957E-CFB6F40666D3}"/>
               </a:ext>
             </a:extLst>
           </p:cNvPr>
@@ -12108,7 +12108,7 @@
           <p:cNvPr id="3" name="band-c">
             <a:extLst xmlns:a="http://schemas.openxmlformats.org/drawingml/2006/main">
               <a:ext uri="{FF2B5EF4-FFF2-40B4-BE49-F238E27FC236}">
-                <a16:creationId xmlns:a16="http://schemas.microsoft.com/office/drawing/2014/main" id="{8D521360-A2A7-4540-B7DE-F047850DA2C6}"/>
+                <a16:creationId xmlns:a16="http://schemas.microsoft.com/office/drawing/2014/main" id="{77882C3C-B921-41B7-8D8E-5C522D2B7D92}"/>
               </a:ext>
             </a:extLst>
           </p:cNvPr>
@@ -12139,7 +12139,7 @@
           <p:cNvPr id="4" name="sec-a-chip">
             <a:extLst xmlns:a="http://schemas.openxmlformats.org/drawingml/2006/main">
               <a:ext uri="{FF2B5EF4-FFF2-40B4-BE49-F238E27FC236}">
-                <a16:creationId xmlns:a16="http://schemas.microsoft.com/office/drawing/2014/main" id="{520AD6C0-1203-4466-A30F-011161A52F99}"/>
+                <a16:creationId xmlns:a16="http://schemas.microsoft.com/office/drawing/2014/main" id="{041ED411-0278-4F98-97AC-50BEEA3180C0}"/>
               </a:ext>
             </a:extLst>
           </p:cNvPr>
@@ -12174,7 +12174,7 @@
           <p:cNvPr id="5" name="sec-a-chip-text">
             <a:extLst xmlns:a="http://schemas.openxmlformats.org/drawingml/2006/main">
               <a:ext uri="{FF2B5EF4-FFF2-40B4-BE49-F238E27FC236}">
-                <a16:creationId xmlns:a16="http://schemas.microsoft.com/office/drawing/2014/main" id="{33BADD79-14B4-425E-9EED-F290EEBA4755}"/>
+                <a16:creationId xmlns:a16="http://schemas.microsoft.com/office/drawing/2014/main" id="{2CAAC3C7-A8BF-44C3-9789-F9A7767F5367}"/>
               </a:ext>
             </a:extLst>
           </p:cNvPr>
@@ -12236,7 +12236,7 @@
           <p:cNvPr id="6" name="sec-a">
             <a:extLst xmlns:a="http://schemas.openxmlformats.org/drawingml/2006/main">
               <a:ext uri="{FF2B5EF4-FFF2-40B4-BE49-F238E27FC236}">
-                <a16:creationId xmlns:a16="http://schemas.microsoft.com/office/drawing/2014/main" id="{7E11AFCE-A0AD-4431-A782-1BBD0CEDF60C}"/>
+                <a16:creationId xmlns:a16="http://schemas.microsoft.com/office/drawing/2014/main" id="{D2461FFE-27CE-4DCF-98D3-CE6B28CC7A0E}"/>
               </a:ext>
             </a:extLst>
           </p:cNvPr>
@@ -12298,7 +12298,7 @@
           <p:cNvPr id="7" name="query-patch">
             <a:extLst xmlns:a="http://schemas.openxmlformats.org/drawingml/2006/main">
               <a:ext uri="{FF2B5EF4-FFF2-40B4-BE49-F238E27FC236}">
-                <a16:creationId xmlns:a16="http://schemas.microsoft.com/office/drawing/2014/main" id="{9C532663-4929-45C0-A76E-F4967DEFC3F4}"/>
+                <a16:creationId xmlns:a16="http://schemas.microsoft.com/office/drawing/2014/main" id="{5C3646E5-17A0-4FF4-AA3E-71C2D194DAE8}"/>
               </a:ext>
             </a:extLst>
           </p:cNvPr>
@@ -12333,7 +12333,7 @@
           <p:cNvPr id="8" name="query-cell-0-0">
             <a:extLst xmlns:a="http://schemas.openxmlformats.org/drawingml/2006/main">
               <a:ext uri="{FF2B5EF4-FFF2-40B4-BE49-F238E27FC236}">
-                <a16:creationId xmlns:a16="http://schemas.microsoft.com/office/drawing/2014/main" id="{51F51AD8-3D10-4518-9229-C61E69A8B727}"/>
+                <a16:creationId xmlns:a16="http://schemas.microsoft.com/office/drawing/2014/main" id="{2B7C3CD8-6205-4D1B-B758-4A5E03946C97}"/>
               </a:ext>
             </a:extLst>
           </p:cNvPr>
@@ -12366,7 +12366,7 @@
           <p:cNvPr id="9" name="query-cell-0-1">
             <a:extLst xmlns:a="http://schemas.openxmlformats.org/drawingml/2006/main">
               <a:ext uri="{FF2B5EF4-FFF2-40B4-BE49-F238E27FC236}">
-                <a16:creationId xmlns:a16="http://schemas.microsoft.com/office/drawing/2014/main" id="{3E7B9140-E6EC-41F1-9721-5B63286CF3D6}"/>
+                <a16:creationId xmlns:a16="http://schemas.microsoft.com/office/drawing/2014/main" id="{81DB60BA-AAA7-4FC4-8599-D96E4BCA3DF3}"/>
               </a:ext>
             </a:extLst>
           </p:cNvPr>
@@ -12399,7 +12399,7 @@
           <p:cNvPr id="10" name="query-cell-1-0">
             <a:extLst xmlns:a="http://schemas.openxmlformats.org/drawingml/2006/main">
               <a:ext uri="{FF2B5EF4-FFF2-40B4-BE49-F238E27FC236}">
-                <a16:creationId xmlns:a16="http://schemas.microsoft.com/office/drawing/2014/main" id="{44E03946-42D9-4EBB-8194-127E75BD71A5}"/>
+                <a16:creationId xmlns:a16="http://schemas.microsoft.com/office/drawing/2014/main" id="{DE4D5258-C13A-4B80-8E76-3DF32F593E19}"/>
               </a:ext>
             </a:extLst>
           </p:cNvPr>
@@ -12432,7 +12432,7 @@
           <p:cNvPr id="11" name="query-cell-1-1">
             <a:extLst xmlns:a="http://schemas.openxmlformats.org/drawingml/2006/main">
               <a:ext uri="{FF2B5EF4-FFF2-40B4-BE49-F238E27FC236}">
-                <a16:creationId xmlns:a16="http://schemas.microsoft.com/office/drawing/2014/main" id="{B933E2EE-91C2-41B3-AB3E-F94C92FA06B3}"/>
+                <a16:creationId xmlns:a16="http://schemas.microsoft.com/office/drawing/2014/main" id="{3E8EFF1D-F4E3-4C55-A268-CC211EB20C9F}"/>
               </a:ext>
             </a:extLst>
           </p:cNvPr>
@@ -12465,7 +12465,7 @@
           <p:cNvPr id="12" name="query-label">
             <a:extLst xmlns:a="http://schemas.openxmlformats.org/drawingml/2006/main">
               <a:ext uri="{FF2B5EF4-FFF2-40B4-BE49-F238E27FC236}">
-                <a16:creationId xmlns:a16="http://schemas.microsoft.com/office/drawing/2014/main" id="{D2577C60-92D2-4A56-9E57-8FA2A96C95E8}"/>
+                <a16:creationId xmlns:a16="http://schemas.microsoft.com/office/drawing/2014/main" id="{6550AB14-CDF6-4766-8040-8816718D0632}"/>
               </a:ext>
             </a:extLst>
           </p:cNvPr>
@@ -12554,7 +12554,7 @@
           <p:cNvPr id="13" name="grade-0">
             <a:extLst xmlns:a="http://schemas.openxmlformats.org/drawingml/2006/main">
               <a:ext uri="{FF2B5EF4-FFF2-40B4-BE49-F238E27FC236}">
-                <a16:creationId xmlns:a16="http://schemas.microsoft.com/office/drawing/2014/main" id="{2C50F1C7-CF6B-41BC-8755-0FA02C595378}"/>
+                <a16:creationId xmlns:a16="http://schemas.microsoft.com/office/drawing/2014/main" id="{FA2C60A2-D72F-4248-80AD-29551DBF9484}"/>
               </a:ext>
             </a:extLst>
           </p:cNvPr>
@@ -12627,7 +12627,7 @@
           <p:cNvPr id="14" name="grade-1">
             <a:extLst xmlns:a="http://schemas.openxmlformats.org/drawingml/2006/main">
               <a:ext uri="{FF2B5EF4-FFF2-40B4-BE49-F238E27FC236}">
-                <a16:creationId xmlns:a16="http://schemas.microsoft.com/office/drawing/2014/main" id="{D9B685A2-6A7A-46CF-8D8A-9FD6A8C5B88E}"/>
+                <a16:creationId xmlns:a16="http://schemas.microsoft.com/office/drawing/2014/main" id="{05018BC0-E616-42F0-B3E9-4015324D509A}"/>
               </a:ext>
             </a:extLst>
           </p:cNvPr>
@@ -12700,7 +12700,7 @@
           <p:cNvPr id="15" name="grade-2">
             <a:extLst xmlns:a="http://schemas.openxmlformats.org/drawingml/2006/main">
               <a:ext uri="{FF2B5EF4-FFF2-40B4-BE49-F238E27FC236}">
-                <a16:creationId xmlns:a16="http://schemas.microsoft.com/office/drawing/2014/main" id="{FFF27629-B079-4B80-A4B8-479599F0F6E2}"/>
+                <a16:creationId xmlns:a16="http://schemas.microsoft.com/office/drawing/2014/main" id="{2C83F0C2-E214-4749-9DCA-BF168263CC1C}"/>
               </a:ext>
             </a:extLst>
           </p:cNvPr>
@@ -12762,7 +12762,7 @@
           <p:cNvPr id="16" name="row-B-0">
             <a:extLst xmlns:a="http://schemas.openxmlformats.org/drawingml/2006/main">
               <a:ext uri="{FF2B5EF4-FFF2-40B4-BE49-F238E27FC236}">
-                <a16:creationId xmlns:a16="http://schemas.microsoft.com/office/drawing/2014/main" id="{0CFBA7B4-2C77-46C1-9227-1582C64F18FB}"/>
+                <a16:creationId xmlns:a16="http://schemas.microsoft.com/office/drawing/2014/main" id="{D95D7899-8827-42F2-8CB2-A05694D25F90}"/>
               </a:ext>
             </a:extLst>
           </p:cNvPr>
@@ -12795,7 +12795,7 @@
           <p:cNvPr id="17" name="row-B-1">
             <a:extLst xmlns:a="http://schemas.openxmlformats.org/drawingml/2006/main">
               <a:ext uri="{FF2B5EF4-FFF2-40B4-BE49-F238E27FC236}">
-                <a16:creationId xmlns:a16="http://schemas.microsoft.com/office/drawing/2014/main" id="{FDA9B884-5162-4216-A714-B58436D688F5}"/>
+                <a16:creationId xmlns:a16="http://schemas.microsoft.com/office/drawing/2014/main" id="{3417FD7A-D3E1-450C-B75C-0AC342C231F4}"/>
               </a:ext>
             </a:extLst>
           </p:cNvPr>
@@ -12828,7 +12828,7 @@
           <p:cNvPr id="18" name="row-B-2">
             <a:extLst xmlns:a="http://schemas.openxmlformats.org/drawingml/2006/main">
               <a:ext uri="{FF2B5EF4-FFF2-40B4-BE49-F238E27FC236}">
-                <a16:creationId xmlns:a16="http://schemas.microsoft.com/office/drawing/2014/main" id="{EEE7A130-BD4C-4A86-ADE4-37A677FEA172}"/>
+                <a16:creationId xmlns:a16="http://schemas.microsoft.com/office/drawing/2014/main" id="{8EB57801-F54A-4F15-A890-E83A5237BE4E}"/>
               </a:ext>
             </a:extLst>
           </p:cNvPr>
@@ -12861,7 +12861,7 @@
           <p:cNvPr id="19" name="row-B-accent-2">
             <a:extLst xmlns:a="http://schemas.openxmlformats.org/drawingml/2006/main">
               <a:ext uri="{FF2B5EF4-FFF2-40B4-BE49-F238E27FC236}">
-                <a16:creationId xmlns:a16="http://schemas.microsoft.com/office/drawing/2014/main" id="{F70FF529-0A0F-41C7-BD6C-1BFA4C8BCDAF}"/>
+                <a16:creationId xmlns:a16="http://schemas.microsoft.com/office/drawing/2014/main" id="{8FDCEDB8-E0EA-4D3F-A739-81D04009A3F4}"/>
               </a:ext>
             </a:extLst>
           </p:cNvPr>
@@ -12892,7 +12892,7 @@
           <p:cNvPr id="20" name="row-B-3">
             <a:extLst xmlns:a="http://schemas.openxmlformats.org/drawingml/2006/main">
               <a:ext uri="{FF2B5EF4-FFF2-40B4-BE49-F238E27FC236}">
-                <a16:creationId xmlns:a16="http://schemas.microsoft.com/office/drawing/2014/main" id="{452C3283-DB05-458A-BE91-6433D1C2EA61}"/>
+                <a16:creationId xmlns:a16="http://schemas.microsoft.com/office/drawing/2014/main" id="{428F18D1-65CD-4D7C-94AD-BC9D1CAA971E}"/>
               </a:ext>
             </a:extLst>
           </p:cNvPr>
@@ -12925,7 +12925,7 @@
           <p:cNvPr id="21" name="row-B-4">
             <a:extLst xmlns:a="http://schemas.openxmlformats.org/drawingml/2006/main">
               <a:ext uri="{FF2B5EF4-FFF2-40B4-BE49-F238E27FC236}">
-                <a16:creationId xmlns:a16="http://schemas.microsoft.com/office/drawing/2014/main" id="{B2ED5C80-57CC-4F8D-8E9C-F7267AD0BA54}"/>
+                <a16:creationId xmlns:a16="http://schemas.microsoft.com/office/drawing/2014/main" id="{6EF1E041-A1F3-41F6-B5FF-14F2A0F8EA4A}"/>
               </a:ext>
             </a:extLst>
           </p:cNvPr>
@@ -12958,7 +12958,7 @@
           <p:cNvPr id="22" name="row-B-5">
             <a:extLst xmlns:a="http://schemas.openxmlformats.org/drawingml/2006/main">
               <a:ext uri="{FF2B5EF4-FFF2-40B4-BE49-F238E27FC236}">
-                <a16:creationId xmlns:a16="http://schemas.microsoft.com/office/drawing/2014/main" id="{D1B2C3C4-F440-4622-80DE-2073C1A15BC2}"/>
+                <a16:creationId xmlns:a16="http://schemas.microsoft.com/office/drawing/2014/main" id="{65790768-3A58-42D6-9266-9BCCB5671C87}"/>
               </a:ext>
             </a:extLst>
           </p:cNvPr>
@@ -12991,7 +12991,7 @@
           <p:cNvPr id="23" name="row-B-6">
             <a:extLst xmlns:a="http://schemas.openxmlformats.org/drawingml/2006/main">
               <a:ext uri="{FF2B5EF4-FFF2-40B4-BE49-F238E27FC236}">
-                <a16:creationId xmlns:a16="http://schemas.microsoft.com/office/drawing/2014/main" id="{A5851CB2-3C91-40BF-A1E0-7420BD996D37}"/>
+                <a16:creationId xmlns:a16="http://schemas.microsoft.com/office/drawing/2014/main" id="{42518894-9570-422B-A002-193DA64E526C}"/>
               </a:ext>
             </a:extLst>
           </p:cNvPr>
@@ -13024,7 +13024,7 @@
           <p:cNvPr id="24" name="row-B-7">
             <a:extLst xmlns:a="http://schemas.openxmlformats.org/drawingml/2006/main">
               <a:ext uri="{FF2B5EF4-FFF2-40B4-BE49-F238E27FC236}">
-                <a16:creationId xmlns:a16="http://schemas.microsoft.com/office/drawing/2014/main" id="{5164B0DB-C1D7-4BA7-A413-410C7C2AE943}"/>
+                <a16:creationId xmlns:a16="http://schemas.microsoft.com/office/drawing/2014/main" id="{A68549CA-8D58-40F3-A1DB-C4B6FBA5E72E}"/>
               </a:ext>
             </a:extLst>
           </p:cNvPr>
@@ -13057,7 +13057,7 @@
           <p:cNvPr id="25" name="row-C-0">
             <a:extLst xmlns:a="http://schemas.openxmlformats.org/drawingml/2006/main">
               <a:ext uri="{FF2B5EF4-FFF2-40B4-BE49-F238E27FC236}">
-                <a16:creationId xmlns:a16="http://schemas.microsoft.com/office/drawing/2014/main" id="{04A28A18-27E2-49A5-9F98-D225C2223051}"/>
+                <a16:creationId xmlns:a16="http://schemas.microsoft.com/office/drawing/2014/main" id="{D8C7CBC5-95A8-4485-B0B7-9850617F45B4}"/>
               </a:ext>
             </a:extLst>
           </p:cNvPr>
@@ -13090,7 +13090,7 @@
           <p:cNvPr id="26" name="row-C-1">
             <a:extLst xmlns:a="http://schemas.openxmlformats.org/drawingml/2006/main">
               <a:ext uri="{FF2B5EF4-FFF2-40B4-BE49-F238E27FC236}">
-                <a16:creationId xmlns:a16="http://schemas.microsoft.com/office/drawing/2014/main" id="{D5F69397-5A38-4906-AFCD-1766F3EB06E9}"/>
+                <a16:creationId xmlns:a16="http://schemas.microsoft.com/office/drawing/2014/main" id="{713AD232-974B-489A-BCC4-965057FFE9E9}"/>
               </a:ext>
             </a:extLst>
           </p:cNvPr>
@@ -13123,7 +13123,7 @@
           <p:cNvPr id="27" name="row-C-2">
             <a:extLst xmlns:a="http://schemas.openxmlformats.org/drawingml/2006/main">
               <a:ext uri="{FF2B5EF4-FFF2-40B4-BE49-F238E27FC236}">
-                <a16:creationId xmlns:a16="http://schemas.microsoft.com/office/drawing/2014/main" id="{3334CBD9-40A0-4F9A-A4C2-F0C70223710D}"/>
+                <a16:creationId xmlns:a16="http://schemas.microsoft.com/office/drawing/2014/main" id="{1272D32E-DB44-4A95-BE8F-6AD3E1C6F4CD}"/>
               </a:ext>
             </a:extLst>
           </p:cNvPr>
@@ -13156,7 +13156,7 @@
           <p:cNvPr id="28" name="row-C-3">
             <a:extLst xmlns:a="http://schemas.openxmlformats.org/drawingml/2006/main">
               <a:ext uri="{FF2B5EF4-FFF2-40B4-BE49-F238E27FC236}">
-                <a16:creationId xmlns:a16="http://schemas.microsoft.com/office/drawing/2014/main" id="{BD00FD6B-6EC4-4878-A900-E598C4222DCB}"/>
+                <a16:creationId xmlns:a16="http://schemas.microsoft.com/office/drawing/2014/main" id="{A6C8C5D8-FC5D-4932-A8AE-1F33ABCBF305}"/>
               </a:ext>
             </a:extLst>
           </p:cNvPr>
@@ -13189,7 +13189,7 @@
           <p:cNvPr id="29" name="row-C-4">
             <a:extLst xmlns:a="http://schemas.openxmlformats.org/drawingml/2006/main">
               <a:ext uri="{FF2B5EF4-FFF2-40B4-BE49-F238E27FC236}">
-                <a16:creationId xmlns:a16="http://schemas.microsoft.com/office/drawing/2014/main" id="{CF2F768D-8417-4665-B7FC-05ACFEF4E15F}"/>
+                <a16:creationId xmlns:a16="http://schemas.microsoft.com/office/drawing/2014/main" id="{59291854-FBF8-4785-8F10-C0C561E55A4D}"/>
               </a:ext>
             </a:extLst>
           </p:cNvPr>
@@ -13222,7 +13222,7 @@
           <p:cNvPr id="30" name="row-C-5">
             <a:extLst xmlns:a="http://schemas.openxmlformats.org/drawingml/2006/main">
               <a:ext uri="{FF2B5EF4-FFF2-40B4-BE49-F238E27FC236}">
-                <a16:creationId xmlns:a16="http://schemas.microsoft.com/office/drawing/2014/main" id="{742C8289-0114-4F9F-8AB3-7A8C18BEC70D}"/>
+                <a16:creationId xmlns:a16="http://schemas.microsoft.com/office/drawing/2014/main" id="{3AF52788-2981-4ACC-BF10-C151F3AC8556}"/>
               </a:ext>
             </a:extLst>
           </p:cNvPr>
@@ -13255,7 +13255,7 @@
           <p:cNvPr id="31" name="row-C-accent-5">
             <a:extLst xmlns:a="http://schemas.openxmlformats.org/drawingml/2006/main">
               <a:ext uri="{FF2B5EF4-FFF2-40B4-BE49-F238E27FC236}">
-                <a16:creationId xmlns:a16="http://schemas.microsoft.com/office/drawing/2014/main" id="{1EE9FB36-E51B-437A-A66D-C6828EDEACFD}"/>
+                <a16:creationId xmlns:a16="http://schemas.microsoft.com/office/drawing/2014/main" id="{985C938B-8D5E-4E35-B2EA-505A0C4267AE}"/>
               </a:ext>
             </a:extLst>
           </p:cNvPr>
@@ -13286,7 +13286,7 @@
           <p:cNvPr id="32" name="row-C-6">
             <a:extLst xmlns:a="http://schemas.openxmlformats.org/drawingml/2006/main">
               <a:ext uri="{FF2B5EF4-FFF2-40B4-BE49-F238E27FC236}">
-                <a16:creationId xmlns:a16="http://schemas.microsoft.com/office/drawing/2014/main" id="{F796061D-FE6E-413E-B421-BF376247FAEF}"/>
+                <a16:creationId xmlns:a16="http://schemas.microsoft.com/office/drawing/2014/main" id="{BEFC55AD-818F-4B2C-A0B6-1DDD8B316AC7}"/>
               </a:ext>
             </a:extLst>
           </p:cNvPr>
@@ -13319,7 +13319,7 @@
           <p:cNvPr id="33" name="row-C-7">
             <a:extLst xmlns:a="http://schemas.openxmlformats.org/drawingml/2006/main">
               <a:ext uri="{FF2B5EF4-FFF2-40B4-BE49-F238E27FC236}">
-                <a16:creationId xmlns:a16="http://schemas.microsoft.com/office/drawing/2014/main" id="{9B376F62-5C1A-4C6A-A7AF-B579ADFE36F3}"/>
+                <a16:creationId xmlns:a16="http://schemas.microsoft.com/office/drawing/2014/main" id="{BB04A421-74FF-4620-BB4D-5281181E1B19}"/>
               </a:ext>
             </a:extLst>
           </p:cNvPr>
@@ -13352,7 +13352,7 @@
           <p:cNvPr id="34" name="row-S-0">
             <a:extLst xmlns:a="http://schemas.openxmlformats.org/drawingml/2006/main">
               <a:ext uri="{FF2B5EF4-FFF2-40B4-BE49-F238E27FC236}">
-                <a16:creationId xmlns:a16="http://schemas.microsoft.com/office/drawing/2014/main" id="{B5531D83-3A17-4D7E-917A-AE20252B2940}"/>
+                <a16:creationId xmlns:a16="http://schemas.microsoft.com/office/drawing/2014/main" id="{BD3706E9-2CA3-4D9B-8A53-9758C73DD904}"/>
               </a:ext>
             </a:extLst>
           </p:cNvPr>
@@ -13385,7 +13385,7 @@
           <p:cNvPr id="35" name="row-S-1">
             <a:extLst xmlns:a="http://schemas.openxmlformats.org/drawingml/2006/main">
               <a:ext uri="{FF2B5EF4-FFF2-40B4-BE49-F238E27FC236}">
-                <a16:creationId xmlns:a16="http://schemas.microsoft.com/office/drawing/2014/main" id="{98B540B4-1381-46A4-BDE1-25BE56EB565F}"/>
+                <a16:creationId xmlns:a16="http://schemas.microsoft.com/office/drawing/2014/main" id="{DA6AD22C-9527-408F-A4B2-53074C434D50}"/>
               </a:ext>
             </a:extLst>
           </p:cNvPr>
@@ -13418,7 +13418,7 @@
           <p:cNvPr id="36" name="row-S-2">
             <a:extLst xmlns:a="http://schemas.openxmlformats.org/drawingml/2006/main">
               <a:ext uri="{FF2B5EF4-FFF2-40B4-BE49-F238E27FC236}">
-                <a16:creationId xmlns:a16="http://schemas.microsoft.com/office/drawing/2014/main" id="{0AEA0FC6-C7D4-4227-99B6-AFE30A496580}"/>
+                <a16:creationId xmlns:a16="http://schemas.microsoft.com/office/drawing/2014/main" id="{38D228A1-D8A0-4DD6-B4F5-800B47868264}"/>
               </a:ext>
             </a:extLst>
           </p:cNvPr>
@@ -13451,7 +13451,7 @@
           <p:cNvPr id="37" name="row-S-3">
             <a:extLst xmlns:a="http://schemas.openxmlformats.org/drawingml/2006/main">
               <a:ext uri="{FF2B5EF4-FFF2-40B4-BE49-F238E27FC236}">
-                <a16:creationId xmlns:a16="http://schemas.microsoft.com/office/drawing/2014/main" id="{48266D1F-77E6-4FA5-B84E-C73A888F7C63}"/>
+                <a16:creationId xmlns:a16="http://schemas.microsoft.com/office/drawing/2014/main" id="{C1D58909-6247-4882-9009-CA13B132707F}"/>
               </a:ext>
             </a:extLst>
           </p:cNvPr>
@@ -13484,7 +13484,7 @@
           <p:cNvPr id="38" name="row-S-accent-3">
             <a:extLst xmlns:a="http://schemas.openxmlformats.org/drawingml/2006/main">
               <a:ext uri="{FF2B5EF4-FFF2-40B4-BE49-F238E27FC236}">
-                <a16:creationId xmlns:a16="http://schemas.microsoft.com/office/drawing/2014/main" id="{39D2F81C-2FE9-41FC-9D6E-2F92A48F50CC}"/>
+                <a16:creationId xmlns:a16="http://schemas.microsoft.com/office/drawing/2014/main" id="{CC281D78-150D-487A-9CAD-0C4984D5B7DA}"/>
               </a:ext>
             </a:extLst>
           </p:cNvPr>
@@ -13515,7 +13515,7 @@
           <p:cNvPr id="39" name="row-S-4">
             <a:extLst xmlns:a="http://schemas.openxmlformats.org/drawingml/2006/main">
               <a:ext uri="{FF2B5EF4-FFF2-40B4-BE49-F238E27FC236}">
-                <a16:creationId xmlns:a16="http://schemas.microsoft.com/office/drawing/2014/main" id="{9E8BDFF3-946E-4E83-9E2E-92EFB544D861}"/>
+                <a16:creationId xmlns:a16="http://schemas.microsoft.com/office/drawing/2014/main" id="{9E25540D-77CF-4F16-8F38-A3A83E02B211}"/>
               </a:ext>
             </a:extLst>
           </p:cNvPr>
@@ -13548,7 +13548,7 @@
           <p:cNvPr id="40" name="row-S-5">
             <a:extLst xmlns:a="http://schemas.openxmlformats.org/drawingml/2006/main">
               <a:ext uri="{FF2B5EF4-FFF2-40B4-BE49-F238E27FC236}">
-                <a16:creationId xmlns:a16="http://schemas.microsoft.com/office/drawing/2014/main" id="{707C4345-1635-4493-8EA4-917961B340E4}"/>
+                <a16:creationId xmlns:a16="http://schemas.microsoft.com/office/drawing/2014/main" id="{0A949B59-A99A-401E-95DA-211CD2FF7E74}"/>
               </a:ext>
             </a:extLst>
           </p:cNvPr>
@@ -13581,7 +13581,7 @@
           <p:cNvPr id="41" name="row-S-6">
             <a:extLst xmlns:a="http://schemas.openxmlformats.org/drawingml/2006/main">
               <a:ext uri="{FF2B5EF4-FFF2-40B4-BE49-F238E27FC236}">
-                <a16:creationId xmlns:a16="http://schemas.microsoft.com/office/drawing/2014/main" id="{385B2CBF-4674-4AE2-BFA2-A56322A71AFF}"/>
+                <a16:creationId xmlns:a16="http://schemas.microsoft.com/office/drawing/2014/main" id="{3EC08923-91E2-422B-B761-A0B52CD46643}"/>
               </a:ext>
             </a:extLst>
           </p:cNvPr>
@@ -13614,7 +13614,7 @@
           <p:cNvPr id="42" name="row-S-7">
             <a:extLst xmlns:a="http://schemas.openxmlformats.org/drawingml/2006/main">
               <a:ext uri="{FF2B5EF4-FFF2-40B4-BE49-F238E27FC236}">
-                <a16:creationId xmlns:a16="http://schemas.microsoft.com/office/drawing/2014/main" id="{F161DBBA-0E00-4638-B51A-7D1A51925093}"/>
+                <a16:creationId xmlns:a16="http://schemas.microsoft.com/office/drawing/2014/main" id="{0FAFD4FB-1E9F-4DA4-B6AD-F6694910B79B}"/>
               </a:ext>
             </a:extLst>
           </p:cNvPr>
@@ -13647,7 +13647,7 @@
           <p:cNvPr id="43" name="row-axis">
             <a:extLst xmlns:a="http://schemas.openxmlformats.org/drawingml/2006/main">
               <a:ext uri="{FF2B5EF4-FFF2-40B4-BE49-F238E27FC236}">
-                <a16:creationId xmlns:a16="http://schemas.microsoft.com/office/drawing/2014/main" id="{DD0F0F4D-9901-4146-8983-7A5B8E30030F}"/>
+                <a16:creationId xmlns:a16="http://schemas.microsoft.com/office/drawing/2014/main" id="{8DFFF599-08E7-4E5A-A09E-4BAEF539DCE2}"/>
               </a:ext>
             </a:extLst>
           </p:cNvPr>
@@ -13731,7 +13731,7 @@
           <p:cNvPr id="44" name="a-note">
             <a:extLst xmlns:a="http://schemas.openxmlformats.org/drawingml/2006/main">
               <a:ext uri="{FF2B5EF4-FFF2-40B4-BE49-F238E27FC236}">
-                <a16:creationId xmlns:a16="http://schemas.microsoft.com/office/drawing/2014/main" id="{155F5873-3218-42D3-B4D9-A1DB1D99F723}"/>
+                <a16:creationId xmlns:a16="http://schemas.microsoft.com/office/drawing/2014/main" id="{42442D08-B05D-43FD-BD8B-56E40E726B8E}"/>
               </a:ext>
             </a:extLst>
           </p:cNvPr>
@@ -13847,7 +13847,7 @@
           <p:cNvPr id="45" name="sec-b-chip">
             <a:extLst xmlns:a="http://schemas.openxmlformats.org/drawingml/2006/main">
               <a:ext uri="{FF2B5EF4-FFF2-40B4-BE49-F238E27FC236}">
-                <a16:creationId xmlns:a16="http://schemas.microsoft.com/office/drawing/2014/main" id="{A2B1FDA7-FC5A-4390-BA27-4B8E2A3FAA4D}"/>
+                <a16:creationId xmlns:a16="http://schemas.microsoft.com/office/drawing/2014/main" id="{5A40ADE6-5B37-4724-9568-5B6B7F7ACEF7}"/>
               </a:ext>
             </a:extLst>
           </p:cNvPr>
@@ -13882,7 +13882,7 @@
           <p:cNvPr id="46" name="sec-b-chip-text">
             <a:extLst xmlns:a="http://schemas.openxmlformats.org/drawingml/2006/main">
               <a:ext uri="{FF2B5EF4-FFF2-40B4-BE49-F238E27FC236}">
-                <a16:creationId xmlns:a16="http://schemas.microsoft.com/office/drawing/2014/main" id="{FE82E36D-82AA-40B2-AE43-DCA1A61716DA}"/>
+                <a16:creationId xmlns:a16="http://schemas.microsoft.com/office/drawing/2014/main" id="{8FC6B29E-CF51-45B3-A49D-D8BF9A06AC11}"/>
               </a:ext>
             </a:extLst>
           </p:cNvPr>
@@ -13944,7 +13944,7 @@
           <p:cNvPr id="47" name="sec-b">
             <a:extLst xmlns:a="http://schemas.openxmlformats.org/drawingml/2006/main">
               <a:ext uri="{FF2B5EF4-FFF2-40B4-BE49-F238E27FC236}">
-                <a16:creationId xmlns:a16="http://schemas.microsoft.com/office/drawing/2014/main" id="{C014ABE6-8B4E-446C-AB5B-5D853A9D5F65}"/>
+                <a16:creationId xmlns:a16="http://schemas.microsoft.com/office/drawing/2014/main" id="{E9F51236-F710-4A39-B5F8-57BC5F6D2DC1}"/>
               </a:ext>
             </a:extLst>
           </p:cNvPr>
@@ -14006,7 +14006,7 @@
           <p:cNvPr id="48" name="panel-J">
             <a:extLst xmlns:a="http://schemas.openxmlformats.org/drawingml/2006/main">
               <a:ext uri="{FF2B5EF4-FFF2-40B4-BE49-F238E27FC236}">
-                <a16:creationId xmlns:a16="http://schemas.microsoft.com/office/drawing/2014/main" id="{11ACBA35-2FFB-4A05-9BEF-697E4DEC05BC}"/>
+                <a16:creationId xmlns:a16="http://schemas.microsoft.com/office/drawing/2014/main" id="{E1B6B338-551F-42ED-A41B-C2EFCF0E876C}"/>
               </a:ext>
             </a:extLst>
           </p:cNvPr>
@@ -14041,7 +14041,7 @@
           <p:cNvPr id="49" name="J-title">
             <a:extLst xmlns:a="http://schemas.openxmlformats.org/drawingml/2006/main">
               <a:ext uri="{FF2B5EF4-FFF2-40B4-BE49-F238E27FC236}">
-                <a16:creationId xmlns:a16="http://schemas.microsoft.com/office/drawing/2014/main" id="{EC82BA83-7294-4FF2-BF94-B90D6D87FB9A}"/>
+                <a16:creationId xmlns:a16="http://schemas.microsoft.com/office/drawing/2014/main" id="{A56BDD16-40D4-4713-98B9-57E894910BF1}"/>
               </a:ext>
             </a:extLst>
           </p:cNvPr>
@@ -14114,7 +14114,7 @@
           <p:cNvPr id="50" name="J-formula">
             <a:extLst xmlns:a="http://schemas.openxmlformats.org/drawingml/2006/main">
               <a:ext uri="{FF2B5EF4-FFF2-40B4-BE49-F238E27FC236}">
-                <a16:creationId xmlns:a16="http://schemas.microsoft.com/office/drawing/2014/main" id="{E448A53A-7B1E-43E0-9A13-C73D7CBCAA28}"/>
+                <a16:creationId xmlns:a16="http://schemas.microsoft.com/office/drawing/2014/main" id="{C47A41A0-6BD4-499D-AD86-555F9AF6BF28}"/>
               </a:ext>
             </a:extLst>
           </p:cNvPr>
@@ -14253,7 +14253,7 @@
           <p:cNvPr id="51" name="J-B-0">
             <a:extLst xmlns:a="http://schemas.openxmlformats.org/drawingml/2006/main">
               <a:ext uri="{FF2B5EF4-FFF2-40B4-BE49-F238E27FC236}">
-                <a16:creationId xmlns:a16="http://schemas.microsoft.com/office/drawing/2014/main" id="{6727E3C8-744D-48E0-975E-7722C491A521}"/>
+                <a16:creationId xmlns:a16="http://schemas.microsoft.com/office/drawing/2014/main" id="{9B13EDE2-23CF-48D7-BB6E-5DE4C3995541}"/>
               </a:ext>
             </a:extLst>
           </p:cNvPr>
@@ -14286,7 +14286,7 @@
           <p:cNvPr id="52" name="J-B-1">
             <a:extLst xmlns:a="http://schemas.openxmlformats.org/drawingml/2006/main">
               <a:ext uri="{FF2B5EF4-FFF2-40B4-BE49-F238E27FC236}">
-                <a16:creationId xmlns:a16="http://schemas.microsoft.com/office/drawing/2014/main" id="{1B7C7F40-0050-4FE0-BAFA-478E75293753}"/>
+                <a16:creationId xmlns:a16="http://schemas.microsoft.com/office/drawing/2014/main" id="{D0EFA503-7EFA-44F0-B544-B9BB3E3FCC71}"/>
               </a:ext>
             </a:extLst>
           </p:cNvPr>
@@ -14319,7 +14319,7 @@
           <p:cNvPr id="53" name="J-B-2">
             <a:extLst xmlns:a="http://schemas.openxmlformats.org/drawingml/2006/main">
               <a:ext uri="{FF2B5EF4-FFF2-40B4-BE49-F238E27FC236}">
-                <a16:creationId xmlns:a16="http://schemas.microsoft.com/office/drawing/2014/main" id="{746CA3F9-9CB9-456B-9E89-68441D3647B0}"/>
+                <a16:creationId xmlns:a16="http://schemas.microsoft.com/office/drawing/2014/main" id="{285E9D56-ACDA-45B6-908D-335575A61E68}"/>
               </a:ext>
             </a:extLst>
           </p:cNvPr>
@@ -14352,7 +14352,7 @@
           <p:cNvPr id="54" name="J-B-accent-2">
             <a:extLst xmlns:a="http://schemas.openxmlformats.org/drawingml/2006/main">
               <a:ext uri="{FF2B5EF4-FFF2-40B4-BE49-F238E27FC236}">
-                <a16:creationId xmlns:a16="http://schemas.microsoft.com/office/drawing/2014/main" id="{4A88E218-B76C-480D-989C-C16F88438269}"/>
+                <a16:creationId xmlns:a16="http://schemas.microsoft.com/office/drawing/2014/main" id="{98215B8C-3EF1-43F8-87B6-56A507192997}"/>
               </a:ext>
             </a:extLst>
           </p:cNvPr>
@@ -14383,7 +14383,7 @@
           <p:cNvPr id="55" name="J-B-3">
             <a:extLst xmlns:a="http://schemas.openxmlformats.org/drawingml/2006/main">
               <a:ext uri="{FF2B5EF4-FFF2-40B4-BE49-F238E27FC236}">
-                <a16:creationId xmlns:a16="http://schemas.microsoft.com/office/drawing/2014/main" id="{A9C6CBAC-CDA9-468E-89BA-6502E96CDDC7}"/>
+                <a16:creationId xmlns:a16="http://schemas.microsoft.com/office/drawing/2014/main" id="{263AC7DA-7687-4C75-940C-50CF6D9A20B5}"/>
               </a:ext>
             </a:extLst>
           </p:cNvPr>
@@ -14416,7 +14416,7 @@
           <p:cNvPr id="56" name="J-B-4">
             <a:extLst xmlns:a="http://schemas.openxmlformats.org/drawingml/2006/main">
               <a:ext uri="{FF2B5EF4-FFF2-40B4-BE49-F238E27FC236}">
-                <a16:creationId xmlns:a16="http://schemas.microsoft.com/office/drawing/2014/main" id="{9CBFCE54-B08E-4D61-8484-8144858A8194}"/>
+                <a16:creationId xmlns:a16="http://schemas.microsoft.com/office/drawing/2014/main" id="{14A2D426-3AEB-437B-BEF9-35EE86048EBD}"/>
               </a:ext>
             </a:extLst>
           </p:cNvPr>
@@ -14449,7 +14449,7 @@
           <p:cNvPr id="57" name="J-B-5">
             <a:extLst xmlns:a="http://schemas.openxmlformats.org/drawingml/2006/main">
               <a:ext uri="{FF2B5EF4-FFF2-40B4-BE49-F238E27FC236}">
-                <a16:creationId xmlns:a16="http://schemas.microsoft.com/office/drawing/2014/main" id="{7FAA362B-A0DE-423D-8241-E3EC9564B1D0}"/>
+                <a16:creationId xmlns:a16="http://schemas.microsoft.com/office/drawing/2014/main" id="{476E61D8-22C2-4085-BB59-55CFD05E8852}"/>
               </a:ext>
             </a:extLst>
           </p:cNvPr>
@@ -14482,7 +14482,7 @@
           <p:cNvPr id="58" name="J-B-6">
             <a:extLst xmlns:a="http://schemas.openxmlformats.org/drawingml/2006/main">
               <a:ext uri="{FF2B5EF4-FFF2-40B4-BE49-F238E27FC236}">
-                <a16:creationId xmlns:a16="http://schemas.microsoft.com/office/drawing/2014/main" id="{4B71BD79-D8D5-421F-91DC-A6078A11B584}"/>
+                <a16:creationId xmlns:a16="http://schemas.microsoft.com/office/drawing/2014/main" id="{45A5013C-4CC2-4BF4-ACC9-A988F7510387}"/>
               </a:ext>
             </a:extLst>
           </p:cNvPr>
@@ -14515,7 +14515,7 @@
           <p:cNvPr id="59" name="J-B-7">
             <a:extLst xmlns:a="http://schemas.openxmlformats.org/drawingml/2006/main">
               <a:ext uri="{FF2B5EF4-FFF2-40B4-BE49-F238E27FC236}">
-                <a16:creationId xmlns:a16="http://schemas.microsoft.com/office/drawing/2014/main" id="{3E813530-F613-4E2E-9A35-8ABDFC635EB2}"/>
+                <a16:creationId xmlns:a16="http://schemas.microsoft.com/office/drawing/2014/main" id="{9808F767-0C51-4CA6-A1FB-4F05C8F31186}"/>
               </a:ext>
             </a:extLst>
           </p:cNvPr>
@@ -14548,7 +14548,7 @@
           <p:cNvPr id="60" name="J-C-0">
             <a:extLst xmlns:a="http://schemas.openxmlformats.org/drawingml/2006/main">
               <a:ext uri="{FF2B5EF4-FFF2-40B4-BE49-F238E27FC236}">
-                <a16:creationId xmlns:a16="http://schemas.microsoft.com/office/drawing/2014/main" id="{6DF45FF0-3FA4-464B-9D6F-81A99B7FD8D5}"/>
+                <a16:creationId xmlns:a16="http://schemas.microsoft.com/office/drawing/2014/main" id="{9811574C-F389-4630-97FD-CB68E256D7C6}"/>
               </a:ext>
             </a:extLst>
           </p:cNvPr>
@@ -14581,7 +14581,7 @@
           <p:cNvPr id="61" name="J-C-1">
             <a:extLst xmlns:a="http://schemas.openxmlformats.org/drawingml/2006/main">
               <a:ext uri="{FF2B5EF4-FFF2-40B4-BE49-F238E27FC236}">
-                <a16:creationId xmlns:a16="http://schemas.microsoft.com/office/drawing/2014/main" id="{F393EFFF-038D-424F-B746-187983BBEDE2}"/>
+                <a16:creationId xmlns:a16="http://schemas.microsoft.com/office/drawing/2014/main" id="{2D06B800-C09D-4BAA-919B-C949A2E601AB}"/>
               </a:ext>
             </a:extLst>
           </p:cNvPr>
@@ -14614,7 +14614,7 @@
           <p:cNvPr id="62" name="J-C-2">
             <a:extLst xmlns:a="http://schemas.openxmlformats.org/drawingml/2006/main">
               <a:ext uri="{FF2B5EF4-FFF2-40B4-BE49-F238E27FC236}">
-                <a16:creationId xmlns:a16="http://schemas.microsoft.com/office/drawing/2014/main" id="{909DC3EB-A001-4C27-ACEA-14D06BE31A93}"/>
+                <a16:creationId xmlns:a16="http://schemas.microsoft.com/office/drawing/2014/main" id="{D7FFB915-54FB-4C49-BFD2-8C20B648B78A}"/>
               </a:ext>
             </a:extLst>
           </p:cNvPr>
@@ -14647,7 +14647,7 @@
           <p:cNvPr id="63" name="J-C-accent-2">
             <a:extLst xmlns:a="http://schemas.openxmlformats.org/drawingml/2006/main">
               <a:ext uri="{FF2B5EF4-FFF2-40B4-BE49-F238E27FC236}">
-                <a16:creationId xmlns:a16="http://schemas.microsoft.com/office/drawing/2014/main" id="{F7912ABD-3D8F-4215-B3B5-EC64167AAAE5}"/>
+                <a16:creationId xmlns:a16="http://schemas.microsoft.com/office/drawing/2014/main" id="{48FDE993-9C6D-4A3A-9BF2-E055C3E973B8}"/>
               </a:ext>
             </a:extLst>
           </p:cNvPr>
@@ -14678,7 +14678,7 @@
           <p:cNvPr id="64" name="J-C-3">
             <a:extLst xmlns:a="http://schemas.openxmlformats.org/drawingml/2006/main">
               <a:ext uri="{FF2B5EF4-FFF2-40B4-BE49-F238E27FC236}">
-                <a16:creationId xmlns:a16="http://schemas.microsoft.com/office/drawing/2014/main" id="{F3970F01-45B0-4331-9B55-6EC28F601F21}"/>
+                <a16:creationId xmlns:a16="http://schemas.microsoft.com/office/drawing/2014/main" id="{2CB65259-C771-423E-BA80-2427A8286F1F}"/>
               </a:ext>
             </a:extLst>
           </p:cNvPr>
@@ -14711,7 +14711,7 @@
           <p:cNvPr id="65" name="J-C-4">
             <a:extLst xmlns:a="http://schemas.openxmlformats.org/drawingml/2006/main">
               <a:ext uri="{FF2B5EF4-FFF2-40B4-BE49-F238E27FC236}">
-                <a16:creationId xmlns:a16="http://schemas.microsoft.com/office/drawing/2014/main" id="{CF432912-5D39-4084-A8F4-46CF7EAD844F}"/>
+                <a16:creationId xmlns:a16="http://schemas.microsoft.com/office/drawing/2014/main" id="{D1817AEA-62A0-4938-946C-C97E6EA7C100}"/>
               </a:ext>
             </a:extLst>
           </p:cNvPr>
@@ -14744,7 +14744,7 @@
           <p:cNvPr id="66" name="J-C-5">
             <a:extLst xmlns:a="http://schemas.openxmlformats.org/drawingml/2006/main">
               <a:ext uri="{FF2B5EF4-FFF2-40B4-BE49-F238E27FC236}">
-                <a16:creationId xmlns:a16="http://schemas.microsoft.com/office/drawing/2014/main" id="{0918E040-F138-4683-87CA-9ACC0CB40256}"/>
+                <a16:creationId xmlns:a16="http://schemas.microsoft.com/office/drawing/2014/main" id="{C5168E94-85FB-48BB-A497-02D6C8FB02DD}"/>
               </a:ext>
             </a:extLst>
           </p:cNvPr>
@@ -14777,7 +14777,7 @@
           <p:cNvPr id="67" name="J-C-6">
             <a:extLst xmlns:a="http://schemas.openxmlformats.org/drawingml/2006/main">
               <a:ext uri="{FF2B5EF4-FFF2-40B4-BE49-F238E27FC236}">
-                <a16:creationId xmlns:a16="http://schemas.microsoft.com/office/drawing/2014/main" id="{EC74B98B-B07A-458F-9732-6758330375A3}"/>
+                <a16:creationId xmlns:a16="http://schemas.microsoft.com/office/drawing/2014/main" id="{787E264C-C6DA-432E-B96A-FCF07348EC2B}"/>
               </a:ext>
             </a:extLst>
           </p:cNvPr>
@@ -14810,7 +14810,7 @@
           <p:cNvPr id="68" name="J-C-7">
             <a:extLst xmlns:a="http://schemas.openxmlformats.org/drawingml/2006/main">
               <a:ext uri="{FF2B5EF4-FFF2-40B4-BE49-F238E27FC236}">
-                <a16:creationId xmlns:a16="http://schemas.microsoft.com/office/drawing/2014/main" id="{6992A1C2-B84F-4764-A3A5-73B7E26E91AF}"/>
+                <a16:creationId xmlns:a16="http://schemas.microsoft.com/office/drawing/2014/main" id="{3672364C-BDB6-4822-B547-A3FCC02E9D7E}"/>
               </a:ext>
             </a:extLst>
           </p:cNvPr>
@@ -14843,7 +14843,7 @@
           <p:cNvPr id="69" name="J-shared">
             <a:extLst xmlns:a="http://schemas.openxmlformats.org/drawingml/2006/main">
               <a:ext uri="{FF2B5EF4-FFF2-40B4-BE49-F238E27FC236}">
-                <a16:creationId xmlns:a16="http://schemas.microsoft.com/office/drawing/2014/main" id="{EF834BA8-02CE-4B33-9497-972CFCFEFD44}"/>
+                <a16:creationId xmlns:a16="http://schemas.microsoft.com/office/drawing/2014/main" id="{F9D2309D-607B-4B58-9B93-42428470E188}"/>
               </a:ext>
             </a:extLst>
           </p:cNvPr>
@@ -14874,7 +14874,7 @@
           <p:cNvPr id="70" name="J-note">
             <a:extLst xmlns:a="http://schemas.openxmlformats.org/drawingml/2006/main">
               <a:ext uri="{FF2B5EF4-FFF2-40B4-BE49-F238E27FC236}">
-                <a16:creationId xmlns:a16="http://schemas.microsoft.com/office/drawing/2014/main" id="{E042CE23-2C9D-44B5-8DDB-0CF331467CFD}"/>
+                <a16:creationId xmlns:a16="http://schemas.microsoft.com/office/drawing/2014/main" id="{A5A85D84-E965-46BE-BC52-813C6E947FE1}"/>
               </a:ext>
             </a:extLst>
           </p:cNvPr>
@@ -14963,7 +14963,7 @@
           <p:cNvPr id="71" name="panel-L">
             <a:extLst xmlns:a="http://schemas.openxmlformats.org/drawingml/2006/main">
               <a:ext uri="{FF2B5EF4-FFF2-40B4-BE49-F238E27FC236}">
-                <a16:creationId xmlns:a16="http://schemas.microsoft.com/office/drawing/2014/main" id="{20911440-FB81-4151-9DEB-A4052F59782A}"/>
+                <a16:creationId xmlns:a16="http://schemas.microsoft.com/office/drawing/2014/main" id="{06A42BD0-8B74-4A23-A3D3-CAB53C53F3BA}"/>
               </a:ext>
             </a:extLst>
           </p:cNvPr>
@@ -14998,7 +14998,7 @@
           <p:cNvPr id="72" name="L-title">
             <a:extLst xmlns:a="http://schemas.openxmlformats.org/drawingml/2006/main">
               <a:ext uri="{FF2B5EF4-FFF2-40B4-BE49-F238E27FC236}">
-                <a16:creationId xmlns:a16="http://schemas.microsoft.com/office/drawing/2014/main" id="{F8457D15-DF0A-4229-805F-CC9DE597DC28}"/>
+                <a16:creationId xmlns:a16="http://schemas.microsoft.com/office/drawing/2014/main" id="{4F948261-5837-4591-9A36-769375D091C7}"/>
               </a:ext>
             </a:extLst>
           </p:cNvPr>
@@ -15071,7 +15071,7 @@
           <p:cNvPr id="73" name="L-formula">
             <a:extLst xmlns:a="http://schemas.openxmlformats.org/drawingml/2006/main">
               <a:ext uri="{FF2B5EF4-FFF2-40B4-BE49-F238E27FC236}">
-                <a16:creationId xmlns:a16="http://schemas.microsoft.com/office/drawing/2014/main" id="{11A5F665-C028-4F98-BA80-4328DA9D946C}"/>
+                <a16:creationId xmlns:a16="http://schemas.microsoft.com/office/drawing/2014/main" id="{9DCFFBBC-0AAD-417B-AC35-DA4965D82F9C}"/>
               </a:ext>
             </a:extLst>
           </p:cNvPr>
@@ -15188,7 +15188,7 @@
           <p:cNvPr id="74" name="L-B-0">
             <a:extLst xmlns:a="http://schemas.openxmlformats.org/drawingml/2006/main">
               <a:ext uri="{FF2B5EF4-FFF2-40B4-BE49-F238E27FC236}">
-                <a16:creationId xmlns:a16="http://schemas.microsoft.com/office/drawing/2014/main" id="{8622616D-E047-4548-9466-F96EACC3BA8E}"/>
+                <a16:creationId xmlns:a16="http://schemas.microsoft.com/office/drawing/2014/main" id="{A56FBAC8-AE57-4962-9C1E-5DD076E33C79}"/>
               </a:ext>
             </a:extLst>
           </p:cNvPr>
@@ -15221,7 +15221,7 @@
           <p:cNvPr id="75" name="L-B-1">
             <a:extLst xmlns:a="http://schemas.openxmlformats.org/drawingml/2006/main">
               <a:ext uri="{FF2B5EF4-FFF2-40B4-BE49-F238E27FC236}">
-                <a16:creationId xmlns:a16="http://schemas.microsoft.com/office/drawing/2014/main" id="{5E620D86-2E21-45D1-813C-5BE6F4A60319}"/>
+                <a16:creationId xmlns:a16="http://schemas.microsoft.com/office/drawing/2014/main" id="{EA242798-F506-479C-96FF-9666B11C1AC8}"/>
               </a:ext>
             </a:extLst>
           </p:cNvPr>
@@ -15254,7 +15254,7 @@
           <p:cNvPr id="76" name="L-B-2">
             <a:extLst xmlns:a="http://schemas.openxmlformats.org/drawingml/2006/main">
               <a:ext uri="{FF2B5EF4-FFF2-40B4-BE49-F238E27FC236}">
-                <a16:creationId xmlns:a16="http://schemas.microsoft.com/office/drawing/2014/main" id="{F7DE2C04-DF4F-4D4E-9AE1-68D0C1D6E2B3}"/>
+                <a16:creationId xmlns:a16="http://schemas.microsoft.com/office/drawing/2014/main" id="{12BD5985-4BDA-4004-8F8A-07BF66851054}"/>
               </a:ext>
             </a:extLst>
           </p:cNvPr>
@@ -15287,7 +15287,7 @@
           <p:cNvPr id="77" name="L-B-accent-2">
             <a:extLst xmlns:a="http://schemas.openxmlformats.org/drawingml/2006/main">
               <a:ext uri="{FF2B5EF4-FFF2-40B4-BE49-F238E27FC236}">
-                <a16:creationId xmlns:a16="http://schemas.microsoft.com/office/drawing/2014/main" id="{04E6AC3F-EE61-4090-A35C-CA33CA9741E8}"/>
+                <a16:creationId xmlns:a16="http://schemas.microsoft.com/office/drawing/2014/main" id="{14A50552-B044-4205-BA38-C83DE7C2DFE4}"/>
               </a:ext>
             </a:extLst>
           </p:cNvPr>
@@ -15318,7 +15318,7 @@
           <p:cNvPr id="78" name="L-B-3">
             <a:extLst xmlns:a="http://schemas.openxmlformats.org/drawingml/2006/main">
               <a:ext uri="{FF2B5EF4-FFF2-40B4-BE49-F238E27FC236}">
-                <a16:creationId xmlns:a16="http://schemas.microsoft.com/office/drawing/2014/main" id="{03D25179-14E7-407E-8DE7-67BF679C2593}"/>
+                <a16:creationId xmlns:a16="http://schemas.microsoft.com/office/drawing/2014/main" id="{DCAA38B2-118C-4C21-8561-D4CDBDFC2AF2}"/>
               </a:ext>
             </a:extLst>
           </p:cNvPr>
@@ -15351,7 +15351,7 @@
           <p:cNvPr id="79" name="L-B-4">
             <a:extLst xmlns:a="http://schemas.openxmlformats.org/drawingml/2006/main">
               <a:ext uri="{FF2B5EF4-FFF2-40B4-BE49-F238E27FC236}">
-                <a16:creationId xmlns:a16="http://schemas.microsoft.com/office/drawing/2014/main" id="{9FD774A8-59AD-45E2-AE83-C7F5D30DCB9E}"/>
+                <a16:creationId xmlns:a16="http://schemas.microsoft.com/office/drawing/2014/main" id="{DDBEA56A-9165-4EF2-BF8F-C954831E74C2}"/>
               </a:ext>
             </a:extLst>
           </p:cNvPr>
@@ -15384,7 +15384,7 @@
           <p:cNvPr id="80" name="L-B-5">
             <a:extLst xmlns:a="http://schemas.openxmlformats.org/drawingml/2006/main">
               <a:ext uri="{FF2B5EF4-FFF2-40B4-BE49-F238E27FC236}">
-                <a16:creationId xmlns:a16="http://schemas.microsoft.com/office/drawing/2014/main" id="{1A354642-678A-4F25-A056-65EF1E57D6A2}"/>
+                <a16:creationId xmlns:a16="http://schemas.microsoft.com/office/drawing/2014/main" id="{6FA3391C-DD64-4B54-8A2B-5E54BF7597FB}"/>
               </a:ext>
             </a:extLst>
           </p:cNvPr>
@@ -15417,7 +15417,7 @@
           <p:cNvPr id="81" name="L-B-6">
             <a:extLst xmlns:a="http://schemas.openxmlformats.org/drawingml/2006/main">
               <a:ext uri="{FF2B5EF4-FFF2-40B4-BE49-F238E27FC236}">
-                <a16:creationId xmlns:a16="http://schemas.microsoft.com/office/drawing/2014/main" id="{C7A1EFC0-6032-4248-9EBA-8A6F4E1010CE}"/>
+                <a16:creationId xmlns:a16="http://schemas.microsoft.com/office/drawing/2014/main" id="{A82C3287-C57C-4000-9CA2-22AD76C72B75}"/>
               </a:ext>
             </a:extLst>
           </p:cNvPr>
@@ -15450,7 +15450,7 @@
           <p:cNvPr id="82" name="L-B-7">
             <a:extLst xmlns:a="http://schemas.openxmlformats.org/drawingml/2006/main">
               <a:ext uri="{FF2B5EF4-FFF2-40B4-BE49-F238E27FC236}">
-                <a16:creationId xmlns:a16="http://schemas.microsoft.com/office/drawing/2014/main" id="{78A9AABE-D888-4648-8AEB-17E845409919}"/>
+                <a16:creationId xmlns:a16="http://schemas.microsoft.com/office/drawing/2014/main" id="{38518F07-9753-420B-9096-DBEBF8B2A41C}"/>
               </a:ext>
             </a:extLst>
           </p:cNvPr>
@@ -15483,7 +15483,7 @@
           <p:cNvPr id="83" name="L-C-0">
             <a:extLst xmlns:a="http://schemas.openxmlformats.org/drawingml/2006/main">
               <a:ext uri="{FF2B5EF4-FFF2-40B4-BE49-F238E27FC236}">
-                <a16:creationId xmlns:a16="http://schemas.microsoft.com/office/drawing/2014/main" id="{A4A74759-23B6-4EEE-9F12-F99F6A6B4277}"/>
+                <a16:creationId xmlns:a16="http://schemas.microsoft.com/office/drawing/2014/main" id="{42D73931-3EFB-4FF1-BC4A-2CAE033A53FF}"/>
               </a:ext>
             </a:extLst>
           </p:cNvPr>
@@ -15516,7 +15516,7 @@
           <p:cNvPr id="84" name="L-C-1">
             <a:extLst xmlns:a="http://schemas.openxmlformats.org/drawingml/2006/main">
               <a:ext uri="{FF2B5EF4-FFF2-40B4-BE49-F238E27FC236}">
-                <a16:creationId xmlns:a16="http://schemas.microsoft.com/office/drawing/2014/main" id="{2F175EE6-F9A8-4ADF-BF97-59D045F445AB}"/>
+                <a16:creationId xmlns:a16="http://schemas.microsoft.com/office/drawing/2014/main" id="{B2AFC24E-AA27-4FDD-85F0-0D455858C4E7}"/>
               </a:ext>
             </a:extLst>
           </p:cNvPr>
@@ -15549,7 +15549,7 @@
           <p:cNvPr id="85" name="L-C-2">
             <a:extLst xmlns:a="http://schemas.openxmlformats.org/drawingml/2006/main">
               <a:ext uri="{FF2B5EF4-FFF2-40B4-BE49-F238E27FC236}">
-                <a16:creationId xmlns:a16="http://schemas.microsoft.com/office/drawing/2014/main" id="{751D6A9D-7D89-48B0-9B03-37A019A5AEC0}"/>
+                <a16:creationId xmlns:a16="http://schemas.microsoft.com/office/drawing/2014/main" id="{6F2CBBFE-3E86-4F5A-915E-980B145E023F}"/>
               </a:ext>
             </a:extLst>
           </p:cNvPr>
@@ -15582,7 +15582,7 @@
           <p:cNvPr id="86" name="L-C-3">
             <a:extLst xmlns:a="http://schemas.openxmlformats.org/drawingml/2006/main">
               <a:ext uri="{FF2B5EF4-FFF2-40B4-BE49-F238E27FC236}">
-                <a16:creationId xmlns:a16="http://schemas.microsoft.com/office/drawing/2014/main" id="{BC88D085-62A5-4C22-B3DE-DFFFB440A609}"/>
+                <a16:creationId xmlns:a16="http://schemas.microsoft.com/office/drawing/2014/main" id="{E388E12F-0539-447F-9858-4E50E200F25C}"/>
               </a:ext>
             </a:extLst>
           </p:cNvPr>
@@ -15615,7 +15615,7 @@
           <p:cNvPr id="87" name="L-C-4">
             <a:extLst xmlns:a="http://schemas.openxmlformats.org/drawingml/2006/main">
               <a:ext uri="{FF2B5EF4-FFF2-40B4-BE49-F238E27FC236}">
-                <a16:creationId xmlns:a16="http://schemas.microsoft.com/office/drawing/2014/main" id="{C3DEC694-AAEE-4FE8-91A1-86E7E65E07A7}"/>
+                <a16:creationId xmlns:a16="http://schemas.microsoft.com/office/drawing/2014/main" id="{D77C657B-4434-4C20-9DDD-73A15283A97C}"/>
               </a:ext>
             </a:extLst>
           </p:cNvPr>
@@ -15648,7 +15648,7 @@
           <p:cNvPr id="88" name="L-C-5">
             <a:extLst xmlns:a="http://schemas.openxmlformats.org/drawingml/2006/main">
               <a:ext uri="{FF2B5EF4-FFF2-40B4-BE49-F238E27FC236}">
-                <a16:creationId xmlns:a16="http://schemas.microsoft.com/office/drawing/2014/main" id="{5E9C6D88-5660-418C-9C91-788FB8A51362}"/>
+                <a16:creationId xmlns:a16="http://schemas.microsoft.com/office/drawing/2014/main" id="{D81E753C-2FE7-4C95-BFF5-40E1A6BBBE7C}"/>
               </a:ext>
             </a:extLst>
           </p:cNvPr>
@@ -15681,7 +15681,7 @@
           <p:cNvPr id="89" name="L-C-accent-5">
             <a:extLst xmlns:a="http://schemas.openxmlformats.org/drawingml/2006/main">
               <a:ext uri="{FF2B5EF4-FFF2-40B4-BE49-F238E27FC236}">
-                <a16:creationId xmlns:a16="http://schemas.microsoft.com/office/drawing/2014/main" id="{B2E43853-0E0D-445F-866A-E994C7C20DAB}"/>
+                <a16:creationId xmlns:a16="http://schemas.microsoft.com/office/drawing/2014/main" id="{7EBF9061-297F-42F9-8AF2-0556B32A5D63}"/>
               </a:ext>
             </a:extLst>
           </p:cNvPr>
@@ -15712,7 +15712,7 @@
           <p:cNvPr id="90" name="L-C-6">
             <a:extLst xmlns:a="http://schemas.openxmlformats.org/drawingml/2006/main">
               <a:ext uri="{FF2B5EF4-FFF2-40B4-BE49-F238E27FC236}">
-                <a16:creationId xmlns:a16="http://schemas.microsoft.com/office/drawing/2014/main" id="{A31333E4-82ED-4CCB-9818-FC267EF153E0}"/>
+                <a16:creationId xmlns:a16="http://schemas.microsoft.com/office/drawing/2014/main" id="{4B7405A1-E063-43CB-BBA4-8E7EBFBFC21A}"/>
               </a:ext>
             </a:extLst>
           </p:cNvPr>
@@ -15745,7 +15745,7 @@
           <p:cNvPr id="91" name="L-C-7">
             <a:extLst xmlns:a="http://schemas.openxmlformats.org/drawingml/2006/main">
               <a:ext uri="{FF2B5EF4-FFF2-40B4-BE49-F238E27FC236}">
-                <a16:creationId xmlns:a16="http://schemas.microsoft.com/office/drawing/2014/main" id="{8C6B3E0E-DC34-4072-A947-C971CF4A4EC6}"/>
+                <a16:creationId xmlns:a16="http://schemas.microsoft.com/office/drawing/2014/main" id="{A47F105C-411C-4373-A13B-5085B965BABC}"/>
               </a:ext>
             </a:extLst>
           </p:cNvPr>
@@ -15778,7 +15778,7 @@
           <p:cNvPr id="92" name="L-own-B">
             <a:extLst xmlns:a="http://schemas.openxmlformats.org/drawingml/2006/main">
               <a:ext uri="{FF2B5EF4-FFF2-40B4-BE49-F238E27FC236}">
-                <a16:creationId xmlns:a16="http://schemas.microsoft.com/office/drawing/2014/main" id="{A6863A70-E195-4A97-BD80-5B2ECEF62D69}"/>
+                <a16:creationId xmlns:a16="http://schemas.microsoft.com/office/drawing/2014/main" id="{FAEC49CA-6DE7-4259-8466-8597F3800AB9}"/>
               </a:ext>
             </a:extLst>
           </p:cNvPr>
@@ -15809,7 +15809,7 @@
           <p:cNvPr id="93" name="L-own-C">
             <a:extLst xmlns:a="http://schemas.openxmlformats.org/drawingml/2006/main">
               <a:ext uri="{FF2B5EF4-FFF2-40B4-BE49-F238E27FC236}">
-                <a16:creationId xmlns:a16="http://schemas.microsoft.com/office/drawing/2014/main" id="{CA354246-6421-48BE-91CE-1337BF461B5E}"/>
+                <a16:creationId xmlns:a16="http://schemas.microsoft.com/office/drawing/2014/main" id="{E53E0098-E7CE-4278-A39D-FD1379FD623C}"/>
               </a:ext>
             </a:extLst>
           </p:cNvPr>
@@ -15840,7 +15840,7 @@
           <p:cNvPr id="94" name="L-note">
             <a:extLst xmlns:a="http://schemas.openxmlformats.org/drawingml/2006/main">
               <a:ext uri="{FF2B5EF4-FFF2-40B4-BE49-F238E27FC236}">
-                <a16:creationId xmlns:a16="http://schemas.microsoft.com/office/drawing/2014/main" id="{A29E1BD5-A882-4DB0-BFB9-1D8737BCF793}"/>
+                <a16:creationId xmlns:a16="http://schemas.microsoft.com/office/drawing/2014/main" id="{A8B1C63C-9AAA-4BAA-898B-0BE5E71C6B10}"/>
               </a:ext>
             </a:extLst>
           </p:cNvPr>
@@ -15929,7 +15929,7 @@
           <p:cNvPr id="95" name="sec-c-chip">
             <a:extLst xmlns:a="http://schemas.openxmlformats.org/drawingml/2006/main">
               <a:ext uri="{FF2B5EF4-FFF2-40B4-BE49-F238E27FC236}">
-                <a16:creationId xmlns:a16="http://schemas.microsoft.com/office/drawing/2014/main" id="{EA9F68A0-2A3F-4A91-B395-33988AD5064C}"/>
+                <a16:creationId xmlns:a16="http://schemas.microsoft.com/office/drawing/2014/main" id="{99B99657-870F-49D2-B7A4-B72EBF377636}"/>
               </a:ext>
             </a:extLst>
           </p:cNvPr>
@@ -15964,7 +15964,7 @@
           <p:cNvPr id="96" name="sec-c-chip-text">
             <a:extLst xmlns:a="http://schemas.openxmlformats.org/drawingml/2006/main">
               <a:ext uri="{FF2B5EF4-FFF2-40B4-BE49-F238E27FC236}">
-                <a16:creationId xmlns:a16="http://schemas.microsoft.com/office/drawing/2014/main" id="{CF551D8A-12D7-42FC-837F-3A526D0FED24}"/>
+                <a16:creationId xmlns:a16="http://schemas.microsoft.com/office/drawing/2014/main" id="{7A820CF2-6360-4361-9ACE-267DB4100772}"/>
               </a:ext>
             </a:extLst>
           </p:cNvPr>
@@ -16026,7 +16026,7 @@
           <p:cNvPr id="97" name="sec-c">
             <a:extLst xmlns:a="http://schemas.openxmlformats.org/drawingml/2006/main">
               <a:ext uri="{FF2B5EF4-FFF2-40B4-BE49-F238E27FC236}">
-                <a16:creationId xmlns:a16="http://schemas.microsoft.com/office/drawing/2014/main" id="{E99C1A86-DDAE-4E92-B0EE-0BE7082153DD}"/>
+                <a16:creationId xmlns:a16="http://schemas.microsoft.com/office/drawing/2014/main" id="{F294EEA9-76D0-4BFF-8DAF-258D8D4A81D3}"/>
               </a:ext>
             </a:extLst>
           </p:cNvPr>
@@ -16088,7 +16088,7 @@
           <p:cNvPr id="98" name="G-formula">
             <a:extLst xmlns:a="http://schemas.openxmlformats.org/drawingml/2006/main">
               <a:ext uri="{FF2B5EF4-FFF2-40B4-BE49-F238E27FC236}">
-                <a16:creationId xmlns:a16="http://schemas.microsoft.com/office/drawing/2014/main" id="{C0DAC5E3-4B10-401E-B372-5DF3B5456193}"/>
+                <a16:creationId xmlns:a16="http://schemas.microsoft.com/office/drawing/2014/main" id="{5A994E44-F79C-4A92-949B-B11C77477F5B}"/>
               </a:ext>
             </a:extLst>
           </p:cNvPr>
@@ -16271,7 +16271,7 @@
           <p:cNvPr id="99" name="G-why">
             <a:extLst xmlns:a="http://schemas.openxmlformats.org/drawingml/2006/main">
               <a:ext uri="{FF2B5EF4-FFF2-40B4-BE49-F238E27FC236}">
-                <a16:creationId xmlns:a16="http://schemas.microsoft.com/office/drawing/2014/main" id="{9ED06040-2F88-42D6-925F-1676398E405D}"/>
+                <a16:creationId xmlns:a16="http://schemas.microsoft.com/office/drawing/2014/main" id="{45976B63-CE29-4AD0-8A6D-EF3973ADFFA3}"/>
               </a:ext>
             </a:extLst>
           </p:cNvPr>
@@ -16387,7 +16387,7 @@
           <p:cNvPr id="100" name="G-caveat">
             <a:extLst xmlns:a="http://schemas.openxmlformats.org/drawingml/2006/main">
               <a:ext uri="{FF2B5EF4-FFF2-40B4-BE49-F238E27FC236}">
-                <a16:creationId xmlns:a16="http://schemas.microsoft.com/office/drawing/2014/main" id="{B3CFADD1-8DE1-41B1-B110-8D3669469992}"/>
+                <a16:creationId xmlns:a16="http://schemas.microsoft.com/office/drawing/2014/main" id="{14687082-CAE2-4512-927F-CB55039D119F}"/>
               </a:ext>
             </a:extLst>
           </p:cNvPr>
@@ -16422,7 +16422,7 @@
           <p:cNvPr id="101" name="G-caveat-text">
             <a:extLst xmlns:a="http://schemas.openxmlformats.org/drawingml/2006/main">
               <a:ext uri="{FF2B5EF4-FFF2-40B4-BE49-F238E27FC236}">
-                <a16:creationId xmlns:a16="http://schemas.microsoft.com/office/drawing/2014/main" id="{D7934ABA-E747-4BC5-B75D-8B87819B13C7}"/>
+                <a16:creationId xmlns:a16="http://schemas.microsoft.com/office/drawing/2014/main" id="{D4CA29A5-0D35-4A97-84A9-36A31AB71ED7}"/>
               </a:ext>
             </a:extLst>
           </p:cNvPr>
@@ -16493,7 +16493,7 @@
     </p:spTree>
     <p:extLst>
       <p:ext uri="{BB962C8B-B14F-4D97-AF65-F5344CB8AC3E}">
-        <p14:creationId xmlns:p14="http://schemas.microsoft.com/office/powerpoint/2010/main" val="455121718"/>
+        <p14:creationId xmlns:p14="http://schemas.microsoft.com/office/powerpoint/2010/main" val="1764723556"/>
       </p:ext>
     </p:extLst>
   </p:cSld>
@@ -16524,7 +16524,7 @@
           <p:cNvPr id="95" name="band-a">
             <a:extLst xmlns:a="http://schemas.openxmlformats.org/drawingml/2006/main">
               <a:ext uri="{FF2B5EF4-FFF2-40B4-BE49-F238E27FC236}">
-                <a16:creationId xmlns:a16="http://schemas.microsoft.com/office/drawing/2014/main" id="{D3E91EAC-F984-431A-8CBC-58B5E9E0840A}"/>
+                <a16:creationId xmlns:a16="http://schemas.microsoft.com/office/drawing/2014/main" id="{24114651-C80C-47AE-94A0-3832A0529947}"/>
               </a:ext>
             </a:extLst>
           </p:cNvPr>
@@ -16555,7 +16555,7 @@
           <p:cNvPr id="2" name="band-b">
             <a:extLst xmlns:a="http://schemas.openxmlformats.org/drawingml/2006/main">
               <a:ext uri="{FF2B5EF4-FFF2-40B4-BE49-F238E27FC236}">
-                <a16:creationId xmlns:a16="http://schemas.microsoft.com/office/drawing/2014/main" id="{D8111A49-D890-4149-9A36-C242A480AAF7}"/>
+                <a16:creationId xmlns:a16="http://schemas.microsoft.com/office/drawing/2014/main" id="{2A0EBC25-15B5-465F-A46B-D5C8830B65C0}"/>
               </a:ext>
             </a:extLst>
           </p:cNvPr>
@@ -16586,7 +16586,7 @@
           <p:cNvPr id="3" name="band-c">
             <a:extLst xmlns:a="http://schemas.openxmlformats.org/drawingml/2006/main">
               <a:ext uri="{FF2B5EF4-FFF2-40B4-BE49-F238E27FC236}">
-                <a16:creationId xmlns:a16="http://schemas.microsoft.com/office/drawing/2014/main" id="{2E20FB14-C327-49FE-BFD9-147FDD74BF04}"/>
+                <a16:creationId xmlns:a16="http://schemas.microsoft.com/office/drawing/2014/main" id="{87FE1C18-F092-48FD-9D30-9BC6908DF29C}"/>
               </a:ext>
             </a:extLst>
           </p:cNvPr>
@@ -16617,7 +16617,7 @@
           <p:cNvPr id="4" name="sec-a-chip">
             <a:extLst xmlns:a="http://schemas.openxmlformats.org/drawingml/2006/main">
               <a:ext uri="{FF2B5EF4-FFF2-40B4-BE49-F238E27FC236}">
-                <a16:creationId xmlns:a16="http://schemas.microsoft.com/office/drawing/2014/main" id="{FCC90874-CBD4-4D40-99E5-7FB41EBBD804}"/>
+                <a16:creationId xmlns:a16="http://schemas.microsoft.com/office/drawing/2014/main" id="{64D9A8D4-02E0-4385-88F3-D8B9F5F7CA30}"/>
               </a:ext>
             </a:extLst>
           </p:cNvPr>
@@ -16652,7 +16652,7 @@
           <p:cNvPr id="5" name="sec-a-chip-text">
             <a:extLst xmlns:a="http://schemas.openxmlformats.org/drawingml/2006/main">
               <a:ext uri="{FF2B5EF4-FFF2-40B4-BE49-F238E27FC236}">
-                <a16:creationId xmlns:a16="http://schemas.microsoft.com/office/drawing/2014/main" id="{109CE772-5A91-48EE-BE3F-9731CC21CA76}"/>
+                <a16:creationId xmlns:a16="http://schemas.microsoft.com/office/drawing/2014/main" id="{9C8F22B6-A2CA-4650-897A-7E673FB0EA50}"/>
               </a:ext>
             </a:extLst>
           </p:cNvPr>
@@ -16714,7 +16714,7 @@
           <p:cNvPr id="6" name="sec-a">
             <a:extLst xmlns:a="http://schemas.openxmlformats.org/drawingml/2006/main">
               <a:ext uri="{FF2B5EF4-FFF2-40B4-BE49-F238E27FC236}">
-                <a16:creationId xmlns:a16="http://schemas.microsoft.com/office/drawing/2014/main" id="{A0A57834-5966-4BF0-82FB-0C604B09C4DD}"/>
+                <a16:creationId xmlns:a16="http://schemas.microsoft.com/office/drawing/2014/main" id="{0CF07C27-206A-4D49-A20C-5A4F3916D5F6}"/>
               </a:ext>
             </a:extLst>
           </p:cNvPr>
@@ -16776,7 +16776,7 @@
           <p:cNvPr id="7" name="panel-A1">
             <a:extLst xmlns:a="http://schemas.openxmlformats.org/drawingml/2006/main">
               <a:ext uri="{FF2B5EF4-FFF2-40B4-BE49-F238E27FC236}">
-                <a16:creationId xmlns:a16="http://schemas.microsoft.com/office/drawing/2014/main" id="{617A870E-6963-4364-945C-72718E1A8582}"/>
+                <a16:creationId xmlns:a16="http://schemas.microsoft.com/office/drawing/2014/main" id="{7BA50A27-79EC-4301-BCA1-3A81B69F036B}"/>
               </a:ext>
             </a:extLst>
           </p:cNvPr>
@@ -16811,7 +16811,7 @@
           <p:cNvPr id="8" name="panel-A1-name">
             <a:extLst xmlns:a="http://schemas.openxmlformats.org/drawingml/2006/main">
               <a:ext uri="{FF2B5EF4-FFF2-40B4-BE49-F238E27FC236}">
-                <a16:creationId xmlns:a16="http://schemas.microsoft.com/office/drawing/2014/main" id="{B50ED41B-A9C2-438A-B992-9DBFBE921269}"/>
+                <a16:creationId xmlns:a16="http://schemas.microsoft.com/office/drawing/2014/main" id="{52EF1312-96E0-43E7-8972-6712914EDF9B}"/>
               </a:ext>
             </a:extLst>
           </p:cNvPr>
@@ -16846,7 +16846,7 @@
           <p:cNvPr id="9" name="panel-A1-name-text">
             <a:extLst xmlns:a="http://schemas.openxmlformats.org/drawingml/2006/main">
               <a:ext uri="{FF2B5EF4-FFF2-40B4-BE49-F238E27FC236}">
-                <a16:creationId xmlns:a16="http://schemas.microsoft.com/office/drawing/2014/main" id="{DFF33360-D73E-4796-BFC8-FB63F9F48715}"/>
+                <a16:creationId xmlns:a16="http://schemas.microsoft.com/office/drawing/2014/main" id="{5A5D2BB2-48BC-4F38-ACCF-75B7F46BCC0E}"/>
               </a:ext>
             </a:extLst>
           </p:cNvPr>
@@ -16908,7 +16908,7 @@
           <p:cNvPr id="10" name="panel-A1-sub">
             <a:extLst xmlns:a="http://schemas.openxmlformats.org/drawingml/2006/main">
               <a:ext uri="{FF2B5EF4-FFF2-40B4-BE49-F238E27FC236}">
-                <a16:creationId xmlns:a16="http://schemas.microsoft.com/office/drawing/2014/main" id="{D7B31514-3A58-4A6E-8DA5-7F9AC1332190}"/>
+                <a16:creationId xmlns:a16="http://schemas.microsoft.com/office/drawing/2014/main" id="{671DEE9A-1BF9-446D-BE5B-6FF179D2EAFA}"/>
               </a:ext>
             </a:extLst>
           </p:cNvPr>
@@ -16970,7 +16970,7 @@
           <p:cNvPr id="11" name="slot-A1-0">
             <a:extLst xmlns:a="http://schemas.openxmlformats.org/drawingml/2006/main">
               <a:ext uri="{FF2B5EF4-FFF2-40B4-BE49-F238E27FC236}">
-                <a16:creationId xmlns:a16="http://schemas.microsoft.com/office/drawing/2014/main" id="{B7834C13-AB0A-4DD2-89EC-4074797AA5C6}"/>
+                <a16:creationId xmlns:a16="http://schemas.microsoft.com/office/drawing/2014/main" id="{A7A16CA5-05C2-4D1D-860B-242EBB427236}"/>
               </a:ext>
             </a:extLst>
           </p:cNvPr>
@@ -17005,7 +17005,7 @@
           <p:cNvPr id="12" name="slot-A1-0-t">
             <a:extLst xmlns:a="http://schemas.openxmlformats.org/drawingml/2006/main">
               <a:ext uri="{FF2B5EF4-FFF2-40B4-BE49-F238E27FC236}">
-                <a16:creationId xmlns:a16="http://schemas.microsoft.com/office/drawing/2014/main" id="{C6C87D39-582A-43F7-BC5F-C86CEBE0DE29}"/>
+                <a16:creationId xmlns:a16="http://schemas.microsoft.com/office/drawing/2014/main" id="{6FD3FACA-864C-449A-A4F0-C2825B612BA4}"/>
               </a:ext>
             </a:extLst>
           </p:cNvPr>
@@ -17089,7 +17089,7 @@
           <p:cNvPr id="13" name="slot-A1-0-w">
             <a:extLst xmlns:a="http://schemas.openxmlformats.org/drawingml/2006/main">
               <a:ext uri="{FF2B5EF4-FFF2-40B4-BE49-F238E27FC236}">
-                <a16:creationId xmlns:a16="http://schemas.microsoft.com/office/drawing/2014/main" id="{68F7B46D-527E-4259-B535-301DC76CB7E5}"/>
+                <a16:creationId xmlns:a16="http://schemas.microsoft.com/office/drawing/2014/main" id="{C2568D19-76F2-4642-AE95-C309398B6774}"/>
               </a:ext>
             </a:extLst>
           </p:cNvPr>
@@ -17151,7 +17151,7 @@
           <p:cNvPr id="14" name="slot-A1-1">
             <a:extLst xmlns:a="http://schemas.openxmlformats.org/drawingml/2006/main">
               <a:ext uri="{FF2B5EF4-FFF2-40B4-BE49-F238E27FC236}">
-                <a16:creationId xmlns:a16="http://schemas.microsoft.com/office/drawing/2014/main" id="{5BF77437-85DC-45D9-B366-F55943E63EB8}"/>
+                <a16:creationId xmlns:a16="http://schemas.microsoft.com/office/drawing/2014/main" id="{896B4EC7-8E35-4ECB-B668-809A1FC504B7}"/>
               </a:ext>
             </a:extLst>
           </p:cNvPr>
@@ -17186,7 +17186,7 @@
           <p:cNvPr id="15" name="slot-A1-1-t">
             <a:extLst xmlns:a="http://schemas.openxmlformats.org/drawingml/2006/main">
               <a:ext uri="{FF2B5EF4-FFF2-40B4-BE49-F238E27FC236}">
-                <a16:creationId xmlns:a16="http://schemas.microsoft.com/office/drawing/2014/main" id="{626DB819-F2AB-4F74-87DA-9A75CA76DE7F}"/>
+                <a16:creationId xmlns:a16="http://schemas.microsoft.com/office/drawing/2014/main" id="{720BA3BD-0327-416D-B325-344729C52045}"/>
               </a:ext>
             </a:extLst>
           </p:cNvPr>
@@ -17259,7 +17259,7 @@
           <p:cNvPr id="16" name="slot-A1-1-w">
             <a:extLst xmlns:a="http://schemas.openxmlformats.org/drawingml/2006/main">
               <a:ext uri="{FF2B5EF4-FFF2-40B4-BE49-F238E27FC236}">
-                <a16:creationId xmlns:a16="http://schemas.microsoft.com/office/drawing/2014/main" id="{AAB6F5E9-82C2-4533-8459-4D087A2AA42A}"/>
+                <a16:creationId xmlns:a16="http://schemas.microsoft.com/office/drawing/2014/main" id="{6AF548D1-ED72-4964-9265-D0A23C9A6D45}"/>
               </a:ext>
             </a:extLst>
           </p:cNvPr>
@@ -17321,7 +17321,7 @@
           <p:cNvPr id="17" name="panel-A1-note">
             <a:extLst xmlns:a="http://schemas.openxmlformats.org/drawingml/2006/main">
               <a:ext uri="{FF2B5EF4-FFF2-40B4-BE49-F238E27FC236}">
-                <a16:creationId xmlns:a16="http://schemas.microsoft.com/office/drawing/2014/main" id="{AC0A660C-F371-4B3D-85A7-56B0591E4060}"/>
+                <a16:creationId xmlns:a16="http://schemas.microsoft.com/office/drawing/2014/main" id="{F7A5AD26-877A-45A2-87C4-F1593B505110}"/>
               </a:ext>
             </a:extLst>
           </p:cNvPr>
@@ -17410,7 +17410,7 @@
           <p:cNvPr id="18" name="anchor-20">
             <a:extLst xmlns:a="http://schemas.openxmlformats.org/drawingml/2006/main">
               <a:ext uri="{FF2B5EF4-FFF2-40B4-BE49-F238E27FC236}">
-                <a16:creationId xmlns:a16="http://schemas.microsoft.com/office/drawing/2014/main" id="{F525F402-B62A-46D4-939C-E89B1A3E4475}"/>
+                <a16:creationId xmlns:a16="http://schemas.microsoft.com/office/drawing/2014/main" id="{10F38580-6850-4452-9AE6-1C40B0FBDC93}"/>
               </a:ext>
             </a:extLst>
           </p:cNvPr>
@@ -17439,7 +17439,7 @@
           <p:cNvPr id="19" name="anchor-21">
             <a:extLst xmlns:a="http://schemas.openxmlformats.org/drawingml/2006/main">
               <a:ext uri="{FF2B5EF4-FFF2-40B4-BE49-F238E27FC236}">
-                <a16:creationId xmlns:a16="http://schemas.microsoft.com/office/drawing/2014/main" id="{C9A90ADB-0E26-444E-B9F6-E87D0269E0A9}"/>
+                <a16:creationId xmlns:a16="http://schemas.microsoft.com/office/drawing/2014/main" id="{7216F51A-0460-4033-B661-8DB7369301E0}"/>
               </a:ext>
             </a:extLst>
           </p:cNvPr>
@@ -17494,7 +17494,7 @@
           <p:cNvPr id="21" name="panel-DUP">
             <a:extLst xmlns:a="http://schemas.openxmlformats.org/drawingml/2006/main">
               <a:ext uri="{FF2B5EF4-FFF2-40B4-BE49-F238E27FC236}">
-                <a16:creationId xmlns:a16="http://schemas.microsoft.com/office/drawing/2014/main" id="{F0EFE0D9-C70A-4C1B-80E4-74588A6869B1}"/>
+                <a16:creationId xmlns:a16="http://schemas.microsoft.com/office/drawing/2014/main" id="{9472DB90-3ECF-4488-8F08-A86C542B6ACE}"/>
               </a:ext>
             </a:extLst>
           </p:cNvPr>
@@ -17529,7 +17529,7 @@
           <p:cNvPr id="22" name="panel-DUP-name">
             <a:extLst xmlns:a="http://schemas.openxmlformats.org/drawingml/2006/main">
               <a:ext uri="{FF2B5EF4-FFF2-40B4-BE49-F238E27FC236}">
-                <a16:creationId xmlns:a16="http://schemas.microsoft.com/office/drawing/2014/main" id="{FCB8B676-EB12-4D98-ADFC-067D226DB247}"/>
+                <a16:creationId xmlns:a16="http://schemas.microsoft.com/office/drawing/2014/main" id="{227E6D2B-BA90-4005-9582-02DD9A3038A9}"/>
               </a:ext>
             </a:extLst>
           </p:cNvPr>
@@ -17564,7 +17564,7 @@
           <p:cNvPr id="23" name="panel-DUP-name-text">
             <a:extLst xmlns:a="http://schemas.openxmlformats.org/drawingml/2006/main">
               <a:ext uri="{FF2B5EF4-FFF2-40B4-BE49-F238E27FC236}">
-                <a16:creationId xmlns:a16="http://schemas.microsoft.com/office/drawing/2014/main" id="{FD3408F8-7C63-47D6-95F5-01FF7E4489CC}"/>
+                <a16:creationId xmlns:a16="http://schemas.microsoft.com/office/drawing/2014/main" id="{E767C496-0651-400A-A705-9FE12FDEF2B1}"/>
               </a:ext>
             </a:extLst>
           </p:cNvPr>
@@ -17626,7 +17626,7 @@
           <p:cNvPr id="24" name="panel-DUP-sub">
             <a:extLst xmlns:a="http://schemas.openxmlformats.org/drawingml/2006/main">
               <a:ext uri="{FF2B5EF4-FFF2-40B4-BE49-F238E27FC236}">
-                <a16:creationId xmlns:a16="http://schemas.microsoft.com/office/drawing/2014/main" id="{6DF612D2-AEB4-41C7-9F25-DB63062D012D}"/>
+                <a16:creationId xmlns:a16="http://schemas.microsoft.com/office/drawing/2014/main" id="{46F3E96D-294A-4FED-886C-0B71DBAC50A7}"/>
               </a:ext>
             </a:extLst>
           </p:cNvPr>
@@ -17699,7 +17699,7 @@
           <p:cNvPr id="25" name="slot-DUP-0">
             <a:extLst xmlns:a="http://schemas.openxmlformats.org/drawingml/2006/main">
               <a:ext uri="{FF2B5EF4-FFF2-40B4-BE49-F238E27FC236}">
-                <a16:creationId xmlns:a16="http://schemas.microsoft.com/office/drawing/2014/main" id="{F59DCEB0-E7FB-4487-88D4-7BAE336C247A}"/>
+                <a16:creationId xmlns:a16="http://schemas.microsoft.com/office/drawing/2014/main" id="{13997C12-C4D6-4D8B-969C-66A43A203A79}"/>
               </a:ext>
             </a:extLst>
           </p:cNvPr>
@@ -17734,7 +17734,7 @@
           <p:cNvPr id="26" name="slot-DUP-0-t">
             <a:extLst xmlns:a="http://schemas.openxmlformats.org/drawingml/2006/main">
               <a:ext uri="{FF2B5EF4-FFF2-40B4-BE49-F238E27FC236}">
-                <a16:creationId xmlns:a16="http://schemas.microsoft.com/office/drawing/2014/main" id="{74EAFFC4-53C3-4F89-8BEE-1781B6BE05C5}"/>
+                <a16:creationId xmlns:a16="http://schemas.microsoft.com/office/drawing/2014/main" id="{49BB4DAE-FA0E-48AE-89B8-0A9A85FFB795}"/>
               </a:ext>
             </a:extLst>
           </p:cNvPr>
@@ -17818,7 +17818,7 @@
           <p:cNvPr id="27" name="slot-DUP-0-w">
             <a:extLst xmlns:a="http://schemas.openxmlformats.org/drawingml/2006/main">
               <a:ext uri="{FF2B5EF4-FFF2-40B4-BE49-F238E27FC236}">
-                <a16:creationId xmlns:a16="http://schemas.microsoft.com/office/drawing/2014/main" id="{D11E49C5-017A-4062-927B-679D0694B625}"/>
+                <a16:creationId xmlns:a16="http://schemas.microsoft.com/office/drawing/2014/main" id="{6834D64C-C520-4E4B-BFEE-2A58A4433708}"/>
               </a:ext>
             </a:extLst>
           </p:cNvPr>
@@ -17880,7 +17880,7 @@
           <p:cNvPr id="28" name="slot-DUP-1">
             <a:extLst xmlns:a="http://schemas.openxmlformats.org/drawingml/2006/main">
               <a:ext uri="{FF2B5EF4-FFF2-40B4-BE49-F238E27FC236}">
-                <a16:creationId xmlns:a16="http://schemas.microsoft.com/office/drawing/2014/main" id="{953FB01B-6E75-4260-AFAC-3C3F08ED9108}"/>
+                <a16:creationId xmlns:a16="http://schemas.microsoft.com/office/drawing/2014/main" id="{F2AE35A4-72C5-4212-82C9-755E71BAFC31}"/>
               </a:ext>
             </a:extLst>
           </p:cNvPr>
@@ -17915,7 +17915,7 @@
           <p:cNvPr id="29" name="slot-DUP-1-t">
             <a:extLst xmlns:a="http://schemas.openxmlformats.org/drawingml/2006/main">
               <a:ext uri="{FF2B5EF4-FFF2-40B4-BE49-F238E27FC236}">
-                <a16:creationId xmlns:a16="http://schemas.microsoft.com/office/drawing/2014/main" id="{74D742B3-44E3-4FC9-82D1-603A77925742}"/>
+                <a16:creationId xmlns:a16="http://schemas.microsoft.com/office/drawing/2014/main" id="{D073B8CB-1A96-46EF-BC35-1BF9BB0EF5F9}"/>
               </a:ext>
             </a:extLst>
           </p:cNvPr>
@@ -17988,7 +17988,7 @@
           <p:cNvPr id="30" name="slot-DUP-1-w">
             <a:extLst xmlns:a="http://schemas.openxmlformats.org/drawingml/2006/main">
               <a:ext uri="{FF2B5EF4-FFF2-40B4-BE49-F238E27FC236}">
-                <a16:creationId xmlns:a16="http://schemas.microsoft.com/office/drawing/2014/main" id="{D032A93F-ACB9-410B-8755-883AA7DFDF8A}"/>
+                <a16:creationId xmlns:a16="http://schemas.microsoft.com/office/drawing/2014/main" id="{D3F3BF06-E6B5-4002-995A-A88C8351F85D}"/>
               </a:ext>
             </a:extLst>
           </p:cNvPr>
@@ -18050,7 +18050,7 @@
           <p:cNvPr id="31" name="slot-DUP-2">
             <a:extLst xmlns:a="http://schemas.openxmlformats.org/drawingml/2006/main">
               <a:ext uri="{FF2B5EF4-FFF2-40B4-BE49-F238E27FC236}">
-                <a16:creationId xmlns:a16="http://schemas.microsoft.com/office/drawing/2014/main" id="{7D6F709B-B799-4A23-BC0C-29349810D84A}"/>
+                <a16:creationId xmlns:a16="http://schemas.microsoft.com/office/drawing/2014/main" id="{2EE53729-4CCC-40DF-A31B-AC7E72D6398C}"/>
               </a:ext>
             </a:extLst>
           </p:cNvPr>
@@ -18085,7 +18085,7 @@
           <p:cNvPr id="32" name="slot-DUP-2-t">
             <a:extLst xmlns:a="http://schemas.openxmlformats.org/drawingml/2006/main">
               <a:ext uri="{FF2B5EF4-FFF2-40B4-BE49-F238E27FC236}">
-                <a16:creationId xmlns:a16="http://schemas.microsoft.com/office/drawing/2014/main" id="{1D5DB333-457B-4A83-B34E-15F0BC42DC2D}"/>
+                <a16:creationId xmlns:a16="http://schemas.microsoft.com/office/drawing/2014/main" id="{D84F63FD-8B0A-491E-AE79-CBF211B979FA}"/>
               </a:ext>
             </a:extLst>
           </p:cNvPr>
@@ -18158,7 +18158,7 @@
           <p:cNvPr id="33" name="slot-DUP-2-w">
             <a:extLst xmlns:a="http://schemas.openxmlformats.org/drawingml/2006/main">
               <a:ext uri="{FF2B5EF4-FFF2-40B4-BE49-F238E27FC236}">
-                <a16:creationId xmlns:a16="http://schemas.microsoft.com/office/drawing/2014/main" id="{9315F82C-F244-4947-A7D5-02E18EECD796}"/>
+                <a16:creationId xmlns:a16="http://schemas.microsoft.com/office/drawing/2014/main" id="{34CD4BB3-C98A-4180-AD98-9168E63CA0F3}"/>
               </a:ext>
             </a:extLst>
           </p:cNvPr>
@@ -18220,7 +18220,7 @@
           <p:cNvPr id="34" name="panel-DUP-note">
             <a:extLst xmlns:a="http://schemas.openxmlformats.org/drawingml/2006/main">
               <a:ext uri="{FF2B5EF4-FFF2-40B4-BE49-F238E27FC236}">
-                <a16:creationId xmlns:a16="http://schemas.microsoft.com/office/drawing/2014/main" id="{99F72229-5B6B-45A0-9E5D-F147F6F8E17C}"/>
+                <a16:creationId xmlns:a16="http://schemas.microsoft.com/office/drawing/2014/main" id="{BBF303B0-EAAE-422C-ADEE-7187D77C2593}"/>
               </a:ext>
             </a:extLst>
           </p:cNvPr>
@@ -18320,7 +18320,7 @@
           <p:cNvPr id="35" name="anchor-22">
             <a:extLst xmlns:a="http://schemas.openxmlformats.org/drawingml/2006/main">
               <a:ext uri="{FF2B5EF4-FFF2-40B4-BE49-F238E27FC236}">
-                <a16:creationId xmlns:a16="http://schemas.microsoft.com/office/drawing/2014/main" id="{E0883824-088C-4FD3-8FA2-3C3835E83AD1}"/>
+                <a16:creationId xmlns:a16="http://schemas.microsoft.com/office/drawing/2014/main" id="{72B5FAA3-26D9-4814-A76E-DCF7B4D43CC6}"/>
               </a:ext>
             </a:extLst>
           </p:cNvPr>
@@ -18349,7 +18349,7 @@
           <p:cNvPr id="36" name="anchor-23">
             <a:extLst xmlns:a="http://schemas.openxmlformats.org/drawingml/2006/main">
               <a:ext uri="{FF2B5EF4-FFF2-40B4-BE49-F238E27FC236}">
-                <a16:creationId xmlns:a16="http://schemas.microsoft.com/office/drawing/2014/main" id="{187A06A4-04AB-49D9-83D8-EEE0A900219E}"/>
+                <a16:creationId xmlns:a16="http://schemas.microsoft.com/office/drawing/2014/main" id="{B3F5D038-8934-4D3C-86FB-84747879A126}"/>
               </a:ext>
             </a:extLst>
           </p:cNvPr>
@@ -18404,7 +18404,7 @@
           <p:cNvPr id="38" name="panel-TRI">
             <a:extLst xmlns:a="http://schemas.openxmlformats.org/drawingml/2006/main">
               <a:ext uri="{FF2B5EF4-FFF2-40B4-BE49-F238E27FC236}">
-                <a16:creationId xmlns:a16="http://schemas.microsoft.com/office/drawing/2014/main" id="{03115801-74A4-4EB9-A43F-BB839D9497B8}"/>
+                <a16:creationId xmlns:a16="http://schemas.microsoft.com/office/drawing/2014/main" id="{F0E9A92D-AC17-4CEA-A9CE-D4EA50D2BD1F}"/>
               </a:ext>
             </a:extLst>
           </p:cNvPr>
@@ -18439,7 +18439,7 @@
           <p:cNvPr id="39" name="panel-TRI-name">
             <a:extLst xmlns:a="http://schemas.openxmlformats.org/drawingml/2006/main">
               <a:ext uri="{FF2B5EF4-FFF2-40B4-BE49-F238E27FC236}">
-                <a16:creationId xmlns:a16="http://schemas.microsoft.com/office/drawing/2014/main" id="{D359F9A3-3E6E-4486-9ECA-1203E5B176FE}"/>
+                <a16:creationId xmlns:a16="http://schemas.microsoft.com/office/drawing/2014/main" id="{D422D555-37FD-46A4-A137-585C717041AB}"/>
               </a:ext>
             </a:extLst>
           </p:cNvPr>
@@ -18474,7 +18474,7 @@
           <p:cNvPr id="40" name="panel-TRI-name-text">
             <a:extLst xmlns:a="http://schemas.openxmlformats.org/drawingml/2006/main">
               <a:ext uri="{FF2B5EF4-FFF2-40B4-BE49-F238E27FC236}">
-                <a16:creationId xmlns:a16="http://schemas.microsoft.com/office/drawing/2014/main" id="{422E7104-6EE2-40FC-ABA3-2E6856F55851}"/>
+                <a16:creationId xmlns:a16="http://schemas.microsoft.com/office/drawing/2014/main" id="{B126403C-8A89-4F35-A3F1-58C6880968A1}"/>
               </a:ext>
             </a:extLst>
           </p:cNvPr>
@@ -18536,7 +18536,7 @@
           <p:cNvPr id="41" name="panel-TRI-sub">
             <a:extLst xmlns:a="http://schemas.openxmlformats.org/drawingml/2006/main">
               <a:ext uri="{FF2B5EF4-FFF2-40B4-BE49-F238E27FC236}">
-                <a16:creationId xmlns:a16="http://schemas.microsoft.com/office/drawing/2014/main" id="{89CCDC77-C4F9-4F0B-A6D7-76277F053300}"/>
+                <a16:creationId xmlns:a16="http://schemas.microsoft.com/office/drawing/2014/main" id="{6E42A29F-0D10-4C64-B379-2097AB4A2EE5}"/>
               </a:ext>
             </a:extLst>
           </p:cNvPr>
@@ -18598,7 +18598,7 @@
           <p:cNvPr id="42" name="slot-TRI-0">
             <a:extLst xmlns:a="http://schemas.openxmlformats.org/drawingml/2006/main">
               <a:ext uri="{FF2B5EF4-FFF2-40B4-BE49-F238E27FC236}">
-                <a16:creationId xmlns:a16="http://schemas.microsoft.com/office/drawing/2014/main" id="{1B1B9B16-17A8-4871-95B2-7F5DF9544FD8}"/>
+                <a16:creationId xmlns:a16="http://schemas.microsoft.com/office/drawing/2014/main" id="{087F42BD-09D7-4205-B768-E41D7EDCBED2}"/>
               </a:ext>
             </a:extLst>
           </p:cNvPr>
@@ -18633,7 +18633,7 @@
           <p:cNvPr id="43" name="slot-TRI-0-t">
             <a:extLst xmlns:a="http://schemas.openxmlformats.org/drawingml/2006/main">
               <a:ext uri="{FF2B5EF4-FFF2-40B4-BE49-F238E27FC236}">
-                <a16:creationId xmlns:a16="http://schemas.microsoft.com/office/drawing/2014/main" id="{FD92EABC-706A-4BF5-9618-DF41842E7D09}"/>
+                <a16:creationId xmlns:a16="http://schemas.microsoft.com/office/drawing/2014/main" id="{0A5B581A-B09E-4EDF-BBA7-FA3DE8E21509}"/>
               </a:ext>
             </a:extLst>
           </p:cNvPr>
@@ -18717,7 +18717,7 @@
           <p:cNvPr id="44" name="slot-TRI-0-w">
             <a:extLst xmlns:a="http://schemas.openxmlformats.org/drawingml/2006/main">
               <a:ext uri="{FF2B5EF4-FFF2-40B4-BE49-F238E27FC236}">
-                <a16:creationId xmlns:a16="http://schemas.microsoft.com/office/drawing/2014/main" id="{F8057771-A904-4D62-B6EA-0F3E89A2E256}"/>
+                <a16:creationId xmlns:a16="http://schemas.microsoft.com/office/drawing/2014/main" id="{782AEEBC-EABF-4176-BB1D-980AEEA471B4}"/>
               </a:ext>
             </a:extLst>
           </p:cNvPr>
@@ -18779,7 +18779,7 @@
           <p:cNvPr id="45" name="slot-TRI-1">
             <a:extLst xmlns:a="http://schemas.openxmlformats.org/drawingml/2006/main">
               <a:ext uri="{FF2B5EF4-FFF2-40B4-BE49-F238E27FC236}">
-                <a16:creationId xmlns:a16="http://schemas.microsoft.com/office/drawing/2014/main" id="{947B187A-5918-48B0-B02D-1B34D1199DE6}"/>
+                <a16:creationId xmlns:a16="http://schemas.microsoft.com/office/drawing/2014/main" id="{96271F72-C811-4D89-81BC-BCF5E15111E5}"/>
               </a:ext>
             </a:extLst>
           </p:cNvPr>
@@ -18814,7 +18814,7 @@
           <p:cNvPr id="46" name="slot-TRI-1-t">
             <a:extLst xmlns:a="http://schemas.openxmlformats.org/drawingml/2006/main">
               <a:ext uri="{FF2B5EF4-FFF2-40B4-BE49-F238E27FC236}">
-                <a16:creationId xmlns:a16="http://schemas.microsoft.com/office/drawing/2014/main" id="{E88E5FAE-65CD-4085-8912-11E91004170A}"/>
+                <a16:creationId xmlns:a16="http://schemas.microsoft.com/office/drawing/2014/main" id="{6D912E18-9FF4-4530-BB2E-835541DD86F0}"/>
               </a:ext>
             </a:extLst>
           </p:cNvPr>
@@ -18887,7 +18887,7 @@
           <p:cNvPr id="47" name="slot-TRI-1-w">
             <a:extLst xmlns:a="http://schemas.openxmlformats.org/drawingml/2006/main">
               <a:ext uri="{FF2B5EF4-FFF2-40B4-BE49-F238E27FC236}">
-                <a16:creationId xmlns:a16="http://schemas.microsoft.com/office/drawing/2014/main" id="{A1485840-9EE3-4D1D-B498-32ABA2B55ADF}"/>
+                <a16:creationId xmlns:a16="http://schemas.microsoft.com/office/drawing/2014/main" id="{1110DC45-AE5B-432B-9456-FC9912469841}"/>
               </a:ext>
             </a:extLst>
           </p:cNvPr>
@@ -18949,7 +18949,7 @@
           <p:cNvPr id="48" name="slot-TRI-2">
             <a:extLst xmlns:a="http://schemas.openxmlformats.org/drawingml/2006/main">
               <a:ext uri="{FF2B5EF4-FFF2-40B4-BE49-F238E27FC236}">
-                <a16:creationId xmlns:a16="http://schemas.microsoft.com/office/drawing/2014/main" id="{98E1AAD6-D1D2-4E16-AB8E-7F1B1249A6AD}"/>
+                <a16:creationId xmlns:a16="http://schemas.microsoft.com/office/drawing/2014/main" id="{B6BC511D-8C13-42EF-9521-82AD85021790}"/>
               </a:ext>
             </a:extLst>
           </p:cNvPr>
@@ -18984,7 +18984,7 @@
           <p:cNvPr id="49" name="slot-TRI-2-t">
             <a:extLst xmlns:a="http://schemas.openxmlformats.org/drawingml/2006/main">
               <a:ext uri="{FF2B5EF4-FFF2-40B4-BE49-F238E27FC236}">
-                <a16:creationId xmlns:a16="http://schemas.microsoft.com/office/drawing/2014/main" id="{78027626-C5F1-448B-9D19-D7FA9D986412}"/>
+                <a16:creationId xmlns:a16="http://schemas.microsoft.com/office/drawing/2014/main" id="{D693C8A9-92AB-4357-9FA1-B0A5C4D40A8A}"/>
               </a:ext>
             </a:extLst>
           </p:cNvPr>
@@ -19057,7 +19057,7 @@
           <p:cNvPr id="50" name="slot-TRI-2-w">
             <a:extLst xmlns:a="http://schemas.openxmlformats.org/drawingml/2006/main">
               <a:ext uri="{FF2B5EF4-FFF2-40B4-BE49-F238E27FC236}">
-                <a16:creationId xmlns:a16="http://schemas.microsoft.com/office/drawing/2014/main" id="{0D376222-7D59-469B-9CD4-DC0970938D38}"/>
+                <a16:creationId xmlns:a16="http://schemas.microsoft.com/office/drawing/2014/main" id="{A64A9D0F-E76B-4D8F-8228-ACFC12D2D539}"/>
               </a:ext>
             </a:extLst>
           </p:cNvPr>
@@ -19119,7 +19119,7 @@
           <p:cNvPr id="51" name="panel-TRI-note">
             <a:extLst xmlns:a="http://schemas.openxmlformats.org/drawingml/2006/main">
               <a:ext uri="{FF2B5EF4-FFF2-40B4-BE49-F238E27FC236}">
-                <a16:creationId xmlns:a16="http://schemas.microsoft.com/office/drawing/2014/main" id="{9E88554B-85D6-4611-BC55-2A582B1792E5}"/>
+                <a16:creationId xmlns:a16="http://schemas.microsoft.com/office/drawing/2014/main" id="{FB95DE56-D89B-48CB-AC0C-D96BF4F788FD}"/>
               </a:ext>
             </a:extLst>
           </p:cNvPr>
@@ -19208,7 +19208,7 @@
           <p:cNvPr id="52" name="anchor-24">
             <a:extLst xmlns:a="http://schemas.openxmlformats.org/drawingml/2006/main">
               <a:ext uri="{FF2B5EF4-FFF2-40B4-BE49-F238E27FC236}">
-                <a16:creationId xmlns:a16="http://schemas.microsoft.com/office/drawing/2014/main" id="{7DD9A65C-9C8A-4F5B-87BD-6CC8BE6AE03D}"/>
+                <a16:creationId xmlns:a16="http://schemas.microsoft.com/office/drawing/2014/main" id="{E0FE9858-E55F-4C45-A125-FFD2A0784577}"/>
               </a:ext>
             </a:extLst>
           </p:cNvPr>
@@ -19237,7 +19237,7 @@
           <p:cNvPr id="53" name="anchor-25">
             <a:extLst xmlns:a="http://schemas.openxmlformats.org/drawingml/2006/main">
               <a:ext uri="{FF2B5EF4-FFF2-40B4-BE49-F238E27FC236}">
-                <a16:creationId xmlns:a16="http://schemas.microsoft.com/office/drawing/2014/main" id="{25DC95A7-9314-441D-8C7E-3764FD475CE5}"/>
+                <a16:creationId xmlns:a16="http://schemas.microsoft.com/office/drawing/2014/main" id="{292D81C9-AF48-49A9-B003-FCCCAEF7CCA0}"/>
               </a:ext>
             </a:extLst>
           </p:cNvPr>
@@ -19292,7 +19292,7 @@
           <p:cNvPr id="55" name="panel-BAL">
             <a:extLst xmlns:a="http://schemas.openxmlformats.org/drawingml/2006/main">
               <a:ext uri="{FF2B5EF4-FFF2-40B4-BE49-F238E27FC236}">
-                <a16:creationId xmlns:a16="http://schemas.microsoft.com/office/drawing/2014/main" id="{58B9469C-C0C8-4215-A5F3-77F8AD6D10E8}"/>
+                <a16:creationId xmlns:a16="http://schemas.microsoft.com/office/drawing/2014/main" id="{7FCDA84F-DA8A-4387-9EB7-5BC389AFED2D}"/>
               </a:ext>
             </a:extLst>
           </p:cNvPr>
@@ -19327,7 +19327,7 @@
           <p:cNvPr id="56" name="panel-BAL-name">
             <a:extLst xmlns:a="http://schemas.openxmlformats.org/drawingml/2006/main">
               <a:ext uri="{FF2B5EF4-FFF2-40B4-BE49-F238E27FC236}">
-                <a16:creationId xmlns:a16="http://schemas.microsoft.com/office/drawing/2014/main" id="{DEB6CD7C-E334-416B-B52B-AA0A5DB1BF5A}"/>
+                <a16:creationId xmlns:a16="http://schemas.microsoft.com/office/drawing/2014/main" id="{B50EA735-F770-4804-8AE0-92F53F86DCC2}"/>
               </a:ext>
             </a:extLst>
           </p:cNvPr>
@@ -19362,7 +19362,7 @@
           <p:cNvPr id="57" name="panel-BAL-name-text">
             <a:extLst xmlns:a="http://schemas.openxmlformats.org/drawingml/2006/main">
               <a:ext uri="{FF2B5EF4-FFF2-40B4-BE49-F238E27FC236}">
-                <a16:creationId xmlns:a16="http://schemas.microsoft.com/office/drawing/2014/main" id="{3ABC0000-6DBF-489B-B346-3A610D9A50CA}"/>
+                <a16:creationId xmlns:a16="http://schemas.microsoft.com/office/drawing/2014/main" id="{3D126B05-B8F4-4B6B-87C5-768147D45F37}"/>
               </a:ext>
             </a:extLst>
           </p:cNvPr>
@@ -19424,7 +19424,7 @@
           <p:cNvPr id="58" name="panel-BAL-sub">
             <a:extLst xmlns:a="http://schemas.openxmlformats.org/drawingml/2006/main">
               <a:ext uri="{FF2B5EF4-FFF2-40B4-BE49-F238E27FC236}">
-                <a16:creationId xmlns:a16="http://schemas.microsoft.com/office/drawing/2014/main" id="{93229EE4-D72B-4B32-95D3-5915C2DBBB37}"/>
+                <a16:creationId xmlns:a16="http://schemas.microsoft.com/office/drawing/2014/main" id="{EF8E9AD3-6C52-4383-933A-9446D549E492}"/>
               </a:ext>
             </a:extLst>
           </p:cNvPr>
@@ -19486,7 +19486,7 @@
           <p:cNvPr id="59" name="slot-BAL-0">
             <a:extLst xmlns:a="http://schemas.openxmlformats.org/drawingml/2006/main">
               <a:ext uri="{FF2B5EF4-FFF2-40B4-BE49-F238E27FC236}">
-                <a16:creationId xmlns:a16="http://schemas.microsoft.com/office/drawing/2014/main" id="{0633A5E5-AFCF-4BDD-A8D2-25BB96D6D899}"/>
+                <a16:creationId xmlns:a16="http://schemas.microsoft.com/office/drawing/2014/main" id="{9AE510B5-5CD6-4F2A-8166-EFDF0CA532AC}"/>
               </a:ext>
             </a:extLst>
           </p:cNvPr>
@@ -19521,7 +19521,7 @@
           <p:cNvPr id="60" name="slot-BAL-0-t">
             <a:extLst xmlns:a="http://schemas.openxmlformats.org/drawingml/2006/main">
               <a:ext uri="{FF2B5EF4-FFF2-40B4-BE49-F238E27FC236}">
-                <a16:creationId xmlns:a16="http://schemas.microsoft.com/office/drawing/2014/main" id="{4BEC8C73-C959-44F5-AB92-A3C1444DCEFD}"/>
+                <a16:creationId xmlns:a16="http://schemas.microsoft.com/office/drawing/2014/main" id="{E629398C-EF1F-4260-85F7-F2E9CCC7FE45}"/>
               </a:ext>
             </a:extLst>
           </p:cNvPr>
@@ -19605,7 +19605,7 @@
           <p:cNvPr id="61" name="slot-BAL-0-w">
             <a:extLst xmlns:a="http://schemas.openxmlformats.org/drawingml/2006/main">
               <a:ext uri="{FF2B5EF4-FFF2-40B4-BE49-F238E27FC236}">
-                <a16:creationId xmlns:a16="http://schemas.microsoft.com/office/drawing/2014/main" id="{CE09DAD2-BD7F-464A-BCC3-060723A32FF2}"/>
+                <a16:creationId xmlns:a16="http://schemas.microsoft.com/office/drawing/2014/main" id="{CC0CCB3D-1EFB-4399-9F54-9781DBF08556}"/>
               </a:ext>
             </a:extLst>
           </p:cNvPr>
@@ -19667,7 +19667,7 @@
           <p:cNvPr id="62" name="slot-BAL-1">
             <a:extLst xmlns:a="http://schemas.openxmlformats.org/drawingml/2006/main">
               <a:ext uri="{FF2B5EF4-FFF2-40B4-BE49-F238E27FC236}">
-                <a16:creationId xmlns:a16="http://schemas.microsoft.com/office/drawing/2014/main" id="{54BFB3B0-361A-4BD3-9829-2F7DED4FA1C2}"/>
+                <a16:creationId xmlns:a16="http://schemas.microsoft.com/office/drawing/2014/main" id="{BDF76B6F-021A-42D6-8699-4D4D614D560C}"/>
               </a:ext>
             </a:extLst>
           </p:cNvPr>
@@ -19702,7 +19702,7 @@
           <p:cNvPr id="63" name="slot-BAL-1-t">
             <a:extLst xmlns:a="http://schemas.openxmlformats.org/drawingml/2006/main">
               <a:ext uri="{FF2B5EF4-FFF2-40B4-BE49-F238E27FC236}">
-                <a16:creationId xmlns:a16="http://schemas.microsoft.com/office/drawing/2014/main" id="{42DE16CE-A351-4ACD-9D4D-C15249715A46}"/>
+                <a16:creationId xmlns:a16="http://schemas.microsoft.com/office/drawing/2014/main" id="{B0A79527-BDB4-4030-9366-97E887061954}"/>
               </a:ext>
             </a:extLst>
           </p:cNvPr>
@@ -19775,7 +19775,7 @@
           <p:cNvPr id="64" name="slot-BAL-1-w">
             <a:extLst xmlns:a="http://schemas.openxmlformats.org/drawingml/2006/main">
               <a:ext uri="{FF2B5EF4-FFF2-40B4-BE49-F238E27FC236}">
-                <a16:creationId xmlns:a16="http://schemas.microsoft.com/office/drawing/2014/main" id="{2AF208C5-CAF3-47EB-9380-6177D68894C1}"/>
+                <a16:creationId xmlns:a16="http://schemas.microsoft.com/office/drawing/2014/main" id="{7CEB4965-0EF6-429C-8BFF-39135FCB901B}"/>
               </a:ext>
             </a:extLst>
           </p:cNvPr>
@@ -19837,7 +19837,7 @@
           <p:cNvPr id="65" name="slot-BAL-2">
             <a:extLst xmlns:a="http://schemas.openxmlformats.org/drawingml/2006/main">
               <a:ext uri="{FF2B5EF4-FFF2-40B4-BE49-F238E27FC236}">
-                <a16:creationId xmlns:a16="http://schemas.microsoft.com/office/drawing/2014/main" id="{1C88E5E8-8AB2-48E1-AAF9-8CE33E6F2805}"/>
+                <a16:creationId xmlns:a16="http://schemas.microsoft.com/office/drawing/2014/main" id="{28550CC4-08D6-4150-A069-342517707B81}"/>
               </a:ext>
             </a:extLst>
           </p:cNvPr>
@@ -19872,7 +19872,7 @@
           <p:cNvPr id="66" name="slot-BAL-2-t">
             <a:extLst xmlns:a="http://schemas.openxmlformats.org/drawingml/2006/main">
               <a:ext uri="{FF2B5EF4-FFF2-40B4-BE49-F238E27FC236}">
-                <a16:creationId xmlns:a16="http://schemas.microsoft.com/office/drawing/2014/main" id="{8FAD2EFA-FD58-41FA-B3F1-22D69F8B725B}"/>
+                <a16:creationId xmlns:a16="http://schemas.microsoft.com/office/drawing/2014/main" id="{8DAB7194-0990-449C-9CF6-3257F3100AFE}"/>
               </a:ext>
             </a:extLst>
           </p:cNvPr>
@@ -19945,7 +19945,7 @@
           <p:cNvPr id="67" name="slot-BAL-2-w">
             <a:extLst xmlns:a="http://schemas.openxmlformats.org/drawingml/2006/main">
               <a:ext uri="{FF2B5EF4-FFF2-40B4-BE49-F238E27FC236}">
-                <a16:creationId xmlns:a16="http://schemas.microsoft.com/office/drawing/2014/main" id="{C64D5949-9BA9-4D96-973D-04D9D7661F89}"/>
+                <a16:creationId xmlns:a16="http://schemas.microsoft.com/office/drawing/2014/main" id="{7FBB35F4-B577-4C47-8F69-C1AAAFD2096C}"/>
               </a:ext>
             </a:extLst>
           </p:cNvPr>
@@ -20007,7 +20007,7 @@
           <p:cNvPr id="68" name="panel-BAL-note">
             <a:extLst xmlns:a="http://schemas.openxmlformats.org/drawingml/2006/main">
               <a:ext uri="{FF2B5EF4-FFF2-40B4-BE49-F238E27FC236}">
-                <a16:creationId xmlns:a16="http://schemas.microsoft.com/office/drawing/2014/main" id="{6F50502B-D0BB-4542-83EB-61F14F308F48}"/>
+                <a16:creationId xmlns:a16="http://schemas.microsoft.com/office/drawing/2014/main" id="{2060EFEA-8DAE-409A-93A9-27BCC3A7F852}"/>
               </a:ext>
             </a:extLst>
           </p:cNvPr>
@@ -20096,7 +20096,7 @@
           <p:cNvPr id="69" name="sec-b-chip">
             <a:extLst xmlns:a="http://schemas.openxmlformats.org/drawingml/2006/main">
               <a:ext uri="{FF2B5EF4-FFF2-40B4-BE49-F238E27FC236}">
-                <a16:creationId xmlns:a16="http://schemas.microsoft.com/office/drawing/2014/main" id="{6343DA97-3BB9-49B9-8FE6-5EC0C4E9A4CE}"/>
+                <a16:creationId xmlns:a16="http://schemas.microsoft.com/office/drawing/2014/main" id="{855CD80F-36B7-43C6-B0FA-082C1BB9823C}"/>
               </a:ext>
             </a:extLst>
           </p:cNvPr>
@@ -20131,7 +20131,7 @@
           <p:cNvPr id="70" name="sec-b-chip-text">
             <a:extLst xmlns:a="http://schemas.openxmlformats.org/drawingml/2006/main">
               <a:ext uri="{FF2B5EF4-FFF2-40B4-BE49-F238E27FC236}">
-                <a16:creationId xmlns:a16="http://schemas.microsoft.com/office/drawing/2014/main" id="{E2AEEADC-4D26-4119-86FD-A056643B8743}"/>
+                <a16:creationId xmlns:a16="http://schemas.microsoft.com/office/drawing/2014/main" id="{7AA4ED43-2E55-429F-B5F2-938A12529647}"/>
               </a:ext>
             </a:extLst>
           </p:cNvPr>
@@ -20193,7 +20193,7 @@
           <p:cNvPr id="71" name="sec-b">
             <a:extLst xmlns:a="http://schemas.openxmlformats.org/drawingml/2006/main">
               <a:ext uri="{FF2B5EF4-FFF2-40B4-BE49-F238E27FC236}">
-                <a16:creationId xmlns:a16="http://schemas.microsoft.com/office/drawing/2014/main" id="{5D65A1EE-22A9-409D-AC29-0CF21DA6EDE1}"/>
+                <a16:creationId xmlns:a16="http://schemas.microsoft.com/office/drawing/2014/main" id="{FF0D7F12-1949-4EA4-85C5-2F57F87052CE}"/>
               </a:ext>
             </a:extLst>
           </p:cNvPr>
@@ -20255,7 +20255,7 @@
           <p:cNvPr id="72" name="step-0">
             <a:extLst xmlns:a="http://schemas.openxmlformats.org/drawingml/2006/main">
               <a:ext uri="{FF2B5EF4-FFF2-40B4-BE49-F238E27FC236}">
-                <a16:creationId xmlns:a16="http://schemas.microsoft.com/office/drawing/2014/main" id="{BB5D9AA5-6431-42AC-86FB-9E6F931A8725}"/>
+                <a16:creationId xmlns:a16="http://schemas.microsoft.com/office/drawing/2014/main" id="{7D580AC0-EBF1-4A32-87FC-5185A76CF41C}"/>
               </a:ext>
             </a:extLst>
           </p:cNvPr>
@@ -20290,7 +20290,7 @@
           <p:cNvPr id="73" name="step-0-t">
             <a:extLst xmlns:a="http://schemas.openxmlformats.org/drawingml/2006/main">
               <a:ext uri="{FF2B5EF4-FFF2-40B4-BE49-F238E27FC236}">
-                <a16:creationId xmlns:a16="http://schemas.microsoft.com/office/drawing/2014/main" id="{3CABECF2-7EFE-44A5-AD1F-CD2C15AB011B}"/>
+                <a16:creationId xmlns:a16="http://schemas.microsoft.com/office/drawing/2014/main" id="{A3A0F20D-9952-4044-8907-3501B31F9B0F}"/>
               </a:ext>
             </a:extLst>
           </p:cNvPr>
@@ -20401,7 +20401,7 @@
           <p:cNvPr id="74" name="step-1">
             <a:extLst xmlns:a="http://schemas.openxmlformats.org/drawingml/2006/main">
               <a:ext uri="{FF2B5EF4-FFF2-40B4-BE49-F238E27FC236}">
-                <a16:creationId xmlns:a16="http://schemas.microsoft.com/office/drawing/2014/main" id="{DB125380-8262-47AE-AB1E-4E59CB2889ED}"/>
+                <a16:creationId xmlns:a16="http://schemas.microsoft.com/office/drawing/2014/main" id="{9C6E9B27-CF83-4B0D-953D-D50D0329017F}"/>
               </a:ext>
             </a:extLst>
           </p:cNvPr>
@@ -20436,7 +20436,7 @@
           <p:cNvPr id="75" name="step-1-t">
             <a:extLst xmlns:a="http://schemas.openxmlformats.org/drawingml/2006/main">
               <a:ext uri="{FF2B5EF4-FFF2-40B4-BE49-F238E27FC236}">
-                <a16:creationId xmlns:a16="http://schemas.microsoft.com/office/drawing/2014/main" id="{813E0191-9C43-4DCC-A063-E4500458D7DB}"/>
+                <a16:creationId xmlns:a16="http://schemas.microsoft.com/office/drawing/2014/main" id="{8E6248B0-7D16-49DC-9E9B-7153C53ABB95}"/>
               </a:ext>
             </a:extLst>
           </p:cNvPr>
@@ -20547,7 +20547,7 @@
           <p:cNvPr id="76" name="step-2">
             <a:extLst xmlns:a="http://schemas.openxmlformats.org/drawingml/2006/main">
               <a:ext uri="{FF2B5EF4-FFF2-40B4-BE49-F238E27FC236}">
-                <a16:creationId xmlns:a16="http://schemas.microsoft.com/office/drawing/2014/main" id="{78F3C440-8260-4259-92FC-06AC04090D11}"/>
+                <a16:creationId xmlns:a16="http://schemas.microsoft.com/office/drawing/2014/main" id="{60880A62-F871-4478-964E-3E39308FA01F}"/>
               </a:ext>
             </a:extLst>
           </p:cNvPr>
@@ -20582,7 +20582,7 @@
           <p:cNvPr id="77" name="step-2-t">
             <a:extLst xmlns:a="http://schemas.openxmlformats.org/drawingml/2006/main">
               <a:ext uri="{FF2B5EF4-FFF2-40B4-BE49-F238E27FC236}">
-                <a16:creationId xmlns:a16="http://schemas.microsoft.com/office/drawing/2014/main" id="{B8B1250C-F406-4EE2-B39B-98F27A464896}"/>
+                <a16:creationId xmlns:a16="http://schemas.microsoft.com/office/drawing/2014/main" id="{0CFEAAF6-A696-494B-8D8B-21EB23BB1791}"/>
               </a:ext>
             </a:extLst>
           </p:cNvPr>
@@ -20693,7 +20693,7 @@
           <p:cNvPr id="78" name="step-note">
             <a:extLst xmlns:a="http://schemas.openxmlformats.org/drawingml/2006/main">
               <a:ext uri="{FF2B5EF4-FFF2-40B4-BE49-F238E27FC236}">
-                <a16:creationId xmlns:a16="http://schemas.microsoft.com/office/drawing/2014/main" id="{8A87DD7C-ED6A-424D-8F60-501E51972C89}"/>
+                <a16:creationId xmlns:a16="http://schemas.microsoft.com/office/drawing/2014/main" id="{DB033346-D6E5-41FE-8C00-8A0609556220}"/>
               </a:ext>
             </a:extLst>
           </p:cNvPr>
@@ -20920,7 +20920,7 @@
           <p:cNvPr id="79" name="sec-c-chip">
             <a:extLst xmlns:a="http://schemas.openxmlformats.org/drawingml/2006/main">
               <a:ext uri="{FF2B5EF4-FFF2-40B4-BE49-F238E27FC236}">
-                <a16:creationId xmlns:a16="http://schemas.microsoft.com/office/drawing/2014/main" id="{4D6AE9E0-8EAB-41F3-99FC-DB27E47B5EF6}"/>
+                <a16:creationId xmlns:a16="http://schemas.microsoft.com/office/drawing/2014/main" id="{660CF52F-6E00-4371-8420-4909C3A1CC47}"/>
               </a:ext>
             </a:extLst>
           </p:cNvPr>
@@ -20955,7 +20955,7 @@
           <p:cNvPr id="80" name="sec-c-chip-text">
             <a:extLst xmlns:a="http://schemas.openxmlformats.org/drawingml/2006/main">
               <a:ext uri="{FF2B5EF4-FFF2-40B4-BE49-F238E27FC236}">
-                <a16:creationId xmlns:a16="http://schemas.microsoft.com/office/drawing/2014/main" id="{83AC434A-3904-4FE8-AB9E-D956B6A2658F}"/>
+                <a16:creationId xmlns:a16="http://schemas.microsoft.com/office/drawing/2014/main" id="{0312A0EF-5164-4DB6-AD74-598D48F8364C}"/>
               </a:ext>
             </a:extLst>
           </p:cNvPr>
@@ -21017,7 +21017,7 @@
           <p:cNvPr id="81" name="sec-c">
             <a:extLst xmlns:a="http://schemas.openxmlformats.org/drawingml/2006/main">
               <a:ext uri="{FF2B5EF4-FFF2-40B4-BE49-F238E27FC236}">
-                <a16:creationId xmlns:a16="http://schemas.microsoft.com/office/drawing/2014/main" id="{2EE165A4-9AED-4E11-840A-6B5574523F28}"/>
+                <a16:creationId xmlns:a16="http://schemas.microsoft.com/office/drawing/2014/main" id="{7FB1A64A-FC52-4605-958C-5BDD91A7057F}"/>
               </a:ext>
             </a:extLst>
           </p:cNvPr>
@@ -21079,7 +21079,7 @@
           <p:cNvPr id="82" name="contrast-0">
             <a:extLst xmlns:a="http://schemas.openxmlformats.org/drawingml/2006/main">
               <a:ext uri="{FF2B5EF4-FFF2-40B4-BE49-F238E27FC236}">
-                <a16:creationId xmlns:a16="http://schemas.microsoft.com/office/drawing/2014/main" id="{A22FC605-0AD6-4E42-8F60-1A0DE065FEE6}"/>
+                <a16:creationId xmlns:a16="http://schemas.microsoft.com/office/drawing/2014/main" id="{0CF1B712-B575-43CD-9295-0C53A4765122}"/>
               </a:ext>
             </a:extLst>
           </p:cNvPr>
@@ -21114,7 +21114,7 @@
           <p:cNvPr id="83" name="contrast-0-f">
             <a:extLst xmlns:a="http://schemas.openxmlformats.org/drawingml/2006/main">
               <a:ext uri="{FF2B5EF4-FFF2-40B4-BE49-F238E27FC236}">
-                <a16:creationId xmlns:a16="http://schemas.microsoft.com/office/drawing/2014/main" id="{3C29F799-6A72-47FF-AFFD-C9B8A1C1D86C}"/>
+                <a16:creationId xmlns:a16="http://schemas.microsoft.com/office/drawing/2014/main" id="{853CA398-6D66-4610-B1D6-1F25AAE9383E}"/>
               </a:ext>
             </a:extLst>
           </p:cNvPr>
@@ -21176,7 +21176,7 @@
           <p:cNvPr id="84" name="contrast-0-n">
             <a:extLst xmlns:a="http://schemas.openxmlformats.org/drawingml/2006/main">
               <a:ext uri="{FF2B5EF4-FFF2-40B4-BE49-F238E27FC236}">
-                <a16:creationId xmlns:a16="http://schemas.microsoft.com/office/drawing/2014/main" id="{FB453C3D-E28F-47B2-8B1E-B1F07B17A97B}"/>
+                <a16:creationId xmlns:a16="http://schemas.microsoft.com/office/drawing/2014/main" id="{E88C8247-B81E-4A7B-BA77-AB94CC97DE31}"/>
               </a:ext>
             </a:extLst>
           </p:cNvPr>
@@ -21238,7 +21238,7 @@
           <p:cNvPr id="85" name="contrast-1">
             <a:extLst xmlns:a="http://schemas.openxmlformats.org/drawingml/2006/main">
               <a:ext uri="{FF2B5EF4-FFF2-40B4-BE49-F238E27FC236}">
-                <a16:creationId xmlns:a16="http://schemas.microsoft.com/office/drawing/2014/main" id="{2783878C-2314-4603-8206-24A2C3BE97FF}"/>
+                <a16:creationId xmlns:a16="http://schemas.microsoft.com/office/drawing/2014/main" id="{B31FF86B-3E8A-4ABB-A3F2-3629AD51A467}"/>
               </a:ext>
             </a:extLst>
           </p:cNvPr>
@@ -21273,7 +21273,7 @@
           <p:cNvPr id="86" name="contrast-1-f">
             <a:extLst xmlns:a="http://schemas.openxmlformats.org/drawingml/2006/main">
               <a:ext uri="{FF2B5EF4-FFF2-40B4-BE49-F238E27FC236}">
-                <a16:creationId xmlns:a16="http://schemas.microsoft.com/office/drawing/2014/main" id="{F05CBB79-31C7-48B2-99F5-0938A8BCF5C4}"/>
+                <a16:creationId xmlns:a16="http://schemas.microsoft.com/office/drawing/2014/main" id="{A8863EDF-FF90-4A60-AA30-C5634602EF6D}"/>
               </a:ext>
             </a:extLst>
           </p:cNvPr>
@@ -21335,7 +21335,7 @@
           <p:cNvPr id="87" name="contrast-1-n">
             <a:extLst xmlns:a="http://schemas.openxmlformats.org/drawingml/2006/main">
               <a:ext uri="{FF2B5EF4-FFF2-40B4-BE49-F238E27FC236}">
-                <a16:creationId xmlns:a16="http://schemas.microsoft.com/office/drawing/2014/main" id="{0254AA58-D988-4675-B567-033676AF7382}"/>
+                <a16:creationId xmlns:a16="http://schemas.microsoft.com/office/drawing/2014/main" id="{79B36B36-EAB5-4EC8-8022-37723E9A58CD}"/>
               </a:ext>
             </a:extLst>
           </p:cNvPr>
@@ -21397,7 +21397,7 @@
           <p:cNvPr id="88" name="contrast-2">
             <a:extLst xmlns:a="http://schemas.openxmlformats.org/drawingml/2006/main">
               <a:ext uri="{FF2B5EF4-FFF2-40B4-BE49-F238E27FC236}">
-                <a16:creationId xmlns:a16="http://schemas.microsoft.com/office/drawing/2014/main" id="{20FE70BE-4B67-4E3C-9FDF-1DA81DC86638}"/>
+                <a16:creationId xmlns:a16="http://schemas.microsoft.com/office/drawing/2014/main" id="{503CCF9B-4745-4B68-9EFD-CD694A5C37DD}"/>
               </a:ext>
             </a:extLst>
           </p:cNvPr>
@@ -21432,7 +21432,7 @@
           <p:cNvPr id="89" name="contrast-2-f">
             <a:extLst xmlns:a="http://schemas.openxmlformats.org/drawingml/2006/main">
               <a:ext uri="{FF2B5EF4-FFF2-40B4-BE49-F238E27FC236}">
-                <a16:creationId xmlns:a16="http://schemas.microsoft.com/office/drawing/2014/main" id="{F206D8FF-CBBA-4C65-BFC2-3821326B8A42}"/>
+                <a16:creationId xmlns:a16="http://schemas.microsoft.com/office/drawing/2014/main" id="{2EF297BE-26BD-47FA-8984-50D605B2478F}"/>
               </a:ext>
             </a:extLst>
           </p:cNvPr>
@@ -21494,7 +21494,7 @@
           <p:cNvPr id="90" name="contrast-2-n">
             <a:extLst xmlns:a="http://schemas.openxmlformats.org/drawingml/2006/main">
               <a:ext uri="{FF2B5EF4-FFF2-40B4-BE49-F238E27FC236}">
-                <a16:creationId xmlns:a16="http://schemas.microsoft.com/office/drawing/2014/main" id="{E15C4F97-A788-4F0F-9B0B-4D0FDFEC11A9}"/>
+                <a16:creationId xmlns:a16="http://schemas.microsoft.com/office/drawing/2014/main" id="{B0CC81C4-109E-43CE-A5C7-C45B4C579F9B}"/>
               </a:ext>
             </a:extLst>
           </p:cNvPr>
@@ -21556,7 +21556,7 @@
           <p:cNvPr id="91" name="contrast-3">
             <a:extLst xmlns:a="http://schemas.openxmlformats.org/drawingml/2006/main">
               <a:ext uri="{FF2B5EF4-FFF2-40B4-BE49-F238E27FC236}">
-                <a16:creationId xmlns:a16="http://schemas.microsoft.com/office/drawing/2014/main" id="{B8DA7652-E73B-4AC9-A112-B1C3207768BF}"/>
+                <a16:creationId xmlns:a16="http://schemas.microsoft.com/office/drawing/2014/main" id="{0B1697D3-BA5A-48E7-A19A-C6CE10CEC89E}"/>
               </a:ext>
             </a:extLst>
           </p:cNvPr>
@@ -21591,7 +21591,7 @@
           <p:cNvPr id="92" name="contrast-3-f">
             <a:extLst xmlns:a="http://schemas.openxmlformats.org/drawingml/2006/main">
               <a:ext uri="{FF2B5EF4-FFF2-40B4-BE49-F238E27FC236}">
-                <a16:creationId xmlns:a16="http://schemas.microsoft.com/office/drawing/2014/main" id="{17EEBA60-9CB2-4E8F-A5C2-87E6A79D44D4}"/>
+                <a16:creationId xmlns:a16="http://schemas.microsoft.com/office/drawing/2014/main" id="{FAA435F8-8329-4F62-820C-839E176F21E4}"/>
               </a:ext>
             </a:extLst>
           </p:cNvPr>
@@ -21653,7 +21653,7 @@
           <p:cNvPr id="93" name="contrast-3-n">
             <a:extLst xmlns:a="http://schemas.openxmlformats.org/drawingml/2006/main">
               <a:ext uri="{FF2B5EF4-FFF2-40B4-BE49-F238E27FC236}">
-                <a16:creationId xmlns:a16="http://schemas.microsoft.com/office/drawing/2014/main" id="{ED5B2D71-17E9-4BDB-9F42-A9F7A45A1BC4}"/>
+                <a16:creationId xmlns:a16="http://schemas.microsoft.com/office/drawing/2014/main" id="{5697D5D6-17E0-4FAD-90FA-DA536459D68B}"/>
               </a:ext>
             </a:extLst>
           </p:cNvPr>
@@ -21715,7 +21715,7 @@
           <p:cNvPr id="94" name="c-caveat">
             <a:extLst xmlns:a="http://schemas.openxmlformats.org/drawingml/2006/main">
               <a:ext uri="{FF2B5EF4-FFF2-40B4-BE49-F238E27FC236}">
-                <a16:creationId xmlns:a16="http://schemas.microsoft.com/office/drawing/2014/main" id="{DAF70C61-CBA8-42A8-BA44-9D22FDAA6FD1}"/>
+                <a16:creationId xmlns:a16="http://schemas.microsoft.com/office/drawing/2014/main" id="{3C7B8FFB-2859-4CC6-92EC-A1607C46A89C}"/>
               </a:ext>
             </a:extLst>
           </p:cNvPr>
@@ -22076,7 +22076,7 @@
     </p:spTree>
     <p:extLst>
       <p:ext uri="{BB962C8B-B14F-4D97-AF65-F5344CB8AC3E}">
-        <p14:creationId xmlns:p14="http://schemas.microsoft.com/office/powerpoint/2010/main" val="1687132337"/>
+        <p14:creationId xmlns:p14="http://schemas.microsoft.com/office/powerpoint/2010/main" val="723044856"/>
       </p:ext>
     </p:extLst>
   </p:cSld>
@@ -22107,7 +22107,7 @@
           <p:cNvPr id="267" name="band-a">
             <a:extLst xmlns:a="http://schemas.openxmlformats.org/drawingml/2006/main">
               <a:ext uri="{FF2B5EF4-FFF2-40B4-BE49-F238E27FC236}">
-                <a16:creationId xmlns:a16="http://schemas.microsoft.com/office/drawing/2014/main" id="{2EB12E24-119E-454F-9D40-2CC3B0B391B0}"/>
+                <a16:creationId xmlns:a16="http://schemas.microsoft.com/office/drawing/2014/main" id="{A43A6F1C-58AD-49BE-88CB-0DE54BF00DA5}"/>
               </a:ext>
             </a:extLst>
           </p:cNvPr>
@@ -22138,7 +22138,7 @@
           <p:cNvPr id="2" name="sec-a-chip">
             <a:extLst xmlns:a="http://schemas.openxmlformats.org/drawingml/2006/main">
               <a:ext uri="{FF2B5EF4-FFF2-40B4-BE49-F238E27FC236}">
-                <a16:creationId xmlns:a16="http://schemas.microsoft.com/office/drawing/2014/main" id="{652F7B8A-2788-4B53-A1F4-B75879BB50FF}"/>
+                <a16:creationId xmlns:a16="http://schemas.microsoft.com/office/drawing/2014/main" id="{E94B847C-4B5D-42F7-8894-E2BD6227D21C}"/>
               </a:ext>
             </a:extLst>
           </p:cNvPr>
@@ -22173,7 +22173,7 @@
           <p:cNvPr id="3" name="sec-a-chip-text">
             <a:extLst xmlns:a="http://schemas.openxmlformats.org/drawingml/2006/main">
               <a:ext uri="{FF2B5EF4-FFF2-40B4-BE49-F238E27FC236}">
-                <a16:creationId xmlns:a16="http://schemas.microsoft.com/office/drawing/2014/main" id="{70F1B8FA-525F-4E48-8185-D1997050F977}"/>
+                <a16:creationId xmlns:a16="http://schemas.microsoft.com/office/drawing/2014/main" id="{4BD8B574-F9AD-437A-A887-5C92C2483A6D}"/>
               </a:ext>
             </a:extLst>
           </p:cNvPr>
@@ -22235,7 +22235,7 @@
           <p:cNvPr id="4" name="sec-a">
             <a:extLst xmlns:a="http://schemas.openxmlformats.org/drawingml/2006/main">
               <a:ext uri="{FF2B5EF4-FFF2-40B4-BE49-F238E27FC236}">
-                <a16:creationId xmlns:a16="http://schemas.microsoft.com/office/drawing/2014/main" id="{0FEC0599-C11F-4F09-8F63-8F2A06C7DEFD}"/>
+                <a16:creationId xmlns:a16="http://schemas.microsoft.com/office/drawing/2014/main" id="{BAF426E7-4E10-4BA1-BADC-682F32C05FCC}"/>
               </a:ext>
             </a:extLst>
           </p:cNvPr>
@@ -22297,7 +22297,7 @@
           <p:cNvPr id="5" name="sec-a-sub">
             <a:extLst xmlns:a="http://schemas.openxmlformats.org/drawingml/2006/main">
               <a:ext uri="{FF2B5EF4-FFF2-40B4-BE49-F238E27FC236}">
-                <a16:creationId xmlns:a16="http://schemas.microsoft.com/office/drawing/2014/main" id="{242A33F0-DD7D-4796-BD5A-6719A4003ADA}"/>
+                <a16:creationId xmlns:a16="http://schemas.microsoft.com/office/drawing/2014/main" id="{CE7F5079-F81A-4BB8-B975-E97447DAB663}"/>
               </a:ext>
             </a:extLst>
           </p:cNvPr>
@@ -22469,7 +22469,7 @@
           <p:cNvPr id="6" name="e-tick--0.020">
             <a:extLst xmlns:a="http://schemas.openxmlformats.org/drawingml/2006/main">
               <a:ext uri="{FF2B5EF4-FFF2-40B4-BE49-F238E27FC236}">
-                <a16:creationId xmlns:a16="http://schemas.microsoft.com/office/drawing/2014/main" id="{B80D69FC-79A1-4A0B-AC4B-5E2A10AA5510}"/>
+                <a16:creationId xmlns:a16="http://schemas.microsoft.com/office/drawing/2014/main" id="{550E4DCA-E890-4E28-AB97-8670563A0452}"/>
               </a:ext>
             </a:extLst>
           </p:cNvPr>
@@ -22500,7 +22500,7 @@
           <p:cNvPr id="7" name="e-lab--0.020">
             <a:extLst xmlns:a="http://schemas.openxmlformats.org/drawingml/2006/main">
               <a:ext uri="{FF2B5EF4-FFF2-40B4-BE49-F238E27FC236}">
-                <a16:creationId xmlns:a16="http://schemas.microsoft.com/office/drawing/2014/main" id="{B3F477F3-2BAC-4086-A248-05244E0F64C0}"/>
+                <a16:creationId xmlns:a16="http://schemas.microsoft.com/office/drawing/2014/main" id="{80364727-3706-4296-8909-5A4C357F6D03}"/>
               </a:ext>
             </a:extLst>
           </p:cNvPr>
@@ -22562,7 +22562,7 @@
           <p:cNvPr id="8" name="e-tick-0.000">
             <a:extLst xmlns:a="http://schemas.openxmlformats.org/drawingml/2006/main">
               <a:ext uri="{FF2B5EF4-FFF2-40B4-BE49-F238E27FC236}">
-                <a16:creationId xmlns:a16="http://schemas.microsoft.com/office/drawing/2014/main" id="{AA475504-ECAC-48C0-9EB4-9B944C1F1043}"/>
+                <a16:creationId xmlns:a16="http://schemas.microsoft.com/office/drawing/2014/main" id="{363B8AFA-2F9D-42DC-B262-F83D28E3BD05}"/>
               </a:ext>
             </a:extLst>
           </p:cNvPr>
@@ -22593,7 +22593,7 @@
           <p:cNvPr id="9" name="e-lab-0.000">
             <a:extLst xmlns:a="http://schemas.openxmlformats.org/drawingml/2006/main">
               <a:ext uri="{FF2B5EF4-FFF2-40B4-BE49-F238E27FC236}">
-                <a16:creationId xmlns:a16="http://schemas.microsoft.com/office/drawing/2014/main" id="{C2EFEFEA-042A-4A6A-9D86-D36F8A92E806}"/>
+                <a16:creationId xmlns:a16="http://schemas.microsoft.com/office/drawing/2014/main" id="{4094DB03-8715-4B36-948E-02EDF3A362F0}"/>
               </a:ext>
             </a:extLst>
           </p:cNvPr>
@@ -22655,7 +22655,7 @@
           <p:cNvPr id="10" name="e-tick-0.020">
             <a:extLst xmlns:a="http://schemas.openxmlformats.org/drawingml/2006/main">
               <a:ext uri="{FF2B5EF4-FFF2-40B4-BE49-F238E27FC236}">
-                <a16:creationId xmlns:a16="http://schemas.microsoft.com/office/drawing/2014/main" id="{242C771C-3936-4604-A6D5-DF4C107ED93A}"/>
+                <a16:creationId xmlns:a16="http://schemas.microsoft.com/office/drawing/2014/main" id="{10234C42-9E26-46C2-B44F-84E0D81F8135}"/>
               </a:ext>
             </a:extLst>
           </p:cNvPr>
@@ -22686,7 +22686,7 @@
           <p:cNvPr id="11" name="e-lab-0.020">
             <a:extLst xmlns:a="http://schemas.openxmlformats.org/drawingml/2006/main">
               <a:ext uri="{FF2B5EF4-FFF2-40B4-BE49-F238E27FC236}">
-                <a16:creationId xmlns:a16="http://schemas.microsoft.com/office/drawing/2014/main" id="{1A3EE419-7E22-4127-B000-B85AC681618C}"/>
+                <a16:creationId xmlns:a16="http://schemas.microsoft.com/office/drawing/2014/main" id="{A3041ACD-9904-40E7-BFA2-7051D8B818DB}"/>
               </a:ext>
             </a:extLst>
           </p:cNvPr>
@@ -22748,7 +22748,7 @@
           <p:cNvPr id="12" name="e-tick-0.040">
             <a:extLst xmlns:a="http://schemas.openxmlformats.org/drawingml/2006/main">
               <a:ext uri="{FF2B5EF4-FFF2-40B4-BE49-F238E27FC236}">
-                <a16:creationId xmlns:a16="http://schemas.microsoft.com/office/drawing/2014/main" id="{0BFEBF0C-5B26-4146-BE0F-853107015821}"/>
+                <a16:creationId xmlns:a16="http://schemas.microsoft.com/office/drawing/2014/main" id="{2594A85A-F6EC-4900-B8DC-7BA92F52487A}"/>
               </a:ext>
             </a:extLst>
           </p:cNvPr>
@@ -22779,7 +22779,7 @@
           <p:cNvPr id="13" name="e-lab-0.040">
             <a:extLst xmlns:a="http://schemas.openxmlformats.org/drawingml/2006/main">
               <a:ext uri="{FF2B5EF4-FFF2-40B4-BE49-F238E27FC236}">
-                <a16:creationId xmlns:a16="http://schemas.microsoft.com/office/drawing/2014/main" id="{3692AC42-2AC2-443B-B569-9A329804E98E}"/>
+                <a16:creationId xmlns:a16="http://schemas.microsoft.com/office/drawing/2014/main" id="{4B828CE0-21C7-4FBB-B704-A5AF31E5755B}"/>
               </a:ext>
             </a:extLst>
           </p:cNvPr>
@@ -22841,7 +22841,7 @@
           <p:cNvPr id="14" name="e-tick-0.060">
             <a:extLst xmlns:a="http://schemas.openxmlformats.org/drawingml/2006/main">
               <a:ext uri="{FF2B5EF4-FFF2-40B4-BE49-F238E27FC236}">
-                <a16:creationId xmlns:a16="http://schemas.microsoft.com/office/drawing/2014/main" id="{7365B885-1D2F-4769-B6D1-07FFD0DB1F80}"/>
+                <a16:creationId xmlns:a16="http://schemas.microsoft.com/office/drawing/2014/main" id="{C92673F4-01A7-419B-981C-BFD837BC096F}"/>
               </a:ext>
             </a:extLst>
           </p:cNvPr>
@@ -22872,7 +22872,7 @@
           <p:cNvPr id="15" name="e-lab-0.060">
             <a:extLst xmlns:a="http://schemas.openxmlformats.org/drawingml/2006/main">
               <a:ext uri="{FF2B5EF4-FFF2-40B4-BE49-F238E27FC236}">
-                <a16:creationId xmlns:a16="http://schemas.microsoft.com/office/drawing/2014/main" id="{8C8DA350-0485-4847-87C3-7AE35F6A9B61}"/>
+                <a16:creationId xmlns:a16="http://schemas.microsoft.com/office/drawing/2014/main" id="{0CE07D51-3997-4C37-B1CE-4C582432A5E1}"/>
               </a:ext>
             </a:extLst>
           </p:cNvPr>
@@ -22934,7 +22934,7 @@
           <p:cNvPr id="16" name="e-zero">
             <a:extLst xmlns:a="http://schemas.openxmlformats.org/drawingml/2006/main">
               <a:ext uri="{FF2B5EF4-FFF2-40B4-BE49-F238E27FC236}">
-                <a16:creationId xmlns:a16="http://schemas.microsoft.com/office/drawing/2014/main" id="{84170ADB-1ED9-485C-85BE-941E90B6FD23}"/>
+                <a16:creationId xmlns:a16="http://schemas.microsoft.com/office/drawing/2014/main" id="{0F66B167-0F92-4C8A-83A7-E5796A606AB4}"/>
               </a:ext>
             </a:extLst>
           </p:cNvPr>
@@ -22965,7 +22965,7 @@
           <p:cNvPr id="17" name="e-scale">
             <a:extLst xmlns:a="http://schemas.openxmlformats.org/drawingml/2006/main">
               <a:ext uri="{FF2B5EF4-FFF2-40B4-BE49-F238E27FC236}">
-                <a16:creationId xmlns:a16="http://schemas.microsoft.com/office/drawing/2014/main" id="{637C5210-F828-4F60-B3F4-939E25CF9946}"/>
+                <a16:creationId xmlns:a16="http://schemas.microsoft.com/office/drawing/2014/main" id="{53A624AD-39F5-455B-996D-9ACAAAC81F2B}"/>
               </a:ext>
             </a:extLst>
           </p:cNvPr>
@@ -22996,7 +22996,7 @@
           <p:cNvPr id="18" name="e-key-S">
             <a:extLst xmlns:a="http://schemas.openxmlformats.org/drawingml/2006/main">
               <a:ext uri="{FF2B5EF4-FFF2-40B4-BE49-F238E27FC236}">
-                <a16:creationId xmlns:a16="http://schemas.microsoft.com/office/drawing/2014/main" id="{648E2EC7-5A64-450D-A1AD-299EB584AB92}"/>
+                <a16:creationId xmlns:a16="http://schemas.microsoft.com/office/drawing/2014/main" id="{5877FEC6-724F-42C9-A0A0-702161585765}"/>
               </a:ext>
             </a:extLst>
           </p:cNvPr>
@@ -23031,7 +23031,7 @@
           <p:cNvPr id="19" name="e-key-lab-S">
             <a:extLst xmlns:a="http://schemas.openxmlformats.org/drawingml/2006/main">
               <a:ext uri="{FF2B5EF4-FFF2-40B4-BE49-F238E27FC236}">
-                <a16:creationId xmlns:a16="http://schemas.microsoft.com/office/drawing/2014/main" id="{7D3C099F-E235-4AA3-A93E-29FF9934E1A9}"/>
+                <a16:creationId xmlns:a16="http://schemas.microsoft.com/office/drawing/2014/main" id="{7642349F-6C5D-47EC-9778-372B4123B4F7}"/>
               </a:ext>
             </a:extLst>
           </p:cNvPr>
@@ -23093,7 +23093,7 @@
           <p:cNvPr id="20" name="e-key-D">
             <a:extLst xmlns:a="http://schemas.openxmlformats.org/drawingml/2006/main">
               <a:ext uri="{FF2B5EF4-FFF2-40B4-BE49-F238E27FC236}">
-                <a16:creationId xmlns:a16="http://schemas.microsoft.com/office/drawing/2014/main" id="{E3A881DD-4AD9-4C86-9240-06FEFB81D27F}"/>
+                <a16:creationId xmlns:a16="http://schemas.microsoft.com/office/drawing/2014/main" id="{51E143FE-0D78-441C-AC03-70BB2C0A9B23}"/>
               </a:ext>
             </a:extLst>
           </p:cNvPr>
@@ -23128,7 +23128,7 @@
           <p:cNvPr id="21" name="e-key-lab-D">
             <a:extLst xmlns:a="http://schemas.openxmlformats.org/drawingml/2006/main">
               <a:ext uri="{FF2B5EF4-FFF2-40B4-BE49-F238E27FC236}">
-                <a16:creationId xmlns:a16="http://schemas.microsoft.com/office/drawing/2014/main" id="{6B74EFDE-ECCC-4945-B287-84E69CC05558}"/>
+                <a16:creationId xmlns:a16="http://schemas.microsoft.com/office/drawing/2014/main" id="{3711243F-38D8-4834-B2F7-42B224EA4BFB}"/>
               </a:ext>
             </a:extLst>
           </p:cNvPr>
@@ -23190,7 +23190,7 @@
           <p:cNvPr id="22" name="e0-label">
             <a:extLst xmlns:a="http://schemas.openxmlformats.org/drawingml/2006/main">
               <a:ext uri="{FF2B5EF4-FFF2-40B4-BE49-F238E27FC236}">
-                <a16:creationId xmlns:a16="http://schemas.microsoft.com/office/drawing/2014/main" id="{846D6553-4013-414E-A5E8-675D0011ED76}"/>
+                <a16:creationId xmlns:a16="http://schemas.microsoft.com/office/drawing/2014/main" id="{B194216C-B76F-4336-9EF2-B6960FE9D607}"/>
               </a:ext>
             </a:extLst>
           </p:cNvPr>
@@ -23285,7 +23285,7 @@
           <p:cNvPr id="23" name="e0-S-bar">
             <a:extLst xmlns:a="http://schemas.openxmlformats.org/drawingml/2006/main">
               <a:ext uri="{FF2B5EF4-FFF2-40B4-BE49-F238E27FC236}">
-                <a16:creationId xmlns:a16="http://schemas.microsoft.com/office/drawing/2014/main" id="{5B1AC085-365E-4DE7-B313-0DD154657490}"/>
+                <a16:creationId xmlns:a16="http://schemas.microsoft.com/office/drawing/2014/main" id="{00768767-ED53-41FD-8E7C-1B9E6046639F}"/>
               </a:ext>
             </a:extLst>
           </p:cNvPr>
@@ -23316,7 +23316,7 @@
           <p:cNvPr id="24" name="e0-S-ci">
             <a:extLst xmlns:a="http://schemas.openxmlformats.org/drawingml/2006/main">
               <a:ext uri="{FF2B5EF4-FFF2-40B4-BE49-F238E27FC236}">
-                <a16:creationId xmlns:a16="http://schemas.microsoft.com/office/drawing/2014/main" id="{020B43E4-538D-4686-97BC-2D057E537E51}"/>
+                <a16:creationId xmlns:a16="http://schemas.microsoft.com/office/drawing/2014/main" id="{AFD1195D-CA55-43A5-A867-ED8EB71A4086}"/>
               </a:ext>
             </a:extLst>
           </p:cNvPr>
@@ -23347,7 +23347,7 @@
           <p:cNvPr id="25" name="e0-S-cil">
             <a:extLst xmlns:a="http://schemas.openxmlformats.org/drawingml/2006/main">
               <a:ext uri="{FF2B5EF4-FFF2-40B4-BE49-F238E27FC236}">
-                <a16:creationId xmlns:a16="http://schemas.microsoft.com/office/drawing/2014/main" id="{5DB6342F-26EB-4D7D-B62E-45A9C1080544}"/>
+                <a16:creationId xmlns:a16="http://schemas.microsoft.com/office/drawing/2014/main" id="{E48756D7-39D6-47A0-96AF-F0692E6BE775}"/>
               </a:ext>
             </a:extLst>
           </p:cNvPr>
@@ -23378,7 +23378,7 @@
           <p:cNvPr id="26" name="e0-S-cih">
             <a:extLst xmlns:a="http://schemas.openxmlformats.org/drawingml/2006/main">
               <a:ext uri="{FF2B5EF4-FFF2-40B4-BE49-F238E27FC236}">
-                <a16:creationId xmlns:a16="http://schemas.microsoft.com/office/drawing/2014/main" id="{2CD7FB98-7207-4085-9025-0F46C63856C5}"/>
+                <a16:creationId xmlns:a16="http://schemas.microsoft.com/office/drawing/2014/main" id="{5025FD82-3B47-4341-9790-DB118296C8B9}"/>
               </a:ext>
             </a:extLst>
           </p:cNvPr>
@@ -23409,7 +23409,7 @@
           <p:cNvPr id="27" name="e0-S-mark">
             <a:extLst xmlns:a="http://schemas.openxmlformats.org/drawingml/2006/main">
               <a:ext uri="{FF2B5EF4-FFF2-40B4-BE49-F238E27FC236}">
-                <a16:creationId xmlns:a16="http://schemas.microsoft.com/office/drawing/2014/main" id="{B65A80A8-B030-4731-9F9A-0AAC614009FD}"/>
+                <a16:creationId xmlns:a16="http://schemas.microsoft.com/office/drawing/2014/main" id="{755B1EA6-0515-4764-B168-845C149348EA}"/>
               </a:ext>
             </a:extLst>
           </p:cNvPr>
@@ -23440,7 +23440,7 @@
           <p:cNvPr id="28" name="e0-D-bar">
             <a:extLst xmlns:a="http://schemas.openxmlformats.org/drawingml/2006/main">
               <a:ext uri="{FF2B5EF4-FFF2-40B4-BE49-F238E27FC236}">
-                <a16:creationId xmlns:a16="http://schemas.microsoft.com/office/drawing/2014/main" id="{52874567-AA76-4B18-97A5-D8BADA0D0C97}"/>
+                <a16:creationId xmlns:a16="http://schemas.microsoft.com/office/drawing/2014/main" id="{F41B3326-24E8-4B1F-9D70-B45598C0C343}"/>
               </a:ext>
             </a:extLst>
           </p:cNvPr>
@@ -23471,7 +23471,7 @@
           <p:cNvPr id="29" name="e0-D-ci">
             <a:extLst xmlns:a="http://schemas.openxmlformats.org/drawingml/2006/main">
               <a:ext uri="{FF2B5EF4-FFF2-40B4-BE49-F238E27FC236}">
-                <a16:creationId xmlns:a16="http://schemas.microsoft.com/office/drawing/2014/main" id="{CA729AE7-F607-4FED-8374-CD26B29B751C}"/>
+                <a16:creationId xmlns:a16="http://schemas.microsoft.com/office/drawing/2014/main" id="{733B8E1F-D32F-4821-B326-03168AAEFF42}"/>
               </a:ext>
             </a:extLst>
           </p:cNvPr>
@@ -23502,7 +23502,7 @@
           <p:cNvPr id="30" name="e0-D-cil">
             <a:extLst xmlns:a="http://schemas.openxmlformats.org/drawingml/2006/main">
               <a:ext uri="{FF2B5EF4-FFF2-40B4-BE49-F238E27FC236}">
-                <a16:creationId xmlns:a16="http://schemas.microsoft.com/office/drawing/2014/main" id="{CCF718A1-355D-459E-AA8D-D1D0CE6A90F0}"/>
+                <a16:creationId xmlns:a16="http://schemas.microsoft.com/office/drawing/2014/main" id="{80F8473E-3797-4928-86D7-17475FE07328}"/>
               </a:ext>
             </a:extLst>
           </p:cNvPr>
@@ -23533,7 +23533,7 @@
           <p:cNvPr id="31" name="e0-D-cih">
             <a:extLst xmlns:a="http://schemas.openxmlformats.org/drawingml/2006/main">
               <a:ext uri="{FF2B5EF4-FFF2-40B4-BE49-F238E27FC236}">
-                <a16:creationId xmlns:a16="http://schemas.microsoft.com/office/drawing/2014/main" id="{A026AC27-B957-43DF-B564-4E927EBF34F2}"/>
+                <a16:creationId xmlns:a16="http://schemas.microsoft.com/office/drawing/2014/main" id="{6DB10B81-BE0C-44C0-AFB3-89D11A9E2B53}"/>
               </a:ext>
             </a:extLst>
           </p:cNvPr>
@@ -23564,7 +23564,7 @@
           <p:cNvPr id="32" name="e0-D-mark">
             <a:extLst xmlns:a="http://schemas.openxmlformats.org/drawingml/2006/main">
               <a:ext uri="{FF2B5EF4-FFF2-40B4-BE49-F238E27FC236}">
-                <a16:creationId xmlns:a16="http://schemas.microsoft.com/office/drawing/2014/main" id="{3E842989-7D7C-4CB2-B61C-77141AB284B1}"/>
+                <a16:creationId xmlns:a16="http://schemas.microsoft.com/office/drawing/2014/main" id="{1299A818-D9CA-4D4A-9E96-75E56369D015}"/>
               </a:ext>
             </a:extLst>
           </p:cNvPr>
@@ -23595,7 +23595,7 @@
           <p:cNvPr id="33" name="e1-label">
             <a:extLst xmlns:a="http://schemas.openxmlformats.org/drawingml/2006/main">
               <a:ext uri="{FF2B5EF4-FFF2-40B4-BE49-F238E27FC236}">
-                <a16:creationId xmlns:a16="http://schemas.microsoft.com/office/drawing/2014/main" id="{FD4AEF98-277E-46E9-A8DE-F17ACA50F5F3}"/>
+                <a16:creationId xmlns:a16="http://schemas.microsoft.com/office/drawing/2014/main" id="{31487087-736C-4FF4-AF64-417A736839C6}"/>
               </a:ext>
             </a:extLst>
           </p:cNvPr>
@@ -23690,7 +23690,7 @@
           <p:cNvPr id="34" name="e1-S-bar">
             <a:extLst xmlns:a="http://schemas.openxmlformats.org/drawingml/2006/main">
               <a:ext uri="{FF2B5EF4-FFF2-40B4-BE49-F238E27FC236}">
-                <a16:creationId xmlns:a16="http://schemas.microsoft.com/office/drawing/2014/main" id="{A1958C2E-9A6E-49EF-BAEE-7B08B36E4687}"/>
+                <a16:creationId xmlns:a16="http://schemas.microsoft.com/office/drawing/2014/main" id="{5FB46B27-9075-4200-956F-2F2A7E8C011E}"/>
               </a:ext>
             </a:extLst>
           </p:cNvPr>
@@ -23721,7 +23721,7 @@
           <p:cNvPr id="35" name="e1-S-ci">
             <a:extLst xmlns:a="http://schemas.openxmlformats.org/drawingml/2006/main">
               <a:ext uri="{FF2B5EF4-FFF2-40B4-BE49-F238E27FC236}">
-                <a16:creationId xmlns:a16="http://schemas.microsoft.com/office/drawing/2014/main" id="{EBDF6D80-1A9C-4D72-80F1-60FC0292AABF}"/>
+                <a16:creationId xmlns:a16="http://schemas.microsoft.com/office/drawing/2014/main" id="{39F2553D-E654-4E8D-8C89-BE42F7EEF15E}"/>
               </a:ext>
             </a:extLst>
           </p:cNvPr>
@@ -23752,7 +23752,7 @@
           <p:cNvPr id="36" name="e1-S-cil">
             <a:extLst xmlns:a="http://schemas.openxmlformats.org/drawingml/2006/main">
               <a:ext uri="{FF2B5EF4-FFF2-40B4-BE49-F238E27FC236}">
-                <a16:creationId xmlns:a16="http://schemas.microsoft.com/office/drawing/2014/main" id="{68F3C3AE-8CA7-44ED-9B7C-9E131CB0D2D6}"/>
+                <a16:creationId xmlns:a16="http://schemas.microsoft.com/office/drawing/2014/main" id="{280960C6-6AB9-4E52-8323-942101CF2C25}"/>
               </a:ext>
             </a:extLst>
           </p:cNvPr>
@@ -23783,7 +23783,7 @@
           <p:cNvPr id="37" name="e1-S-cih">
             <a:extLst xmlns:a="http://schemas.openxmlformats.org/drawingml/2006/main">
               <a:ext uri="{FF2B5EF4-FFF2-40B4-BE49-F238E27FC236}">
-                <a16:creationId xmlns:a16="http://schemas.microsoft.com/office/drawing/2014/main" id="{6E44E6AD-357F-4E0A-8909-5C912851323F}"/>
+                <a16:creationId xmlns:a16="http://schemas.microsoft.com/office/drawing/2014/main" id="{8DDA9D05-2DD3-43B7-96FB-C5232DB542F7}"/>
               </a:ext>
             </a:extLst>
           </p:cNvPr>
@@ -23814,7 +23814,7 @@
           <p:cNvPr id="38" name="e1-S-mark">
             <a:extLst xmlns:a="http://schemas.openxmlformats.org/drawingml/2006/main">
               <a:ext uri="{FF2B5EF4-FFF2-40B4-BE49-F238E27FC236}">
-                <a16:creationId xmlns:a16="http://schemas.microsoft.com/office/drawing/2014/main" id="{0D13E958-81C2-49FE-BA49-94A6ED126CBF}"/>
+                <a16:creationId xmlns:a16="http://schemas.microsoft.com/office/drawing/2014/main" id="{AA85194C-514B-4CC0-A216-8C158A11003A}"/>
               </a:ext>
             </a:extLst>
           </p:cNvPr>
@@ -23845,7 +23845,7 @@
           <p:cNvPr id="39" name="e1-D-bar">
             <a:extLst xmlns:a="http://schemas.openxmlformats.org/drawingml/2006/main">
               <a:ext uri="{FF2B5EF4-FFF2-40B4-BE49-F238E27FC236}">
-                <a16:creationId xmlns:a16="http://schemas.microsoft.com/office/drawing/2014/main" id="{FC1C6432-5267-47EB-B0A8-4E7382637B09}"/>
+                <a16:creationId xmlns:a16="http://schemas.microsoft.com/office/drawing/2014/main" id="{9CB0457A-6B59-4B3E-A3A2-76D1D89D87B3}"/>
               </a:ext>
             </a:extLst>
           </p:cNvPr>
@@ -23876,7 +23876,7 @@
           <p:cNvPr id="40" name="e1-D-ci">
             <a:extLst xmlns:a="http://schemas.openxmlformats.org/drawingml/2006/main">
               <a:ext uri="{FF2B5EF4-FFF2-40B4-BE49-F238E27FC236}">
-                <a16:creationId xmlns:a16="http://schemas.microsoft.com/office/drawing/2014/main" id="{3C312919-1AA8-4EA3-8CC1-2FBD8C1D6F5B}"/>
+                <a16:creationId xmlns:a16="http://schemas.microsoft.com/office/drawing/2014/main" id="{8B168742-26B9-4103-BE16-13312D96D128}"/>
               </a:ext>
             </a:extLst>
           </p:cNvPr>
@@ -23907,7 +23907,7 @@
           <p:cNvPr id="41" name="e1-D-cil">
             <a:extLst xmlns:a="http://schemas.openxmlformats.org/drawingml/2006/main">
               <a:ext uri="{FF2B5EF4-FFF2-40B4-BE49-F238E27FC236}">
-                <a16:creationId xmlns:a16="http://schemas.microsoft.com/office/drawing/2014/main" id="{FFE6746D-24C6-49BF-8512-4D0862CBB0ED}"/>
+                <a16:creationId xmlns:a16="http://schemas.microsoft.com/office/drawing/2014/main" id="{1F88E2E8-0163-48FE-983F-29CE41C3C8CD}"/>
               </a:ext>
             </a:extLst>
           </p:cNvPr>
@@ -23938,7 +23938,7 @@
           <p:cNvPr id="42" name="e1-D-cih">
             <a:extLst xmlns:a="http://schemas.openxmlformats.org/drawingml/2006/main">
               <a:ext uri="{FF2B5EF4-FFF2-40B4-BE49-F238E27FC236}">
-                <a16:creationId xmlns:a16="http://schemas.microsoft.com/office/drawing/2014/main" id="{E8DFB2E4-6F7E-41CC-842E-4697FAD405A9}"/>
+                <a16:creationId xmlns:a16="http://schemas.microsoft.com/office/drawing/2014/main" id="{91C9F357-535E-47C4-A740-68D80959508E}"/>
               </a:ext>
             </a:extLst>
           </p:cNvPr>
@@ -23969,7 +23969,7 @@
           <p:cNvPr id="43" name="e1-D-mark">
             <a:extLst xmlns:a="http://schemas.openxmlformats.org/drawingml/2006/main">
               <a:ext uri="{FF2B5EF4-FFF2-40B4-BE49-F238E27FC236}">
-                <a16:creationId xmlns:a16="http://schemas.microsoft.com/office/drawing/2014/main" id="{7952515B-01E0-473C-AE84-454926F4037B}"/>
+                <a16:creationId xmlns:a16="http://schemas.microsoft.com/office/drawing/2014/main" id="{875B762D-5FF6-4C26-BAE8-48F9D8DCC7CA}"/>
               </a:ext>
             </a:extLst>
           </p:cNvPr>
@@ -24000,7 +24000,7 @@
           <p:cNvPr id="44" name="e2-label">
             <a:extLst xmlns:a="http://schemas.openxmlformats.org/drawingml/2006/main">
               <a:ext uri="{FF2B5EF4-FFF2-40B4-BE49-F238E27FC236}">
-                <a16:creationId xmlns:a16="http://schemas.microsoft.com/office/drawing/2014/main" id="{BCE245F5-2A88-4F9D-8554-428CF4CC99F3}"/>
+                <a16:creationId xmlns:a16="http://schemas.microsoft.com/office/drawing/2014/main" id="{142B1B2E-236F-4F08-800B-E8DFCB46FEDB}"/>
               </a:ext>
             </a:extLst>
           </p:cNvPr>
@@ -24095,7 +24095,7 @@
           <p:cNvPr id="45" name="e2-S-bar">
             <a:extLst xmlns:a="http://schemas.openxmlformats.org/drawingml/2006/main">
               <a:ext uri="{FF2B5EF4-FFF2-40B4-BE49-F238E27FC236}">
-                <a16:creationId xmlns:a16="http://schemas.microsoft.com/office/drawing/2014/main" id="{63908AB2-C2C1-443A-A612-7DB361E891BE}"/>
+                <a16:creationId xmlns:a16="http://schemas.microsoft.com/office/drawing/2014/main" id="{27DCD4CE-826C-47E1-BC8D-D7B5B35DEADC}"/>
               </a:ext>
             </a:extLst>
           </p:cNvPr>
@@ -24126,7 +24126,7 @@
           <p:cNvPr id="46" name="e2-S-ci">
             <a:extLst xmlns:a="http://schemas.openxmlformats.org/drawingml/2006/main">
               <a:ext uri="{FF2B5EF4-FFF2-40B4-BE49-F238E27FC236}">
-                <a16:creationId xmlns:a16="http://schemas.microsoft.com/office/drawing/2014/main" id="{7335893B-5564-426D-BED3-CA0C2EC3C3E2}"/>
+                <a16:creationId xmlns:a16="http://schemas.microsoft.com/office/drawing/2014/main" id="{9CD354E5-313A-43C6-B8BB-2F8AD84AC192}"/>
               </a:ext>
             </a:extLst>
           </p:cNvPr>
@@ -24157,7 +24157,7 @@
           <p:cNvPr id="47" name="e2-S-cil">
             <a:extLst xmlns:a="http://schemas.openxmlformats.org/drawingml/2006/main">
               <a:ext uri="{FF2B5EF4-FFF2-40B4-BE49-F238E27FC236}">
-                <a16:creationId xmlns:a16="http://schemas.microsoft.com/office/drawing/2014/main" id="{E9E97A3C-02FB-440E-B4F9-4B044BB81200}"/>
+                <a16:creationId xmlns:a16="http://schemas.microsoft.com/office/drawing/2014/main" id="{7A771292-35EA-4EA0-9C51-71E2AC06B1F4}"/>
               </a:ext>
             </a:extLst>
           </p:cNvPr>
@@ -24188,7 +24188,7 @@
           <p:cNvPr id="48" name="e2-S-cih">
             <a:extLst xmlns:a="http://schemas.openxmlformats.org/drawingml/2006/main">
               <a:ext uri="{FF2B5EF4-FFF2-40B4-BE49-F238E27FC236}">
-                <a16:creationId xmlns:a16="http://schemas.microsoft.com/office/drawing/2014/main" id="{1616D910-02D8-4CC7-A2D6-3B51F00031AC}"/>
+                <a16:creationId xmlns:a16="http://schemas.microsoft.com/office/drawing/2014/main" id="{56303545-56B4-45A0-B0F4-77E976D7D7A7}"/>
               </a:ext>
             </a:extLst>
           </p:cNvPr>
@@ -24219,7 +24219,7 @@
           <p:cNvPr id="49" name="e2-S-mark">
             <a:extLst xmlns:a="http://schemas.openxmlformats.org/drawingml/2006/main">
               <a:ext uri="{FF2B5EF4-FFF2-40B4-BE49-F238E27FC236}">
-                <a16:creationId xmlns:a16="http://schemas.microsoft.com/office/drawing/2014/main" id="{B7A07B65-9DB6-4682-AA45-CB8A958EE72B}"/>
+                <a16:creationId xmlns:a16="http://schemas.microsoft.com/office/drawing/2014/main" id="{CC30BD76-DA0F-48B2-8A84-9F63DC33AA3B}"/>
               </a:ext>
             </a:extLst>
           </p:cNvPr>
@@ -24250,7 +24250,7 @@
           <p:cNvPr id="50" name="e2-D-bar">
             <a:extLst xmlns:a="http://schemas.openxmlformats.org/drawingml/2006/main">
               <a:ext uri="{FF2B5EF4-FFF2-40B4-BE49-F238E27FC236}">
-                <a16:creationId xmlns:a16="http://schemas.microsoft.com/office/drawing/2014/main" id="{1A421186-218D-426A-A57C-BE3EFF28E242}"/>
+                <a16:creationId xmlns:a16="http://schemas.microsoft.com/office/drawing/2014/main" id="{056F58B8-F24E-41F7-ACB4-5FB81E430486}"/>
               </a:ext>
             </a:extLst>
           </p:cNvPr>
@@ -24281,7 +24281,7 @@
           <p:cNvPr id="51" name="e2-D-ci">
             <a:extLst xmlns:a="http://schemas.openxmlformats.org/drawingml/2006/main">
               <a:ext uri="{FF2B5EF4-FFF2-40B4-BE49-F238E27FC236}">
-                <a16:creationId xmlns:a16="http://schemas.microsoft.com/office/drawing/2014/main" id="{FA0844EB-315F-49FA-9F71-DC9ED1D9505D}"/>
+                <a16:creationId xmlns:a16="http://schemas.microsoft.com/office/drawing/2014/main" id="{96D1526B-9414-4F15-B763-393655793F3B}"/>
               </a:ext>
             </a:extLst>
           </p:cNvPr>
@@ -24312,7 +24312,7 @@
           <p:cNvPr id="52" name="e2-D-cil">
             <a:extLst xmlns:a="http://schemas.openxmlformats.org/drawingml/2006/main">
               <a:ext uri="{FF2B5EF4-FFF2-40B4-BE49-F238E27FC236}">
-                <a16:creationId xmlns:a16="http://schemas.microsoft.com/office/drawing/2014/main" id="{11FF5746-BC61-4569-97B4-22C1D8C046ED}"/>
+                <a16:creationId xmlns:a16="http://schemas.microsoft.com/office/drawing/2014/main" id="{D90E3364-5FE2-475D-842F-4C555B8A0D79}"/>
               </a:ext>
             </a:extLst>
           </p:cNvPr>
@@ -24343,7 +24343,7 @@
           <p:cNvPr id="53" name="e2-D-cih">
             <a:extLst xmlns:a="http://schemas.openxmlformats.org/drawingml/2006/main">
               <a:ext uri="{FF2B5EF4-FFF2-40B4-BE49-F238E27FC236}">
-                <a16:creationId xmlns:a16="http://schemas.microsoft.com/office/drawing/2014/main" id="{CDBEE2AB-0EC3-429C-B922-8D482C5E623B}"/>
+                <a16:creationId xmlns:a16="http://schemas.microsoft.com/office/drawing/2014/main" id="{89A2D218-F70F-4A2D-BAB4-93E3F6BE6C40}"/>
               </a:ext>
             </a:extLst>
           </p:cNvPr>
@@ -24374,7 +24374,7 @@
           <p:cNvPr id="54" name="e2-D-mark">
             <a:extLst xmlns:a="http://schemas.openxmlformats.org/drawingml/2006/main">
               <a:ext uri="{FF2B5EF4-FFF2-40B4-BE49-F238E27FC236}">
-                <a16:creationId xmlns:a16="http://schemas.microsoft.com/office/drawing/2014/main" id="{73EEAFE8-AD56-4F8E-9DBB-7C489C85E93D}"/>
+                <a16:creationId xmlns:a16="http://schemas.microsoft.com/office/drawing/2014/main" id="{643D5E58-7C64-413B-BFDA-B3A3B96CF19B}"/>
               </a:ext>
             </a:extLst>
           </p:cNvPr>
@@ -24405,7 +24405,7 @@
           <p:cNvPr id="55" name="e3-label">
             <a:extLst xmlns:a="http://schemas.openxmlformats.org/drawingml/2006/main">
               <a:ext uri="{FF2B5EF4-FFF2-40B4-BE49-F238E27FC236}">
-                <a16:creationId xmlns:a16="http://schemas.microsoft.com/office/drawing/2014/main" id="{57105853-343F-46EE-A9C2-AE15E9B5CF6A}"/>
+                <a16:creationId xmlns:a16="http://schemas.microsoft.com/office/drawing/2014/main" id="{C4FCF05F-62B6-4029-AA64-6FFDFE97E1F0}"/>
               </a:ext>
             </a:extLst>
           </p:cNvPr>
@@ -24500,7 +24500,7 @@
           <p:cNvPr id="56" name="e3-S-bar">
             <a:extLst xmlns:a="http://schemas.openxmlformats.org/drawingml/2006/main">
               <a:ext uri="{FF2B5EF4-FFF2-40B4-BE49-F238E27FC236}">
-                <a16:creationId xmlns:a16="http://schemas.microsoft.com/office/drawing/2014/main" id="{8BCAE1A7-E537-4C2F-A66B-11B4FC213E72}"/>
+                <a16:creationId xmlns:a16="http://schemas.microsoft.com/office/drawing/2014/main" id="{30EFB137-AA35-4CD3-B208-C9B34F09C2A1}"/>
               </a:ext>
             </a:extLst>
           </p:cNvPr>
@@ -24531,7 +24531,7 @@
           <p:cNvPr id="57" name="e3-S-ci">
             <a:extLst xmlns:a="http://schemas.openxmlformats.org/drawingml/2006/main">
               <a:ext uri="{FF2B5EF4-FFF2-40B4-BE49-F238E27FC236}">
-                <a16:creationId xmlns:a16="http://schemas.microsoft.com/office/drawing/2014/main" id="{BB7A2094-D58C-41CA-80A8-AD12AE82CC05}"/>
+                <a16:creationId xmlns:a16="http://schemas.microsoft.com/office/drawing/2014/main" id="{C049AF3C-C6CE-4F8D-9665-2984B8403D3C}"/>
               </a:ext>
             </a:extLst>
           </p:cNvPr>
@@ -24562,7 +24562,7 @@
           <p:cNvPr id="58" name="e3-S-cil">
             <a:extLst xmlns:a="http://schemas.openxmlformats.org/drawingml/2006/main">
               <a:ext uri="{FF2B5EF4-FFF2-40B4-BE49-F238E27FC236}">
-                <a16:creationId xmlns:a16="http://schemas.microsoft.com/office/drawing/2014/main" id="{5309957F-62DB-4C91-AAEB-9415CDDC465F}"/>
+                <a16:creationId xmlns:a16="http://schemas.microsoft.com/office/drawing/2014/main" id="{C341C601-AA7C-4649-9734-FAA306A665CD}"/>
               </a:ext>
             </a:extLst>
           </p:cNvPr>
@@ -24593,7 +24593,7 @@
           <p:cNvPr id="59" name="e3-S-cih">
             <a:extLst xmlns:a="http://schemas.openxmlformats.org/drawingml/2006/main">
               <a:ext uri="{FF2B5EF4-FFF2-40B4-BE49-F238E27FC236}">
-                <a16:creationId xmlns:a16="http://schemas.microsoft.com/office/drawing/2014/main" id="{ADAEB1A5-3CD4-4F87-BC22-1532156BC83D}"/>
+                <a16:creationId xmlns:a16="http://schemas.microsoft.com/office/drawing/2014/main" id="{9D1515B5-185B-4186-B38F-3046A8FCD430}"/>
               </a:ext>
             </a:extLst>
           </p:cNvPr>
@@ -24624,7 +24624,7 @@
           <p:cNvPr id="60" name="e3-S-mark">
             <a:extLst xmlns:a="http://schemas.openxmlformats.org/drawingml/2006/main">
               <a:ext uri="{FF2B5EF4-FFF2-40B4-BE49-F238E27FC236}">
-                <a16:creationId xmlns:a16="http://schemas.microsoft.com/office/drawing/2014/main" id="{4391FF60-5DFE-4570-81A1-FF7908599B07}"/>
+                <a16:creationId xmlns:a16="http://schemas.microsoft.com/office/drawing/2014/main" id="{B7282DA1-2EC0-4DA3-B690-425EC0BC7ACD}"/>
               </a:ext>
             </a:extLst>
           </p:cNvPr>
@@ -24655,7 +24655,7 @@
           <p:cNvPr id="61" name="e3-D-bar">
             <a:extLst xmlns:a="http://schemas.openxmlformats.org/drawingml/2006/main">
               <a:ext uri="{FF2B5EF4-FFF2-40B4-BE49-F238E27FC236}">
-                <a16:creationId xmlns:a16="http://schemas.microsoft.com/office/drawing/2014/main" id="{8FFDD7A9-4BCC-44EC-B282-C35968B6ACCF}"/>
+                <a16:creationId xmlns:a16="http://schemas.microsoft.com/office/drawing/2014/main" id="{47225ED9-6C23-406F-B068-3246C17568CC}"/>
               </a:ext>
             </a:extLst>
           </p:cNvPr>
@@ -24686,7 +24686,7 @@
           <p:cNvPr id="62" name="e3-D-ci">
             <a:extLst xmlns:a="http://schemas.openxmlformats.org/drawingml/2006/main">
               <a:ext uri="{FF2B5EF4-FFF2-40B4-BE49-F238E27FC236}">
-                <a16:creationId xmlns:a16="http://schemas.microsoft.com/office/drawing/2014/main" id="{73B465C9-95A8-44BC-BF54-B0DA0A0B7842}"/>
+                <a16:creationId xmlns:a16="http://schemas.microsoft.com/office/drawing/2014/main" id="{C9E4C3C3-3D60-4EBA-A28F-59C0D1F726AB}"/>
               </a:ext>
             </a:extLst>
           </p:cNvPr>
@@ -24717,7 +24717,7 @@
           <p:cNvPr id="63" name="e3-D-cil">
             <a:extLst xmlns:a="http://schemas.openxmlformats.org/drawingml/2006/main">
               <a:ext uri="{FF2B5EF4-FFF2-40B4-BE49-F238E27FC236}">
-                <a16:creationId xmlns:a16="http://schemas.microsoft.com/office/drawing/2014/main" id="{1A5869FF-41C1-422A-A794-092B0A6280D9}"/>
+                <a16:creationId xmlns:a16="http://schemas.microsoft.com/office/drawing/2014/main" id="{2D9D22A2-6BC4-4BF1-8257-EACF892D32B6}"/>
               </a:ext>
             </a:extLst>
           </p:cNvPr>
@@ -24748,7 +24748,7 @@
           <p:cNvPr id="64" name="e3-D-cih">
             <a:extLst xmlns:a="http://schemas.openxmlformats.org/drawingml/2006/main">
               <a:ext uri="{FF2B5EF4-FFF2-40B4-BE49-F238E27FC236}">
-                <a16:creationId xmlns:a16="http://schemas.microsoft.com/office/drawing/2014/main" id="{1F5E9329-D532-413B-A85B-07183F1FC08A}"/>
+                <a16:creationId xmlns:a16="http://schemas.microsoft.com/office/drawing/2014/main" id="{3CD3DD87-6EEC-47E8-A32D-D9B6B553721F}"/>
               </a:ext>
             </a:extLst>
           </p:cNvPr>
@@ -24779,7 +24779,7 @@
           <p:cNvPr id="65" name="e3-D-mark">
             <a:extLst xmlns:a="http://schemas.openxmlformats.org/drawingml/2006/main">
               <a:ext uri="{FF2B5EF4-FFF2-40B4-BE49-F238E27FC236}">
-                <a16:creationId xmlns:a16="http://schemas.microsoft.com/office/drawing/2014/main" id="{DB503674-3005-4944-8E1D-22D8DDBC45D2}"/>
+                <a16:creationId xmlns:a16="http://schemas.microsoft.com/office/drawing/2014/main" id="{6BCB3DAB-8020-4F03-A9D2-D9A7C540CE9F}"/>
               </a:ext>
             </a:extLst>
           </p:cNvPr>
@@ -24810,7 +24810,7 @@
           <p:cNvPr id="66" name="e4-label">
             <a:extLst xmlns:a="http://schemas.openxmlformats.org/drawingml/2006/main">
               <a:ext uri="{FF2B5EF4-FFF2-40B4-BE49-F238E27FC236}">
-                <a16:creationId xmlns:a16="http://schemas.microsoft.com/office/drawing/2014/main" id="{0C29C5F5-E6D8-4D05-9C00-D9626FEDE885}"/>
+                <a16:creationId xmlns:a16="http://schemas.microsoft.com/office/drawing/2014/main" id="{048F261C-3971-4D1A-B2C7-C9E72914186C}"/>
               </a:ext>
             </a:extLst>
           </p:cNvPr>
@@ -24905,7 +24905,7 @@
           <p:cNvPr id="67" name="e4-S-bar">
             <a:extLst xmlns:a="http://schemas.openxmlformats.org/drawingml/2006/main">
               <a:ext uri="{FF2B5EF4-FFF2-40B4-BE49-F238E27FC236}">
-                <a16:creationId xmlns:a16="http://schemas.microsoft.com/office/drawing/2014/main" id="{736ECFF1-C2DF-49FA-A42A-E8CDCC8B3A86}"/>
+                <a16:creationId xmlns:a16="http://schemas.microsoft.com/office/drawing/2014/main" id="{A2E965EF-D818-4A19-A028-D42528D2935E}"/>
               </a:ext>
             </a:extLst>
           </p:cNvPr>
@@ -24936,7 +24936,7 @@
           <p:cNvPr id="68" name="e4-S-ci">
             <a:extLst xmlns:a="http://schemas.openxmlformats.org/drawingml/2006/main">
               <a:ext uri="{FF2B5EF4-FFF2-40B4-BE49-F238E27FC236}">
-                <a16:creationId xmlns:a16="http://schemas.microsoft.com/office/drawing/2014/main" id="{BE059735-53BA-4B48-A7E0-00354554CA94}"/>
+                <a16:creationId xmlns:a16="http://schemas.microsoft.com/office/drawing/2014/main" id="{2F76AC8F-D425-4DEC-92C8-022E1344FB8B}"/>
               </a:ext>
             </a:extLst>
           </p:cNvPr>
@@ -24967,7 +24967,7 @@
           <p:cNvPr id="69" name="e4-S-cil">
             <a:extLst xmlns:a="http://schemas.openxmlformats.org/drawingml/2006/main">
               <a:ext uri="{FF2B5EF4-FFF2-40B4-BE49-F238E27FC236}">
-                <a16:creationId xmlns:a16="http://schemas.microsoft.com/office/drawing/2014/main" id="{0D852E50-FC01-4938-9A2F-52C98AEE6D61}"/>
+                <a16:creationId xmlns:a16="http://schemas.microsoft.com/office/drawing/2014/main" id="{15E629DF-8CF6-4FA6-9000-379EEDAF17FD}"/>
               </a:ext>
             </a:extLst>
           </p:cNvPr>
@@ -24998,7 +24998,7 @@
           <p:cNvPr id="70" name="e4-S-cih">
             <a:extLst xmlns:a="http://schemas.openxmlformats.org/drawingml/2006/main">
               <a:ext uri="{FF2B5EF4-FFF2-40B4-BE49-F238E27FC236}">
-                <a16:creationId xmlns:a16="http://schemas.microsoft.com/office/drawing/2014/main" id="{A86D69F3-B7CE-4BA1-8D0A-33DA8C286319}"/>
+                <a16:creationId xmlns:a16="http://schemas.microsoft.com/office/drawing/2014/main" id="{98451D9E-6452-4A0B-B812-A8A9D852DFC3}"/>
               </a:ext>
             </a:extLst>
           </p:cNvPr>
@@ -25029,7 +25029,7 @@
           <p:cNvPr id="71" name="e4-S-mark">
             <a:extLst xmlns:a="http://schemas.openxmlformats.org/drawingml/2006/main">
               <a:ext uri="{FF2B5EF4-FFF2-40B4-BE49-F238E27FC236}">
-                <a16:creationId xmlns:a16="http://schemas.microsoft.com/office/drawing/2014/main" id="{12F89E91-9211-4131-9A2A-EC6E237DBD47}"/>
+                <a16:creationId xmlns:a16="http://schemas.microsoft.com/office/drawing/2014/main" id="{7925E5C0-5BE8-4152-A345-B35EB39424BC}"/>
               </a:ext>
             </a:extLst>
           </p:cNvPr>
@@ -25060,7 +25060,7 @@
           <p:cNvPr id="72" name="e4-D-bar">
             <a:extLst xmlns:a="http://schemas.openxmlformats.org/drawingml/2006/main">
               <a:ext uri="{FF2B5EF4-FFF2-40B4-BE49-F238E27FC236}">
-                <a16:creationId xmlns:a16="http://schemas.microsoft.com/office/drawing/2014/main" id="{FE72441E-EE05-4A56-AB81-017A175401D3}"/>
+                <a16:creationId xmlns:a16="http://schemas.microsoft.com/office/drawing/2014/main" id="{F2578191-8211-4D1F-AA38-6BEAFB6A6933}"/>
               </a:ext>
             </a:extLst>
           </p:cNvPr>
@@ -25091,7 +25091,7 @@
           <p:cNvPr id="73" name="e4-D-ci">
             <a:extLst xmlns:a="http://schemas.openxmlformats.org/drawingml/2006/main">
               <a:ext uri="{FF2B5EF4-FFF2-40B4-BE49-F238E27FC236}">
-                <a16:creationId xmlns:a16="http://schemas.microsoft.com/office/drawing/2014/main" id="{0FC003F7-5324-48C1-9D3D-E62A9076A2E7}"/>
+                <a16:creationId xmlns:a16="http://schemas.microsoft.com/office/drawing/2014/main" id="{564C0A38-FDAF-4F1F-A415-9EDCE5BAE716}"/>
               </a:ext>
             </a:extLst>
           </p:cNvPr>
@@ -25122,7 +25122,7 @@
           <p:cNvPr id="74" name="e4-D-cil">
             <a:extLst xmlns:a="http://schemas.openxmlformats.org/drawingml/2006/main">
               <a:ext uri="{FF2B5EF4-FFF2-40B4-BE49-F238E27FC236}">
-                <a16:creationId xmlns:a16="http://schemas.microsoft.com/office/drawing/2014/main" id="{5B5B43D8-0A01-42BC-88A4-D3B48E470BBE}"/>
+                <a16:creationId xmlns:a16="http://schemas.microsoft.com/office/drawing/2014/main" id="{1DB75A87-30DC-4E3D-948B-3BF383556DE1}"/>
               </a:ext>
             </a:extLst>
           </p:cNvPr>
@@ -25153,7 +25153,7 @@
           <p:cNvPr id="75" name="e4-D-cih">
             <a:extLst xmlns:a="http://schemas.openxmlformats.org/drawingml/2006/main">
               <a:ext uri="{FF2B5EF4-FFF2-40B4-BE49-F238E27FC236}">
-                <a16:creationId xmlns:a16="http://schemas.microsoft.com/office/drawing/2014/main" id="{2E094CA3-CB4B-42D9-B9AC-F2736B5740CB}"/>
+                <a16:creationId xmlns:a16="http://schemas.microsoft.com/office/drawing/2014/main" id="{37299353-3AD5-4D7C-83FD-2D6D648B1697}"/>
               </a:ext>
             </a:extLst>
           </p:cNvPr>
@@ -25184,7 +25184,7 @@
           <p:cNvPr id="76" name="e4-D-mark">
             <a:extLst xmlns:a="http://schemas.openxmlformats.org/drawingml/2006/main">
               <a:ext uri="{FF2B5EF4-FFF2-40B4-BE49-F238E27FC236}">
-                <a16:creationId xmlns:a16="http://schemas.microsoft.com/office/drawing/2014/main" id="{FABFEE97-32AB-4E30-AD1C-83108D755DAF}"/>
+                <a16:creationId xmlns:a16="http://schemas.microsoft.com/office/drawing/2014/main" id="{0B23EF4D-985B-42FA-A82C-026D7EFDAB5B}"/>
               </a:ext>
             </a:extLst>
           </p:cNvPr>
@@ -25215,7 +25215,7 @@
           <p:cNvPr id="77" name="e5-label">
             <a:extLst xmlns:a="http://schemas.openxmlformats.org/drawingml/2006/main">
               <a:ext uri="{FF2B5EF4-FFF2-40B4-BE49-F238E27FC236}">
-                <a16:creationId xmlns:a16="http://schemas.microsoft.com/office/drawing/2014/main" id="{18A4C203-D4A7-47ED-A599-77251E0CE025}"/>
+                <a16:creationId xmlns:a16="http://schemas.microsoft.com/office/drawing/2014/main" id="{EC11BDA6-17D8-4885-9F55-0735B98A2D48}"/>
               </a:ext>
             </a:extLst>
           </p:cNvPr>
@@ -25310,7 +25310,7 @@
           <p:cNvPr id="78" name="e5-S-bar">
             <a:extLst xmlns:a="http://schemas.openxmlformats.org/drawingml/2006/main">
               <a:ext uri="{FF2B5EF4-FFF2-40B4-BE49-F238E27FC236}">
-                <a16:creationId xmlns:a16="http://schemas.microsoft.com/office/drawing/2014/main" id="{3E493BA1-1088-4F76-BEC8-F88D74E29A6B}"/>
+                <a16:creationId xmlns:a16="http://schemas.microsoft.com/office/drawing/2014/main" id="{58D7E52A-73FC-4713-8C36-2F6372D857AB}"/>
               </a:ext>
             </a:extLst>
           </p:cNvPr>
@@ -25341,7 +25341,7 @@
           <p:cNvPr id="79" name="e5-S-ci">
             <a:extLst xmlns:a="http://schemas.openxmlformats.org/drawingml/2006/main">
               <a:ext uri="{FF2B5EF4-FFF2-40B4-BE49-F238E27FC236}">
-                <a16:creationId xmlns:a16="http://schemas.microsoft.com/office/drawing/2014/main" id="{05C3D355-61B7-403F-9B86-80A3ACC9065B}"/>
+                <a16:creationId xmlns:a16="http://schemas.microsoft.com/office/drawing/2014/main" id="{4A849D2A-75DE-40D6-901F-871A4AFA540E}"/>
               </a:ext>
             </a:extLst>
           </p:cNvPr>
@@ -25372,7 +25372,7 @@
           <p:cNvPr id="80" name="e5-S-cil">
             <a:extLst xmlns:a="http://schemas.openxmlformats.org/drawingml/2006/main">
               <a:ext uri="{FF2B5EF4-FFF2-40B4-BE49-F238E27FC236}">
-                <a16:creationId xmlns:a16="http://schemas.microsoft.com/office/drawing/2014/main" id="{72F49EA8-9BEA-4592-8393-B21A66FF7942}"/>
+                <a16:creationId xmlns:a16="http://schemas.microsoft.com/office/drawing/2014/main" id="{E9B68857-6E48-4A94-AE04-47F2790DDE7B}"/>
               </a:ext>
             </a:extLst>
           </p:cNvPr>
@@ -25403,7 +25403,7 @@
           <p:cNvPr id="81" name="e5-S-cih">
             <a:extLst xmlns:a="http://schemas.openxmlformats.org/drawingml/2006/main">
               <a:ext uri="{FF2B5EF4-FFF2-40B4-BE49-F238E27FC236}">
-                <a16:creationId xmlns:a16="http://schemas.microsoft.com/office/drawing/2014/main" id="{FEF63C60-23C8-4000-8A82-FF7AB19137C3}"/>
+                <a16:creationId xmlns:a16="http://schemas.microsoft.com/office/drawing/2014/main" id="{097D2E01-EF17-4CF5-933C-9B874098F345}"/>
               </a:ext>
             </a:extLst>
           </p:cNvPr>
@@ -25434,7 +25434,7 @@
           <p:cNvPr id="82" name="e5-S-mark">
             <a:extLst xmlns:a="http://schemas.openxmlformats.org/drawingml/2006/main">
               <a:ext uri="{FF2B5EF4-FFF2-40B4-BE49-F238E27FC236}">
-                <a16:creationId xmlns:a16="http://schemas.microsoft.com/office/drawing/2014/main" id="{57F834F6-D552-453E-9631-797DC06408D1}"/>
+                <a16:creationId xmlns:a16="http://schemas.microsoft.com/office/drawing/2014/main" id="{1F5C4BAA-CFFF-4A2C-888D-FC4D0E5F9257}"/>
               </a:ext>
             </a:extLst>
           </p:cNvPr>
@@ -25465,7 +25465,7 @@
           <p:cNvPr id="83" name="e5-D-bar">
             <a:extLst xmlns:a="http://schemas.openxmlformats.org/drawingml/2006/main">
               <a:ext uri="{FF2B5EF4-FFF2-40B4-BE49-F238E27FC236}">
-                <a16:creationId xmlns:a16="http://schemas.microsoft.com/office/drawing/2014/main" id="{D0446B35-101E-41CB-97AB-A2171BA99C35}"/>
+                <a16:creationId xmlns:a16="http://schemas.microsoft.com/office/drawing/2014/main" id="{4BB4FD44-EF73-4549-89F8-13680DB57EC0}"/>
               </a:ext>
             </a:extLst>
           </p:cNvPr>
@@ -25496,7 +25496,7 @@
           <p:cNvPr id="84" name="e5-D-ci">
             <a:extLst xmlns:a="http://schemas.openxmlformats.org/drawingml/2006/main">
               <a:ext uri="{FF2B5EF4-FFF2-40B4-BE49-F238E27FC236}">
-                <a16:creationId xmlns:a16="http://schemas.microsoft.com/office/drawing/2014/main" id="{6062EE14-BB63-4237-87AE-76D726DEE624}"/>
+                <a16:creationId xmlns:a16="http://schemas.microsoft.com/office/drawing/2014/main" id="{D7A99A0E-3C1A-4AA6-BAB5-47415A179E9E}"/>
               </a:ext>
             </a:extLst>
           </p:cNvPr>
@@ -25527,7 +25527,7 @@
           <p:cNvPr id="85" name="e5-D-cil">
             <a:extLst xmlns:a="http://schemas.openxmlformats.org/drawingml/2006/main">
               <a:ext uri="{FF2B5EF4-FFF2-40B4-BE49-F238E27FC236}">
-                <a16:creationId xmlns:a16="http://schemas.microsoft.com/office/drawing/2014/main" id="{A8486269-AB41-42D2-B700-7E7F44A9546F}"/>
+                <a16:creationId xmlns:a16="http://schemas.microsoft.com/office/drawing/2014/main" id="{CA377109-A272-4383-B154-934A78CFD1EC}"/>
               </a:ext>
             </a:extLst>
           </p:cNvPr>
@@ -25558,7 +25558,7 @@
           <p:cNvPr id="86" name="e5-D-cih">
             <a:extLst xmlns:a="http://schemas.openxmlformats.org/drawingml/2006/main">
               <a:ext uri="{FF2B5EF4-FFF2-40B4-BE49-F238E27FC236}">
-                <a16:creationId xmlns:a16="http://schemas.microsoft.com/office/drawing/2014/main" id="{E0A53650-2951-4D1B-88F6-DC04CC6715A2}"/>
+                <a16:creationId xmlns:a16="http://schemas.microsoft.com/office/drawing/2014/main" id="{4518D2A8-430F-4E39-AB4D-88601F498AAD}"/>
               </a:ext>
             </a:extLst>
           </p:cNvPr>
@@ -25589,7 +25589,7 @@
           <p:cNvPr id="87" name="e5-D-mark">
             <a:extLst xmlns:a="http://schemas.openxmlformats.org/drawingml/2006/main">
               <a:ext uri="{FF2B5EF4-FFF2-40B4-BE49-F238E27FC236}">
-                <a16:creationId xmlns:a16="http://schemas.microsoft.com/office/drawing/2014/main" id="{A04347EC-A489-4D80-85E6-EA51AD546288}"/>
+                <a16:creationId xmlns:a16="http://schemas.microsoft.com/office/drawing/2014/main" id="{9EF90944-D3BD-4B2A-AA64-EDFA27A1385A}"/>
               </a:ext>
             </a:extLst>
           </p:cNvPr>
@@ -25620,7 +25620,7 @@
           <p:cNvPr id="88" name="e6-label">
             <a:extLst xmlns:a="http://schemas.openxmlformats.org/drawingml/2006/main">
               <a:ext uri="{FF2B5EF4-FFF2-40B4-BE49-F238E27FC236}">
-                <a16:creationId xmlns:a16="http://schemas.microsoft.com/office/drawing/2014/main" id="{0F456033-8B42-420A-ACB6-5CC5C02492A6}"/>
+                <a16:creationId xmlns:a16="http://schemas.microsoft.com/office/drawing/2014/main" id="{DD1BD442-DD55-4F87-8579-C327FC9E37B6}"/>
               </a:ext>
             </a:extLst>
           </p:cNvPr>
@@ -25715,7 +25715,7 @@
           <p:cNvPr id="89" name="e6-S-bar">
             <a:extLst xmlns:a="http://schemas.openxmlformats.org/drawingml/2006/main">
               <a:ext uri="{FF2B5EF4-FFF2-40B4-BE49-F238E27FC236}">
-                <a16:creationId xmlns:a16="http://schemas.microsoft.com/office/drawing/2014/main" id="{0111432D-5423-4821-80A3-DA7E8C875477}"/>
+                <a16:creationId xmlns:a16="http://schemas.microsoft.com/office/drawing/2014/main" id="{C25E1D18-5D50-4F6B-9214-FAA1C3505778}"/>
               </a:ext>
             </a:extLst>
           </p:cNvPr>
@@ -25746,7 +25746,7 @@
           <p:cNvPr id="90" name="e6-S-ci">
             <a:extLst xmlns:a="http://schemas.openxmlformats.org/drawingml/2006/main">
               <a:ext uri="{FF2B5EF4-FFF2-40B4-BE49-F238E27FC236}">
-                <a16:creationId xmlns:a16="http://schemas.microsoft.com/office/drawing/2014/main" id="{2F4544D8-2D15-49FA-AC33-4DB5B0D4C8D9}"/>
+                <a16:creationId xmlns:a16="http://schemas.microsoft.com/office/drawing/2014/main" id="{5B1AC889-DC9F-44D7-8EEC-3052E02B9235}"/>
               </a:ext>
             </a:extLst>
           </p:cNvPr>
@@ -25777,7 +25777,7 @@
           <p:cNvPr id="91" name="e6-S-cil">
             <a:extLst xmlns:a="http://schemas.openxmlformats.org/drawingml/2006/main">
               <a:ext uri="{FF2B5EF4-FFF2-40B4-BE49-F238E27FC236}">
-                <a16:creationId xmlns:a16="http://schemas.microsoft.com/office/drawing/2014/main" id="{4FC5F979-2920-4D44-A9BC-A45C178E5F19}"/>
+                <a16:creationId xmlns:a16="http://schemas.microsoft.com/office/drawing/2014/main" id="{697E418F-15C2-465B-A025-9FB6BAC6CCE7}"/>
               </a:ext>
             </a:extLst>
           </p:cNvPr>
@@ -25808,7 +25808,7 @@
           <p:cNvPr id="92" name="e6-S-cih">
             <a:extLst xmlns:a="http://schemas.openxmlformats.org/drawingml/2006/main">
               <a:ext uri="{FF2B5EF4-FFF2-40B4-BE49-F238E27FC236}">
-                <a16:creationId xmlns:a16="http://schemas.microsoft.com/office/drawing/2014/main" id="{BF8425C1-2977-42A7-9F76-1F5973521743}"/>
+                <a16:creationId xmlns:a16="http://schemas.microsoft.com/office/drawing/2014/main" id="{81ACCD78-FA06-4943-AE76-3755E491FD20}"/>
               </a:ext>
             </a:extLst>
           </p:cNvPr>
@@ -25839,7 +25839,7 @@
           <p:cNvPr id="93" name="e6-S-mark">
             <a:extLst xmlns:a="http://schemas.openxmlformats.org/drawingml/2006/main">
               <a:ext uri="{FF2B5EF4-FFF2-40B4-BE49-F238E27FC236}">
-                <a16:creationId xmlns:a16="http://schemas.microsoft.com/office/drawing/2014/main" id="{2C52C6A1-6E48-4BD8-875F-44F6B6AAC0CA}"/>
+                <a16:creationId xmlns:a16="http://schemas.microsoft.com/office/drawing/2014/main" id="{BE20186D-E77A-4FEB-93C7-E585ADF54DD4}"/>
               </a:ext>
             </a:extLst>
           </p:cNvPr>
@@ -25870,7 +25870,7 @@
           <p:cNvPr id="94" name="e6-D-bar">
             <a:extLst xmlns:a="http://schemas.openxmlformats.org/drawingml/2006/main">
               <a:ext uri="{FF2B5EF4-FFF2-40B4-BE49-F238E27FC236}">
-                <a16:creationId xmlns:a16="http://schemas.microsoft.com/office/drawing/2014/main" id="{EFF69D79-59AC-41C5-BA08-7F75AED1D409}"/>
+                <a16:creationId xmlns:a16="http://schemas.microsoft.com/office/drawing/2014/main" id="{16233F75-9459-4197-A4C9-C75D9763D23C}"/>
               </a:ext>
             </a:extLst>
           </p:cNvPr>
@@ -25901,7 +25901,7 @@
           <p:cNvPr id="95" name="e6-D-ci">
             <a:extLst xmlns:a="http://schemas.openxmlformats.org/drawingml/2006/main">
               <a:ext uri="{FF2B5EF4-FFF2-40B4-BE49-F238E27FC236}">
-                <a16:creationId xmlns:a16="http://schemas.microsoft.com/office/drawing/2014/main" id="{ABA416E2-34F8-4584-8110-56AD8134861D}"/>
+                <a16:creationId xmlns:a16="http://schemas.microsoft.com/office/drawing/2014/main" id="{5B693AE7-3493-4393-B0D5-113A67382217}"/>
               </a:ext>
             </a:extLst>
           </p:cNvPr>
@@ -25932,7 +25932,7 @@
           <p:cNvPr id="96" name="e6-D-cil">
             <a:extLst xmlns:a="http://schemas.openxmlformats.org/drawingml/2006/main">
               <a:ext uri="{FF2B5EF4-FFF2-40B4-BE49-F238E27FC236}">
-                <a16:creationId xmlns:a16="http://schemas.microsoft.com/office/drawing/2014/main" id="{CA3A7510-4F23-475A-8F03-72A996C1CFBE}"/>
+                <a16:creationId xmlns:a16="http://schemas.microsoft.com/office/drawing/2014/main" id="{7FCCD4F6-206C-4DEE-BCBC-120A00BFF9BA}"/>
               </a:ext>
             </a:extLst>
           </p:cNvPr>
@@ -25963,7 +25963,7 @@
           <p:cNvPr id="97" name="e6-D-cih">
             <a:extLst xmlns:a="http://schemas.openxmlformats.org/drawingml/2006/main">
               <a:ext uri="{FF2B5EF4-FFF2-40B4-BE49-F238E27FC236}">
-                <a16:creationId xmlns:a16="http://schemas.microsoft.com/office/drawing/2014/main" id="{E4CFE477-60FB-4317-8939-D40E2666492A}"/>
+                <a16:creationId xmlns:a16="http://schemas.microsoft.com/office/drawing/2014/main" id="{39B11077-6D12-40BF-8329-6B7787A28261}"/>
               </a:ext>
             </a:extLst>
           </p:cNvPr>
@@ -25994,7 +25994,7 @@
           <p:cNvPr id="98" name="e6-D-mark">
             <a:extLst xmlns:a="http://schemas.openxmlformats.org/drawingml/2006/main">
               <a:ext uri="{FF2B5EF4-FFF2-40B4-BE49-F238E27FC236}">
-                <a16:creationId xmlns:a16="http://schemas.microsoft.com/office/drawing/2014/main" id="{78E81B99-F406-4A45-9E88-B57BEC009A42}"/>
+                <a16:creationId xmlns:a16="http://schemas.microsoft.com/office/drawing/2014/main" id="{DD0A7F8C-3C8F-4A13-A2A4-F468E24710F2}"/>
               </a:ext>
             </a:extLst>
           </p:cNvPr>
@@ -26025,7 +26025,7 @@
           <p:cNvPr id="99" name="e7-label">
             <a:extLst xmlns:a="http://schemas.openxmlformats.org/drawingml/2006/main">
               <a:ext uri="{FF2B5EF4-FFF2-40B4-BE49-F238E27FC236}">
-                <a16:creationId xmlns:a16="http://schemas.microsoft.com/office/drawing/2014/main" id="{1D48A8AD-01AF-4967-8E48-5DA5485A8B7B}"/>
+                <a16:creationId xmlns:a16="http://schemas.microsoft.com/office/drawing/2014/main" id="{959F5666-F980-4BAE-9DCA-225A25F8F994}"/>
               </a:ext>
             </a:extLst>
           </p:cNvPr>
@@ -26120,7 +26120,7 @@
           <p:cNvPr id="100" name="e7-S-bar">
             <a:extLst xmlns:a="http://schemas.openxmlformats.org/drawingml/2006/main">
               <a:ext uri="{FF2B5EF4-FFF2-40B4-BE49-F238E27FC236}">
-                <a16:creationId xmlns:a16="http://schemas.microsoft.com/office/drawing/2014/main" id="{1210B869-D3E0-488F-8887-108FAD1DF06D}"/>
+                <a16:creationId xmlns:a16="http://schemas.microsoft.com/office/drawing/2014/main" id="{6E6DA8FD-32B5-4395-BB24-E344CBEB2B4C}"/>
               </a:ext>
             </a:extLst>
           </p:cNvPr>
@@ -26151,7 +26151,7 @@
           <p:cNvPr id="101" name="e7-S-ci">
             <a:extLst xmlns:a="http://schemas.openxmlformats.org/drawingml/2006/main">
               <a:ext uri="{FF2B5EF4-FFF2-40B4-BE49-F238E27FC236}">
-                <a16:creationId xmlns:a16="http://schemas.microsoft.com/office/drawing/2014/main" id="{345B6FC8-15C1-4A3D-9DE2-435F2CF1924C}"/>
+                <a16:creationId xmlns:a16="http://schemas.microsoft.com/office/drawing/2014/main" id="{A0DF76AE-A47F-4B44-B16F-8CFFA3577936}"/>
               </a:ext>
             </a:extLst>
           </p:cNvPr>
@@ -26182,7 +26182,7 @@
           <p:cNvPr id="102" name="e7-S-cil">
             <a:extLst xmlns:a="http://schemas.openxmlformats.org/drawingml/2006/main">
               <a:ext uri="{FF2B5EF4-FFF2-40B4-BE49-F238E27FC236}">
-                <a16:creationId xmlns:a16="http://schemas.microsoft.com/office/drawing/2014/main" id="{267A7D1B-2C4D-4702-AE2F-2AFA5D65233B}"/>
+                <a16:creationId xmlns:a16="http://schemas.microsoft.com/office/drawing/2014/main" id="{D31C4FAA-9076-4227-913A-75D82F244050}"/>
               </a:ext>
             </a:extLst>
           </p:cNvPr>
@@ -26213,7 +26213,7 @@
           <p:cNvPr id="103" name="e7-S-cih">
             <a:extLst xmlns:a="http://schemas.openxmlformats.org/drawingml/2006/main">
               <a:ext uri="{FF2B5EF4-FFF2-40B4-BE49-F238E27FC236}">
-                <a16:creationId xmlns:a16="http://schemas.microsoft.com/office/drawing/2014/main" id="{0457CAC5-42EB-4FBD-8D5B-3290E340AFD1}"/>
+                <a16:creationId xmlns:a16="http://schemas.microsoft.com/office/drawing/2014/main" id="{5513C664-D08F-4BE2-8027-36E583FB57FF}"/>
               </a:ext>
             </a:extLst>
           </p:cNvPr>
@@ -26244,7 +26244,7 @@
           <p:cNvPr id="104" name="e7-S-mark">
             <a:extLst xmlns:a="http://schemas.openxmlformats.org/drawingml/2006/main">
               <a:ext uri="{FF2B5EF4-FFF2-40B4-BE49-F238E27FC236}">
-                <a16:creationId xmlns:a16="http://schemas.microsoft.com/office/drawing/2014/main" id="{431850C2-AEA4-4546-99ED-F7192081704D}"/>
+                <a16:creationId xmlns:a16="http://schemas.microsoft.com/office/drawing/2014/main" id="{67BEAE6D-33EA-4A56-AF62-2CCCE85CA6DD}"/>
               </a:ext>
             </a:extLst>
           </p:cNvPr>
@@ -26275,7 +26275,7 @@
           <p:cNvPr id="105" name="e7-D-bar">
             <a:extLst xmlns:a="http://schemas.openxmlformats.org/drawingml/2006/main">
               <a:ext uri="{FF2B5EF4-FFF2-40B4-BE49-F238E27FC236}">
-                <a16:creationId xmlns:a16="http://schemas.microsoft.com/office/drawing/2014/main" id="{E5C1566E-16A9-4B9C-8DD1-ACAA0D0D0FF1}"/>
+                <a16:creationId xmlns:a16="http://schemas.microsoft.com/office/drawing/2014/main" id="{C9C69D21-6B6B-4D0F-9CB0-1456C0BAC132}"/>
               </a:ext>
             </a:extLst>
           </p:cNvPr>
@@ -26306,7 +26306,7 @@
           <p:cNvPr id="106" name="e7-D-ci">
             <a:extLst xmlns:a="http://schemas.openxmlformats.org/drawingml/2006/main">
               <a:ext uri="{FF2B5EF4-FFF2-40B4-BE49-F238E27FC236}">
-                <a16:creationId xmlns:a16="http://schemas.microsoft.com/office/drawing/2014/main" id="{1465252E-8221-4CC7-B982-161A93F2CCF3}"/>
+                <a16:creationId xmlns:a16="http://schemas.microsoft.com/office/drawing/2014/main" id="{0787D4E7-0D9F-4C82-AA97-9FC2D52B1ADB}"/>
               </a:ext>
             </a:extLst>
           </p:cNvPr>
@@ -26337,7 +26337,7 @@
           <p:cNvPr id="107" name="e7-D-cil">
             <a:extLst xmlns:a="http://schemas.openxmlformats.org/drawingml/2006/main">
               <a:ext uri="{FF2B5EF4-FFF2-40B4-BE49-F238E27FC236}">
-                <a16:creationId xmlns:a16="http://schemas.microsoft.com/office/drawing/2014/main" id="{F04C97B9-97D1-4C1E-8201-2965A0B0531E}"/>
+                <a16:creationId xmlns:a16="http://schemas.microsoft.com/office/drawing/2014/main" id="{35CD6909-E2D4-4FF5-9452-FE697B7592B4}"/>
               </a:ext>
             </a:extLst>
           </p:cNvPr>
@@ -26368,7 +26368,7 @@
           <p:cNvPr id="108" name="e7-D-cih">
             <a:extLst xmlns:a="http://schemas.openxmlformats.org/drawingml/2006/main">
               <a:ext uri="{FF2B5EF4-FFF2-40B4-BE49-F238E27FC236}">
-                <a16:creationId xmlns:a16="http://schemas.microsoft.com/office/drawing/2014/main" id="{1D630818-9EBC-4BE6-BAB7-21F8012C2293}"/>
+                <a16:creationId xmlns:a16="http://schemas.microsoft.com/office/drawing/2014/main" id="{A067196C-779B-4865-92DB-2D229706A210}"/>
               </a:ext>
             </a:extLst>
           </p:cNvPr>
@@ -26399,7 +26399,7 @@
           <p:cNvPr id="109" name="e7-D-mark">
             <a:extLst xmlns:a="http://schemas.openxmlformats.org/drawingml/2006/main">
               <a:ext uri="{FF2B5EF4-FFF2-40B4-BE49-F238E27FC236}">
-                <a16:creationId xmlns:a16="http://schemas.microsoft.com/office/drawing/2014/main" id="{A3FEA72E-428E-4DDA-A148-112237EE7DA2}"/>
+                <a16:creationId xmlns:a16="http://schemas.microsoft.com/office/drawing/2014/main" id="{4FFF738F-B25C-4D48-BC30-0ECCD64B3F5B}"/>
               </a:ext>
             </a:extLst>
           </p:cNvPr>
@@ -26430,7 +26430,7 @@
           <p:cNvPr id="110" name="band-b">
             <a:extLst xmlns:a="http://schemas.openxmlformats.org/drawingml/2006/main">
               <a:ext uri="{FF2B5EF4-FFF2-40B4-BE49-F238E27FC236}">
-                <a16:creationId xmlns:a16="http://schemas.microsoft.com/office/drawing/2014/main" id="{0B22F068-2FF7-41A7-9B27-789C6064F566}"/>
+                <a16:creationId xmlns:a16="http://schemas.microsoft.com/office/drawing/2014/main" id="{6D0B8D9A-DEB2-426E-BFCA-77AFF8AB643C}"/>
               </a:ext>
             </a:extLst>
           </p:cNvPr>
@@ -26461,7 +26461,7 @@
           <p:cNvPr id="111" name="sec-b-chip">
             <a:extLst xmlns:a="http://schemas.openxmlformats.org/drawingml/2006/main">
               <a:ext uri="{FF2B5EF4-FFF2-40B4-BE49-F238E27FC236}">
-                <a16:creationId xmlns:a16="http://schemas.microsoft.com/office/drawing/2014/main" id="{6E2C1484-C039-42B4-AB40-233C5C4B9E95}"/>
+                <a16:creationId xmlns:a16="http://schemas.microsoft.com/office/drawing/2014/main" id="{543AEEAE-12A2-4733-B2CF-D2EEB665E1B4}"/>
               </a:ext>
             </a:extLst>
           </p:cNvPr>
@@ -26496,7 +26496,7 @@
           <p:cNvPr id="112" name="sec-b-chip-text">
             <a:extLst xmlns:a="http://schemas.openxmlformats.org/drawingml/2006/main">
               <a:ext uri="{FF2B5EF4-FFF2-40B4-BE49-F238E27FC236}">
-                <a16:creationId xmlns:a16="http://schemas.microsoft.com/office/drawing/2014/main" id="{B9578955-BB4F-4C87-9A07-11D7BCCF6FBD}"/>
+                <a16:creationId xmlns:a16="http://schemas.microsoft.com/office/drawing/2014/main" id="{6458BB4E-578B-41B1-8E71-888024940DAE}"/>
               </a:ext>
             </a:extLst>
           </p:cNvPr>
@@ -26558,7 +26558,7 @@
           <p:cNvPr id="113" name="sec-b">
             <a:extLst xmlns:a="http://schemas.openxmlformats.org/drawingml/2006/main">
               <a:ext uri="{FF2B5EF4-FFF2-40B4-BE49-F238E27FC236}">
-                <a16:creationId xmlns:a16="http://schemas.microsoft.com/office/drawing/2014/main" id="{AB000AE6-1F67-4010-BFCC-78CA021C00AE}"/>
+                <a16:creationId xmlns:a16="http://schemas.microsoft.com/office/drawing/2014/main" id="{B2722DA6-D9A3-4987-9A43-CC985A664DD9}"/>
               </a:ext>
             </a:extLst>
           </p:cNvPr>
@@ -26620,7 +26620,7 @@
           <p:cNvPr id="114" name="sec-b-sub">
             <a:extLst xmlns:a="http://schemas.openxmlformats.org/drawingml/2006/main">
               <a:ext uri="{FF2B5EF4-FFF2-40B4-BE49-F238E27FC236}">
-                <a16:creationId xmlns:a16="http://schemas.microsoft.com/office/drawing/2014/main" id="{8C26F815-F5CE-4D3D-B456-8E9845238602}"/>
+                <a16:creationId xmlns:a16="http://schemas.microsoft.com/office/drawing/2014/main" id="{328BBEE7-25AC-4E9A-8F2C-9B9C20E505D3}"/>
               </a:ext>
             </a:extLst>
           </p:cNvPr>
@@ -26716,7 +26716,7 @@
                 <a:ea typeface="Times New Roman"/>
                 <a:cs typeface="Times New Roman"/>
               </a:rPr>
-              <a:t> pre-specified; E1, E2, E3 added later and exploratory · MVTec/VisA rows appear once interaction_generalization.csv exists (TODO)</a:t>
+              <a:t> pre-specified; E1, E2, E3 added later and exploratory · MVTec/VisA rows from interaction_generalization.csv (GEN)</a:t>
             </a:r>
           </a:p>
         </p:txBody>
@@ -26726,7 +26726,7 @@
           <p:cNvPr id="115" name="i-tick--0.005">
             <a:extLst xmlns:a="http://schemas.openxmlformats.org/drawingml/2006/main">
               <a:ext uri="{FF2B5EF4-FFF2-40B4-BE49-F238E27FC236}">
-                <a16:creationId xmlns:a16="http://schemas.microsoft.com/office/drawing/2014/main" id="{9771B129-CA18-408B-8EF2-0322303362E0}"/>
+                <a16:creationId xmlns:a16="http://schemas.microsoft.com/office/drawing/2014/main" id="{0B72EC5F-140B-40BD-8B4D-17D10CD4C5FC}"/>
               </a:ext>
             </a:extLst>
           </p:cNvPr>
@@ -26757,7 +26757,7 @@
           <p:cNvPr id="116" name="i-lab--0.005">
             <a:extLst xmlns:a="http://schemas.openxmlformats.org/drawingml/2006/main">
               <a:ext uri="{FF2B5EF4-FFF2-40B4-BE49-F238E27FC236}">
-                <a16:creationId xmlns:a16="http://schemas.microsoft.com/office/drawing/2014/main" id="{040DAFDF-6734-4A0F-9E48-DE0B866A4E74}"/>
+                <a16:creationId xmlns:a16="http://schemas.microsoft.com/office/drawing/2014/main" id="{C11B3DC0-0D5B-4EE3-B31D-D036FF8CC341}"/>
               </a:ext>
             </a:extLst>
           </p:cNvPr>
@@ -26819,7 +26819,7 @@
           <p:cNvPr id="117" name="i-tick-0.000">
             <a:extLst xmlns:a="http://schemas.openxmlformats.org/drawingml/2006/main">
               <a:ext uri="{FF2B5EF4-FFF2-40B4-BE49-F238E27FC236}">
-                <a16:creationId xmlns:a16="http://schemas.microsoft.com/office/drawing/2014/main" id="{0C5F934F-120B-4148-BA65-24348CEE35F8}"/>
+                <a16:creationId xmlns:a16="http://schemas.microsoft.com/office/drawing/2014/main" id="{34AB95B8-FD8D-4525-BBBA-D908A55BA233}"/>
               </a:ext>
             </a:extLst>
           </p:cNvPr>
@@ -26850,7 +26850,7 @@
           <p:cNvPr id="118" name="i-lab-0.000">
             <a:extLst xmlns:a="http://schemas.openxmlformats.org/drawingml/2006/main">
               <a:ext uri="{FF2B5EF4-FFF2-40B4-BE49-F238E27FC236}">
-                <a16:creationId xmlns:a16="http://schemas.microsoft.com/office/drawing/2014/main" id="{E9C2F410-711D-42B0-B5FF-AF34EC324476}"/>
+                <a16:creationId xmlns:a16="http://schemas.microsoft.com/office/drawing/2014/main" id="{1A03147F-D4C1-4D3E-AE76-73F98B54F980}"/>
               </a:ext>
             </a:extLst>
           </p:cNvPr>
@@ -26912,7 +26912,7 @@
           <p:cNvPr id="119" name="i-tick-0.005">
             <a:extLst xmlns:a="http://schemas.openxmlformats.org/drawingml/2006/main">
               <a:ext uri="{FF2B5EF4-FFF2-40B4-BE49-F238E27FC236}">
-                <a16:creationId xmlns:a16="http://schemas.microsoft.com/office/drawing/2014/main" id="{F69B817D-DDD1-4DF3-8A29-AD1B3CB56C20}"/>
+                <a16:creationId xmlns:a16="http://schemas.microsoft.com/office/drawing/2014/main" id="{47820A0C-A58E-4D75-A92F-F10E2519962B}"/>
               </a:ext>
             </a:extLst>
           </p:cNvPr>
@@ -26943,7 +26943,7 @@
           <p:cNvPr id="120" name="i-lab-0.005">
             <a:extLst xmlns:a="http://schemas.openxmlformats.org/drawingml/2006/main">
               <a:ext uri="{FF2B5EF4-FFF2-40B4-BE49-F238E27FC236}">
-                <a16:creationId xmlns:a16="http://schemas.microsoft.com/office/drawing/2014/main" id="{5C1F363D-1838-4006-A572-51F692DD2CC0}"/>
+                <a16:creationId xmlns:a16="http://schemas.microsoft.com/office/drawing/2014/main" id="{185C26A7-532C-4962-A01D-E24416852D40}"/>
               </a:ext>
             </a:extLst>
           </p:cNvPr>
@@ -27005,7 +27005,7 @@
           <p:cNvPr id="121" name="i-tick-0.010">
             <a:extLst xmlns:a="http://schemas.openxmlformats.org/drawingml/2006/main">
               <a:ext uri="{FF2B5EF4-FFF2-40B4-BE49-F238E27FC236}">
-                <a16:creationId xmlns:a16="http://schemas.microsoft.com/office/drawing/2014/main" id="{D899E504-0053-4B0D-B6E1-AC83BD7AF176}"/>
+                <a16:creationId xmlns:a16="http://schemas.microsoft.com/office/drawing/2014/main" id="{EEA357D0-2BDF-440E-B1F8-39EA5FE8882A}"/>
               </a:ext>
             </a:extLst>
           </p:cNvPr>
@@ -27036,7 +27036,7 @@
           <p:cNvPr id="122" name="i-lab-0.010">
             <a:extLst xmlns:a="http://schemas.openxmlformats.org/drawingml/2006/main">
               <a:ext uri="{FF2B5EF4-FFF2-40B4-BE49-F238E27FC236}">
-                <a16:creationId xmlns:a16="http://schemas.microsoft.com/office/drawing/2014/main" id="{DFC0B274-D266-4555-A1D1-D37C7B7A5BD7}"/>
+                <a16:creationId xmlns:a16="http://schemas.microsoft.com/office/drawing/2014/main" id="{523B3C62-B6D1-4F37-9543-27B3B76EB471}"/>
               </a:ext>
             </a:extLst>
           </p:cNvPr>
@@ -27098,7 +27098,7 @@
           <p:cNvPr id="123" name="i-tick-0.015">
             <a:extLst xmlns:a="http://schemas.openxmlformats.org/drawingml/2006/main">
               <a:ext uri="{FF2B5EF4-FFF2-40B4-BE49-F238E27FC236}">
-                <a16:creationId xmlns:a16="http://schemas.microsoft.com/office/drawing/2014/main" id="{D83905E3-BE64-42A9-A133-401C56BCAB3B}"/>
+                <a16:creationId xmlns:a16="http://schemas.microsoft.com/office/drawing/2014/main" id="{1E94A4DA-74D2-4851-9EFF-2CE6AB2D8401}"/>
               </a:ext>
             </a:extLst>
           </p:cNvPr>
@@ -27129,7 +27129,7 @@
           <p:cNvPr id="124" name="i-lab-0.015">
             <a:extLst xmlns:a="http://schemas.openxmlformats.org/drawingml/2006/main">
               <a:ext uri="{FF2B5EF4-FFF2-40B4-BE49-F238E27FC236}">
-                <a16:creationId xmlns:a16="http://schemas.microsoft.com/office/drawing/2014/main" id="{D529AAA5-4AEE-42AA-A5FE-7A175EC5A6C6}"/>
+                <a16:creationId xmlns:a16="http://schemas.microsoft.com/office/drawing/2014/main" id="{22168C8E-5675-4802-BF89-EA1F872C21E2}"/>
               </a:ext>
             </a:extLst>
           </p:cNvPr>
@@ -27191,7 +27191,7 @@
           <p:cNvPr id="125" name="i-tick-0.020">
             <a:extLst xmlns:a="http://schemas.openxmlformats.org/drawingml/2006/main">
               <a:ext uri="{FF2B5EF4-FFF2-40B4-BE49-F238E27FC236}">
-                <a16:creationId xmlns:a16="http://schemas.microsoft.com/office/drawing/2014/main" id="{B8694484-1B5D-46BD-A20A-A738076C39A1}"/>
+                <a16:creationId xmlns:a16="http://schemas.microsoft.com/office/drawing/2014/main" id="{228524BF-B5A9-414D-837E-24BF59C9E54A}"/>
               </a:ext>
             </a:extLst>
           </p:cNvPr>
@@ -27222,7 +27222,7 @@
           <p:cNvPr id="126" name="i-lab-0.020">
             <a:extLst xmlns:a="http://schemas.openxmlformats.org/drawingml/2006/main">
               <a:ext uri="{FF2B5EF4-FFF2-40B4-BE49-F238E27FC236}">
-                <a16:creationId xmlns:a16="http://schemas.microsoft.com/office/drawing/2014/main" id="{19650579-85A7-4BA9-A8B2-ABCA293E7C86}"/>
+                <a16:creationId xmlns:a16="http://schemas.microsoft.com/office/drawing/2014/main" id="{2A0B1063-6B8E-4865-ADAD-E39C63E4F9DA}"/>
               </a:ext>
             </a:extLst>
           </p:cNvPr>
@@ -27284,7 +27284,7 @@
           <p:cNvPr id="127" name="i-key-S">
             <a:extLst xmlns:a="http://schemas.openxmlformats.org/drawingml/2006/main">
               <a:ext uri="{FF2B5EF4-FFF2-40B4-BE49-F238E27FC236}">
-                <a16:creationId xmlns:a16="http://schemas.microsoft.com/office/drawing/2014/main" id="{0525B1AE-4652-414D-8855-96310B185712}"/>
+                <a16:creationId xmlns:a16="http://schemas.microsoft.com/office/drawing/2014/main" id="{EDAE178B-E78D-4238-ABC1-ED100D71BE9F}"/>
               </a:ext>
             </a:extLst>
           </p:cNvPr>
@@ -27319,7 +27319,7 @@
           <p:cNvPr id="128" name="i-key-lab-S">
             <a:extLst xmlns:a="http://schemas.openxmlformats.org/drawingml/2006/main">
               <a:ext uri="{FF2B5EF4-FFF2-40B4-BE49-F238E27FC236}">
-                <a16:creationId xmlns:a16="http://schemas.microsoft.com/office/drawing/2014/main" id="{C18E9C40-0C5C-469F-AA1C-115323F5E639}"/>
+                <a16:creationId xmlns:a16="http://schemas.microsoft.com/office/drawing/2014/main" id="{AC53A4DA-41F1-4EA6-A425-DCD7153C2D3D}"/>
               </a:ext>
             </a:extLst>
           </p:cNvPr>
@@ -27381,7 +27381,7 @@
           <p:cNvPr id="129" name="i-key-D">
             <a:extLst xmlns:a="http://schemas.openxmlformats.org/drawingml/2006/main">
               <a:ext uri="{FF2B5EF4-FFF2-40B4-BE49-F238E27FC236}">
-                <a16:creationId xmlns:a16="http://schemas.microsoft.com/office/drawing/2014/main" id="{94390EC1-5746-43F8-B0B9-0D46B99DAB63}"/>
+                <a16:creationId xmlns:a16="http://schemas.microsoft.com/office/drawing/2014/main" id="{94A2D65B-F87C-4BCB-9F27-11A7CA85EA65}"/>
               </a:ext>
             </a:extLst>
           </p:cNvPr>
@@ -27416,7 +27416,7 @@
           <p:cNvPr id="130" name="i-key-lab-D">
             <a:extLst xmlns:a="http://schemas.openxmlformats.org/drawingml/2006/main">
               <a:ext uri="{FF2B5EF4-FFF2-40B4-BE49-F238E27FC236}">
-                <a16:creationId xmlns:a16="http://schemas.microsoft.com/office/drawing/2014/main" id="{FA5C34F9-B878-4E5E-984A-D87A72D2425B}"/>
+                <a16:creationId xmlns:a16="http://schemas.microsoft.com/office/drawing/2014/main" id="{CC434634-DA7C-4E18-8AE0-3E01D9669C7E}"/>
               </a:ext>
             </a:extLst>
           </p:cNvPr>
@@ -27478,7 +27478,7 @@
           <p:cNvPr id="131" name="i-key-E1">
             <a:extLst xmlns:a="http://schemas.openxmlformats.org/drawingml/2006/main">
               <a:ext uri="{FF2B5EF4-FFF2-40B4-BE49-F238E27FC236}">
-                <a16:creationId xmlns:a16="http://schemas.microsoft.com/office/drawing/2014/main" id="{595206D8-F967-47DA-B2EA-794BD7A6B932}"/>
+                <a16:creationId xmlns:a16="http://schemas.microsoft.com/office/drawing/2014/main" id="{07C0EA68-CAF3-457B-81DC-89331B6FCAA7}"/>
               </a:ext>
             </a:extLst>
           </p:cNvPr>
@@ -27513,7 +27513,7 @@
           <p:cNvPr id="132" name="i-key-lab-E1">
             <a:extLst xmlns:a="http://schemas.openxmlformats.org/drawingml/2006/main">
               <a:ext uri="{FF2B5EF4-FFF2-40B4-BE49-F238E27FC236}">
-                <a16:creationId xmlns:a16="http://schemas.microsoft.com/office/drawing/2014/main" id="{01028CB4-813E-4B68-A6E2-C04816356F47}"/>
+                <a16:creationId xmlns:a16="http://schemas.microsoft.com/office/drawing/2014/main" id="{39ECA5AA-1A2F-4F7C-9A9D-04F98DCDBEC8}"/>
               </a:ext>
             </a:extLst>
           </p:cNvPr>
@@ -27575,7 +27575,7 @@
           <p:cNvPr id="133" name="i-key-E2">
             <a:extLst xmlns:a="http://schemas.openxmlformats.org/drawingml/2006/main">
               <a:ext uri="{FF2B5EF4-FFF2-40B4-BE49-F238E27FC236}">
-                <a16:creationId xmlns:a16="http://schemas.microsoft.com/office/drawing/2014/main" id="{BA90B5ED-2CC0-4AD0-A83E-943635179C36}"/>
+                <a16:creationId xmlns:a16="http://schemas.microsoft.com/office/drawing/2014/main" id="{21ED057B-3C76-448F-9E1A-110601F6C052}"/>
               </a:ext>
             </a:extLst>
           </p:cNvPr>
@@ -27610,7 +27610,7 @@
           <p:cNvPr id="134" name="i-key-lab-E2">
             <a:extLst xmlns:a="http://schemas.openxmlformats.org/drawingml/2006/main">
               <a:ext uri="{FF2B5EF4-FFF2-40B4-BE49-F238E27FC236}">
-                <a16:creationId xmlns:a16="http://schemas.microsoft.com/office/drawing/2014/main" id="{A4F973C1-E652-4ECF-B2D0-163DA3C75274}"/>
+                <a16:creationId xmlns:a16="http://schemas.microsoft.com/office/drawing/2014/main" id="{67408C5D-6E5C-4DDB-857F-DA65B08566DA}"/>
               </a:ext>
             </a:extLst>
           </p:cNvPr>
@@ -27672,7 +27672,7 @@
           <p:cNvPr id="135" name="i-key-E3">
             <a:extLst xmlns:a="http://schemas.openxmlformats.org/drawingml/2006/main">
               <a:ext uri="{FF2B5EF4-FFF2-40B4-BE49-F238E27FC236}">
-                <a16:creationId xmlns:a16="http://schemas.microsoft.com/office/drawing/2014/main" id="{0ADFB1DE-6F30-4126-8C11-2092296694B3}"/>
+                <a16:creationId xmlns:a16="http://schemas.microsoft.com/office/drawing/2014/main" id="{4777895D-DE99-4EA2-A0F6-B33D29FB28D5}"/>
               </a:ext>
             </a:extLst>
           </p:cNvPr>
@@ -27707,7 +27707,7 @@
           <p:cNvPr id="136" name="i-key-lab-E3">
             <a:extLst xmlns:a="http://schemas.openxmlformats.org/drawingml/2006/main">
               <a:ext uri="{FF2B5EF4-FFF2-40B4-BE49-F238E27FC236}">
-                <a16:creationId xmlns:a16="http://schemas.microsoft.com/office/drawing/2014/main" id="{4DA2DFF9-071A-4453-B3B8-789F57DC97B4}"/>
+                <a16:creationId xmlns:a16="http://schemas.microsoft.com/office/drawing/2014/main" id="{DC382212-540F-43F9-AFCB-35ABE15EE7A3}"/>
               </a:ext>
             </a:extLst>
           </p:cNvPr>
@@ -27769,7 +27769,7 @@
           <p:cNvPr id="137" name="i-zero">
             <a:extLst xmlns:a="http://schemas.openxmlformats.org/drawingml/2006/main">
               <a:ext uri="{FF2B5EF4-FFF2-40B4-BE49-F238E27FC236}">
-                <a16:creationId xmlns:a16="http://schemas.microsoft.com/office/drawing/2014/main" id="{ADAF72EB-021C-4A77-AE2A-D355133895B2}"/>
+                <a16:creationId xmlns:a16="http://schemas.microsoft.com/office/drawing/2014/main" id="{827810DA-AA53-4654-9448-DE9505F848B6}"/>
               </a:ext>
             </a:extLst>
           </p:cNvPr>
@@ -27800,7 +27800,7 @@
           <p:cNvPr id="138" name="i-scale">
             <a:extLst xmlns:a="http://schemas.openxmlformats.org/drawingml/2006/main">
               <a:ext uri="{FF2B5EF4-FFF2-40B4-BE49-F238E27FC236}">
-                <a16:creationId xmlns:a16="http://schemas.microsoft.com/office/drawing/2014/main" id="{542C0934-3399-4858-8E2A-7BECB7B46734}"/>
+                <a16:creationId xmlns:a16="http://schemas.microsoft.com/office/drawing/2014/main" id="{E40CEDF6-CE1A-4D83-BAB8-79032F3D7755}"/>
               </a:ext>
             </a:extLst>
           </p:cNvPr>
@@ -27831,7 +27831,7 @@
           <p:cNvPr id="139" name="i0-label">
             <a:extLst xmlns:a="http://schemas.openxmlformats.org/drawingml/2006/main">
               <a:ext uri="{FF2B5EF4-FFF2-40B4-BE49-F238E27FC236}">
-                <a16:creationId xmlns:a16="http://schemas.microsoft.com/office/drawing/2014/main" id="{9B753F41-A0CF-492A-9A2E-0280003521F3}"/>
+                <a16:creationId xmlns:a16="http://schemas.microsoft.com/office/drawing/2014/main" id="{44FF9637-0175-4E2D-A3E2-B02E1524560F}"/>
               </a:ext>
             </a:extLst>
           </p:cNvPr>
@@ -27904,7 +27904,7 @@
           <p:cNvPr id="140" name="i0-S-bar">
             <a:extLst xmlns:a="http://schemas.openxmlformats.org/drawingml/2006/main">
               <a:ext uri="{FF2B5EF4-FFF2-40B4-BE49-F238E27FC236}">
-                <a16:creationId xmlns:a16="http://schemas.microsoft.com/office/drawing/2014/main" id="{35F54005-EC78-446A-B513-9367FB8F8826}"/>
+                <a16:creationId xmlns:a16="http://schemas.microsoft.com/office/drawing/2014/main" id="{5B0934E8-05C7-423C-A453-6D64D34763BF}"/>
               </a:ext>
             </a:extLst>
           </p:cNvPr>
@@ -27935,7 +27935,7 @@
           <p:cNvPr id="141" name="i0-S-ci">
             <a:extLst xmlns:a="http://schemas.openxmlformats.org/drawingml/2006/main">
               <a:ext uri="{FF2B5EF4-FFF2-40B4-BE49-F238E27FC236}">
-                <a16:creationId xmlns:a16="http://schemas.microsoft.com/office/drawing/2014/main" id="{72964991-2CA3-418D-AFCB-E133C9D88C8B}"/>
+                <a16:creationId xmlns:a16="http://schemas.microsoft.com/office/drawing/2014/main" id="{B0A811E2-CE87-423B-996D-2EF49A389FEE}"/>
               </a:ext>
             </a:extLst>
           </p:cNvPr>
@@ -27966,7 +27966,7 @@
           <p:cNvPr id="142" name="i0-S-cil">
             <a:extLst xmlns:a="http://schemas.openxmlformats.org/drawingml/2006/main">
               <a:ext uri="{FF2B5EF4-FFF2-40B4-BE49-F238E27FC236}">
-                <a16:creationId xmlns:a16="http://schemas.microsoft.com/office/drawing/2014/main" id="{04076390-471B-427E-9B60-BB69521066E7}"/>
+                <a16:creationId xmlns:a16="http://schemas.microsoft.com/office/drawing/2014/main" id="{DE1CED5C-1DC5-48C7-ABE2-D64ADD6B2442}"/>
               </a:ext>
             </a:extLst>
           </p:cNvPr>
@@ -27997,7 +27997,7 @@
           <p:cNvPr id="143" name="i0-S-cih">
             <a:extLst xmlns:a="http://schemas.openxmlformats.org/drawingml/2006/main">
               <a:ext uri="{FF2B5EF4-FFF2-40B4-BE49-F238E27FC236}">
-                <a16:creationId xmlns:a16="http://schemas.microsoft.com/office/drawing/2014/main" id="{E102C8A1-77DE-4AD5-875E-3C9530887978}"/>
+                <a16:creationId xmlns:a16="http://schemas.microsoft.com/office/drawing/2014/main" id="{2609AEBD-75C8-4980-B5E8-E66169749A73}"/>
               </a:ext>
             </a:extLst>
           </p:cNvPr>
@@ -28028,7 +28028,7 @@
           <p:cNvPr id="144" name="i0-S-mark">
             <a:extLst xmlns:a="http://schemas.openxmlformats.org/drawingml/2006/main">
               <a:ext uri="{FF2B5EF4-FFF2-40B4-BE49-F238E27FC236}">
-                <a16:creationId xmlns:a16="http://schemas.microsoft.com/office/drawing/2014/main" id="{E1BDD70E-EA12-4EF7-B7B7-FCD5646436B1}"/>
+                <a16:creationId xmlns:a16="http://schemas.microsoft.com/office/drawing/2014/main" id="{D2B7150E-5A5F-468D-BBB0-C32BD2121E49}"/>
               </a:ext>
             </a:extLst>
           </p:cNvPr>
@@ -28059,7 +28059,7 @@
           <p:cNvPr id="145" name="i0-D-bar">
             <a:extLst xmlns:a="http://schemas.openxmlformats.org/drawingml/2006/main">
               <a:ext uri="{FF2B5EF4-FFF2-40B4-BE49-F238E27FC236}">
-                <a16:creationId xmlns:a16="http://schemas.microsoft.com/office/drawing/2014/main" id="{B93FD187-BF35-49ED-B3B6-EDA1242F7F01}"/>
+                <a16:creationId xmlns:a16="http://schemas.microsoft.com/office/drawing/2014/main" id="{0585C192-37D4-4833-AD35-4D7E0157D78C}"/>
               </a:ext>
             </a:extLst>
           </p:cNvPr>
@@ -28090,7 +28090,7 @@
           <p:cNvPr id="146" name="i0-D-ci">
             <a:extLst xmlns:a="http://schemas.openxmlformats.org/drawingml/2006/main">
               <a:ext uri="{FF2B5EF4-FFF2-40B4-BE49-F238E27FC236}">
-                <a16:creationId xmlns:a16="http://schemas.microsoft.com/office/drawing/2014/main" id="{66E4F219-1B64-4FCA-9295-21DE7D480D0D}"/>
+                <a16:creationId xmlns:a16="http://schemas.microsoft.com/office/drawing/2014/main" id="{4A1235E8-DE8E-4E16-B099-CE4AA6C8999F}"/>
               </a:ext>
             </a:extLst>
           </p:cNvPr>
@@ -28121,7 +28121,7 @@
           <p:cNvPr id="147" name="i0-D-cil">
             <a:extLst xmlns:a="http://schemas.openxmlformats.org/drawingml/2006/main">
               <a:ext uri="{FF2B5EF4-FFF2-40B4-BE49-F238E27FC236}">
-                <a16:creationId xmlns:a16="http://schemas.microsoft.com/office/drawing/2014/main" id="{39663BBD-D552-452B-ABEA-E08A0C40CDEE}"/>
+                <a16:creationId xmlns:a16="http://schemas.microsoft.com/office/drawing/2014/main" id="{BF3F1C33-9BAA-466C-86D6-9E0B37BBA9E7}"/>
               </a:ext>
             </a:extLst>
           </p:cNvPr>
@@ -28152,7 +28152,7 @@
           <p:cNvPr id="148" name="i0-D-cih">
             <a:extLst xmlns:a="http://schemas.openxmlformats.org/drawingml/2006/main">
               <a:ext uri="{FF2B5EF4-FFF2-40B4-BE49-F238E27FC236}">
-                <a16:creationId xmlns:a16="http://schemas.microsoft.com/office/drawing/2014/main" id="{6FF0EA87-604F-4A6D-BE8D-2E4C07F1400D}"/>
+                <a16:creationId xmlns:a16="http://schemas.microsoft.com/office/drawing/2014/main" id="{0153B261-2C9D-4920-8B9C-85C9939384E4}"/>
               </a:ext>
             </a:extLst>
           </p:cNvPr>
@@ -28183,7 +28183,7 @@
           <p:cNvPr id="149" name="i0-D-mark">
             <a:extLst xmlns:a="http://schemas.openxmlformats.org/drawingml/2006/main">
               <a:ext uri="{FF2B5EF4-FFF2-40B4-BE49-F238E27FC236}">
-                <a16:creationId xmlns:a16="http://schemas.microsoft.com/office/drawing/2014/main" id="{08F1AC51-A615-4080-829C-9430DA3FB136}"/>
+                <a16:creationId xmlns:a16="http://schemas.microsoft.com/office/drawing/2014/main" id="{640FB927-AD49-441C-A66C-9C6DFEF9414B}"/>
               </a:ext>
             </a:extLst>
           </p:cNvPr>
@@ -28214,7 +28214,7 @@
           <p:cNvPr id="150" name="i0-E1-bar">
             <a:extLst xmlns:a="http://schemas.openxmlformats.org/drawingml/2006/main">
               <a:ext uri="{FF2B5EF4-FFF2-40B4-BE49-F238E27FC236}">
-                <a16:creationId xmlns:a16="http://schemas.microsoft.com/office/drawing/2014/main" id="{47099A36-44C7-47A1-BE4F-49231C50BE88}"/>
+                <a16:creationId xmlns:a16="http://schemas.microsoft.com/office/drawing/2014/main" id="{EA324343-2D41-4809-96C3-9118AF26FBA3}"/>
               </a:ext>
             </a:extLst>
           </p:cNvPr>
@@ -28245,7 +28245,7 @@
           <p:cNvPr id="151" name="i0-E1-ci">
             <a:extLst xmlns:a="http://schemas.openxmlformats.org/drawingml/2006/main">
               <a:ext uri="{FF2B5EF4-FFF2-40B4-BE49-F238E27FC236}">
-                <a16:creationId xmlns:a16="http://schemas.microsoft.com/office/drawing/2014/main" id="{5073A728-05D5-42C1-B343-05A750FECAA3}"/>
+                <a16:creationId xmlns:a16="http://schemas.microsoft.com/office/drawing/2014/main" id="{0834A2F7-923F-4393-9478-41E493CC9A76}"/>
               </a:ext>
             </a:extLst>
           </p:cNvPr>
@@ -28276,7 +28276,7 @@
           <p:cNvPr id="152" name="i0-E1-cil">
             <a:extLst xmlns:a="http://schemas.openxmlformats.org/drawingml/2006/main">
               <a:ext uri="{FF2B5EF4-FFF2-40B4-BE49-F238E27FC236}">
-                <a16:creationId xmlns:a16="http://schemas.microsoft.com/office/drawing/2014/main" id="{29367B83-59DA-4DC4-851F-2B1B3EFF6D3A}"/>
+                <a16:creationId xmlns:a16="http://schemas.microsoft.com/office/drawing/2014/main" id="{E57C1DF4-63EB-4253-AEB4-0C6C591F26F7}"/>
               </a:ext>
             </a:extLst>
           </p:cNvPr>
@@ -28307,7 +28307,7 @@
           <p:cNvPr id="153" name="i0-E1-cih">
             <a:extLst xmlns:a="http://schemas.openxmlformats.org/drawingml/2006/main">
               <a:ext uri="{FF2B5EF4-FFF2-40B4-BE49-F238E27FC236}">
-                <a16:creationId xmlns:a16="http://schemas.microsoft.com/office/drawing/2014/main" id="{E83013FB-BC38-40CD-A55D-B20F5ED4717C}"/>
+                <a16:creationId xmlns:a16="http://schemas.microsoft.com/office/drawing/2014/main" id="{961B4D9C-3109-468E-908F-AC287C9C5D29}"/>
               </a:ext>
             </a:extLst>
           </p:cNvPr>
@@ -28338,7 +28338,7 @@
           <p:cNvPr id="154" name="i0-E1-mark">
             <a:extLst xmlns:a="http://schemas.openxmlformats.org/drawingml/2006/main">
               <a:ext uri="{FF2B5EF4-FFF2-40B4-BE49-F238E27FC236}">
-                <a16:creationId xmlns:a16="http://schemas.microsoft.com/office/drawing/2014/main" id="{F9931F68-C98C-4E6F-8BC7-11F172D9DEE2}"/>
+                <a16:creationId xmlns:a16="http://schemas.microsoft.com/office/drawing/2014/main" id="{C711E532-36EF-4C55-A6F6-ABF61E1D4B35}"/>
               </a:ext>
             </a:extLst>
           </p:cNvPr>
@@ -28369,7 +28369,7 @@
           <p:cNvPr id="155" name="i0-E2-bar">
             <a:extLst xmlns:a="http://schemas.openxmlformats.org/drawingml/2006/main">
               <a:ext uri="{FF2B5EF4-FFF2-40B4-BE49-F238E27FC236}">
-                <a16:creationId xmlns:a16="http://schemas.microsoft.com/office/drawing/2014/main" id="{7FE0C6D1-3392-4BED-B18E-85077505D315}"/>
+                <a16:creationId xmlns:a16="http://schemas.microsoft.com/office/drawing/2014/main" id="{A0FA46B2-AB53-4E59-AEBD-9F1FFE3D609C}"/>
               </a:ext>
             </a:extLst>
           </p:cNvPr>
@@ -28400,7 +28400,7 @@
           <p:cNvPr id="156" name="i0-E2-ci">
             <a:extLst xmlns:a="http://schemas.openxmlformats.org/drawingml/2006/main">
               <a:ext uri="{FF2B5EF4-FFF2-40B4-BE49-F238E27FC236}">
-                <a16:creationId xmlns:a16="http://schemas.microsoft.com/office/drawing/2014/main" id="{6C52BCBA-8F9A-4D3F-8332-49EEB3E35B1A}"/>
+                <a16:creationId xmlns:a16="http://schemas.microsoft.com/office/drawing/2014/main" id="{FDDBB134-53FA-4F10-8E60-BA2CC9055D65}"/>
               </a:ext>
             </a:extLst>
           </p:cNvPr>
@@ -28431,7 +28431,7 @@
           <p:cNvPr id="157" name="i0-E2-cil">
             <a:extLst xmlns:a="http://schemas.openxmlformats.org/drawingml/2006/main">
               <a:ext uri="{FF2B5EF4-FFF2-40B4-BE49-F238E27FC236}">
-                <a16:creationId xmlns:a16="http://schemas.microsoft.com/office/drawing/2014/main" id="{1D791993-A7E9-497F-AF2C-13BCC4C5A9C4}"/>
+                <a16:creationId xmlns:a16="http://schemas.microsoft.com/office/drawing/2014/main" id="{A5C665A9-9BF2-48F5-9B69-C37AE1551C67}"/>
               </a:ext>
             </a:extLst>
           </p:cNvPr>
@@ -28462,7 +28462,7 @@
           <p:cNvPr id="158" name="i0-E2-cih">
             <a:extLst xmlns:a="http://schemas.openxmlformats.org/drawingml/2006/main">
               <a:ext uri="{FF2B5EF4-FFF2-40B4-BE49-F238E27FC236}">
-                <a16:creationId xmlns:a16="http://schemas.microsoft.com/office/drawing/2014/main" id="{5F1D86E4-9461-4C41-88FB-C830FE26C143}"/>
+                <a16:creationId xmlns:a16="http://schemas.microsoft.com/office/drawing/2014/main" id="{8D8E58AE-A80A-4B6B-871A-6C1407B0CEE4}"/>
               </a:ext>
             </a:extLst>
           </p:cNvPr>
@@ -28493,7 +28493,7 @@
           <p:cNvPr id="159" name="i0-E2-mark">
             <a:extLst xmlns:a="http://schemas.openxmlformats.org/drawingml/2006/main">
               <a:ext uri="{FF2B5EF4-FFF2-40B4-BE49-F238E27FC236}">
-                <a16:creationId xmlns:a16="http://schemas.microsoft.com/office/drawing/2014/main" id="{A40013A5-9378-4505-B3B4-697688AC89E9}"/>
+                <a16:creationId xmlns:a16="http://schemas.microsoft.com/office/drawing/2014/main" id="{8E708250-B965-47B5-B9BB-2461DA716D95}"/>
               </a:ext>
             </a:extLst>
           </p:cNvPr>
@@ -28524,7 +28524,7 @@
           <p:cNvPr id="160" name="i0-E3-bar">
             <a:extLst xmlns:a="http://schemas.openxmlformats.org/drawingml/2006/main">
               <a:ext uri="{FF2B5EF4-FFF2-40B4-BE49-F238E27FC236}">
-                <a16:creationId xmlns:a16="http://schemas.microsoft.com/office/drawing/2014/main" id="{457AE8F0-2F6D-4AC8-86BE-1C1DC6F7AB74}"/>
+                <a16:creationId xmlns:a16="http://schemas.microsoft.com/office/drawing/2014/main" id="{991BCFBE-AC14-49BE-9180-D4B0DAEABCDF}"/>
               </a:ext>
             </a:extLst>
           </p:cNvPr>
@@ -28555,7 +28555,7 @@
           <p:cNvPr id="161" name="i0-E3-ci">
             <a:extLst xmlns:a="http://schemas.openxmlformats.org/drawingml/2006/main">
               <a:ext uri="{FF2B5EF4-FFF2-40B4-BE49-F238E27FC236}">
-                <a16:creationId xmlns:a16="http://schemas.microsoft.com/office/drawing/2014/main" id="{170F02C3-1DEF-45B3-8ECC-F297B0D6E451}"/>
+                <a16:creationId xmlns:a16="http://schemas.microsoft.com/office/drawing/2014/main" id="{3B452690-F97E-430F-834F-35D44DD8ECF9}"/>
               </a:ext>
             </a:extLst>
           </p:cNvPr>
@@ -28586,7 +28586,7 @@
           <p:cNvPr id="162" name="i0-E3-cil">
             <a:extLst xmlns:a="http://schemas.openxmlformats.org/drawingml/2006/main">
               <a:ext uri="{FF2B5EF4-FFF2-40B4-BE49-F238E27FC236}">
-                <a16:creationId xmlns:a16="http://schemas.microsoft.com/office/drawing/2014/main" id="{00FA6F2F-FC4C-4E69-8836-B63D7229FD58}"/>
+                <a16:creationId xmlns:a16="http://schemas.microsoft.com/office/drawing/2014/main" id="{5955E1D8-8A79-4ED4-A4B9-C780D329E4F6}"/>
               </a:ext>
             </a:extLst>
           </p:cNvPr>
@@ -28617,7 +28617,7 @@
           <p:cNvPr id="163" name="i0-E3-cih">
             <a:extLst xmlns:a="http://schemas.openxmlformats.org/drawingml/2006/main">
               <a:ext uri="{FF2B5EF4-FFF2-40B4-BE49-F238E27FC236}">
-                <a16:creationId xmlns:a16="http://schemas.microsoft.com/office/drawing/2014/main" id="{DC87DF51-D4B4-4F2B-B572-3E8D9044BFB4}"/>
+                <a16:creationId xmlns:a16="http://schemas.microsoft.com/office/drawing/2014/main" id="{3BE892E1-B8A6-4238-AC38-2596FCAF8CD2}"/>
               </a:ext>
             </a:extLst>
           </p:cNvPr>
@@ -28648,7 +28648,7 @@
           <p:cNvPr id="164" name="i0-E3-mark">
             <a:extLst xmlns:a="http://schemas.openxmlformats.org/drawingml/2006/main">
               <a:ext uri="{FF2B5EF4-FFF2-40B4-BE49-F238E27FC236}">
-                <a16:creationId xmlns:a16="http://schemas.microsoft.com/office/drawing/2014/main" id="{5280B080-8B8C-4777-A4FD-C16E7AF5FE20}"/>
+                <a16:creationId xmlns:a16="http://schemas.microsoft.com/office/drawing/2014/main" id="{C125EADF-5CC8-4C00-8D0F-0FD6D3972D7E}"/>
               </a:ext>
             </a:extLst>
           </p:cNvPr>
@@ -28679,7 +28679,7 @@
           <p:cNvPr id="165" name="i1-label">
             <a:extLst xmlns:a="http://schemas.openxmlformats.org/drawingml/2006/main">
               <a:ext uri="{FF2B5EF4-FFF2-40B4-BE49-F238E27FC236}">
-                <a16:creationId xmlns:a16="http://schemas.microsoft.com/office/drawing/2014/main" id="{1C6D4DBE-F1A7-40ED-BE61-FDA1C64B97BB}"/>
+                <a16:creationId xmlns:a16="http://schemas.microsoft.com/office/drawing/2014/main" id="{B1C2DBED-5E7D-4607-809F-EB8FB18A7717}"/>
               </a:ext>
             </a:extLst>
           </p:cNvPr>
@@ -28752,7 +28752,7 @@
           <p:cNvPr id="166" name="i1-S-bar">
             <a:extLst xmlns:a="http://schemas.openxmlformats.org/drawingml/2006/main">
               <a:ext uri="{FF2B5EF4-FFF2-40B4-BE49-F238E27FC236}">
-                <a16:creationId xmlns:a16="http://schemas.microsoft.com/office/drawing/2014/main" id="{0B16A4A4-E092-4B7A-AB59-781AD6C06167}"/>
+                <a16:creationId xmlns:a16="http://schemas.microsoft.com/office/drawing/2014/main" id="{ED710D5C-ADC4-4033-9F42-F1BA3939C60B}"/>
               </a:ext>
             </a:extLst>
           </p:cNvPr>
@@ -28783,7 +28783,7 @@
           <p:cNvPr id="167" name="i1-S-ci">
             <a:extLst xmlns:a="http://schemas.openxmlformats.org/drawingml/2006/main">
               <a:ext uri="{FF2B5EF4-FFF2-40B4-BE49-F238E27FC236}">
-                <a16:creationId xmlns:a16="http://schemas.microsoft.com/office/drawing/2014/main" id="{CAFB3C08-7C70-4225-9B22-35723C9A61A2}"/>
+                <a16:creationId xmlns:a16="http://schemas.microsoft.com/office/drawing/2014/main" id="{9FE51D56-74BC-47AF-87BE-AE98AD2BBD12}"/>
               </a:ext>
             </a:extLst>
           </p:cNvPr>
@@ -28814,7 +28814,7 @@
           <p:cNvPr id="168" name="i1-S-cil">
             <a:extLst xmlns:a="http://schemas.openxmlformats.org/drawingml/2006/main">
               <a:ext uri="{FF2B5EF4-FFF2-40B4-BE49-F238E27FC236}">
-                <a16:creationId xmlns:a16="http://schemas.microsoft.com/office/drawing/2014/main" id="{1C2AEBA4-476A-45D2-B6BC-ACB0B7CB0B27}"/>
+                <a16:creationId xmlns:a16="http://schemas.microsoft.com/office/drawing/2014/main" id="{9CE5978E-95B3-4AF9-B78B-D932ACF047E4}"/>
               </a:ext>
             </a:extLst>
           </p:cNvPr>
@@ -28845,7 +28845,7 @@
           <p:cNvPr id="169" name="i1-S-cih">
             <a:extLst xmlns:a="http://schemas.openxmlformats.org/drawingml/2006/main">
               <a:ext uri="{FF2B5EF4-FFF2-40B4-BE49-F238E27FC236}">
-                <a16:creationId xmlns:a16="http://schemas.microsoft.com/office/drawing/2014/main" id="{9CA8D99E-AB19-4413-A194-B49B30559B0E}"/>
+                <a16:creationId xmlns:a16="http://schemas.microsoft.com/office/drawing/2014/main" id="{7A39B620-D8CB-47BE-87E4-2BF819D0736F}"/>
               </a:ext>
             </a:extLst>
           </p:cNvPr>
@@ -28876,7 +28876,7 @@
           <p:cNvPr id="170" name="i1-S-mark">
             <a:extLst xmlns:a="http://schemas.openxmlformats.org/drawingml/2006/main">
               <a:ext uri="{FF2B5EF4-FFF2-40B4-BE49-F238E27FC236}">
-                <a16:creationId xmlns:a16="http://schemas.microsoft.com/office/drawing/2014/main" id="{5AAA5E46-CE5A-42A3-B1CE-02466FD9A45D}"/>
+                <a16:creationId xmlns:a16="http://schemas.microsoft.com/office/drawing/2014/main" id="{A8B223C1-92D7-4EAD-9ADD-57E9104A4F25}"/>
               </a:ext>
             </a:extLst>
           </p:cNvPr>
@@ -28907,7 +28907,7 @@
           <p:cNvPr id="171" name="i1-D-bar">
             <a:extLst xmlns:a="http://schemas.openxmlformats.org/drawingml/2006/main">
               <a:ext uri="{FF2B5EF4-FFF2-40B4-BE49-F238E27FC236}">
-                <a16:creationId xmlns:a16="http://schemas.microsoft.com/office/drawing/2014/main" id="{76D43F89-4D11-4654-94F1-A6AD1E035C1D}"/>
+                <a16:creationId xmlns:a16="http://schemas.microsoft.com/office/drawing/2014/main" id="{30E791CF-2197-4C02-A751-EB88EF3EE72A}"/>
               </a:ext>
             </a:extLst>
           </p:cNvPr>
@@ -28938,7 +28938,7 @@
           <p:cNvPr id="172" name="i1-D-ci">
             <a:extLst xmlns:a="http://schemas.openxmlformats.org/drawingml/2006/main">
               <a:ext uri="{FF2B5EF4-FFF2-40B4-BE49-F238E27FC236}">
-                <a16:creationId xmlns:a16="http://schemas.microsoft.com/office/drawing/2014/main" id="{CA947FB5-3812-4F87-B58C-64E1CA1BFEE6}"/>
+                <a16:creationId xmlns:a16="http://schemas.microsoft.com/office/drawing/2014/main" id="{7E5FFDEA-75E7-4AB9-AD2D-6C0C415EFBF0}"/>
               </a:ext>
             </a:extLst>
           </p:cNvPr>
@@ -28969,7 +28969,7 @@
           <p:cNvPr id="173" name="i1-D-cil">
             <a:extLst xmlns:a="http://schemas.openxmlformats.org/drawingml/2006/main">
               <a:ext uri="{FF2B5EF4-FFF2-40B4-BE49-F238E27FC236}">
-                <a16:creationId xmlns:a16="http://schemas.microsoft.com/office/drawing/2014/main" id="{0C4F8BEB-A543-4432-9A4A-C5FCDC97385A}"/>
+                <a16:creationId xmlns:a16="http://schemas.microsoft.com/office/drawing/2014/main" id="{B7FD0D34-6CDB-445F-AA43-734808CFFEA4}"/>
               </a:ext>
             </a:extLst>
           </p:cNvPr>
@@ -29000,7 +29000,7 @@
           <p:cNvPr id="174" name="i1-D-cih">
             <a:extLst xmlns:a="http://schemas.openxmlformats.org/drawingml/2006/main">
               <a:ext uri="{FF2B5EF4-FFF2-40B4-BE49-F238E27FC236}">
-                <a16:creationId xmlns:a16="http://schemas.microsoft.com/office/drawing/2014/main" id="{7D8E7F6A-9E96-40EA-BA14-3A0C87A37A3C}"/>
+                <a16:creationId xmlns:a16="http://schemas.microsoft.com/office/drawing/2014/main" id="{335B99FA-CE94-403F-BD42-F056D073733A}"/>
               </a:ext>
             </a:extLst>
           </p:cNvPr>
@@ -29031,7 +29031,7 @@
           <p:cNvPr id="175" name="i1-D-mark">
             <a:extLst xmlns:a="http://schemas.openxmlformats.org/drawingml/2006/main">
               <a:ext uri="{FF2B5EF4-FFF2-40B4-BE49-F238E27FC236}">
-                <a16:creationId xmlns:a16="http://schemas.microsoft.com/office/drawing/2014/main" id="{0A8D7167-7CD9-4D34-940F-855E9AB03244}"/>
+                <a16:creationId xmlns:a16="http://schemas.microsoft.com/office/drawing/2014/main" id="{C8CBF35F-FF14-47D1-ADAA-B7BD4378CF34}"/>
               </a:ext>
             </a:extLst>
           </p:cNvPr>
@@ -29062,7 +29062,7 @@
           <p:cNvPr id="176" name="i1-E1-bar">
             <a:extLst xmlns:a="http://schemas.openxmlformats.org/drawingml/2006/main">
               <a:ext uri="{FF2B5EF4-FFF2-40B4-BE49-F238E27FC236}">
-                <a16:creationId xmlns:a16="http://schemas.microsoft.com/office/drawing/2014/main" id="{4F209BA1-1A84-4542-B82A-FFCED2226AE5}"/>
+                <a16:creationId xmlns:a16="http://schemas.microsoft.com/office/drawing/2014/main" id="{7445A1A7-BCF9-4902-BA67-AE826FDE906F}"/>
               </a:ext>
             </a:extLst>
           </p:cNvPr>
@@ -29093,7 +29093,7 @@
           <p:cNvPr id="177" name="i1-E1-ci">
             <a:extLst xmlns:a="http://schemas.openxmlformats.org/drawingml/2006/main">
               <a:ext uri="{FF2B5EF4-FFF2-40B4-BE49-F238E27FC236}">
-                <a16:creationId xmlns:a16="http://schemas.microsoft.com/office/drawing/2014/main" id="{CD2966E4-DC52-4854-89DA-371C5F3425DC}"/>
+                <a16:creationId xmlns:a16="http://schemas.microsoft.com/office/drawing/2014/main" id="{9CC7E992-3F20-4654-8708-91CD29DDEFD3}"/>
               </a:ext>
             </a:extLst>
           </p:cNvPr>
@@ -29124,7 +29124,7 @@
           <p:cNvPr id="178" name="i1-E1-cil">
             <a:extLst xmlns:a="http://schemas.openxmlformats.org/drawingml/2006/main">
               <a:ext uri="{FF2B5EF4-FFF2-40B4-BE49-F238E27FC236}">
-                <a16:creationId xmlns:a16="http://schemas.microsoft.com/office/drawing/2014/main" id="{4E3D11CB-9211-411C-9CE2-02D1A2DCFB04}"/>
+                <a16:creationId xmlns:a16="http://schemas.microsoft.com/office/drawing/2014/main" id="{252D1085-8790-4839-AED7-335CB76FBC6C}"/>
               </a:ext>
             </a:extLst>
           </p:cNvPr>
@@ -29155,7 +29155,7 @@
           <p:cNvPr id="179" name="i1-E1-cih">
             <a:extLst xmlns:a="http://schemas.openxmlformats.org/drawingml/2006/main">
               <a:ext uri="{FF2B5EF4-FFF2-40B4-BE49-F238E27FC236}">
-                <a16:creationId xmlns:a16="http://schemas.microsoft.com/office/drawing/2014/main" id="{15A1305A-3C10-4A54-AFE6-8AA3293E3A13}"/>
+                <a16:creationId xmlns:a16="http://schemas.microsoft.com/office/drawing/2014/main" id="{937974E1-DC2F-4515-839A-6918D5B19AAF}"/>
               </a:ext>
             </a:extLst>
           </p:cNvPr>
@@ -29186,7 +29186,7 @@
           <p:cNvPr id="180" name="i1-E1-mark">
             <a:extLst xmlns:a="http://schemas.openxmlformats.org/drawingml/2006/main">
               <a:ext uri="{FF2B5EF4-FFF2-40B4-BE49-F238E27FC236}">
-                <a16:creationId xmlns:a16="http://schemas.microsoft.com/office/drawing/2014/main" id="{D12AB71F-F269-497C-B6D8-2FB93AB6DBC6}"/>
+                <a16:creationId xmlns:a16="http://schemas.microsoft.com/office/drawing/2014/main" id="{41349537-52AE-4AA3-901F-5FA0F364C83C}"/>
               </a:ext>
             </a:extLst>
           </p:cNvPr>
@@ -29217,7 +29217,7 @@
           <p:cNvPr id="181" name="i1-E2-bar">
             <a:extLst xmlns:a="http://schemas.openxmlformats.org/drawingml/2006/main">
               <a:ext uri="{FF2B5EF4-FFF2-40B4-BE49-F238E27FC236}">
-                <a16:creationId xmlns:a16="http://schemas.microsoft.com/office/drawing/2014/main" id="{7016377E-4915-4A21-80E6-D7C3856FF2A7}"/>
+                <a16:creationId xmlns:a16="http://schemas.microsoft.com/office/drawing/2014/main" id="{54FF2D52-797D-4009-B49B-3D36A5C79B44}"/>
               </a:ext>
             </a:extLst>
           </p:cNvPr>
@@ -29248,7 +29248,7 @@
           <p:cNvPr id="182" name="i1-E2-ci">
             <a:extLst xmlns:a="http://schemas.openxmlformats.org/drawingml/2006/main">
               <a:ext uri="{FF2B5EF4-FFF2-40B4-BE49-F238E27FC236}">
-                <a16:creationId xmlns:a16="http://schemas.microsoft.com/office/drawing/2014/main" id="{964D5542-A11D-4DFA-BBBA-AFC521EE5A67}"/>
+                <a16:creationId xmlns:a16="http://schemas.microsoft.com/office/drawing/2014/main" id="{77E3C4E4-E84C-408E-A3C1-89638161DCB2}"/>
               </a:ext>
             </a:extLst>
           </p:cNvPr>
@@ -29279,7 +29279,7 @@
           <p:cNvPr id="183" name="i1-E2-cil">
             <a:extLst xmlns:a="http://schemas.openxmlformats.org/drawingml/2006/main">
               <a:ext uri="{FF2B5EF4-FFF2-40B4-BE49-F238E27FC236}">
-                <a16:creationId xmlns:a16="http://schemas.microsoft.com/office/drawing/2014/main" id="{D7075CD2-F010-4814-AC28-436D79880C72}"/>
+                <a16:creationId xmlns:a16="http://schemas.microsoft.com/office/drawing/2014/main" id="{F64B429B-489C-4EA5-9289-29963BF1851C}"/>
               </a:ext>
             </a:extLst>
           </p:cNvPr>
@@ -29310,7 +29310,7 @@
           <p:cNvPr id="184" name="i1-E2-cih">
             <a:extLst xmlns:a="http://schemas.openxmlformats.org/drawingml/2006/main">
               <a:ext uri="{FF2B5EF4-FFF2-40B4-BE49-F238E27FC236}">
-                <a16:creationId xmlns:a16="http://schemas.microsoft.com/office/drawing/2014/main" id="{4F91C4CB-770F-4EF4-85C7-425A073EECE2}"/>
+                <a16:creationId xmlns:a16="http://schemas.microsoft.com/office/drawing/2014/main" id="{823200F7-F1C1-4E50-8E2C-6C194F76E165}"/>
               </a:ext>
             </a:extLst>
           </p:cNvPr>
@@ -29341,7 +29341,7 @@
           <p:cNvPr id="185" name="i1-E2-mark">
             <a:extLst xmlns:a="http://schemas.openxmlformats.org/drawingml/2006/main">
               <a:ext uri="{FF2B5EF4-FFF2-40B4-BE49-F238E27FC236}">
-                <a16:creationId xmlns:a16="http://schemas.microsoft.com/office/drawing/2014/main" id="{3F8E74E5-E5B3-42E9-810E-7736AC5B1F81}"/>
+                <a16:creationId xmlns:a16="http://schemas.microsoft.com/office/drawing/2014/main" id="{27480804-25B7-4E53-88E8-135C48120D34}"/>
               </a:ext>
             </a:extLst>
           </p:cNvPr>
@@ -29372,7 +29372,7 @@
           <p:cNvPr id="186" name="i1-E3-bar">
             <a:extLst xmlns:a="http://schemas.openxmlformats.org/drawingml/2006/main">
               <a:ext uri="{FF2B5EF4-FFF2-40B4-BE49-F238E27FC236}">
-                <a16:creationId xmlns:a16="http://schemas.microsoft.com/office/drawing/2014/main" id="{D717D4B0-74D7-4204-9B31-537BBB0253CC}"/>
+                <a16:creationId xmlns:a16="http://schemas.microsoft.com/office/drawing/2014/main" id="{4E2DBD24-7DE1-4AFA-BF99-DD798B89EB46}"/>
               </a:ext>
             </a:extLst>
           </p:cNvPr>
@@ -29403,7 +29403,7 @@
           <p:cNvPr id="187" name="i1-E3-ci">
             <a:extLst xmlns:a="http://schemas.openxmlformats.org/drawingml/2006/main">
               <a:ext uri="{FF2B5EF4-FFF2-40B4-BE49-F238E27FC236}">
-                <a16:creationId xmlns:a16="http://schemas.microsoft.com/office/drawing/2014/main" id="{D6CCB1D6-3C8C-4622-BE08-CDBA03ED7DFB}"/>
+                <a16:creationId xmlns:a16="http://schemas.microsoft.com/office/drawing/2014/main" id="{9629EB0C-C315-468C-A4A5-48708971D51B}"/>
               </a:ext>
             </a:extLst>
           </p:cNvPr>
@@ -29434,7 +29434,7 @@
           <p:cNvPr id="188" name="i1-E3-cil">
             <a:extLst xmlns:a="http://schemas.openxmlformats.org/drawingml/2006/main">
               <a:ext uri="{FF2B5EF4-FFF2-40B4-BE49-F238E27FC236}">
-                <a16:creationId xmlns:a16="http://schemas.microsoft.com/office/drawing/2014/main" id="{30655455-5A22-4652-AA89-B1F96ACE32BD}"/>
+                <a16:creationId xmlns:a16="http://schemas.microsoft.com/office/drawing/2014/main" id="{B37810D5-2E5F-4F55-8865-87C24C542859}"/>
               </a:ext>
             </a:extLst>
           </p:cNvPr>
@@ -29465,7 +29465,7 @@
           <p:cNvPr id="189" name="i1-E3-cih">
             <a:extLst xmlns:a="http://schemas.openxmlformats.org/drawingml/2006/main">
               <a:ext uri="{FF2B5EF4-FFF2-40B4-BE49-F238E27FC236}">
-                <a16:creationId xmlns:a16="http://schemas.microsoft.com/office/drawing/2014/main" id="{0BF106DC-61A7-4648-B91E-7B9D89E4E949}"/>
+                <a16:creationId xmlns:a16="http://schemas.microsoft.com/office/drawing/2014/main" id="{762395DC-7DC9-4CE2-A722-17BDFE1E5DDF}"/>
               </a:ext>
             </a:extLst>
           </p:cNvPr>
@@ -29496,7 +29496,7 @@
           <p:cNvPr id="190" name="i1-E3-mark">
             <a:extLst xmlns:a="http://schemas.openxmlformats.org/drawingml/2006/main">
               <a:ext uri="{FF2B5EF4-FFF2-40B4-BE49-F238E27FC236}">
-                <a16:creationId xmlns:a16="http://schemas.microsoft.com/office/drawing/2014/main" id="{A06F8AF5-3E67-4354-A4DA-DB6983991F14}"/>
+                <a16:creationId xmlns:a16="http://schemas.microsoft.com/office/drawing/2014/main" id="{B5FA724F-45CB-45F0-8F88-D74F7F1F8C83}"/>
               </a:ext>
             </a:extLst>
           </p:cNvPr>
@@ -29527,7 +29527,7 @@
           <p:cNvPr id="191" name="i2-label">
             <a:extLst xmlns:a="http://schemas.openxmlformats.org/drawingml/2006/main">
               <a:ext uri="{FF2B5EF4-FFF2-40B4-BE49-F238E27FC236}">
-                <a16:creationId xmlns:a16="http://schemas.microsoft.com/office/drawing/2014/main" id="{00627780-E47F-4462-9DBF-7935B622542A}"/>
+                <a16:creationId xmlns:a16="http://schemas.microsoft.com/office/drawing/2014/main" id="{2DED1F03-CF6E-4F12-B7BB-0F92B5BA7C34}"/>
               </a:ext>
             </a:extLst>
           </p:cNvPr>
@@ -29600,7 +29600,7 @@
           <p:cNvPr id="192" name="i2-S-bar">
             <a:extLst xmlns:a="http://schemas.openxmlformats.org/drawingml/2006/main">
               <a:ext uri="{FF2B5EF4-FFF2-40B4-BE49-F238E27FC236}">
-                <a16:creationId xmlns:a16="http://schemas.microsoft.com/office/drawing/2014/main" id="{06FFD403-69D7-4A20-88F7-5DAB4869AEBF}"/>
+                <a16:creationId xmlns:a16="http://schemas.microsoft.com/office/drawing/2014/main" id="{DAA6C80F-6F1D-4A33-B16E-C43BC36023ED}"/>
               </a:ext>
             </a:extLst>
           </p:cNvPr>
@@ -29631,7 +29631,7 @@
           <p:cNvPr id="193" name="i2-S-ci">
             <a:extLst xmlns:a="http://schemas.openxmlformats.org/drawingml/2006/main">
               <a:ext uri="{FF2B5EF4-FFF2-40B4-BE49-F238E27FC236}">
-                <a16:creationId xmlns:a16="http://schemas.microsoft.com/office/drawing/2014/main" id="{005C69FE-0FB7-43C0-9FF8-454E1F04B8DF}"/>
+                <a16:creationId xmlns:a16="http://schemas.microsoft.com/office/drawing/2014/main" id="{0808FD83-2B2D-44EE-A4D3-EA5F1A566D05}"/>
               </a:ext>
             </a:extLst>
           </p:cNvPr>
@@ -29662,7 +29662,7 @@
           <p:cNvPr id="194" name="i2-S-cil">
             <a:extLst xmlns:a="http://schemas.openxmlformats.org/drawingml/2006/main">
               <a:ext uri="{FF2B5EF4-FFF2-40B4-BE49-F238E27FC236}">
-                <a16:creationId xmlns:a16="http://schemas.microsoft.com/office/drawing/2014/main" id="{DA1E720A-A124-4E01-B9EB-224B96832670}"/>
+                <a16:creationId xmlns:a16="http://schemas.microsoft.com/office/drawing/2014/main" id="{B5505DEC-D932-4B65-A54C-92B6F498F717}"/>
               </a:ext>
             </a:extLst>
           </p:cNvPr>
@@ -29693,7 +29693,7 @@
           <p:cNvPr id="195" name="i2-S-cih">
             <a:extLst xmlns:a="http://schemas.openxmlformats.org/drawingml/2006/main">
               <a:ext uri="{FF2B5EF4-FFF2-40B4-BE49-F238E27FC236}">
-                <a16:creationId xmlns:a16="http://schemas.microsoft.com/office/drawing/2014/main" id="{0CD13AEA-CA21-451A-9F56-36DC14F203FA}"/>
+                <a16:creationId xmlns:a16="http://schemas.microsoft.com/office/drawing/2014/main" id="{EA3A45B7-9091-4380-85DA-6D16D415FFEF}"/>
               </a:ext>
             </a:extLst>
           </p:cNvPr>
@@ -29724,7 +29724,7 @@
           <p:cNvPr id="196" name="i2-S-mark">
             <a:extLst xmlns:a="http://schemas.openxmlformats.org/drawingml/2006/main">
               <a:ext uri="{FF2B5EF4-FFF2-40B4-BE49-F238E27FC236}">
-                <a16:creationId xmlns:a16="http://schemas.microsoft.com/office/drawing/2014/main" id="{8B39122C-1316-44D7-A87C-00D0D7C34629}"/>
+                <a16:creationId xmlns:a16="http://schemas.microsoft.com/office/drawing/2014/main" id="{67E67C11-587E-4947-ACF0-3686B91F5D66}"/>
               </a:ext>
             </a:extLst>
           </p:cNvPr>
@@ -29755,7 +29755,7 @@
           <p:cNvPr id="197" name="i2-D-bar">
             <a:extLst xmlns:a="http://schemas.openxmlformats.org/drawingml/2006/main">
               <a:ext uri="{FF2B5EF4-FFF2-40B4-BE49-F238E27FC236}">
-                <a16:creationId xmlns:a16="http://schemas.microsoft.com/office/drawing/2014/main" id="{1E8BF372-6F6F-402B-8236-6E29A4C37070}"/>
+                <a16:creationId xmlns:a16="http://schemas.microsoft.com/office/drawing/2014/main" id="{56953DB5-8DC9-4ABF-8BBA-17124DD78D94}"/>
               </a:ext>
             </a:extLst>
           </p:cNvPr>
@@ -29786,7 +29786,7 @@
           <p:cNvPr id="198" name="i2-D-ci">
             <a:extLst xmlns:a="http://schemas.openxmlformats.org/drawingml/2006/main">
               <a:ext uri="{FF2B5EF4-FFF2-40B4-BE49-F238E27FC236}">
-                <a16:creationId xmlns:a16="http://schemas.microsoft.com/office/drawing/2014/main" id="{19B25867-CD5F-443F-9E15-AE5153C620D3}"/>
+                <a16:creationId xmlns:a16="http://schemas.microsoft.com/office/drawing/2014/main" id="{19B036EB-CCB7-4858-BA6B-42F76EAE90EE}"/>
               </a:ext>
             </a:extLst>
           </p:cNvPr>
@@ -29817,7 +29817,7 @@
           <p:cNvPr id="199" name="i2-D-cil">
             <a:extLst xmlns:a="http://schemas.openxmlformats.org/drawingml/2006/main">
               <a:ext uri="{FF2B5EF4-FFF2-40B4-BE49-F238E27FC236}">
-                <a16:creationId xmlns:a16="http://schemas.microsoft.com/office/drawing/2014/main" id="{C15C6889-AB40-4863-93F4-4F2D6306CDB1}"/>
+                <a16:creationId xmlns:a16="http://schemas.microsoft.com/office/drawing/2014/main" id="{A61B2D62-3923-4A05-A364-D61DD574F128}"/>
               </a:ext>
             </a:extLst>
           </p:cNvPr>
@@ -29848,7 +29848,7 @@
           <p:cNvPr id="200" name="i2-D-cih">
             <a:extLst xmlns:a="http://schemas.openxmlformats.org/drawingml/2006/main">
               <a:ext uri="{FF2B5EF4-FFF2-40B4-BE49-F238E27FC236}">
-                <a16:creationId xmlns:a16="http://schemas.microsoft.com/office/drawing/2014/main" id="{12B64141-181E-4848-BEB4-2E7EB4C035A9}"/>
+                <a16:creationId xmlns:a16="http://schemas.microsoft.com/office/drawing/2014/main" id="{293C0CA0-79FC-4733-BDB8-4633B4A94F9E}"/>
               </a:ext>
             </a:extLst>
           </p:cNvPr>
@@ -29879,7 +29879,7 @@
           <p:cNvPr id="201" name="i2-D-mark">
             <a:extLst xmlns:a="http://schemas.openxmlformats.org/drawingml/2006/main">
               <a:ext uri="{FF2B5EF4-FFF2-40B4-BE49-F238E27FC236}">
-                <a16:creationId xmlns:a16="http://schemas.microsoft.com/office/drawing/2014/main" id="{63DA5C4A-0A31-45A7-A086-F37C72273322}"/>
+                <a16:creationId xmlns:a16="http://schemas.microsoft.com/office/drawing/2014/main" id="{36B72A4C-10F4-474D-8679-7AA513BE0B38}"/>
               </a:ext>
             </a:extLst>
           </p:cNvPr>
@@ -29910,7 +29910,7 @@
           <p:cNvPr id="202" name="i2-E1-bar">
             <a:extLst xmlns:a="http://schemas.openxmlformats.org/drawingml/2006/main">
               <a:ext uri="{FF2B5EF4-FFF2-40B4-BE49-F238E27FC236}">
-                <a16:creationId xmlns:a16="http://schemas.microsoft.com/office/drawing/2014/main" id="{FA5FCFE9-15C9-4A33-A512-26644EE04AEE}"/>
+                <a16:creationId xmlns:a16="http://schemas.microsoft.com/office/drawing/2014/main" id="{1B73C437-4937-4902-88D0-E8AD4D951827}"/>
               </a:ext>
             </a:extLst>
           </p:cNvPr>
@@ -29941,7 +29941,7 @@
           <p:cNvPr id="203" name="i2-E1-ci">
             <a:extLst xmlns:a="http://schemas.openxmlformats.org/drawingml/2006/main">
               <a:ext uri="{FF2B5EF4-FFF2-40B4-BE49-F238E27FC236}">
-                <a16:creationId xmlns:a16="http://schemas.microsoft.com/office/drawing/2014/main" id="{02503D74-B52A-44EC-9BE1-355931E7DD1F}"/>
+                <a16:creationId xmlns:a16="http://schemas.microsoft.com/office/drawing/2014/main" id="{53C0ED1F-46AE-42E0-8820-77D1568A1575}"/>
               </a:ext>
             </a:extLst>
           </p:cNvPr>
@@ -29972,7 +29972,7 @@
           <p:cNvPr id="204" name="i2-E1-cil">
             <a:extLst xmlns:a="http://schemas.openxmlformats.org/drawingml/2006/main">
               <a:ext uri="{FF2B5EF4-FFF2-40B4-BE49-F238E27FC236}">
-                <a16:creationId xmlns:a16="http://schemas.microsoft.com/office/drawing/2014/main" id="{C41ED252-7D07-4F0E-AEA3-65F048F62D24}"/>
+                <a16:creationId xmlns:a16="http://schemas.microsoft.com/office/drawing/2014/main" id="{2998A6F3-ECA8-48DE-9125-12F5C5DD820F}"/>
               </a:ext>
             </a:extLst>
           </p:cNvPr>
@@ -30003,7 +30003,7 @@
           <p:cNvPr id="205" name="i2-E1-cih">
             <a:extLst xmlns:a="http://schemas.openxmlformats.org/drawingml/2006/main">
               <a:ext uri="{FF2B5EF4-FFF2-40B4-BE49-F238E27FC236}">
-                <a16:creationId xmlns:a16="http://schemas.microsoft.com/office/drawing/2014/main" id="{CED710CF-5479-4DD1-9E21-35C66DB9FCBC}"/>
+                <a16:creationId xmlns:a16="http://schemas.microsoft.com/office/drawing/2014/main" id="{8653E989-1CF0-44C4-AD2E-898FA07E3AC1}"/>
               </a:ext>
             </a:extLst>
           </p:cNvPr>
@@ -30034,7 +30034,7 @@
           <p:cNvPr id="206" name="i2-E1-mark">
             <a:extLst xmlns:a="http://schemas.openxmlformats.org/drawingml/2006/main">
               <a:ext uri="{FF2B5EF4-FFF2-40B4-BE49-F238E27FC236}">
-                <a16:creationId xmlns:a16="http://schemas.microsoft.com/office/drawing/2014/main" id="{AA44A761-BE9E-48B5-9D5E-FA03E45AB0A0}"/>
+                <a16:creationId xmlns:a16="http://schemas.microsoft.com/office/drawing/2014/main" id="{EB88DA4F-CD23-4588-BF50-C33D25B46FB2}"/>
               </a:ext>
             </a:extLst>
           </p:cNvPr>
@@ -30065,7 +30065,7 @@
           <p:cNvPr id="207" name="i2-E2-bar">
             <a:extLst xmlns:a="http://schemas.openxmlformats.org/drawingml/2006/main">
               <a:ext uri="{FF2B5EF4-FFF2-40B4-BE49-F238E27FC236}">
-                <a16:creationId xmlns:a16="http://schemas.microsoft.com/office/drawing/2014/main" id="{D43D1B96-C494-48D2-840C-67AA7588C57B}"/>
+                <a16:creationId xmlns:a16="http://schemas.microsoft.com/office/drawing/2014/main" id="{0F44C31B-7163-4734-99C9-907C7256AC46}"/>
               </a:ext>
             </a:extLst>
           </p:cNvPr>
@@ -30096,7 +30096,7 @@
           <p:cNvPr id="208" name="i2-E2-ci">
             <a:extLst xmlns:a="http://schemas.openxmlformats.org/drawingml/2006/main">
               <a:ext uri="{FF2B5EF4-FFF2-40B4-BE49-F238E27FC236}">
-                <a16:creationId xmlns:a16="http://schemas.microsoft.com/office/drawing/2014/main" id="{F2484B04-F92E-4D3A-BDBC-512D1F0A0714}"/>
+                <a16:creationId xmlns:a16="http://schemas.microsoft.com/office/drawing/2014/main" id="{0B9D7CFE-C4F9-4BEF-A3BA-16B96149464F}"/>
               </a:ext>
             </a:extLst>
           </p:cNvPr>
@@ -30127,7 +30127,7 @@
           <p:cNvPr id="209" name="i2-E2-cil">
             <a:extLst xmlns:a="http://schemas.openxmlformats.org/drawingml/2006/main">
               <a:ext uri="{FF2B5EF4-FFF2-40B4-BE49-F238E27FC236}">
-                <a16:creationId xmlns:a16="http://schemas.microsoft.com/office/drawing/2014/main" id="{70D588DF-7820-4EE7-8DC0-7BB298B54DA6}"/>
+                <a16:creationId xmlns:a16="http://schemas.microsoft.com/office/drawing/2014/main" id="{F7FF7C11-2B62-440F-9809-5237ECDDA130}"/>
               </a:ext>
             </a:extLst>
           </p:cNvPr>
@@ -30158,7 +30158,7 @@
           <p:cNvPr id="210" name="i2-E2-cih">
             <a:extLst xmlns:a="http://schemas.openxmlformats.org/drawingml/2006/main">
               <a:ext uri="{FF2B5EF4-FFF2-40B4-BE49-F238E27FC236}">
-                <a16:creationId xmlns:a16="http://schemas.microsoft.com/office/drawing/2014/main" id="{9CDBC217-D05A-482B-BCCD-AF7272C24E85}"/>
+                <a16:creationId xmlns:a16="http://schemas.microsoft.com/office/drawing/2014/main" id="{7A376337-6D79-426D-B9CA-3876626A15B3}"/>
               </a:ext>
             </a:extLst>
           </p:cNvPr>
@@ -30189,7 +30189,7 @@
           <p:cNvPr id="211" name="i2-E2-mark">
             <a:extLst xmlns:a="http://schemas.openxmlformats.org/drawingml/2006/main">
               <a:ext uri="{FF2B5EF4-FFF2-40B4-BE49-F238E27FC236}">
-                <a16:creationId xmlns:a16="http://schemas.microsoft.com/office/drawing/2014/main" id="{D6F8B1D7-F086-4078-89D2-7351258F699B}"/>
+                <a16:creationId xmlns:a16="http://schemas.microsoft.com/office/drawing/2014/main" id="{0859BAC8-F2DA-496D-B42F-834F1AEA6BFB}"/>
               </a:ext>
             </a:extLst>
           </p:cNvPr>
@@ -30220,7 +30220,7 @@
           <p:cNvPr id="212" name="i2-E3-bar">
             <a:extLst xmlns:a="http://schemas.openxmlformats.org/drawingml/2006/main">
               <a:ext uri="{FF2B5EF4-FFF2-40B4-BE49-F238E27FC236}">
-                <a16:creationId xmlns:a16="http://schemas.microsoft.com/office/drawing/2014/main" id="{793D2A9F-2332-42D8-ACBA-005609CE7D92}"/>
+                <a16:creationId xmlns:a16="http://schemas.microsoft.com/office/drawing/2014/main" id="{C7E1D5CA-144A-4058-950D-F6A0435C4070}"/>
               </a:ext>
             </a:extLst>
           </p:cNvPr>
@@ -30251,7 +30251,7 @@
           <p:cNvPr id="213" name="i2-E3-ci">
             <a:extLst xmlns:a="http://schemas.openxmlformats.org/drawingml/2006/main">
               <a:ext uri="{FF2B5EF4-FFF2-40B4-BE49-F238E27FC236}">
-                <a16:creationId xmlns:a16="http://schemas.microsoft.com/office/drawing/2014/main" id="{0EE98B7B-1387-4CDE-AB6B-92C235639C5B}"/>
+                <a16:creationId xmlns:a16="http://schemas.microsoft.com/office/drawing/2014/main" id="{882DBA03-AB3E-471B-95A6-62BC90F13112}"/>
               </a:ext>
             </a:extLst>
           </p:cNvPr>
@@ -30282,7 +30282,7 @@
           <p:cNvPr id="214" name="i2-E3-cil">
             <a:extLst xmlns:a="http://schemas.openxmlformats.org/drawingml/2006/main">
               <a:ext uri="{FF2B5EF4-FFF2-40B4-BE49-F238E27FC236}">
-                <a16:creationId xmlns:a16="http://schemas.microsoft.com/office/drawing/2014/main" id="{57B862ED-9D4E-45FE-893C-40D4B07DF375}"/>
+                <a16:creationId xmlns:a16="http://schemas.microsoft.com/office/drawing/2014/main" id="{42074D33-00D7-403B-90AF-0509D1AD51B3}"/>
               </a:ext>
             </a:extLst>
           </p:cNvPr>
@@ -30313,7 +30313,7 @@
           <p:cNvPr id="215" name="i2-E3-cih">
             <a:extLst xmlns:a="http://schemas.openxmlformats.org/drawingml/2006/main">
               <a:ext uri="{FF2B5EF4-FFF2-40B4-BE49-F238E27FC236}">
-                <a16:creationId xmlns:a16="http://schemas.microsoft.com/office/drawing/2014/main" id="{F6AAC0D1-8A28-420E-9D4D-E99B94B80E36}"/>
+                <a16:creationId xmlns:a16="http://schemas.microsoft.com/office/drawing/2014/main" id="{EE68CE3D-7B23-48E4-97EF-4817631BBDEA}"/>
               </a:ext>
             </a:extLst>
           </p:cNvPr>
@@ -30344,7 +30344,7 @@
           <p:cNvPr id="216" name="i2-E3-mark">
             <a:extLst xmlns:a="http://schemas.openxmlformats.org/drawingml/2006/main">
               <a:ext uri="{FF2B5EF4-FFF2-40B4-BE49-F238E27FC236}">
-                <a16:creationId xmlns:a16="http://schemas.microsoft.com/office/drawing/2014/main" id="{7F5388E5-9FDA-4394-A223-CB9903AC365E}"/>
+                <a16:creationId xmlns:a16="http://schemas.microsoft.com/office/drawing/2014/main" id="{E2A1AC33-BB25-4298-82E9-977142F00D66}"/>
               </a:ext>
             </a:extLst>
           </p:cNvPr>
@@ -30375,7 +30375,7 @@
           <p:cNvPr id="217" name="i3-label">
             <a:extLst xmlns:a="http://schemas.openxmlformats.org/drawingml/2006/main">
               <a:ext uri="{FF2B5EF4-FFF2-40B4-BE49-F238E27FC236}">
-                <a16:creationId xmlns:a16="http://schemas.microsoft.com/office/drawing/2014/main" id="{74446D50-9108-4B65-907B-C5C906ADB5AB}"/>
+                <a16:creationId xmlns:a16="http://schemas.microsoft.com/office/drawing/2014/main" id="{9053AC84-DD1C-439B-BFDF-12214AC98BA5}"/>
               </a:ext>
             </a:extLst>
           </p:cNvPr>
@@ -30448,7 +30448,7 @@
           <p:cNvPr id="218" name="i3-S-bar">
             <a:extLst xmlns:a="http://schemas.openxmlformats.org/drawingml/2006/main">
               <a:ext uri="{FF2B5EF4-FFF2-40B4-BE49-F238E27FC236}">
-                <a16:creationId xmlns:a16="http://schemas.microsoft.com/office/drawing/2014/main" id="{ACAD7A5C-8551-4929-BECB-224D0D402F9B}"/>
+                <a16:creationId xmlns:a16="http://schemas.microsoft.com/office/drawing/2014/main" id="{65D91299-66E1-44FB-9029-C18FD7E779E0}"/>
               </a:ext>
             </a:extLst>
           </p:cNvPr>
@@ -30479,7 +30479,7 @@
           <p:cNvPr id="219" name="i3-S-ci">
             <a:extLst xmlns:a="http://schemas.openxmlformats.org/drawingml/2006/main">
               <a:ext uri="{FF2B5EF4-FFF2-40B4-BE49-F238E27FC236}">
-                <a16:creationId xmlns:a16="http://schemas.microsoft.com/office/drawing/2014/main" id="{39714BD5-AA78-4505-B1B8-FED9ED220E39}"/>
+                <a16:creationId xmlns:a16="http://schemas.microsoft.com/office/drawing/2014/main" id="{AF719274-9867-4B5D-BC01-E14C0CCF528B}"/>
               </a:ext>
             </a:extLst>
           </p:cNvPr>
@@ -30510,7 +30510,7 @@
           <p:cNvPr id="220" name="i3-S-cil">
             <a:extLst xmlns:a="http://schemas.openxmlformats.org/drawingml/2006/main">
               <a:ext uri="{FF2B5EF4-FFF2-40B4-BE49-F238E27FC236}">
-                <a16:creationId xmlns:a16="http://schemas.microsoft.com/office/drawing/2014/main" id="{4252507A-D5A2-491E-B2EA-D7F16BDCE22E}"/>
+                <a16:creationId xmlns:a16="http://schemas.microsoft.com/office/drawing/2014/main" id="{3494BA65-AC74-43AC-9A62-E50AF3C2CF9D}"/>
               </a:ext>
             </a:extLst>
           </p:cNvPr>
@@ -30541,7 +30541,7 @@
           <p:cNvPr id="221" name="i3-S-cih">
             <a:extLst xmlns:a="http://schemas.openxmlformats.org/drawingml/2006/main">
               <a:ext uri="{FF2B5EF4-FFF2-40B4-BE49-F238E27FC236}">
-                <a16:creationId xmlns:a16="http://schemas.microsoft.com/office/drawing/2014/main" id="{736B7BB8-D2CA-4CC1-AA98-5E97211345AD}"/>
+                <a16:creationId xmlns:a16="http://schemas.microsoft.com/office/drawing/2014/main" id="{159444C6-634D-40D9-ABB1-4B2A83D2270F}"/>
               </a:ext>
             </a:extLst>
           </p:cNvPr>
@@ -30572,7 +30572,7 @@
           <p:cNvPr id="222" name="i3-S-mark">
             <a:extLst xmlns:a="http://schemas.openxmlformats.org/drawingml/2006/main">
               <a:ext uri="{FF2B5EF4-FFF2-40B4-BE49-F238E27FC236}">
-                <a16:creationId xmlns:a16="http://schemas.microsoft.com/office/drawing/2014/main" id="{9220C7F1-4F2C-4CE7-B7E7-FC3BC5D65408}"/>
+                <a16:creationId xmlns:a16="http://schemas.microsoft.com/office/drawing/2014/main" id="{EBFBB694-B389-4E92-8669-A37E7707B43C}"/>
               </a:ext>
             </a:extLst>
           </p:cNvPr>
@@ -30603,7 +30603,7 @@
           <p:cNvPr id="223" name="i3-D-bar">
             <a:extLst xmlns:a="http://schemas.openxmlformats.org/drawingml/2006/main">
               <a:ext uri="{FF2B5EF4-FFF2-40B4-BE49-F238E27FC236}">
-                <a16:creationId xmlns:a16="http://schemas.microsoft.com/office/drawing/2014/main" id="{930172D0-D924-4E15-9020-0E770C2EB237}"/>
+                <a16:creationId xmlns:a16="http://schemas.microsoft.com/office/drawing/2014/main" id="{2889B925-FC51-4658-9D04-C34E7B502572}"/>
               </a:ext>
             </a:extLst>
           </p:cNvPr>
@@ -30634,7 +30634,7 @@
           <p:cNvPr id="224" name="i3-D-ci">
             <a:extLst xmlns:a="http://schemas.openxmlformats.org/drawingml/2006/main">
               <a:ext uri="{FF2B5EF4-FFF2-40B4-BE49-F238E27FC236}">
-                <a16:creationId xmlns:a16="http://schemas.microsoft.com/office/drawing/2014/main" id="{49AB266B-332D-45A1-BF1B-35E746D6D76C}"/>
+                <a16:creationId xmlns:a16="http://schemas.microsoft.com/office/drawing/2014/main" id="{08408C19-BF7D-4512-A061-DE355AAA3020}"/>
               </a:ext>
             </a:extLst>
           </p:cNvPr>
@@ -30665,7 +30665,7 @@
           <p:cNvPr id="225" name="i3-D-cil">
             <a:extLst xmlns:a="http://schemas.openxmlformats.org/drawingml/2006/main">
               <a:ext uri="{FF2B5EF4-FFF2-40B4-BE49-F238E27FC236}">
-                <a16:creationId xmlns:a16="http://schemas.microsoft.com/office/drawing/2014/main" id="{09418251-4176-45D5-B8A7-E61895D93867}"/>
+                <a16:creationId xmlns:a16="http://schemas.microsoft.com/office/drawing/2014/main" id="{67AEE896-7871-49CA-BBF8-9EF3CC4EA9FA}"/>
               </a:ext>
             </a:extLst>
           </p:cNvPr>
@@ -30696,7 +30696,7 @@
           <p:cNvPr id="226" name="i3-D-cih">
             <a:extLst xmlns:a="http://schemas.openxmlformats.org/drawingml/2006/main">
               <a:ext uri="{FF2B5EF4-FFF2-40B4-BE49-F238E27FC236}">
-                <a16:creationId xmlns:a16="http://schemas.microsoft.com/office/drawing/2014/main" id="{6638D61A-839E-4955-BEFF-6CD939C86457}"/>
+                <a16:creationId xmlns:a16="http://schemas.microsoft.com/office/drawing/2014/main" id="{075C4370-F7C1-48AB-9CFD-250020163BBE}"/>
               </a:ext>
             </a:extLst>
           </p:cNvPr>
@@ -30727,7 +30727,7 @@
           <p:cNvPr id="227" name="i3-D-mark">
             <a:extLst xmlns:a="http://schemas.openxmlformats.org/drawingml/2006/main">
               <a:ext uri="{FF2B5EF4-FFF2-40B4-BE49-F238E27FC236}">
-                <a16:creationId xmlns:a16="http://schemas.microsoft.com/office/drawing/2014/main" id="{493CEC74-7084-492B-96BE-396FFFF48571}"/>
+                <a16:creationId xmlns:a16="http://schemas.microsoft.com/office/drawing/2014/main" id="{F0AF639E-98C4-4C92-8048-5C5303ECA21F}"/>
               </a:ext>
             </a:extLst>
           </p:cNvPr>
@@ -30758,7 +30758,7 @@
           <p:cNvPr id="228" name="i3-E1-bar">
             <a:extLst xmlns:a="http://schemas.openxmlformats.org/drawingml/2006/main">
               <a:ext uri="{FF2B5EF4-FFF2-40B4-BE49-F238E27FC236}">
-                <a16:creationId xmlns:a16="http://schemas.microsoft.com/office/drawing/2014/main" id="{17D78300-C417-44F0-BF1E-CD634AD06B93}"/>
+                <a16:creationId xmlns:a16="http://schemas.microsoft.com/office/drawing/2014/main" id="{5CCBFCFD-9297-49D5-BC1B-A0DE61A60EEE}"/>
               </a:ext>
             </a:extLst>
           </p:cNvPr>
@@ -30789,7 +30789,7 @@
           <p:cNvPr id="229" name="i3-E1-ci">
             <a:extLst xmlns:a="http://schemas.openxmlformats.org/drawingml/2006/main">
               <a:ext uri="{FF2B5EF4-FFF2-40B4-BE49-F238E27FC236}">
-                <a16:creationId xmlns:a16="http://schemas.microsoft.com/office/drawing/2014/main" id="{3B35CE08-588F-45E9-B41A-28546F62EB07}"/>
+                <a16:creationId xmlns:a16="http://schemas.microsoft.com/office/drawing/2014/main" id="{18F97F51-4DFB-4680-B013-49DE5BAB4F78}"/>
               </a:ext>
             </a:extLst>
           </p:cNvPr>
@@ -30820,7 +30820,7 @@
           <p:cNvPr id="230" name="i3-E1-cil">
             <a:extLst xmlns:a="http://schemas.openxmlformats.org/drawingml/2006/main">
               <a:ext uri="{FF2B5EF4-FFF2-40B4-BE49-F238E27FC236}">
-                <a16:creationId xmlns:a16="http://schemas.microsoft.com/office/drawing/2014/main" id="{B82E521A-8D97-41F6-93E4-B329ED96FCF0}"/>
+                <a16:creationId xmlns:a16="http://schemas.microsoft.com/office/drawing/2014/main" id="{20D9EDBF-B2AF-4FF9-AAA5-68D0824FFBD6}"/>
               </a:ext>
             </a:extLst>
           </p:cNvPr>
@@ -30851,7 +30851,7 @@
           <p:cNvPr id="231" name="i3-E1-cih">
             <a:extLst xmlns:a="http://schemas.openxmlformats.org/drawingml/2006/main">
               <a:ext uri="{FF2B5EF4-FFF2-40B4-BE49-F238E27FC236}">
-                <a16:creationId xmlns:a16="http://schemas.microsoft.com/office/drawing/2014/main" id="{A02A7D4C-C73C-49A9-81E9-2ADD839D065F}"/>
+                <a16:creationId xmlns:a16="http://schemas.microsoft.com/office/drawing/2014/main" id="{7A826D2A-3332-40D9-AE39-1D3E2C650F04}"/>
               </a:ext>
             </a:extLst>
           </p:cNvPr>
@@ -30882,7 +30882,7 @@
           <p:cNvPr id="232" name="i3-E1-mark">
             <a:extLst xmlns:a="http://schemas.openxmlformats.org/drawingml/2006/main">
               <a:ext uri="{FF2B5EF4-FFF2-40B4-BE49-F238E27FC236}">
-                <a16:creationId xmlns:a16="http://schemas.microsoft.com/office/drawing/2014/main" id="{CFA524B4-71A7-4F7E-BD6D-63BE8D0C9327}"/>
+                <a16:creationId xmlns:a16="http://schemas.microsoft.com/office/drawing/2014/main" id="{89037C2D-2B86-4C12-8416-5CDFAD33DC3C}"/>
               </a:ext>
             </a:extLst>
           </p:cNvPr>
@@ -30913,7 +30913,7 @@
           <p:cNvPr id="233" name="i3-E2-bar">
             <a:extLst xmlns:a="http://schemas.openxmlformats.org/drawingml/2006/main">
               <a:ext uri="{FF2B5EF4-FFF2-40B4-BE49-F238E27FC236}">
-                <a16:creationId xmlns:a16="http://schemas.microsoft.com/office/drawing/2014/main" id="{AD213E73-F14A-4537-A60C-9DAD5A48BA4A}"/>
+                <a16:creationId xmlns:a16="http://schemas.microsoft.com/office/drawing/2014/main" id="{D0DDCF78-5D10-48FF-AB91-EBA8A932E01D}"/>
               </a:ext>
             </a:extLst>
           </p:cNvPr>
@@ -30944,7 +30944,7 @@
           <p:cNvPr id="234" name="i3-E2-ci">
             <a:extLst xmlns:a="http://schemas.openxmlformats.org/drawingml/2006/main">
               <a:ext uri="{FF2B5EF4-FFF2-40B4-BE49-F238E27FC236}">
-                <a16:creationId xmlns:a16="http://schemas.microsoft.com/office/drawing/2014/main" id="{139B04B4-C1E8-455E-90A5-6FCF2DF3922D}"/>
+                <a16:creationId xmlns:a16="http://schemas.microsoft.com/office/drawing/2014/main" id="{B9F60BC5-AAC7-4D05-8D14-84436852C241}"/>
               </a:ext>
             </a:extLst>
           </p:cNvPr>
@@ -30975,7 +30975,7 @@
           <p:cNvPr id="235" name="i3-E2-cil">
             <a:extLst xmlns:a="http://schemas.openxmlformats.org/drawingml/2006/main">
               <a:ext uri="{FF2B5EF4-FFF2-40B4-BE49-F238E27FC236}">
-                <a16:creationId xmlns:a16="http://schemas.microsoft.com/office/drawing/2014/main" id="{ECC489B1-7449-4149-BFDD-1DCCF82D5F3F}"/>
+                <a16:creationId xmlns:a16="http://schemas.microsoft.com/office/drawing/2014/main" id="{458B2BD0-1864-4294-89AA-738652C7E64A}"/>
               </a:ext>
             </a:extLst>
           </p:cNvPr>
@@ -31006,7 +31006,7 @@
           <p:cNvPr id="236" name="i3-E2-cih">
             <a:extLst xmlns:a="http://schemas.openxmlformats.org/drawingml/2006/main">
               <a:ext uri="{FF2B5EF4-FFF2-40B4-BE49-F238E27FC236}">
-                <a16:creationId xmlns:a16="http://schemas.microsoft.com/office/drawing/2014/main" id="{111392AE-AB9C-42BA-8799-F02D64B93441}"/>
+                <a16:creationId xmlns:a16="http://schemas.microsoft.com/office/drawing/2014/main" id="{3812F924-CA29-445A-A1CA-6AF3ABCD2A8A}"/>
               </a:ext>
             </a:extLst>
           </p:cNvPr>
@@ -31037,7 +31037,7 @@
           <p:cNvPr id="237" name="i3-E2-mark">
             <a:extLst xmlns:a="http://schemas.openxmlformats.org/drawingml/2006/main">
               <a:ext uri="{FF2B5EF4-FFF2-40B4-BE49-F238E27FC236}">
-                <a16:creationId xmlns:a16="http://schemas.microsoft.com/office/drawing/2014/main" id="{E074732C-CB1E-4835-ABF0-E6387618E5E9}"/>
+                <a16:creationId xmlns:a16="http://schemas.microsoft.com/office/drawing/2014/main" id="{8C203A01-E019-430A-84E9-8940F762E083}"/>
               </a:ext>
             </a:extLst>
           </p:cNvPr>
@@ -31068,7 +31068,7 @@
           <p:cNvPr id="238" name="i3-E3-bar">
             <a:extLst xmlns:a="http://schemas.openxmlformats.org/drawingml/2006/main">
               <a:ext uri="{FF2B5EF4-FFF2-40B4-BE49-F238E27FC236}">
-                <a16:creationId xmlns:a16="http://schemas.microsoft.com/office/drawing/2014/main" id="{B107D723-F74D-40CD-9E9E-2832E455BB46}"/>
+                <a16:creationId xmlns:a16="http://schemas.microsoft.com/office/drawing/2014/main" id="{BEB45EC9-95DB-4439-845E-FD9544460399}"/>
               </a:ext>
             </a:extLst>
           </p:cNvPr>
@@ -31099,7 +31099,7 @@
           <p:cNvPr id="239" name="i3-E3-ci">
             <a:extLst xmlns:a="http://schemas.openxmlformats.org/drawingml/2006/main">
               <a:ext uri="{FF2B5EF4-FFF2-40B4-BE49-F238E27FC236}">
-                <a16:creationId xmlns:a16="http://schemas.microsoft.com/office/drawing/2014/main" id="{BDC0B6CB-DC11-4A66-9A7F-B1B4395D43BE}"/>
+                <a16:creationId xmlns:a16="http://schemas.microsoft.com/office/drawing/2014/main" id="{ACFCEAF7-E53C-4B62-B150-86F118EAFE88}"/>
               </a:ext>
             </a:extLst>
           </p:cNvPr>
@@ -31130,7 +31130,7 @@
           <p:cNvPr id="240" name="i3-E3-cil">
             <a:extLst xmlns:a="http://schemas.openxmlformats.org/drawingml/2006/main">
               <a:ext uri="{FF2B5EF4-FFF2-40B4-BE49-F238E27FC236}">
-                <a16:creationId xmlns:a16="http://schemas.microsoft.com/office/drawing/2014/main" id="{CB7C382F-00F0-49AD-9A30-78005D77E256}"/>
+                <a16:creationId xmlns:a16="http://schemas.microsoft.com/office/drawing/2014/main" id="{2EAF2A94-2282-4C18-BFD7-4ABD3CA69D6B}"/>
               </a:ext>
             </a:extLst>
           </p:cNvPr>
@@ -31161,7 +31161,7 @@
           <p:cNvPr id="241" name="i3-E3-cih">
             <a:extLst xmlns:a="http://schemas.openxmlformats.org/drawingml/2006/main">
               <a:ext uri="{FF2B5EF4-FFF2-40B4-BE49-F238E27FC236}">
-                <a16:creationId xmlns:a16="http://schemas.microsoft.com/office/drawing/2014/main" id="{DA509041-6062-425A-86F6-0E40ED291201}"/>
+                <a16:creationId xmlns:a16="http://schemas.microsoft.com/office/drawing/2014/main" id="{ACF62A90-6158-46AA-8A22-C6B33D3E1C4E}"/>
               </a:ext>
             </a:extLst>
           </p:cNvPr>
@@ -31192,7 +31192,7 @@
           <p:cNvPr id="242" name="i3-E3-mark">
             <a:extLst xmlns:a="http://schemas.openxmlformats.org/drawingml/2006/main">
               <a:ext uri="{FF2B5EF4-FFF2-40B4-BE49-F238E27FC236}">
-                <a16:creationId xmlns:a16="http://schemas.microsoft.com/office/drawing/2014/main" id="{EC7AA3BF-2D61-4BCC-972D-8941AF7CED59}"/>
+                <a16:creationId xmlns:a16="http://schemas.microsoft.com/office/drawing/2014/main" id="{F9046B83-2402-4EB9-8D4E-9F2031AA5865}"/>
               </a:ext>
             </a:extLst>
           </p:cNvPr>
@@ -31223,7 +31223,7 @@
           <p:cNvPr id="243" name="i4-label">
             <a:extLst xmlns:a="http://schemas.openxmlformats.org/drawingml/2006/main">
               <a:ext uri="{FF2B5EF4-FFF2-40B4-BE49-F238E27FC236}">
-                <a16:creationId xmlns:a16="http://schemas.microsoft.com/office/drawing/2014/main" id="{0B6BC9ED-B4B0-41F1-B97F-A1D871E9C07A}"/>
+                <a16:creationId xmlns:a16="http://schemas.microsoft.com/office/drawing/2014/main" id="{2746EDA3-25A9-460C-AF07-79A47C5FD576}"/>
               </a:ext>
             </a:extLst>
           </p:cNvPr>
@@ -31296,7 +31296,7 @@
           <p:cNvPr id="244" name="i4-GEN-bar">
             <a:extLst xmlns:a="http://schemas.openxmlformats.org/drawingml/2006/main">
               <a:ext uri="{FF2B5EF4-FFF2-40B4-BE49-F238E27FC236}">
-                <a16:creationId xmlns:a16="http://schemas.microsoft.com/office/drawing/2014/main" id="{68690F7E-0A40-4F91-8D1D-1183B066A7C0}"/>
+                <a16:creationId xmlns:a16="http://schemas.microsoft.com/office/drawing/2014/main" id="{C919FA63-E18E-415A-8BC5-3D78EBC14776}"/>
               </a:ext>
             </a:extLst>
           </p:cNvPr>
@@ -31327,7 +31327,7 @@
           <p:cNvPr id="245" name="i4-GEN-ci">
             <a:extLst xmlns:a="http://schemas.openxmlformats.org/drawingml/2006/main">
               <a:ext uri="{FF2B5EF4-FFF2-40B4-BE49-F238E27FC236}">
-                <a16:creationId xmlns:a16="http://schemas.microsoft.com/office/drawing/2014/main" id="{2441E299-7B0C-450E-B221-D8E6E0AB10A6}"/>
+                <a16:creationId xmlns:a16="http://schemas.microsoft.com/office/drawing/2014/main" id="{7C949974-6895-44F3-94A1-D562F8BD87A7}"/>
               </a:ext>
             </a:extLst>
           </p:cNvPr>
@@ -31358,7 +31358,7 @@
           <p:cNvPr id="246" name="i4-GEN-cil">
             <a:extLst xmlns:a="http://schemas.openxmlformats.org/drawingml/2006/main">
               <a:ext uri="{FF2B5EF4-FFF2-40B4-BE49-F238E27FC236}">
-                <a16:creationId xmlns:a16="http://schemas.microsoft.com/office/drawing/2014/main" id="{18452936-0391-4002-8B1F-087535FF821D}"/>
+                <a16:creationId xmlns:a16="http://schemas.microsoft.com/office/drawing/2014/main" id="{B5C2F73A-DF11-48C2-9EC4-CC6B46506D02}"/>
               </a:ext>
             </a:extLst>
           </p:cNvPr>
@@ -31389,7 +31389,7 @@
           <p:cNvPr id="247" name="i4-GEN-cih">
             <a:extLst xmlns:a="http://schemas.openxmlformats.org/drawingml/2006/main">
               <a:ext uri="{FF2B5EF4-FFF2-40B4-BE49-F238E27FC236}">
-                <a16:creationId xmlns:a16="http://schemas.microsoft.com/office/drawing/2014/main" id="{C3BE0437-A7DE-476C-A3A4-526DF68F7927}"/>
+                <a16:creationId xmlns:a16="http://schemas.microsoft.com/office/drawing/2014/main" id="{A73A7E12-46CD-4B07-BCB1-4E0EE276D73F}"/>
               </a:ext>
             </a:extLst>
           </p:cNvPr>
@@ -31420,7 +31420,7 @@
           <p:cNvPr id="248" name="i4-GEN-mark">
             <a:extLst xmlns:a="http://schemas.openxmlformats.org/drawingml/2006/main">
               <a:ext uri="{FF2B5EF4-FFF2-40B4-BE49-F238E27FC236}">
-                <a16:creationId xmlns:a16="http://schemas.microsoft.com/office/drawing/2014/main" id="{5C08CB4A-300C-477E-897F-7EDDA22B198C}"/>
+                <a16:creationId xmlns:a16="http://schemas.microsoft.com/office/drawing/2014/main" id="{AB0014F8-67B3-4FAE-9DF4-6810D4A51E74}"/>
               </a:ext>
             </a:extLst>
           </p:cNvPr>
@@ -31451,7 +31451,7 @@
           <p:cNvPr id="249" name="i5-label">
             <a:extLst xmlns:a="http://schemas.openxmlformats.org/drawingml/2006/main">
               <a:ext uri="{FF2B5EF4-FFF2-40B4-BE49-F238E27FC236}">
-                <a16:creationId xmlns:a16="http://schemas.microsoft.com/office/drawing/2014/main" id="{5951A0FE-FB67-4A39-9C8B-C563E579E892}"/>
+                <a16:creationId xmlns:a16="http://schemas.microsoft.com/office/drawing/2014/main" id="{AC056158-BEE2-435F-8E81-623B245CBB56}"/>
               </a:ext>
             </a:extLst>
           </p:cNvPr>
@@ -31524,7 +31524,7 @@
           <p:cNvPr id="250" name="i5-GEN-bar">
             <a:extLst xmlns:a="http://schemas.openxmlformats.org/drawingml/2006/main">
               <a:ext uri="{FF2B5EF4-FFF2-40B4-BE49-F238E27FC236}">
-                <a16:creationId xmlns:a16="http://schemas.microsoft.com/office/drawing/2014/main" id="{6E0C1520-B0B8-435D-B249-EFEEAEB794D5}"/>
+                <a16:creationId xmlns:a16="http://schemas.microsoft.com/office/drawing/2014/main" id="{29467EBA-2EA3-4327-A0B3-EBA199B2351E}"/>
               </a:ext>
             </a:extLst>
           </p:cNvPr>
@@ -31555,7 +31555,7 @@
           <p:cNvPr id="251" name="i5-GEN-ci">
             <a:extLst xmlns:a="http://schemas.openxmlformats.org/drawingml/2006/main">
               <a:ext uri="{FF2B5EF4-FFF2-40B4-BE49-F238E27FC236}">
-                <a16:creationId xmlns:a16="http://schemas.microsoft.com/office/drawing/2014/main" id="{3E1F5878-C30F-448B-92FC-617646A4CCCE}"/>
+                <a16:creationId xmlns:a16="http://schemas.microsoft.com/office/drawing/2014/main" id="{5656A99A-9257-4DFD-9F5B-D3048C2E7B85}"/>
               </a:ext>
             </a:extLst>
           </p:cNvPr>
@@ -31586,7 +31586,7 @@
           <p:cNvPr id="252" name="i5-GEN-cil">
             <a:extLst xmlns:a="http://schemas.openxmlformats.org/drawingml/2006/main">
               <a:ext uri="{FF2B5EF4-FFF2-40B4-BE49-F238E27FC236}">
-                <a16:creationId xmlns:a16="http://schemas.microsoft.com/office/drawing/2014/main" id="{536D2978-324A-471E-856B-A92B09ED9A9F}"/>
+                <a16:creationId xmlns:a16="http://schemas.microsoft.com/office/drawing/2014/main" id="{6414A0EC-4956-4659-9B84-614BE554CB24}"/>
               </a:ext>
             </a:extLst>
           </p:cNvPr>
@@ -31617,7 +31617,7 @@
           <p:cNvPr id="253" name="i5-GEN-cih">
             <a:extLst xmlns:a="http://schemas.openxmlformats.org/drawingml/2006/main">
               <a:ext uri="{FF2B5EF4-FFF2-40B4-BE49-F238E27FC236}">
-                <a16:creationId xmlns:a16="http://schemas.microsoft.com/office/drawing/2014/main" id="{F2730A58-5E00-4C25-9B94-BBC6E37B7374}"/>
+                <a16:creationId xmlns:a16="http://schemas.microsoft.com/office/drawing/2014/main" id="{A36F909A-10AB-4A30-8914-D44086162071}"/>
               </a:ext>
             </a:extLst>
           </p:cNvPr>
@@ -31648,7 +31648,7 @@
           <p:cNvPr id="254" name="i5-GEN-mark">
             <a:extLst xmlns:a="http://schemas.openxmlformats.org/drawingml/2006/main">
               <a:ext uri="{FF2B5EF4-FFF2-40B4-BE49-F238E27FC236}">
-                <a16:creationId xmlns:a16="http://schemas.microsoft.com/office/drawing/2014/main" id="{5FE857D1-1F2B-4F6B-8BE4-116A188668CA}"/>
+                <a16:creationId xmlns:a16="http://schemas.microsoft.com/office/drawing/2014/main" id="{91FFA7DC-71C4-4378-B67C-8CA6D747ECCD}"/>
               </a:ext>
             </a:extLst>
           </p:cNvPr>
@@ -31679,7 +31679,7 @@
           <p:cNvPr id="255" name="i6-label">
             <a:extLst xmlns:a="http://schemas.openxmlformats.org/drawingml/2006/main">
               <a:ext uri="{FF2B5EF4-FFF2-40B4-BE49-F238E27FC236}">
-                <a16:creationId xmlns:a16="http://schemas.microsoft.com/office/drawing/2014/main" id="{CF4E367C-1EA7-4344-8552-32BA48BAFD2B}"/>
+                <a16:creationId xmlns:a16="http://schemas.microsoft.com/office/drawing/2014/main" id="{BDDBBDF6-1C0D-4078-A712-72371B38D8B7}"/>
               </a:ext>
             </a:extLst>
           </p:cNvPr>
@@ -31752,7 +31752,7 @@
           <p:cNvPr id="256" name="i6-GEN-bar">
             <a:extLst xmlns:a="http://schemas.openxmlformats.org/drawingml/2006/main">
               <a:ext uri="{FF2B5EF4-FFF2-40B4-BE49-F238E27FC236}">
-                <a16:creationId xmlns:a16="http://schemas.microsoft.com/office/drawing/2014/main" id="{48932295-A9C1-4494-BA78-0A707E7B3AD3}"/>
+                <a16:creationId xmlns:a16="http://schemas.microsoft.com/office/drawing/2014/main" id="{83E9A24C-D38A-422B-8EB7-5347C9A302A0}"/>
               </a:ext>
             </a:extLst>
           </p:cNvPr>
@@ -31783,7 +31783,7 @@
           <p:cNvPr id="257" name="i6-GEN-ci">
             <a:extLst xmlns:a="http://schemas.openxmlformats.org/drawingml/2006/main">
               <a:ext uri="{FF2B5EF4-FFF2-40B4-BE49-F238E27FC236}">
-                <a16:creationId xmlns:a16="http://schemas.microsoft.com/office/drawing/2014/main" id="{56D9F487-37A5-4CEF-B270-8413769BC86E}"/>
+                <a16:creationId xmlns:a16="http://schemas.microsoft.com/office/drawing/2014/main" id="{388C8DB6-D8A6-49A4-8AC4-C65DDD9E4272}"/>
               </a:ext>
             </a:extLst>
           </p:cNvPr>
@@ -31814,7 +31814,7 @@
           <p:cNvPr id="258" name="i6-GEN-cil">
             <a:extLst xmlns:a="http://schemas.openxmlformats.org/drawingml/2006/main">
               <a:ext uri="{FF2B5EF4-FFF2-40B4-BE49-F238E27FC236}">
-                <a16:creationId xmlns:a16="http://schemas.microsoft.com/office/drawing/2014/main" id="{8C40F30C-7B79-4A67-8738-8C5133E43ADF}"/>
+                <a16:creationId xmlns:a16="http://schemas.microsoft.com/office/drawing/2014/main" id="{7AD0E796-3008-4F50-9390-4E165BC32BFE}"/>
               </a:ext>
             </a:extLst>
           </p:cNvPr>
@@ -31845,7 +31845,7 @@
           <p:cNvPr id="259" name="i6-GEN-cih">
             <a:extLst xmlns:a="http://schemas.openxmlformats.org/drawingml/2006/main">
               <a:ext uri="{FF2B5EF4-FFF2-40B4-BE49-F238E27FC236}">
-                <a16:creationId xmlns:a16="http://schemas.microsoft.com/office/drawing/2014/main" id="{DEEAB8B0-2C10-4280-8E32-93A49A21DF4E}"/>
+                <a16:creationId xmlns:a16="http://schemas.microsoft.com/office/drawing/2014/main" id="{016516AC-4EF7-463F-ABE3-D3BD114192BE}"/>
               </a:ext>
             </a:extLst>
           </p:cNvPr>
@@ -31876,7 +31876,7 @@
           <p:cNvPr id="260" name="i6-GEN-mark">
             <a:extLst xmlns:a="http://schemas.openxmlformats.org/drawingml/2006/main">
               <a:ext uri="{FF2B5EF4-FFF2-40B4-BE49-F238E27FC236}">
-                <a16:creationId xmlns:a16="http://schemas.microsoft.com/office/drawing/2014/main" id="{6C849F3E-CD65-49AB-BE7B-FC04A1C6FADF}"/>
+                <a16:creationId xmlns:a16="http://schemas.microsoft.com/office/drawing/2014/main" id="{93CABC07-C111-47CB-AD49-F8F770E898E7}"/>
               </a:ext>
             </a:extLst>
           </p:cNvPr>
@@ -31907,7 +31907,7 @@
           <p:cNvPr id="261" name="i7-label">
             <a:extLst xmlns:a="http://schemas.openxmlformats.org/drawingml/2006/main">
               <a:ext uri="{FF2B5EF4-FFF2-40B4-BE49-F238E27FC236}">
-                <a16:creationId xmlns:a16="http://schemas.microsoft.com/office/drawing/2014/main" id="{37FE3ADF-5581-455C-8078-2315AC74C86B}"/>
+                <a16:creationId xmlns:a16="http://schemas.microsoft.com/office/drawing/2014/main" id="{6B0A5C78-B5E6-4AA1-A599-0FF734D2D52A}"/>
               </a:ext>
             </a:extLst>
           </p:cNvPr>
@@ -31980,7 +31980,7 @@
           <p:cNvPr id="262" name="i7-GEN-bar">
             <a:extLst xmlns:a="http://schemas.openxmlformats.org/drawingml/2006/main">
               <a:ext uri="{FF2B5EF4-FFF2-40B4-BE49-F238E27FC236}">
-                <a16:creationId xmlns:a16="http://schemas.microsoft.com/office/drawing/2014/main" id="{0AB88996-09BC-46D0-BB4E-8AA392D25212}"/>
+                <a16:creationId xmlns:a16="http://schemas.microsoft.com/office/drawing/2014/main" id="{70FD90ED-641C-4755-AA6F-6018C03ED1AE}"/>
               </a:ext>
             </a:extLst>
           </p:cNvPr>
@@ -32011,7 +32011,7 @@
           <p:cNvPr id="263" name="i7-GEN-ci">
             <a:extLst xmlns:a="http://schemas.openxmlformats.org/drawingml/2006/main">
               <a:ext uri="{FF2B5EF4-FFF2-40B4-BE49-F238E27FC236}">
-                <a16:creationId xmlns:a16="http://schemas.microsoft.com/office/drawing/2014/main" id="{EB565E2D-5B1C-40F2-963B-EE7EC9DAACC9}"/>
+                <a16:creationId xmlns:a16="http://schemas.microsoft.com/office/drawing/2014/main" id="{F5583DB0-8A04-4925-AE33-E4BA4518F7B1}"/>
               </a:ext>
             </a:extLst>
           </p:cNvPr>
@@ -32042,7 +32042,7 @@
           <p:cNvPr id="264" name="i7-GEN-cil">
             <a:extLst xmlns:a="http://schemas.openxmlformats.org/drawingml/2006/main">
               <a:ext uri="{FF2B5EF4-FFF2-40B4-BE49-F238E27FC236}">
-                <a16:creationId xmlns:a16="http://schemas.microsoft.com/office/drawing/2014/main" id="{EBD0C340-A6EB-4EE8-BA3F-F3061967B292}"/>
+                <a16:creationId xmlns:a16="http://schemas.microsoft.com/office/drawing/2014/main" id="{101458BD-26BA-4A65-A406-43325F4B1C63}"/>
               </a:ext>
             </a:extLst>
           </p:cNvPr>
@@ -32073,7 +32073,7 @@
           <p:cNvPr id="265" name="i7-GEN-cih">
             <a:extLst xmlns:a="http://schemas.openxmlformats.org/drawingml/2006/main">
               <a:ext uri="{FF2B5EF4-FFF2-40B4-BE49-F238E27FC236}">
-                <a16:creationId xmlns:a16="http://schemas.microsoft.com/office/drawing/2014/main" id="{ED05DBE1-0CA4-43DF-918B-1251C634669D}"/>
+                <a16:creationId xmlns:a16="http://schemas.microsoft.com/office/drawing/2014/main" id="{1C489073-630D-4C08-9C44-4447F4B5E568}"/>
               </a:ext>
             </a:extLst>
           </p:cNvPr>
@@ -32104,7 +32104,7 @@
           <p:cNvPr id="266" name="i7-GEN-mark">
             <a:extLst xmlns:a="http://schemas.openxmlformats.org/drawingml/2006/main">
               <a:ext uri="{FF2B5EF4-FFF2-40B4-BE49-F238E27FC236}">
-                <a16:creationId xmlns:a16="http://schemas.microsoft.com/office/drawing/2014/main" id="{1DB393DF-4F31-48E7-A383-775DDFDF39C3}"/>
+                <a16:creationId xmlns:a16="http://schemas.microsoft.com/office/drawing/2014/main" id="{28200BA1-6890-414E-A989-7969C465B1C5}"/>
               </a:ext>
             </a:extLst>
           </p:cNvPr>
@@ -32133,7 +32133,7 @@
     </p:spTree>
     <p:extLst>
       <p:ext uri="{BB962C8B-B14F-4D97-AF65-F5344CB8AC3E}">
-        <p14:creationId xmlns:p14="http://schemas.microsoft.com/office/powerpoint/2010/main" val="685416366"/>
+        <p14:creationId xmlns:p14="http://schemas.microsoft.com/office/powerpoint/2010/main" val="1127581697"/>
       </p:ext>
     </p:extLst>
   </p:cSld>
@@ -32164,7 +32164,7 @@
           <p:cNvPr id="190" name="band-a">
             <a:extLst xmlns:a="http://schemas.openxmlformats.org/drawingml/2006/main">
               <a:ext uri="{FF2B5EF4-FFF2-40B4-BE49-F238E27FC236}">
-                <a16:creationId xmlns:a16="http://schemas.microsoft.com/office/drawing/2014/main" id="{D384C996-F8B4-46C6-A950-AE6081399EE6}"/>
+                <a16:creationId xmlns:a16="http://schemas.microsoft.com/office/drawing/2014/main" id="{32AA408F-0662-4179-B88A-13BD2C66E030}"/>
               </a:ext>
             </a:extLst>
           </p:cNvPr>
@@ -32195,7 +32195,7 @@
           <p:cNvPr id="2" name="band-b">
             <a:extLst xmlns:a="http://schemas.openxmlformats.org/drawingml/2006/main">
               <a:ext uri="{FF2B5EF4-FFF2-40B4-BE49-F238E27FC236}">
-                <a16:creationId xmlns:a16="http://schemas.microsoft.com/office/drawing/2014/main" id="{30CCD820-A191-4E06-B6AD-C6F117F12BBA}"/>
+                <a16:creationId xmlns:a16="http://schemas.microsoft.com/office/drawing/2014/main" id="{E3F7E992-8541-4E72-A09B-70870CAB295B}"/>
               </a:ext>
             </a:extLst>
           </p:cNvPr>
@@ -32226,7 +32226,7 @@
           <p:cNvPr id="3" name="band-c">
             <a:extLst xmlns:a="http://schemas.openxmlformats.org/drawingml/2006/main">
               <a:ext uri="{FF2B5EF4-FFF2-40B4-BE49-F238E27FC236}">
-                <a16:creationId xmlns:a16="http://schemas.microsoft.com/office/drawing/2014/main" id="{E811DFDB-6A42-4744-904D-5D760A4A7F8B}"/>
+                <a16:creationId xmlns:a16="http://schemas.microsoft.com/office/drawing/2014/main" id="{E3446E47-9381-43C0-A75A-909D9A84D5D6}"/>
               </a:ext>
             </a:extLst>
           </p:cNvPr>
@@ -32257,7 +32257,7 @@
           <p:cNvPr id="4" name="sec-a-chip">
             <a:extLst xmlns:a="http://schemas.openxmlformats.org/drawingml/2006/main">
               <a:ext uri="{FF2B5EF4-FFF2-40B4-BE49-F238E27FC236}">
-                <a16:creationId xmlns:a16="http://schemas.microsoft.com/office/drawing/2014/main" id="{ED3D0ED3-DE23-4B7C-AEAF-B8BE716D2DD4}"/>
+                <a16:creationId xmlns:a16="http://schemas.microsoft.com/office/drawing/2014/main" id="{1614E820-2CC5-4842-906D-78C8090798A6}"/>
               </a:ext>
             </a:extLst>
           </p:cNvPr>
@@ -32292,7 +32292,7 @@
           <p:cNvPr id="5" name="sec-a-chip-text">
             <a:extLst xmlns:a="http://schemas.openxmlformats.org/drawingml/2006/main">
               <a:ext uri="{FF2B5EF4-FFF2-40B4-BE49-F238E27FC236}">
-                <a16:creationId xmlns:a16="http://schemas.microsoft.com/office/drawing/2014/main" id="{5D469CC8-1D96-4237-9469-8C1F8346DCFF}"/>
+                <a16:creationId xmlns:a16="http://schemas.microsoft.com/office/drawing/2014/main" id="{51BC7A2C-3794-4D94-9F24-EF03615D28A9}"/>
               </a:ext>
             </a:extLst>
           </p:cNvPr>
@@ -32354,7 +32354,7 @@
           <p:cNvPr id="6" name="sec-a">
             <a:extLst xmlns:a="http://schemas.openxmlformats.org/drawingml/2006/main">
               <a:ext uri="{FF2B5EF4-FFF2-40B4-BE49-F238E27FC236}">
-                <a16:creationId xmlns:a16="http://schemas.microsoft.com/office/drawing/2014/main" id="{D6DC0B9F-55E4-446D-9815-731788AE62D6}"/>
+                <a16:creationId xmlns:a16="http://schemas.microsoft.com/office/drawing/2014/main" id="{3447082D-758F-4394-AFC6-64BDA8CBD6D1}"/>
               </a:ext>
             </a:extLst>
           </p:cNvPr>
@@ -32427,7 +32427,7 @@
           <p:cNvPr id="7" name="sec-a-sub">
             <a:extLst xmlns:a="http://schemas.openxmlformats.org/drawingml/2006/main">
               <a:ext uri="{FF2B5EF4-FFF2-40B4-BE49-F238E27FC236}">
-                <a16:creationId xmlns:a16="http://schemas.microsoft.com/office/drawing/2014/main" id="{802F8015-80E1-457D-91E3-018E459F5531}"/>
+                <a16:creationId xmlns:a16="http://schemas.microsoft.com/office/drawing/2014/main" id="{FA58D19A-3B0D-4012-BE85-AD8D56C5767F}"/>
               </a:ext>
             </a:extLst>
           </p:cNvPr>
@@ -32489,7 +32489,7 @@
           <p:cNvPr id="8" name="k-key-0">
             <a:extLst xmlns:a="http://schemas.openxmlformats.org/drawingml/2006/main">
               <a:ext uri="{FF2B5EF4-FFF2-40B4-BE49-F238E27FC236}">
-                <a16:creationId xmlns:a16="http://schemas.microsoft.com/office/drawing/2014/main" id="{3C0FB20A-B305-4EF9-BBCA-C381964EEC61}"/>
+                <a16:creationId xmlns:a16="http://schemas.microsoft.com/office/drawing/2014/main" id="{4AC16954-5E0E-49D9-B710-1B6D521BDA43}"/>
               </a:ext>
             </a:extLst>
           </p:cNvPr>
@@ -32524,7 +32524,7 @@
           <p:cNvPr id="9" name="k-key-lab-0">
             <a:extLst xmlns:a="http://schemas.openxmlformats.org/drawingml/2006/main">
               <a:ext uri="{FF2B5EF4-FFF2-40B4-BE49-F238E27FC236}">
-                <a16:creationId xmlns:a16="http://schemas.microsoft.com/office/drawing/2014/main" id="{29AACB3D-7471-4A18-8C31-A1636E851B5F}"/>
+                <a16:creationId xmlns:a16="http://schemas.microsoft.com/office/drawing/2014/main" id="{72208F3A-BBAC-4F77-A474-1A7BE0C0A43F}"/>
               </a:ext>
             </a:extLst>
           </p:cNvPr>
@@ -32586,7 +32586,7 @@
           <p:cNvPr id="10" name="k-key-1">
             <a:extLst xmlns:a="http://schemas.openxmlformats.org/drawingml/2006/main">
               <a:ext uri="{FF2B5EF4-FFF2-40B4-BE49-F238E27FC236}">
-                <a16:creationId xmlns:a16="http://schemas.microsoft.com/office/drawing/2014/main" id="{18BD9A3A-736C-4222-A86E-1CDADBEF2883}"/>
+                <a16:creationId xmlns:a16="http://schemas.microsoft.com/office/drawing/2014/main" id="{956792C3-E204-4EF5-9579-F8A0FA814E54}"/>
               </a:ext>
             </a:extLst>
           </p:cNvPr>
@@ -32621,7 +32621,7 @@
           <p:cNvPr id="11" name="k-key-lab-1">
             <a:extLst xmlns:a="http://schemas.openxmlformats.org/drawingml/2006/main">
               <a:ext uri="{FF2B5EF4-FFF2-40B4-BE49-F238E27FC236}">
-                <a16:creationId xmlns:a16="http://schemas.microsoft.com/office/drawing/2014/main" id="{2D71963B-C076-4E05-B22E-BF02FDAF3A3C}"/>
+                <a16:creationId xmlns:a16="http://schemas.microsoft.com/office/drawing/2014/main" id="{3631B726-E2FE-4A39-862D-84F66B9B5EEF}"/>
               </a:ext>
             </a:extLst>
           </p:cNvPr>
@@ -32683,7 +32683,7 @@
           <p:cNvPr id="12" name="k-key-2">
             <a:extLst xmlns:a="http://schemas.openxmlformats.org/drawingml/2006/main">
               <a:ext uri="{FF2B5EF4-FFF2-40B4-BE49-F238E27FC236}">
-                <a16:creationId xmlns:a16="http://schemas.microsoft.com/office/drawing/2014/main" id="{7B44C1CA-A895-45DF-8551-7499A5A7CC45}"/>
+                <a16:creationId xmlns:a16="http://schemas.microsoft.com/office/drawing/2014/main" id="{8C5A5D1C-E7C0-458A-B0E8-5E5653FC08B7}"/>
               </a:ext>
             </a:extLst>
           </p:cNvPr>
@@ -32718,7 +32718,7 @@
           <p:cNvPr id="13" name="k-key-lab-2">
             <a:extLst xmlns:a="http://schemas.openxmlformats.org/drawingml/2006/main">
               <a:ext uri="{FF2B5EF4-FFF2-40B4-BE49-F238E27FC236}">
-                <a16:creationId xmlns:a16="http://schemas.microsoft.com/office/drawing/2014/main" id="{27BD787E-A346-4BB6-BE56-2363A733027B}"/>
+                <a16:creationId xmlns:a16="http://schemas.microsoft.com/office/drawing/2014/main" id="{849A5350-4536-4201-B17D-06A3727816ED}"/>
               </a:ext>
             </a:extLst>
           </p:cNvPr>
@@ -32780,7 +32780,7 @@
           <p:cNvPr id="14" name="k-key-3">
             <a:extLst xmlns:a="http://schemas.openxmlformats.org/drawingml/2006/main">
               <a:ext uri="{FF2B5EF4-FFF2-40B4-BE49-F238E27FC236}">
-                <a16:creationId xmlns:a16="http://schemas.microsoft.com/office/drawing/2014/main" id="{355C60A2-2A52-4DFC-B380-A4253B65E15E}"/>
+                <a16:creationId xmlns:a16="http://schemas.microsoft.com/office/drawing/2014/main" id="{C219C7FE-2F92-4607-B715-57FE41383C66}"/>
               </a:ext>
             </a:extLst>
           </p:cNvPr>
@@ -32815,7 +32815,7 @@
           <p:cNvPr id="15" name="k-key-lab-3">
             <a:extLst xmlns:a="http://schemas.openxmlformats.org/drawingml/2006/main">
               <a:ext uri="{FF2B5EF4-FFF2-40B4-BE49-F238E27FC236}">
-                <a16:creationId xmlns:a16="http://schemas.microsoft.com/office/drawing/2014/main" id="{F060AB90-3BAA-4871-BD69-2796A422A3D1}"/>
+                <a16:creationId xmlns:a16="http://schemas.microsoft.com/office/drawing/2014/main" id="{C7226FEA-757C-4A46-A0CC-03FB2D80E863}"/>
               </a:ext>
             </a:extLst>
           </p:cNvPr>
@@ -32877,7 +32877,7 @@
           <p:cNvPr id="16" name="k-grid-0">
             <a:extLst xmlns:a="http://schemas.openxmlformats.org/drawingml/2006/main">
               <a:ext uri="{FF2B5EF4-FFF2-40B4-BE49-F238E27FC236}">
-                <a16:creationId xmlns:a16="http://schemas.microsoft.com/office/drawing/2014/main" id="{A69EEE8C-4FAD-4B6F-91D7-B5D7C1A1A953}"/>
+                <a16:creationId xmlns:a16="http://schemas.microsoft.com/office/drawing/2014/main" id="{0B6F7097-B07A-48A7-8A94-6B07999C8EDE}"/>
               </a:ext>
             </a:extLst>
           </p:cNvPr>
@@ -32908,7 +32908,7 @@
           <p:cNvPr id="17" name="k-lab-0">
             <a:extLst xmlns:a="http://schemas.openxmlformats.org/drawingml/2006/main">
               <a:ext uri="{FF2B5EF4-FFF2-40B4-BE49-F238E27FC236}">
-                <a16:creationId xmlns:a16="http://schemas.microsoft.com/office/drawing/2014/main" id="{5CCDD072-CEDF-458D-8785-DCD45ABBAE4F}"/>
+                <a16:creationId xmlns:a16="http://schemas.microsoft.com/office/drawing/2014/main" id="{61A8555E-1FD4-4B15-897A-4AE770BCE59C}"/>
               </a:ext>
             </a:extLst>
           </p:cNvPr>
@@ -32981,7 +32981,7 @@
           <p:cNvPr id="18" name="k-grid-1">
             <a:extLst xmlns:a="http://schemas.openxmlformats.org/drawingml/2006/main">
               <a:ext uri="{FF2B5EF4-FFF2-40B4-BE49-F238E27FC236}">
-                <a16:creationId xmlns:a16="http://schemas.microsoft.com/office/drawing/2014/main" id="{89805B73-3723-4628-BD2C-C0C68BFB6E6D}"/>
+                <a16:creationId xmlns:a16="http://schemas.microsoft.com/office/drawing/2014/main" id="{90B8D125-16D1-4B67-97A5-22920918B185}"/>
               </a:ext>
             </a:extLst>
           </p:cNvPr>
@@ -33012,7 +33012,7 @@
           <p:cNvPr id="19" name="k-lab-1">
             <a:extLst xmlns:a="http://schemas.openxmlformats.org/drawingml/2006/main">
               <a:ext uri="{FF2B5EF4-FFF2-40B4-BE49-F238E27FC236}">
-                <a16:creationId xmlns:a16="http://schemas.microsoft.com/office/drawing/2014/main" id="{9BF36F04-FD92-4D1F-B165-1FB3311EE98E}"/>
+                <a16:creationId xmlns:a16="http://schemas.microsoft.com/office/drawing/2014/main" id="{B777573B-1098-4949-92B3-1EBE6823D14F}"/>
               </a:ext>
             </a:extLst>
           </p:cNvPr>
@@ -33085,7 +33085,7 @@
           <p:cNvPr id="20" name="k-grid-2">
             <a:extLst xmlns:a="http://schemas.openxmlformats.org/drawingml/2006/main">
               <a:ext uri="{FF2B5EF4-FFF2-40B4-BE49-F238E27FC236}">
-                <a16:creationId xmlns:a16="http://schemas.microsoft.com/office/drawing/2014/main" id="{ACA66A61-63B2-4E65-94BD-F09661F201E8}"/>
+                <a16:creationId xmlns:a16="http://schemas.microsoft.com/office/drawing/2014/main" id="{63636734-88F0-4F48-83A1-A3DEDDBEC256}"/>
               </a:ext>
             </a:extLst>
           </p:cNvPr>
@@ -33116,7 +33116,7 @@
           <p:cNvPr id="21" name="k-lab-2">
             <a:extLst xmlns:a="http://schemas.openxmlformats.org/drawingml/2006/main">
               <a:ext uri="{FF2B5EF4-FFF2-40B4-BE49-F238E27FC236}">
-                <a16:creationId xmlns:a16="http://schemas.microsoft.com/office/drawing/2014/main" id="{DF959760-D070-4566-A36D-8A47558D0381}"/>
+                <a16:creationId xmlns:a16="http://schemas.microsoft.com/office/drawing/2014/main" id="{02774DA9-6999-457F-8063-56E973E5588C}"/>
               </a:ext>
             </a:extLst>
           </p:cNvPr>
@@ -33189,7 +33189,7 @@
           <p:cNvPr id="22" name="k-grid-3">
             <a:extLst xmlns:a="http://schemas.openxmlformats.org/drawingml/2006/main">
               <a:ext uri="{FF2B5EF4-FFF2-40B4-BE49-F238E27FC236}">
-                <a16:creationId xmlns:a16="http://schemas.microsoft.com/office/drawing/2014/main" id="{09F32F39-B00C-4857-A784-1310AA0737AF}"/>
+                <a16:creationId xmlns:a16="http://schemas.microsoft.com/office/drawing/2014/main" id="{3EF711F2-C439-4D09-A4B7-388B3B36C025}"/>
               </a:ext>
             </a:extLst>
           </p:cNvPr>
@@ -33220,7 +33220,7 @@
           <p:cNvPr id="23" name="k-lab-3">
             <a:extLst xmlns:a="http://schemas.openxmlformats.org/drawingml/2006/main">
               <a:ext uri="{FF2B5EF4-FFF2-40B4-BE49-F238E27FC236}">
-                <a16:creationId xmlns:a16="http://schemas.microsoft.com/office/drawing/2014/main" id="{6C846112-4C21-4D7E-8C9D-C0E4F89F66C2}"/>
+                <a16:creationId xmlns:a16="http://schemas.microsoft.com/office/drawing/2014/main" id="{834EBCB5-1B1A-47B9-8DCF-1FEA8D2BB009}"/>
               </a:ext>
             </a:extLst>
           </p:cNvPr>
@@ -33293,7 +33293,7 @@
           <p:cNvPr id="24" name="k-zero">
             <a:extLst xmlns:a="http://schemas.openxmlformats.org/drawingml/2006/main">
               <a:ext uri="{FF2B5EF4-FFF2-40B4-BE49-F238E27FC236}">
-                <a16:creationId xmlns:a16="http://schemas.microsoft.com/office/drawing/2014/main" id="{6E7CFF6F-EBE7-4D4F-93EB-76A78E8A5EE9}"/>
+                <a16:creationId xmlns:a16="http://schemas.microsoft.com/office/drawing/2014/main" id="{BCAEC86A-9F59-47CE-98C3-D2A567F8B648}"/>
               </a:ext>
             </a:extLst>
           </p:cNvPr>
@@ -33324,7 +33324,7 @@
           <p:cNvPr id="25" name="k-scale">
             <a:extLst xmlns:a="http://schemas.openxmlformats.org/drawingml/2006/main">
               <a:ext uri="{FF2B5EF4-FFF2-40B4-BE49-F238E27FC236}">
-                <a16:creationId xmlns:a16="http://schemas.microsoft.com/office/drawing/2014/main" id="{811B2091-29FD-404E-9071-B351F5CA9960}"/>
+                <a16:creationId xmlns:a16="http://schemas.microsoft.com/office/drawing/2014/main" id="{7590FC31-FA3E-4A86-BF21-22C19E22CC74}"/>
               </a:ext>
             </a:extLst>
           </p:cNvPr>
@@ -33355,7 +33355,7 @@
           <p:cNvPr id="26" name="k-seg-MPDD I_TRI-0">
             <a:extLst xmlns:a="http://schemas.openxmlformats.org/drawingml/2006/main">
               <a:ext uri="{FF2B5EF4-FFF2-40B4-BE49-F238E27FC236}">
-                <a16:creationId xmlns:a16="http://schemas.microsoft.com/office/drawing/2014/main" id="{68D38AC3-AC6A-49E5-9AAC-F2F8483DBC45}"/>
+                <a16:creationId xmlns:a16="http://schemas.microsoft.com/office/drawing/2014/main" id="{9719586E-B419-4ED2-80D1-2E82788C8755}"/>
               </a:ext>
             </a:extLst>
           </p:cNvPr>
@@ -33386,7 +33386,7 @@
           <p:cNvPr id="27" name="k-seg-MPDD I_TRI-1">
             <a:extLst xmlns:a="http://schemas.openxmlformats.org/drawingml/2006/main">
               <a:ext uri="{FF2B5EF4-FFF2-40B4-BE49-F238E27FC236}">
-                <a16:creationId xmlns:a16="http://schemas.microsoft.com/office/drawing/2014/main" id="{B1E57479-7FC9-4CBF-ADB3-9122C41AAC55}"/>
+                <a16:creationId xmlns:a16="http://schemas.microsoft.com/office/drawing/2014/main" id="{39C22976-7F41-40C6-8DC1-48A498C3D5C1}"/>
               </a:ext>
             </a:extLst>
           </p:cNvPr>
@@ -33417,7 +33417,7 @@
           <p:cNvPr id="28" name="k-seg-MPDD I_TRI-2">
             <a:extLst xmlns:a="http://schemas.openxmlformats.org/drawingml/2006/main">
               <a:ext uri="{FF2B5EF4-FFF2-40B4-BE49-F238E27FC236}">
-                <a16:creationId xmlns:a16="http://schemas.microsoft.com/office/drawing/2014/main" id="{1ED02B99-D60E-4F4F-AB2B-878E9334DCE4}"/>
+                <a16:creationId xmlns:a16="http://schemas.microsoft.com/office/drawing/2014/main" id="{E888FE9D-CD5B-4FAB-9E73-32034E59057A}"/>
               </a:ext>
             </a:extLst>
           </p:cNvPr>
@@ -33448,7 +33448,7 @@
           <p:cNvPr id="29" name="k-dot-MPDD I_TRI-0">
             <a:extLst xmlns:a="http://schemas.openxmlformats.org/drawingml/2006/main">
               <a:ext uri="{FF2B5EF4-FFF2-40B4-BE49-F238E27FC236}">
-                <a16:creationId xmlns:a16="http://schemas.microsoft.com/office/drawing/2014/main" id="{EEC6F4E7-77FD-466B-B8B1-3E174AB97346}"/>
+                <a16:creationId xmlns:a16="http://schemas.microsoft.com/office/drawing/2014/main" id="{09F66645-9C59-42B3-8E74-254F05E4F636}"/>
               </a:ext>
             </a:extLst>
           </p:cNvPr>
@@ -33483,7 +33483,7 @@
           <p:cNvPr id="30" name="k-dot-MPDD I_TRI-1">
             <a:extLst xmlns:a="http://schemas.openxmlformats.org/drawingml/2006/main">
               <a:ext uri="{FF2B5EF4-FFF2-40B4-BE49-F238E27FC236}">
-                <a16:creationId xmlns:a16="http://schemas.microsoft.com/office/drawing/2014/main" id="{BCA62AC1-9A31-46B4-BD08-BDC4DD87BB50}"/>
+                <a16:creationId xmlns:a16="http://schemas.microsoft.com/office/drawing/2014/main" id="{D59B28F3-CFD4-42D9-88E9-68EE8F150F30}"/>
               </a:ext>
             </a:extLst>
           </p:cNvPr>
@@ -33518,7 +33518,7 @@
           <p:cNvPr id="31" name="k-dot-MPDD I_TRI-2">
             <a:extLst xmlns:a="http://schemas.openxmlformats.org/drawingml/2006/main">
               <a:ext uri="{FF2B5EF4-FFF2-40B4-BE49-F238E27FC236}">
-                <a16:creationId xmlns:a16="http://schemas.microsoft.com/office/drawing/2014/main" id="{7949CE11-07F7-49C1-807B-E6B89762A56D}"/>
+                <a16:creationId xmlns:a16="http://schemas.microsoft.com/office/drawing/2014/main" id="{CE4B63FC-F5D2-40E5-932E-2F70D52CBAA2}"/>
               </a:ext>
             </a:extLst>
           </p:cNvPr>
@@ -33553,7 +33553,7 @@
           <p:cNvPr id="32" name="k-dot-MPDD I_TRI-3">
             <a:extLst xmlns:a="http://schemas.openxmlformats.org/drawingml/2006/main">
               <a:ext uri="{FF2B5EF4-FFF2-40B4-BE49-F238E27FC236}">
-                <a16:creationId xmlns:a16="http://schemas.microsoft.com/office/drawing/2014/main" id="{2950C216-A193-4AA7-89F3-2215209D64BF}"/>
+                <a16:creationId xmlns:a16="http://schemas.microsoft.com/office/drawing/2014/main" id="{DF18FB6C-855F-40F0-A557-AFD83D626720}"/>
               </a:ext>
             </a:extLst>
           </p:cNvPr>
@@ -33588,7 +33588,7 @@
           <p:cNvPr id="33" name="k-seg-MPDD I_BAL-0">
             <a:extLst xmlns:a="http://schemas.openxmlformats.org/drawingml/2006/main">
               <a:ext uri="{FF2B5EF4-FFF2-40B4-BE49-F238E27FC236}">
-                <a16:creationId xmlns:a16="http://schemas.microsoft.com/office/drawing/2014/main" id="{C9DA7F28-AA5C-48A2-997A-D0712B1D28B6}"/>
+                <a16:creationId xmlns:a16="http://schemas.microsoft.com/office/drawing/2014/main" id="{B03E758A-19B8-4617-8480-605A91769193}"/>
               </a:ext>
             </a:extLst>
           </p:cNvPr>
@@ -33619,7 +33619,7 @@
           <p:cNvPr id="34" name="k-seg-MPDD I_BAL-1">
             <a:extLst xmlns:a="http://schemas.openxmlformats.org/drawingml/2006/main">
               <a:ext uri="{FF2B5EF4-FFF2-40B4-BE49-F238E27FC236}">
-                <a16:creationId xmlns:a16="http://schemas.microsoft.com/office/drawing/2014/main" id="{CD47FFE7-13ED-4DDE-86DB-774CAE56EDBE}"/>
+                <a16:creationId xmlns:a16="http://schemas.microsoft.com/office/drawing/2014/main" id="{9B0FEDD7-863F-4970-810D-E653A15C2C62}"/>
               </a:ext>
             </a:extLst>
           </p:cNvPr>
@@ -33650,7 +33650,7 @@
           <p:cNvPr id="35" name="k-seg-MPDD I_BAL-2">
             <a:extLst xmlns:a="http://schemas.openxmlformats.org/drawingml/2006/main">
               <a:ext uri="{FF2B5EF4-FFF2-40B4-BE49-F238E27FC236}">
-                <a16:creationId xmlns:a16="http://schemas.microsoft.com/office/drawing/2014/main" id="{C19C192A-327D-4D41-BE10-C186346224D9}"/>
+                <a16:creationId xmlns:a16="http://schemas.microsoft.com/office/drawing/2014/main" id="{CE51CE74-7166-48C9-AF65-36F65EFF6466}"/>
               </a:ext>
             </a:extLst>
           </p:cNvPr>
@@ -33681,7 +33681,7 @@
           <p:cNvPr id="36" name="k-dot-MPDD I_BAL-0">
             <a:extLst xmlns:a="http://schemas.openxmlformats.org/drawingml/2006/main">
               <a:ext uri="{FF2B5EF4-FFF2-40B4-BE49-F238E27FC236}">
-                <a16:creationId xmlns:a16="http://schemas.microsoft.com/office/drawing/2014/main" id="{79517AB4-EB9C-471D-82B7-C235B5D95E4C}"/>
+                <a16:creationId xmlns:a16="http://schemas.microsoft.com/office/drawing/2014/main" id="{23946572-B205-49E6-9120-280BD2170912}"/>
               </a:ext>
             </a:extLst>
           </p:cNvPr>
@@ -33716,7 +33716,7 @@
           <p:cNvPr id="37" name="k-dot-MPDD I_BAL-1">
             <a:extLst xmlns:a="http://schemas.openxmlformats.org/drawingml/2006/main">
               <a:ext uri="{FF2B5EF4-FFF2-40B4-BE49-F238E27FC236}">
-                <a16:creationId xmlns:a16="http://schemas.microsoft.com/office/drawing/2014/main" id="{6EACA1F5-DE9E-41FD-81BF-A58B96269AD5}"/>
+                <a16:creationId xmlns:a16="http://schemas.microsoft.com/office/drawing/2014/main" id="{FB8552C1-E1EB-4DD6-97C7-E27DAB23BCB9}"/>
               </a:ext>
             </a:extLst>
           </p:cNvPr>
@@ -33751,7 +33751,7 @@
           <p:cNvPr id="38" name="k-dot-MPDD I_BAL-2">
             <a:extLst xmlns:a="http://schemas.openxmlformats.org/drawingml/2006/main">
               <a:ext uri="{FF2B5EF4-FFF2-40B4-BE49-F238E27FC236}">
-                <a16:creationId xmlns:a16="http://schemas.microsoft.com/office/drawing/2014/main" id="{973E1DB9-FE04-4203-A190-AC2CBE064594}"/>
+                <a16:creationId xmlns:a16="http://schemas.microsoft.com/office/drawing/2014/main" id="{CAE2DD40-5460-40FE-B55F-890DB29042C5}"/>
               </a:ext>
             </a:extLst>
           </p:cNvPr>
@@ -33786,7 +33786,7 @@
           <p:cNvPr id="39" name="k-dot-MPDD I_BAL-3">
             <a:extLst xmlns:a="http://schemas.openxmlformats.org/drawingml/2006/main">
               <a:ext uri="{FF2B5EF4-FFF2-40B4-BE49-F238E27FC236}">
-                <a16:creationId xmlns:a16="http://schemas.microsoft.com/office/drawing/2014/main" id="{AEA2DBDB-61BB-407D-9E88-42D61889DCB1}"/>
+                <a16:creationId xmlns:a16="http://schemas.microsoft.com/office/drawing/2014/main" id="{EBE83160-197C-44A6-B5F3-417AF68410DE}"/>
               </a:ext>
             </a:extLst>
           </p:cNvPr>
@@ -33821,7 +33821,7 @@
           <p:cNvPr id="40" name="k-seg-BTAD I_TRI-0">
             <a:extLst xmlns:a="http://schemas.openxmlformats.org/drawingml/2006/main">
               <a:ext uri="{FF2B5EF4-FFF2-40B4-BE49-F238E27FC236}">
-                <a16:creationId xmlns:a16="http://schemas.microsoft.com/office/drawing/2014/main" id="{944C1622-0CD1-4F36-A130-14997068E806}"/>
+                <a16:creationId xmlns:a16="http://schemas.microsoft.com/office/drawing/2014/main" id="{31F15BFF-6784-4792-B5F7-3496A314EF5D}"/>
               </a:ext>
             </a:extLst>
           </p:cNvPr>
@@ -33852,7 +33852,7 @@
           <p:cNvPr id="41" name="k-seg-BTAD I_TRI-1">
             <a:extLst xmlns:a="http://schemas.openxmlformats.org/drawingml/2006/main">
               <a:ext uri="{FF2B5EF4-FFF2-40B4-BE49-F238E27FC236}">
-                <a16:creationId xmlns:a16="http://schemas.microsoft.com/office/drawing/2014/main" id="{E8A8F133-98FF-4223-8229-9A787EB4F773}"/>
+                <a16:creationId xmlns:a16="http://schemas.microsoft.com/office/drawing/2014/main" id="{B13F0F10-4FF3-4940-9A97-A95060BDC5E5}"/>
               </a:ext>
             </a:extLst>
           </p:cNvPr>
@@ -33883,7 +33883,7 @@
           <p:cNvPr id="42" name="k-seg-BTAD I_TRI-2">
             <a:extLst xmlns:a="http://schemas.openxmlformats.org/drawingml/2006/main">
               <a:ext uri="{FF2B5EF4-FFF2-40B4-BE49-F238E27FC236}">
-                <a16:creationId xmlns:a16="http://schemas.microsoft.com/office/drawing/2014/main" id="{94840F48-80A7-406D-9CBA-FAA35D4243F0}"/>
+                <a16:creationId xmlns:a16="http://schemas.microsoft.com/office/drawing/2014/main" id="{298A8AB1-3194-403F-968E-684159674A57}"/>
               </a:ext>
             </a:extLst>
           </p:cNvPr>
@@ -33914,7 +33914,7 @@
           <p:cNvPr id="43" name="k-dot-BTAD I_TRI-0">
             <a:extLst xmlns:a="http://schemas.openxmlformats.org/drawingml/2006/main">
               <a:ext uri="{FF2B5EF4-FFF2-40B4-BE49-F238E27FC236}">
-                <a16:creationId xmlns:a16="http://schemas.microsoft.com/office/drawing/2014/main" id="{4C760476-7392-415B-A221-A2301352CD57}"/>
+                <a16:creationId xmlns:a16="http://schemas.microsoft.com/office/drawing/2014/main" id="{B0A7B4BC-6C49-4629-964E-786012B18723}"/>
               </a:ext>
             </a:extLst>
           </p:cNvPr>
@@ -33949,7 +33949,7 @@
           <p:cNvPr id="44" name="k-dot-BTAD I_TRI-1">
             <a:extLst xmlns:a="http://schemas.openxmlformats.org/drawingml/2006/main">
               <a:ext uri="{FF2B5EF4-FFF2-40B4-BE49-F238E27FC236}">
-                <a16:creationId xmlns:a16="http://schemas.microsoft.com/office/drawing/2014/main" id="{C91C6485-2AD9-4734-9DF1-6F7A2DCD2AEA}"/>
+                <a16:creationId xmlns:a16="http://schemas.microsoft.com/office/drawing/2014/main" id="{3D850B80-18EB-4B9A-9821-7F5FA2E237D0}"/>
               </a:ext>
             </a:extLst>
           </p:cNvPr>
@@ -33984,7 +33984,7 @@
           <p:cNvPr id="45" name="k-dot-BTAD I_TRI-2">
             <a:extLst xmlns:a="http://schemas.openxmlformats.org/drawingml/2006/main">
               <a:ext uri="{FF2B5EF4-FFF2-40B4-BE49-F238E27FC236}">
-                <a16:creationId xmlns:a16="http://schemas.microsoft.com/office/drawing/2014/main" id="{7D95AF2D-2107-4F56-A54B-D054FA6914CD}"/>
+                <a16:creationId xmlns:a16="http://schemas.microsoft.com/office/drawing/2014/main" id="{1BB0BFE0-DF53-4F47-9069-3C2A41059949}"/>
               </a:ext>
             </a:extLst>
           </p:cNvPr>
@@ -34019,7 +34019,7 @@
           <p:cNvPr id="46" name="k-dot-BTAD I_TRI-3">
             <a:extLst xmlns:a="http://schemas.openxmlformats.org/drawingml/2006/main">
               <a:ext uri="{FF2B5EF4-FFF2-40B4-BE49-F238E27FC236}">
-                <a16:creationId xmlns:a16="http://schemas.microsoft.com/office/drawing/2014/main" id="{97C614B1-C353-4667-B8EB-50E13815B302}"/>
+                <a16:creationId xmlns:a16="http://schemas.microsoft.com/office/drawing/2014/main" id="{40CE0243-676B-485D-94E6-1038EADA301D}"/>
               </a:ext>
             </a:extLst>
           </p:cNvPr>
@@ -34054,7 +34054,7 @@
           <p:cNvPr id="47" name="k-seg-BTAD I_BAL-0">
             <a:extLst xmlns:a="http://schemas.openxmlformats.org/drawingml/2006/main">
               <a:ext uri="{FF2B5EF4-FFF2-40B4-BE49-F238E27FC236}">
-                <a16:creationId xmlns:a16="http://schemas.microsoft.com/office/drawing/2014/main" id="{7E000DBA-600C-4A8D-99BC-803C242C8525}"/>
+                <a16:creationId xmlns:a16="http://schemas.microsoft.com/office/drawing/2014/main" id="{5BE0B3BF-FBB8-4303-B2C6-ECE8965681F0}"/>
               </a:ext>
             </a:extLst>
           </p:cNvPr>
@@ -34085,7 +34085,7 @@
           <p:cNvPr id="48" name="k-seg-BTAD I_BAL-1">
             <a:extLst xmlns:a="http://schemas.openxmlformats.org/drawingml/2006/main">
               <a:ext uri="{FF2B5EF4-FFF2-40B4-BE49-F238E27FC236}">
-                <a16:creationId xmlns:a16="http://schemas.microsoft.com/office/drawing/2014/main" id="{87801E8F-C8A0-487E-B019-DC1FC82D917C}"/>
+                <a16:creationId xmlns:a16="http://schemas.microsoft.com/office/drawing/2014/main" id="{CBF8C2C9-2231-4C60-9AA0-4182C2865962}"/>
               </a:ext>
             </a:extLst>
           </p:cNvPr>
@@ -34116,7 +34116,7 @@
           <p:cNvPr id="49" name="k-seg-BTAD I_BAL-2">
             <a:extLst xmlns:a="http://schemas.openxmlformats.org/drawingml/2006/main">
               <a:ext uri="{FF2B5EF4-FFF2-40B4-BE49-F238E27FC236}">
-                <a16:creationId xmlns:a16="http://schemas.microsoft.com/office/drawing/2014/main" id="{F54FF002-4D5C-40EC-A905-ECFA5D626055}"/>
+                <a16:creationId xmlns:a16="http://schemas.microsoft.com/office/drawing/2014/main" id="{8CF61B79-45A9-4858-A607-AD3136ED4E2C}"/>
               </a:ext>
             </a:extLst>
           </p:cNvPr>
@@ -34147,7 +34147,7 @@
           <p:cNvPr id="50" name="k-dot-BTAD I_BAL-0">
             <a:extLst xmlns:a="http://schemas.openxmlformats.org/drawingml/2006/main">
               <a:ext uri="{FF2B5EF4-FFF2-40B4-BE49-F238E27FC236}">
-                <a16:creationId xmlns:a16="http://schemas.microsoft.com/office/drawing/2014/main" id="{83BC62F1-A343-4E85-A818-8525231DFA74}"/>
+                <a16:creationId xmlns:a16="http://schemas.microsoft.com/office/drawing/2014/main" id="{8E516B63-74AF-4BAB-AFA5-4F2F9BDE2BEA}"/>
               </a:ext>
             </a:extLst>
           </p:cNvPr>
@@ -34182,7 +34182,7 @@
           <p:cNvPr id="51" name="k-dot-BTAD I_BAL-1">
             <a:extLst xmlns:a="http://schemas.openxmlformats.org/drawingml/2006/main">
               <a:ext uri="{FF2B5EF4-FFF2-40B4-BE49-F238E27FC236}">
-                <a16:creationId xmlns:a16="http://schemas.microsoft.com/office/drawing/2014/main" id="{73051510-1D82-4DA8-9F04-588C0287320A}"/>
+                <a16:creationId xmlns:a16="http://schemas.microsoft.com/office/drawing/2014/main" id="{0373DC75-CBAB-4DA3-AB74-9F0F1CB144ED}"/>
               </a:ext>
             </a:extLst>
           </p:cNvPr>
@@ -34217,7 +34217,7 @@
           <p:cNvPr id="52" name="k-dot-BTAD I_BAL-2">
             <a:extLst xmlns:a="http://schemas.openxmlformats.org/drawingml/2006/main">
               <a:ext uri="{FF2B5EF4-FFF2-40B4-BE49-F238E27FC236}">
-                <a16:creationId xmlns:a16="http://schemas.microsoft.com/office/drawing/2014/main" id="{4C60D5A4-37B9-40CC-B968-063E4828C74F}"/>
+                <a16:creationId xmlns:a16="http://schemas.microsoft.com/office/drawing/2014/main" id="{4C791BAF-4CC7-401D-B889-84EE5F0C4F49}"/>
               </a:ext>
             </a:extLst>
           </p:cNvPr>
@@ -34252,7 +34252,7 @@
           <p:cNvPr id="53" name="k-dot-BTAD I_BAL-3">
             <a:extLst xmlns:a="http://schemas.openxmlformats.org/drawingml/2006/main">
               <a:ext uri="{FF2B5EF4-FFF2-40B4-BE49-F238E27FC236}">
-                <a16:creationId xmlns:a16="http://schemas.microsoft.com/office/drawing/2014/main" id="{9DB855E4-E55A-4EAE-BAAE-89F420C5875A}"/>
+                <a16:creationId xmlns:a16="http://schemas.microsoft.com/office/drawing/2014/main" id="{6EB25D9D-AE4E-40BB-B8B0-C186BD65855A}"/>
               </a:ext>
             </a:extLst>
           </p:cNvPr>
@@ -34287,7 +34287,7 @@
           <p:cNvPr id="54" name="sec-b-chip">
             <a:extLst xmlns:a="http://schemas.openxmlformats.org/drawingml/2006/main">
               <a:ext uri="{FF2B5EF4-FFF2-40B4-BE49-F238E27FC236}">
-                <a16:creationId xmlns:a16="http://schemas.microsoft.com/office/drawing/2014/main" id="{8A4899EE-F320-46EE-8482-410AF89AB92B}"/>
+                <a16:creationId xmlns:a16="http://schemas.microsoft.com/office/drawing/2014/main" id="{16C8008D-E4CD-4249-810D-33DBA8BA70D5}"/>
               </a:ext>
             </a:extLst>
           </p:cNvPr>
@@ -34322,7 +34322,7 @@
           <p:cNvPr id="55" name="sec-b-chip-text">
             <a:extLst xmlns:a="http://schemas.openxmlformats.org/drawingml/2006/main">
               <a:ext uri="{FF2B5EF4-FFF2-40B4-BE49-F238E27FC236}">
-                <a16:creationId xmlns:a16="http://schemas.microsoft.com/office/drawing/2014/main" id="{40AA0700-6ED4-46B9-AB5C-3F4B8EA7C1BF}"/>
+                <a16:creationId xmlns:a16="http://schemas.microsoft.com/office/drawing/2014/main" id="{7C3DE250-87AC-484E-B59D-0D7904AACB11}"/>
               </a:ext>
             </a:extLst>
           </p:cNvPr>
@@ -34384,7 +34384,7 @@
           <p:cNvPr id="56" name="sec-b">
             <a:extLst xmlns:a="http://schemas.openxmlformats.org/drawingml/2006/main">
               <a:ext uri="{FF2B5EF4-FFF2-40B4-BE49-F238E27FC236}">
-                <a16:creationId xmlns:a16="http://schemas.microsoft.com/office/drawing/2014/main" id="{570F50F2-2E85-4285-9615-76F695790FA8}"/>
+                <a16:creationId xmlns:a16="http://schemas.microsoft.com/office/drawing/2014/main" id="{97356483-DF90-49E7-8F41-1ECBF544EB97}"/>
               </a:ext>
             </a:extLst>
           </p:cNvPr>
@@ -34446,7 +34446,7 @@
           <p:cNvPr id="57" name="sec-b-sub">
             <a:extLst xmlns:a="http://schemas.openxmlformats.org/drawingml/2006/main">
               <a:ext uri="{FF2B5EF4-FFF2-40B4-BE49-F238E27FC236}">
-                <a16:creationId xmlns:a16="http://schemas.microsoft.com/office/drawing/2014/main" id="{384F8835-8D30-473D-9B7A-95447C45F8AB}"/>
+                <a16:creationId xmlns:a16="http://schemas.microsoft.com/office/drawing/2014/main" id="{F2282D9C-FC6C-4169-BA4E-D59EFF5FFA6C}"/>
               </a:ext>
             </a:extLst>
           </p:cNvPr>
@@ -34508,7 +34508,7 @@
           <p:cNvPr id="58" name="c-tick--0.020">
             <a:extLst xmlns:a="http://schemas.openxmlformats.org/drawingml/2006/main">
               <a:ext uri="{FF2B5EF4-FFF2-40B4-BE49-F238E27FC236}">
-                <a16:creationId xmlns:a16="http://schemas.microsoft.com/office/drawing/2014/main" id="{70854AAE-ACF3-4C4C-97D7-27BC876277C4}"/>
+                <a16:creationId xmlns:a16="http://schemas.microsoft.com/office/drawing/2014/main" id="{92C14E46-372D-49EE-8343-B8EDB25B5756}"/>
               </a:ext>
             </a:extLst>
           </p:cNvPr>
@@ -34539,7 +34539,7 @@
           <p:cNvPr id="59" name="c-lab--0.020">
             <a:extLst xmlns:a="http://schemas.openxmlformats.org/drawingml/2006/main">
               <a:ext uri="{FF2B5EF4-FFF2-40B4-BE49-F238E27FC236}">
-                <a16:creationId xmlns:a16="http://schemas.microsoft.com/office/drawing/2014/main" id="{58A02D20-B1B3-4F73-972D-4B898AB4E7F1}"/>
+                <a16:creationId xmlns:a16="http://schemas.microsoft.com/office/drawing/2014/main" id="{2AF8FE78-3161-4B20-9049-72ECF58B7A4F}"/>
               </a:ext>
             </a:extLst>
           </p:cNvPr>
@@ -34601,7 +34601,7 @@
           <p:cNvPr id="60" name="c-tick--0.010">
             <a:extLst xmlns:a="http://schemas.openxmlformats.org/drawingml/2006/main">
               <a:ext uri="{FF2B5EF4-FFF2-40B4-BE49-F238E27FC236}">
-                <a16:creationId xmlns:a16="http://schemas.microsoft.com/office/drawing/2014/main" id="{9F0D0FC2-35CE-49FD-9E05-CA9328F113FD}"/>
+                <a16:creationId xmlns:a16="http://schemas.microsoft.com/office/drawing/2014/main" id="{7795DA4C-B85E-4DA0-9B85-4015914D2A3E}"/>
               </a:ext>
             </a:extLst>
           </p:cNvPr>
@@ -34632,7 +34632,7 @@
           <p:cNvPr id="61" name="c-lab--0.010">
             <a:extLst xmlns:a="http://schemas.openxmlformats.org/drawingml/2006/main">
               <a:ext uri="{FF2B5EF4-FFF2-40B4-BE49-F238E27FC236}">
-                <a16:creationId xmlns:a16="http://schemas.microsoft.com/office/drawing/2014/main" id="{09634C50-CF36-43B1-8AC2-E2CBF85DF3B9}"/>
+                <a16:creationId xmlns:a16="http://schemas.microsoft.com/office/drawing/2014/main" id="{2F4A7240-FF4C-4F65-9CB1-977B3A9D77F9}"/>
               </a:ext>
             </a:extLst>
           </p:cNvPr>
@@ -34694,7 +34694,7 @@
           <p:cNvPr id="62" name="c-tick-0.000">
             <a:extLst xmlns:a="http://schemas.openxmlformats.org/drawingml/2006/main">
               <a:ext uri="{FF2B5EF4-FFF2-40B4-BE49-F238E27FC236}">
-                <a16:creationId xmlns:a16="http://schemas.microsoft.com/office/drawing/2014/main" id="{EF420DA7-60BA-49D8-8FB6-72BB5C3B0880}"/>
+                <a16:creationId xmlns:a16="http://schemas.microsoft.com/office/drawing/2014/main" id="{D9BD910B-2139-408F-B1D8-0EE3278FE39F}"/>
               </a:ext>
             </a:extLst>
           </p:cNvPr>
@@ -34725,7 +34725,7 @@
           <p:cNvPr id="63" name="c-lab-0.000">
             <a:extLst xmlns:a="http://schemas.openxmlformats.org/drawingml/2006/main">
               <a:ext uri="{FF2B5EF4-FFF2-40B4-BE49-F238E27FC236}">
-                <a16:creationId xmlns:a16="http://schemas.microsoft.com/office/drawing/2014/main" id="{5B548AA6-9608-48C4-B246-2EE650515B8B}"/>
+                <a16:creationId xmlns:a16="http://schemas.microsoft.com/office/drawing/2014/main" id="{61D79050-F7E8-42B9-A578-A1AA87BF6831}"/>
               </a:ext>
             </a:extLst>
           </p:cNvPr>
@@ -34787,7 +34787,7 @@
           <p:cNvPr id="64" name="c-tick-0.010">
             <a:extLst xmlns:a="http://schemas.openxmlformats.org/drawingml/2006/main">
               <a:ext uri="{FF2B5EF4-FFF2-40B4-BE49-F238E27FC236}">
-                <a16:creationId xmlns:a16="http://schemas.microsoft.com/office/drawing/2014/main" id="{83739D8F-D39C-494A-87A1-99C5CDD9F937}"/>
+                <a16:creationId xmlns:a16="http://schemas.microsoft.com/office/drawing/2014/main" id="{1A716A98-451B-4A7C-A4B0-4C29199561D0}"/>
               </a:ext>
             </a:extLst>
           </p:cNvPr>
@@ -34818,7 +34818,7 @@
           <p:cNvPr id="65" name="c-lab-0.010">
             <a:extLst xmlns:a="http://schemas.openxmlformats.org/drawingml/2006/main">
               <a:ext uri="{FF2B5EF4-FFF2-40B4-BE49-F238E27FC236}">
-                <a16:creationId xmlns:a16="http://schemas.microsoft.com/office/drawing/2014/main" id="{91D87EBA-EDF2-443B-BEA4-EEFD6291456E}"/>
+                <a16:creationId xmlns:a16="http://schemas.microsoft.com/office/drawing/2014/main" id="{D09ABE8E-E25B-45F9-B957-31EB8D91C1E7}"/>
               </a:ext>
             </a:extLst>
           </p:cNvPr>
@@ -34880,7 +34880,7 @@
           <p:cNvPr id="66" name="c-tick-0.020">
             <a:extLst xmlns:a="http://schemas.openxmlformats.org/drawingml/2006/main">
               <a:ext uri="{FF2B5EF4-FFF2-40B4-BE49-F238E27FC236}">
-                <a16:creationId xmlns:a16="http://schemas.microsoft.com/office/drawing/2014/main" id="{1F85DB3D-2C62-43A2-B7DC-30654B12554A}"/>
+                <a16:creationId xmlns:a16="http://schemas.microsoft.com/office/drawing/2014/main" id="{330422B1-A8D2-4A6A-82DC-F5207EFD48E2}"/>
               </a:ext>
             </a:extLst>
           </p:cNvPr>
@@ -34911,7 +34911,7 @@
           <p:cNvPr id="67" name="c-lab-0.020">
             <a:extLst xmlns:a="http://schemas.openxmlformats.org/drawingml/2006/main">
               <a:ext uri="{FF2B5EF4-FFF2-40B4-BE49-F238E27FC236}">
-                <a16:creationId xmlns:a16="http://schemas.microsoft.com/office/drawing/2014/main" id="{983D4D48-2E50-4A80-A01D-563881DCB878}"/>
+                <a16:creationId xmlns:a16="http://schemas.microsoft.com/office/drawing/2014/main" id="{08055178-CDF4-46CC-B7ED-072165FBDC78}"/>
               </a:ext>
             </a:extLst>
           </p:cNvPr>
@@ -34973,7 +34973,7 @@
           <p:cNvPr id="68" name="c-tick-0.030">
             <a:extLst xmlns:a="http://schemas.openxmlformats.org/drawingml/2006/main">
               <a:ext uri="{FF2B5EF4-FFF2-40B4-BE49-F238E27FC236}">
-                <a16:creationId xmlns:a16="http://schemas.microsoft.com/office/drawing/2014/main" id="{A02921B2-D6A8-45F6-9198-E73F0F3CD30E}"/>
+                <a16:creationId xmlns:a16="http://schemas.microsoft.com/office/drawing/2014/main" id="{0ACD6CBE-7760-43AE-AD67-47484E767160}"/>
               </a:ext>
             </a:extLst>
           </p:cNvPr>
@@ -35004,7 +35004,7 @@
           <p:cNvPr id="69" name="c-lab-0.030">
             <a:extLst xmlns:a="http://schemas.openxmlformats.org/drawingml/2006/main">
               <a:ext uri="{FF2B5EF4-FFF2-40B4-BE49-F238E27FC236}">
-                <a16:creationId xmlns:a16="http://schemas.microsoft.com/office/drawing/2014/main" id="{79A6CE4F-D58B-41C2-83B7-7F43EF6BF36E}"/>
+                <a16:creationId xmlns:a16="http://schemas.microsoft.com/office/drawing/2014/main" id="{20433963-3140-44CA-8BCB-76F744A8BE70}"/>
               </a:ext>
             </a:extLst>
           </p:cNvPr>
@@ -35066,7 +35066,7 @@
           <p:cNvPr id="70" name="c-tick-0.040">
             <a:extLst xmlns:a="http://schemas.openxmlformats.org/drawingml/2006/main">
               <a:ext uri="{FF2B5EF4-FFF2-40B4-BE49-F238E27FC236}">
-                <a16:creationId xmlns:a16="http://schemas.microsoft.com/office/drawing/2014/main" id="{3E7A9D58-4DA4-4A71-8E2F-0888222A9EE8}"/>
+                <a16:creationId xmlns:a16="http://schemas.microsoft.com/office/drawing/2014/main" id="{1C878448-57EA-444C-831A-9F0B9746A81B}"/>
               </a:ext>
             </a:extLst>
           </p:cNvPr>
@@ -35097,7 +35097,7 @@
           <p:cNvPr id="71" name="c-lab-0.040">
             <a:extLst xmlns:a="http://schemas.openxmlformats.org/drawingml/2006/main">
               <a:ext uri="{FF2B5EF4-FFF2-40B4-BE49-F238E27FC236}">
-                <a16:creationId xmlns:a16="http://schemas.microsoft.com/office/drawing/2014/main" id="{70222487-9EF4-4C76-807D-6B08316DE507}"/>
+                <a16:creationId xmlns:a16="http://schemas.microsoft.com/office/drawing/2014/main" id="{B16A8A88-E4C6-4AFF-8D05-8601FD2A1107}"/>
               </a:ext>
             </a:extLst>
           </p:cNvPr>
@@ -35159,7 +35159,7 @@
           <p:cNvPr id="72" name="c-zero">
             <a:extLst xmlns:a="http://schemas.openxmlformats.org/drawingml/2006/main">
               <a:ext uri="{FF2B5EF4-FFF2-40B4-BE49-F238E27FC236}">
-                <a16:creationId xmlns:a16="http://schemas.microsoft.com/office/drawing/2014/main" id="{CD50F92E-DB38-4E53-8DED-D5EDAC8AEF31}"/>
+                <a16:creationId xmlns:a16="http://schemas.microsoft.com/office/drawing/2014/main" id="{7DB53FFA-9C8D-45CD-A8B4-5C67E13E6C36}"/>
               </a:ext>
             </a:extLst>
           </p:cNvPr>
@@ -35190,7 +35190,7 @@
           <p:cNvPr id="73" name="c-scale">
             <a:extLst xmlns:a="http://schemas.openxmlformats.org/drawingml/2006/main">
               <a:ext uri="{FF2B5EF4-FFF2-40B4-BE49-F238E27FC236}">
-                <a16:creationId xmlns:a16="http://schemas.microsoft.com/office/drawing/2014/main" id="{2648C2B8-45FB-45A1-90E4-76D7045D1C6B}"/>
+                <a16:creationId xmlns:a16="http://schemas.microsoft.com/office/drawing/2014/main" id="{CC7FE7E7-1C64-48A4-9C86-CD15EF62F3A8}"/>
               </a:ext>
             </a:extLst>
           </p:cNvPr>
@@ -35221,7 +35221,7 @@
           <p:cNvPr id="74" name="c0-label">
             <a:extLst xmlns:a="http://schemas.openxmlformats.org/drawingml/2006/main">
               <a:ext uri="{FF2B5EF4-FFF2-40B4-BE49-F238E27FC236}">
-                <a16:creationId xmlns:a16="http://schemas.microsoft.com/office/drawing/2014/main" id="{DEE8944E-35AB-41B9-B5A2-14AD3565594F}"/>
+                <a16:creationId xmlns:a16="http://schemas.microsoft.com/office/drawing/2014/main" id="{E867FB8C-496E-42D3-8391-9D8E9A564189}"/>
               </a:ext>
             </a:extLst>
           </p:cNvPr>
@@ -35283,7 +35283,7 @@
           <p:cNvPr id="75" name="c0-note">
             <a:extLst xmlns:a="http://schemas.openxmlformats.org/drawingml/2006/main">
               <a:ext uri="{FF2B5EF4-FFF2-40B4-BE49-F238E27FC236}">
-                <a16:creationId xmlns:a16="http://schemas.microsoft.com/office/drawing/2014/main" id="{A9D03E44-F29A-467D-A7B7-DC5933C39983}"/>
+                <a16:creationId xmlns:a16="http://schemas.microsoft.com/office/drawing/2014/main" id="{52D951A1-43FF-44A4-802A-8EF0AD2EB7B0}"/>
               </a:ext>
             </a:extLst>
           </p:cNvPr>
@@ -35319,7 +35319,7 @@
           <p:cNvPr id="76" name="c0-bar">
             <a:extLst xmlns:a="http://schemas.openxmlformats.org/drawingml/2006/main">
               <a:ext uri="{FF2B5EF4-FFF2-40B4-BE49-F238E27FC236}">
-                <a16:creationId xmlns:a16="http://schemas.microsoft.com/office/drawing/2014/main" id="{BD9744FB-3CBD-411E-98C9-A665C2D78D0A}"/>
+                <a16:creationId xmlns:a16="http://schemas.microsoft.com/office/drawing/2014/main" id="{2D3C6755-EE1D-4BE2-BD08-5A686ED51348}"/>
               </a:ext>
             </a:extLst>
           </p:cNvPr>
@@ -35350,7 +35350,7 @@
           <p:cNvPr id="77" name="c0-ci">
             <a:extLst xmlns:a="http://schemas.openxmlformats.org/drawingml/2006/main">
               <a:ext uri="{FF2B5EF4-FFF2-40B4-BE49-F238E27FC236}">
-                <a16:creationId xmlns:a16="http://schemas.microsoft.com/office/drawing/2014/main" id="{F4E6C360-ED19-45BD-B5F1-E442F2CC5A56}"/>
+                <a16:creationId xmlns:a16="http://schemas.microsoft.com/office/drawing/2014/main" id="{0E1F75B6-71BA-46B0-9CBA-88AB0404CA93}"/>
               </a:ext>
             </a:extLst>
           </p:cNvPr>
@@ -35381,7 +35381,7 @@
           <p:cNvPr id="78" name="c0-cil">
             <a:extLst xmlns:a="http://schemas.openxmlformats.org/drawingml/2006/main">
               <a:ext uri="{FF2B5EF4-FFF2-40B4-BE49-F238E27FC236}">
-                <a16:creationId xmlns:a16="http://schemas.microsoft.com/office/drawing/2014/main" id="{5F2F971D-A5F9-4C02-B217-E240A8054091}"/>
+                <a16:creationId xmlns:a16="http://schemas.microsoft.com/office/drawing/2014/main" id="{F65BC68F-5CE1-48D3-B758-B1BFE40EB50B}"/>
               </a:ext>
             </a:extLst>
           </p:cNvPr>
@@ -35412,7 +35412,7 @@
           <p:cNvPr id="79" name="c0-cih">
             <a:extLst xmlns:a="http://schemas.openxmlformats.org/drawingml/2006/main">
               <a:ext uri="{FF2B5EF4-FFF2-40B4-BE49-F238E27FC236}">
-                <a16:creationId xmlns:a16="http://schemas.microsoft.com/office/drawing/2014/main" id="{663E3838-D46C-4DA2-8203-338E36B08D9A}"/>
+                <a16:creationId xmlns:a16="http://schemas.microsoft.com/office/drawing/2014/main" id="{1FA986F9-5076-4C37-B193-3D4BFF6D106B}"/>
               </a:ext>
             </a:extLst>
           </p:cNvPr>
@@ -35443,7 +35443,7 @@
           <p:cNvPr id="80" name="c1-label">
             <a:extLst xmlns:a="http://schemas.openxmlformats.org/drawingml/2006/main">
               <a:ext uri="{FF2B5EF4-FFF2-40B4-BE49-F238E27FC236}">
-                <a16:creationId xmlns:a16="http://schemas.microsoft.com/office/drawing/2014/main" id="{8CC4D724-39E2-4E48-8F70-35F53561AAD4}"/>
+                <a16:creationId xmlns:a16="http://schemas.microsoft.com/office/drawing/2014/main" id="{84C754F2-022B-4348-A120-90B3C893BA59}"/>
               </a:ext>
             </a:extLst>
           </p:cNvPr>
@@ -35505,7 +35505,7 @@
           <p:cNvPr id="81" name="c1-note">
             <a:extLst xmlns:a="http://schemas.openxmlformats.org/drawingml/2006/main">
               <a:ext uri="{FF2B5EF4-FFF2-40B4-BE49-F238E27FC236}">
-                <a16:creationId xmlns:a16="http://schemas.microsoft.com/office/drawing/2014/main" id="{8C09EA7F-09EF-45C1-9164-8058CA9BD821}"/>
+                <a16:creationId xmlns:a16="http://schemas.microsoft.com/office/drawing/2014/main" id="{262E1E87-BFDD-46C2-A777-4CCCDDCF4241}"/>
               </a:ext>
             </a:extLst>
           </p:cNvPr>
@@ -35541,7 +35541,7 @@
           <p:cNvPr id="82" name="c1-bar">
             <a:extLst xmlns:a="http://schemas.openxmlformats.org/drawingml/2006/main">
               <a:ext uri="{FF2B5EF4-FFF2-40B4-BE49-F238E27FC236}">
-                <a16:creationId xmlns:a16="http://schemas.microsoft.com/office/drawing/2014/main" id="{CD27C170-8450-4FE9-8898-4DE943C9BE1A}"/>
+                <a16:creationId xmlns:a16="http://schemas.microsoft.com/office/drawing/2014/main" id="{F7BF0E48-FE53-45D6-90AE-CB9F4CE779C5}"/>
               </a:ext>
             </a:extLst>
           </p:cNvPr>
@@ -35572,7 +35572,7 @@
           <p:cNvPr id="83" name="c1-ci">
             <a:extLst xmlns:a="http://schemas.openxmlformats.org/drawingml/2006/main">
               <a:ext uri="{FF2B5EF4-FFF2-40B4-BE49-F238E27FC236}">
-                <a16:creationId xmlns:a16="http://schemas.microsoft.com/office/drawing/2014/main" id="{224CAC5D-426F-488C-882B-D56BAA120EC1}"/>
+                <a16:creationId xmlns:a16="http://schemas.microsoft.com/office/drawing/2014/main" id="{F48D82F9-6357-4A60-8FAF-1D85A441D82F}"/>
               </a:ext>
             </a:extLst>
           </p:cNvPr>
@@ -35603,7 +35603,7 @@
           <p:cNvPr id="84" name="c1-cil">
             <a:extLst xmlns:a="http://schemas.openxmlformats.org/drawingml/2006/main">
               <a:ext uri="{FF2B5EF4-FFF2-40B4-BE49-F238E27FC236}">
-                <a16:creationId xmlns:a16="http://schemas.microsoft.com/office/drawing/2014/main" id="{DF26A9EE-EF45-4469-BD55-52E26F58CD7B}"/>
+                <a16:creationId xmlns:a16="http://schemas.microsoft.com/office/drawing/2014/main" id="{CCF3ABD5-92A1-4CFD-B2F1-2A958905D466}"/>
               </a:ext>
             </a:extLst>
           </p:cNvPr>
@@ -35634,7 +35634,7 @@
           <p:cNvPr id="85" name="c1-cih">
             <a:extLst xmlns:a="http://schemas.openxmlformats.org/drawingml/2006/main">
               <a:ext uri="{FF2B5EF4-FFF2-40B4-BE49-F238E27FC236}">
-                <a16:creationId xmlns:a16="http://schemas.microsoft.com/office/drawing/2014/main" id="{AE4BB7F0-9F18-44A7-B3A8-E6E09525C19D}"/>
+                <a16:creationId xmlns:a16="http://schemas.microsoft.com/office/drawing/2014/main" id="{EB22DEAC-CC74-434C-B1CA-905C895CA253}"/>
               </a:ext>
             </a:extLst>
           </p:cNvPr>
@@ -35665,7 +35665,7 @@
           <p:cNvPr id="86" name="c2-label">
             <a:extLst xmlns:a="http://schemas.openxmlformats.org/drawingml/2006/main">
               <a:ext uri="{FF2B5EF4-FFF2-40B4-BE49-F238E27FC236}">
-                <a16:creationId xmlns:a16="http://schemas.microsoft.com/office/drawing/2014/main" id="{6DB50D77-FF41-408C-AE6E-70251B438669}"/>
+                <a16:creationId xmlns:a16="http://schemas.microsoft.com/office/drawing/2014/main" id="{43C83199-9B0A-4E6F-B665-EC0458F6C9EA}"/>
               </a:ext>
             </a:extLst>
           </p:cNvPr>
@@ -35727,7 +35727,7 @@
           <p:cNvPr id="87" name="c2-note">
             <a:extLst xmlns:a="http://schemas.openxmlformats.org/drawingml/2006/main">
               <a:ext uri="{FF2B5EF4-FFF2-40B4-BE49-F238E27FC236}">
-                <a16:creationId xmlns:a16="http://schemas.microsoft.com/office/drawing/2014/main" id="{4B4C30B7-B9DA-4BDF-8A5B-485F48CCAE63}"/>
+                <a16:creationId xmlns:a16="http://schemas.microsoft.com/office/drawing/2014/main" id="{7C0FD096-40EC-4E36-B80E-AACA93F787DF}"/>
               </a:ext>
             </a:extLst>
           </p:cNvPr>
@@ -35763,7 +35763,7 @@
           <p:cNvPr id="88" name="c2-bar">
             <a:extLst xmlns:a="http://schemas.openxmlformats.org/drawingml/2006/main">
               <a:ext uri="{FF2B5EF4-FFF2-40B4-BE49-F238E27FC236}">
-                <a16:creationId xmlns:a16="http://schemas.microsoft.com/office/drawing/2014/main" id="{1D61CE3D-4B13-4858-94F1-F3F40B296D42}"/>
+                <a16:creationId xmlns:a16="http://schemas.microsoft.com/office/drawing/2014/main" id="{55245911-2250-4CD8-B9B1-B254D2F7ABD3}"/>
               </a:ext>
             </a:extLst>
           </p:cNvPr>
@@ -35794,7 +35794,7 @@
           <p:cNvPr id="89" name="c2-ci">
             <a:extLst xmlns:a="http://schemas.openxmlformats.org/drawingml/2006/main">
               <a:ext uri="{FF2B5EF4-FFF2-40B4-BE49-F238E27FC236}">
-                <a16:creationId xmlns:a16="http://schemas.microsoft.com/office/drawing/2014/main" id="{75CC7A2A-5930-4DCB-9D2C-C3DECD7C0D3A}"/>
+                <a16:creationId xmlns:a16="http://schemas.microsoft.com/office/drawing/2014/main" id="{00D7BF18-5892-4AAB-BC34-6DE8A486E60D}"/>
               </a:ext>
             </a:extLst>
           </p:cNvPr>
@@ -35825,7 +35825,7 @@
           <p:cNvPr id="90" name="c2-cil">
             <a:extLst xmlns:a="http://schemas.openxmlformats.org/drawingml/2006/main">
               <a:ext uri="{FF2B5EF4-FFF2-40B4-BE49-F238E27FC236}">
-                <a16:creationId xmlns:a16="http://schemas.microsoft.com/office/drawing/2014/main" id="{679DA36D-5E2E-45A2-9F08-4632EE0C8E9C}"/>
+                <a16:creationId xmlns:a16="http://schemas.microsoft.com/office/drawing/2014/main" id="{757B7C92-A9AC-4B69-856C-8756BE025CDD}"/>
               </a:ext>
             </a:extLst>
           </p:cNvPr>
@@ -35856,7 +35856,7 @@
           <p:cNvPr id="91" name="c2-cih">
             <a:extLst xmlns:a="http://schemas.openxmlformats.org/drawingml/2006/main">
               <a:ext uri="{FF2B5EF4-FFF2-40B4-BE49-F238E27FC236}">
-                <a16:creationId xmlns:a16="http://schemas.microsoft.com/office/drawing/2014/main" id="{5F375B0D-6AF8-4BF8-BA34-B17AFFE71F8F}"/>
+                <a16:creationId xmlns:a16="http://schemas.microsoft.com/office/drawing/2014/main" id="{12F947DE-E8BE-4959-B96F-8BF2CAA12EBC}"/>
               </a:ext>
             </a:extLst>
           </p:cNvPr>
@@ -35887,7 +35887,7 @@
           <p:cNvPr id="92" name="c3-label">
             <a:extLst xmlns:a="http://schemas.openxmlformats.org/drawingml/2006/main">
               <a:ext uri="{FF2B5EF4-FFF2-40B4-BE49-F238E27FC236}">
-                <a16:creationId xmlns:a16="http://schemas.microsoft.com/office/drawing/2014/main" id="{AB15B56C-AEFD-4862-AC2A-9DAFBD95B556}"/>
+                <a16:creationId xmlns:a16="http://schemas.microsoft.com/office/drawing/2014/main" id="{D7DABE27-1AE9-4525-834C-1B2D5DD03953}"/>
               </a:ext>
             </a:extLst>
           </p:cNvPr>
@@ -35949,7 +35949,7 @@
           <p:cNvPr id="93" name="c3-note">
             <a:extLst xmlns:a="http://schemas.openxmlformats.org/drawingml/2006/main">
               <a:ext uri="{FF2B5EF4-FFF2-40B4-BE49-F238E27FC236}">
-                <a16:creationId xmlns:a16="http://schemas.microsoft.com/office/drawing/2014/main" id="{82A07529-BB89-4C86-ADC8-E2D90B49AE49}"/>
+                <a16:creationId xmlns:a16="http://schemas.microsoft.com/office/drawing/2014/main" id="{AB2CF651-4E61-42A9-BD7B-7712478CBC3B}"/>
               </a:ext>
             </a:extLst>
           </p:cNvPr>
@@ -35985,7 +35985,7 @@
           <p:cNvPr id="94" name="c3-bar">
             <a:extLst xmlns:a="http://schemas.openxmlformats.org/drawingml/2006/main">
               <a:ext uri="{FF2B5EF4-FFF2-40B4-BE49-F238E27FC236}">
-                <a16:creationId xmlns:a16="http://schemas.microsoft.com/office/drawing/2014/main" id="{7EAB08D2-721C-4A7B-9F8B-09CA5DFE1267}"/>
+                <a16:creationId xmlns:a16="http://schemas.microsoft.com/office/drawing/2014/main" id="{9165014A-7C72-457F-BD4C-F3EC0A89D02A}"/>
               </a:ext>
             </a:extLst>
           </p:cNvPr>
@@ -36016,7 +36016,7 @@
           <p:cNvPr id="95" name="c3-ci">
             <a:extLst xmlns:a="http://schemas.openxmlformats.org/drawingml/2006/main">
               <a:ext uri="{FF2B5EF4-FFF2-40B4-BE49-F238E27FC236}">
-                <a16:creationId xmlns:a16="http://schemas.microsoft.com/office/drawing/2014/main" id="{A6EBADFC-F1F2-4E46-AEE1-13617B4BD36A}"/>
+                <a16:creationId xmlns:a16="http://schemas.microsoft.com/office/drawing/2014/main" id="{52727D2C-B4BE-49FE-AB20-C618708684E9}"/>
               </a:ext>
             </a:extLst>
           </p:cNvPr>
@@ -36047,7 +36047,7 @@
           <p:cNvPr id="96" name="c3-cil">
             <a:extLst xmlns:a="http://schemas.openxmlformats.org/drawingml/2006/main">
               <a:ext uri="{FF2B5EF4-FFF2-40B4-BE49-F238E27FC236}">
-                <a16:creationId xmlns:a16="http://schemas.microsoft.com/office/drawing/2014/main" id="{4119E1B6-E604-448C-95DA-26EBAF4CD937}"/>
+                <a16:creationId xmlns:a16="http://schemas.microsoft.com/office/drawing/2014/main" id="{90B0BC57-C62E-4C21-84D8-3334A3CCDAA5}"/>
               </a:ext>
             </a:extLst>
           </p:cNvPr>
@@ -36078,7 +36078,7 @@
           <p:cNvPr id="97" name="c3-cih">
             <a:extLst xmlns:a="http://schemas.openxmlformats.org/drawingml/2006/main">
               <a:ext uri="{FF2B5EF4-FFF2-40B4-BE49-F238E27FC236}">
-                <a16:creationId xmlns:a16="http://schemas.microsoft.com/office/drawing/2014/main" id="{BB839A9A-3DDD-4E99-BA74-411CFE354661}"/>
+                <a16:creationId xmlns:a16="http://schemas.microsoft.com/office/drawing/2014/main" id="{02EA4039-5A56-43C0-A442-88E13C5D3ABE}"/>
               </a:ext>
             </a:extLst>
           </p:cNvPr>
@@ -36109,7 +36109,7 @@
           <p:cNvPr id="98" name="c4-label">
             <a:extLst xmlns:a="http://schemas.openxmlformats.org/drawingml/2006/main">
               <a:ext uri="{FF2B5EF4-FFF2-40B4-BE49-F238E27FC236}">
-                <a16:creationId xmlns:a16="http://schemas.microsoft.com/office/drawing/2014/main" id="{60C9D0F9-DD17-412A-92B0-252ACC3A0652}"/>
+                <a16:creationId xmlns:a16="http://schemas.microsoft.com/office/drawing/2014/main" id="{27BD5A39-A186-4ACF-B264-F61A156952A3}"/>
               </a:ext>
             </a:extLst>
           </p:cNvPr>
@@ -36171,7 +36171,7 @@
           <p:cNvPr id="99" name="c4-note">
             <a:extLst xmlns:a="http://schemas.openxmlformats.org/drawingml/2006/main">
               <a:ext uri="{FF2B5EF4-FFF2-40B4-BE49-F238E27FC236}">
-                <a16:creationId xmlns:a16="http://schemas.microsoft.com/office/drawing/2014/main" id="{A844E63B-2380-4FF0-A5BA-4E938F1FC57D}"/>
+                <a16:creationId xmlns:a16="http://schemas.microsoft.com/office/drawing/2014/main" id="{725C8E96-5DD3-412D-8CF6-BEED03B4A09E}"/>
               </a:ext>
             </a:extLst>
           </p:cNvPr>
@@ -36207,7 +36207,7 @@
           <p:cNvPr id="100" name="c4-bar">
             <a:extLst xmlns:a="http://schemas.openxmlformats.org/drawingml/2006/main">
               <a:ext uri="{FF2B5EF4-FFF2-40B4-BE49-F238E27FC236}">
-                <a16:creationId xmlns:a16="http://schemas.microsoft.com/office/drawing/2014/main" id="{36C8A7DE-E5AD-48D6-AE75-6202FA4F48A6}"/>
+                <a16:creationId xmlns:a16="http://schemas.microsoft.com/office/drawing/2014/main" id="{00544E4C-67ED-429C-BB61-F81D164CF8E5}"/>
               </a:ext>
             </a:extLst>
           </p:cNvPr>
@@ -36238,7 +36238,7 @@
           <p:cNvPr id="101" name="c4-ci">
             <a:extLst xmlns:a="http://schemas.openxmlformats.org/drawingml/2006/main">
               <a:ext uri="{FF2B5EF4-FFF2-40B4-BE49-F238E27FC236}">
-                <a16:creationId xmlns:a16="http://schemas.microsoft.com/office/drawing/2014/main" id="{90FF6C1F-A938-481F-BCB5-8C40DF8AC9AD}"/>
+                <a16:creationId xmlns:a16="http://schemas.microsoft.com/office/drawing/2014/main" id="{3CEA134B-93CD-4C47-BE5A-B132E2BEBB03}"/>
               </a:ext>
             </a:extLst>
           </p:cNvPr>
@@ -36269,7 +36269,7 @@
           <p:cNvPr id="102" name="c4-cil">
             <a:extLst xmlns:a="http://schemas.openxmlformats.org/drawingml/2006/main">
               <a:ext uri="{FF2B5EF4-FFF2-40B4-BE49-F238E27FC236}">
-                <a16:creationId xmlns:a16="http://schemas.microsoft.com/office/drawing/2014/main" id="{A71CE3D8-32D7-4C5E-B657-07115FC092BD}"/>
+                <a16:creationId xmlns:a16="http://schemas.microsoft.com/office/drawing/2014/main" id="{A3548220-6A8E-438D-8A7A-F667C5539E77}"/>
               </a:ext>
             </a:extLst>
           </p:cNvPr>
@@ -36300,7 +36300,7 @@
           <p:cNvPr id="103" name="c4-cih">
             <a:extLst xmlns:a="http://schemas.openxmlformats.org/drawingml/2006/main">
               <a:ext uri="{FF2B5EF4-FFF2-40B4-BE49-F238E27FC236}">
-                <a16:creationId xmlns:a16="http://schemas.microsoft.com/office/drawing/2014/main" id="{6F3BC06B-BE98-4C7C-B768-0AC2EEF93FA8}"/>
+                <a16:creationId xmlns:a16="http://schemas.microsoft.com/office/drawing/2014/main" id="{1CFA72A0-DE0C-4553-B0C2-937F58B88271}"/>
               </a:ext>
             </a:extLst>
           </p:cNvPr>
@@ -36331,7 +36331,7 @@
           <p:cNvPr id="104" name="c5-label">
             <a:extLst xmlns:a="http://schemas.openxmlformats.org/drawingml/2006/main">
               <a:ext uri="{FF2B5EF4-FFF2-40B4-BE49-F238E27FC236}">
-                <a16:creationId xmlns:a16="http://schemas.microsoft.com/office/drawing/2014/main" id="{85AA09F3-E46F-422A-96D3-061D1DBC1A85}"/>
+                <a16:creationId xmlns:a16="http://schemas.microsoft.com/office/drawing/2014/main" id="{51C8A88F-86CF-4683-823E-4653BC70D083}"/>
               </a:ext>
             </a:extLst>
           </p:cNvPr>
@@ -36393,7 +36393,7 @@
           <p:cNvPr id="105" name="c5-note">
             <a:extLst xmlns:a="http://schemas.openxmlformats.org/drawingml/2006/main">
               <a:ext uri="{FF2B5EF4-FFF2-40B4-BE49-F238E27FC236}">
-                <a16:creationId xmlns:a16="http://schemas.microsoft.com/office/drawing/2014/main" id="{40A44BA9-6FCB-4BE3-8E99-7ADD707AE332}"/>
+                <a16:creationId xmlns:a16="http://schemas.microsoft.com/office/drawing/2014/main" id="{DA194E67-4850-4BD8-AC3F-45C953623944}"/>
               </a:ext>
             </a:extLst>
           </p:cNvPr>
@@ -36429,7 +36429,7 @@
           <p:cNvPr id="106" name="c5-bar">
             <a:extLst xmlns:a="http://schemas.openxmlformats.org/drawingml/2006/main">
               <a:ext uri="{FF2B5EF4-FFF2-40B4-BE49-F238E27FC236}">
-                <a16:creationId xmlns:a16="http://schemas.microsoft.com/office/drawing/2014/main" id="{06E7B08A-ECAE-43DC-900C-69C1970F7581}"/>
+                <a16:creationId xmlns:a16="http://schemas.microsoft.com/office/drawing/2014/main" id="{C705B5FA-CFE3-4A13-9A69-F39A0CAA9177}"/>
               </a:ext>
             </a:extLst>
           </p:cNvPr>
@@ -36460,7 +36460,7 @@
           <p:cNvPr id="107" name="c5-ci">
             <a:extLst xmlns:a="http://schemas.openxmlformats.org/drawingml/2006/main">
               <a:ext uri="{FF2B5EF4-FFF2-40B4-BE49-F238E27FC236}">
-                <a16:creationId xmlns:a16="http://schemas.microsoft.com/office/drawing/2014/main" id="{A305E27D-974B-4C39-ACFE-584974EDA1C0}"/>
+                <a16:creationId xmlns:a16="http://schemas.microsoft.com/office/drawing/2014/main" id="{F87CC460-9999-4F85-AEC8-17D3BE918109}"/>
               </a:ext>
             </a:extLst>
           </p:cNvPr>
@@ -36491,7 +36491,7 @@
           <p:cNvPr id="108" name="c5-cil">
             <a:extLst xmlns:a="http://schemas.openxmlformats.org/drawingml/2006/main">
               <a:ext uri="{FF2B5EF4-FFF2-40B4-BE49-F238E27FC236}">
-                <a16:creationId xmlns:a16="http://schemas.microsoft.com/office/drawing/2014/main" id="{7EEB0F11-8F8A-4FFB-BD0B-2A638BAC9D4D}"/>
+                <a16:creationId xmlns:a16="http://schemas.microsoft.com/office/drawing/2014/main" id="{70C81D91-D3AF-4C79-98B2-62134C74FE7C}"/>
               </a:ext>
             </a:extLst>
           </p:cNvPr>
@@ -36522,7 +36522,7 @@
           <p:cNvPr id="109" name="c5-cih">
             <a:extLst xmlns:a="http://schemas.openxmlformats.org/drawingml/2006/main">
               <a:ext uri="{FF2B5EF4-FFF2-40B4-BE49-F238E27FC236}">
-                <a16:creationId xmlns:a16="http://schemas.microsoft.com/office/drawing/2014/main" id="{19E41230-1D1C-46BD-A942-33F3A5868814}"/>
+                <a16:creationId xmlns:a16="http://schemas.microsoft.com/office/drawing/2014/main" id="{3C9DA4B0-37F9-4C37-80B0-F7C61297E8DD}"/>
               </a:ext>
             </a:extLst>
           </p:cNvPr>
@@ -36553,7 +36553,7 @@
           <p:cNvPr id="110" name="c6-label">
             <a:extLst xmlns:a="http://schemas.openxmlformats.org/drawingml/2006/main">
               <a:ext uri="{FF2B5EF4-FFF2-40B4-BE49-F238E27FC236}">
-                <a16:creationId xmlns:a16="http://schemas.microsoft.com/office/drawing/2014/main" id="{B4C5520C-B47E-4250-B919-EC85CDD48C3B}"/>
+                <a16:creationId xmlns:a16="http://schemas.microsoft.com/office/drawing/2014/main" id="{D5060AC2-3B66-46B3-B10B-A48805E8971E}"/>
               </a:ext>
             </a:extLst>
           </p:cNvPr>
@@ -36615,7 +36615,7 @@
           <p:cNvPr id="111" name="c6-note">
             <a:extLst xmlns:a="http://schemas.openxmlformats.org/drawingml/2006/main">
               <a:ext uri="{FF2B5EF4-FFF2-40B4-BE49-F238E27FC236}">
-                <a16:creationId xmlns:a16="http://schemas.microsoft.com/office/drawing/2014/main" id="{5C4530B5-F098-42D2-A177-18B6A2BC4355}"/>
+                <a16:creationId xmlns:a16="http://schemas.microsoft.com/office/drawing/2014/main" id="{A4578AF7-506E-4235-8988-79BE9CB8D7B5}"/>
               </a:ext>
             </a:extLst>
           </p:cNvPr>
@@ -36651,7 +36651,7 @@
           <p:cNvPr id="112" name="c6-bar">
             <a:extLst xmlns:a="http://schemas.openxmlformats.org/drawingml/2006/main">
               <a:ext uri="{FF2B5EF4-FFF2-40B4-BE49-F238E27FC236}">
-                <a16:creationId xmlns:a16="http://schemas.microsoft.com/office/drawing/2014/main" id="{833A1A49-8BFC-4769-8ED1-A68DC8F67768}"/>
+                <a16:creationId xmlns:a16="http://schemas.microsoft.com/office/drawing/2014/main" id="{1423D180-C678-48D0-A8D3-CBE193039784}"/>
               </a:ext>
             </a:extLst>
           </p:cNvPr>
@@ -36682,7 +36682,7 @@
           <p:cNvPr id="113" name="c6-ci">
             <a:extLst xmlns:a="http://schemas.openxmlformats.org/drawingml/2006/main">
               <a:ext uri="{FF2B5EF4-FFF2-40B4-BE49-F238E27FC236}">
-                <a16:creationId xmlns:a16="http://schemas.microsoft.com/office/drawing/2014/main" id="{6DB57738-73BC-41BE-ABCD-EBA664BC54B3}"/>
+                <a16:creationId xmlns:a16="http://schemas.microsoft.com/office/drawing/2014/main" id="{F82EA161-90F8-41A8-B9B4-90CC8D77144E}"/>
               </a:ext>
             </a:extLst>
           </p:cNvPr>
@@ -36713,7 +36713,7 @@
           <p:cNvPr id="114" name="c6-cil">
             <a:extLst xmlns:a="http://schemas.openxmlformats.org/drawingml/2006/main">
               <a:ext uri="{FF2B5EF4-FFF2-40B4-BE49-F238E27FC236}">
-                <a16:creationId xmlns:a16="http://schemas.microsoft.com/office/drawing/2014/main" id="{47F3DEBE-3710-4D38-AF37-E2C1126A684D}"/>
+                <a16:creationId xmlns:a16="http://schemas.microsoft.com/office/drawing/2014/main" id="{EDEDAF6A-DF2E-4457-8B22-90C827C60015}"/>
               </a:ext>
             </a:extLst>
           </p:cNvPr>
@@ -36744,7 +36744,7 @@
           <p:cNvPr id="115" name="c6-cih">
             <a:extLst xmlns:a="http://schemas.openxmlformats.org/drawingml/2006/main">
               <a:ext uri="{FF2B5EF4-FFF2-40B4-BE49-F238E27FC236}">
-                <a16:creationId xmlns:a16="http://schemas.microsoft.com/office/drawing/2014/main" id="{6CE52229-661F-443F-A47E-3946B92F58C9}"/>
+                <a16:creationId xmlns:a16="http://schemas.microsoft.com/office/drawing/2014/main" id="{9FBB832E-8A06-4527-BFE6-944520CCCC1F}"/>
               </a:ext>
             </a:extLst>
           </p:cNvPr>
@@ -36775,7 +36775,7 @@
           <p:cNvPr id="116" name="c7-label">
             <a:extLst xmlns:a="http://schemas.openxmlformats.org/drawingml/2006/main">
               <a:ext uri="{FF2B5EF4-FFF2-40B4-BE49-F238E27FC236}">
-                <a16:creationId xmlns:a16="http://schemas.microsoft.com/office/drawing/2014/main" id="{CE2C37CB-7C3E-4B5C-BC5F-3DC8D84EF404}"/>
+                <a16:creationId xmlns:a16="http://schemas.microsoft.com/office/drawing/2014/main" id="{D02CF8B4-66EA-44E0-A09C-F842C083CE77}"/>
               </a:ext>
             </a:extLst>
           </p:cNvPr>
@@ -36837,7 +36837,7 @@
           <p:cNvPr id="117" name="c7-note">
             <a:extLst xmlns:a="http://schemas.openxmlformats.org/drawingml/2006/main">
               <a:ext uri="{FF2B5EF4-FFF2-40B4-BE49-F238E27FC236}">
-                <a16:creationId xmlns:a16="http://schemas.microsoft.com/office/drawing/2014/main" id="{D47A701F-4E22-4C3B-A84C-E0C0D9DEBD5E}"/>
+                <a16:creationId xmlns:a16="http://schemas.microsoft.com/office/drawing/2014/main" id="{2E95E94A-EB3B-4991-911B-F01E49F261E0}"/>
               </a:ext>
             </a:extLst>
           </p:cNvPr>
@@ -36873,7 +36873,7 @@
           <p:cNvPr id="118" name="c7-bar">
             <a:extLst xmlns:a="http://schemas.openxmlformats.org/drawingml/2006/main">
               <a:ext uri="{FF2B5EF4-FFF2-40B4-BE49-F238E27FC236}">
-                <a16:creationId xmlns:a16="http://schemas.microsoft.com/office/drawing/2014/main" id="{103634B0-050A-449D-BD41-5493CB276C49}"/>
+                <a16:creationId xmlns:a16="http://schemas.microsoft.com/office/drawing/2014/main" id="{41331F7D-173B-41EA-8179-156FD00CABD0}"/>
               </a:ext>
             </a:extLst>
           </p:cNvPr>
@@ -36904,7 +36904,7 @@
           <p:cNvPr id="119" name="c7-ci">
             <a:extLst xmlns:a="http://schemas.openxmlformats.org/drawingml/2006/main">
               <a:ext uri="{FF2B5EF4-FFF2-40B4-BE49-F238E27FC236}">
-                <a16:creationId xmlns:a16="http://schemas.microsoft.com/office/drawing/2014/main" id="{D5500578-E4FA-4055-870B-9ABFE82D1F9B}"/>
+                <a16:creationId xmlns:a16="http://schemas.microsoft.com/office/drawing/2014/main" id="{B3B53C22-A190-4726-8DF6-06F4599BF04C}"/>
               </a:ext>
             </a:extLst>
           </p:cNvPr>
@@ -36935,7 +36935,7 @@
           <p:cNvPr id="120" name="c7-cil">
             <a:extLst xmlns:a="http://schemas.openxmlformats.org/drawingml/2006/main">
               <a:ext uri="{FF2B5EF4-FFF2-40B4-BE49-F238E27FC236}">
-                <a16:creationId xmlns:a16="http://schemas.microsoft.com/office/drawing/2014/main" id="{669AE7B4-A696-4EDF-8071-7C3B30B35F4E}"/>
+                <a16:creationId xmlns:a16="http://schemas.microsoft.com/office/drawing/2014/main" id="{4ABE0B38-1217-4A1F-9AA6-21203BCBC1E6}"/>
               </a:ext>
             </a:extLst>
           </p:cNvPr>
@@ -36966,7 +36966,7 @@
           <p:cNvPr id="121" name="c7-cih">
             <a:extLst xmlns:a="http://schemas.openxmlformats.org/drawingml/2006/main">
               <a:ext uri="{FF2B5EF4-FFF2-40B4-BE49-F238E27FC236}">
-                <a16:creationId xmlns:a16="http://schemas.microsoft.com/office/drawing/2014/main" id="{4AF5D40B-9325-4B8B-A668-E605A758259A}"/>
+                <a16:creationId xmlns:a16="http://schemas.microsoft.com/office/drawing/2014/main" id="{7B9F4151-4A74-4F15-A97D-E09D65841A97}"/>
               </a:ext>
             </a:extLst>
           </p:cNvPr>
@@ -36997,7 +36997,7 @@
           <p:cNvPr id="122" name="c8-label">
             <a:extLst xmlns:a="http://schemas.openxmlformats.org/drawingml/2006/main">
               <a:ext uri="{FF2B5EF4-FFF2-40B4-BE49-F238E27FC236}">
-                <a16:creationId xmlns:a16="http://schemas.microsoft.com/office/drawing/2014/main" id="{F04DED6E-8E54-4799-8174-3904E0A9472F}"/>
+                <a16:creationId xmlns:a16="http://schemas.microsoft.com/office/drawing/2014/main" id="{9441A92C-BCC5-47C3-9AB7-ED1DA1B03F13}"/>
               </a:ext>
             </a:extLst>
           </p:cNvPr>
@@ -37059,7 +37059,7 @@
           <p:cNvPr id="123" name="c8-note">
             <a:extLst xmlns:a="http://schemas.openxmlformats.org/drawingml/2006/main">
               <a:ext uri="{FF2B5EF4-FFF2-40B4-BE49-F238E27FC236}">
-                <a16:creationId xmlns:a16="http://schemas.microsoft.com/office/drawing/2014/main" id="{759A09C5-7AEE-4717-805E-133452F094DC}"/>
+                <a16:creationId xmlns:a16="http://schemas.microsoft.com/office/drawing/2014/main" id="{745A8AC0-D041-4FDA-8BDF-22A149A63A65}"/>
               </a:ext>
             </a:extLst>
           </p:cNvPr>
@@ -37095,7 +37095,7 @@
           <p:cNvPr id="124" name="c8-bar">
             <a:extLst xmlns:a="http://schemas.openxmlformats.org/drawingml/2006/main">
               <a:ext uri="{FF2B5EF4-FFF2-40B4-BE49-F238E27FC236}">
-                <a16:creationId xmlns:a16="http://schemas.microsoft.com/office/drawing/2014/main" id="{6EE759DC-DE6E-430E-AE4A-BDA2303073F1}"/>
+                <a16:creationId xmlns:a16="http://schemas.microsoft.com/office/drawing/2014/main" id="{7B533939-547E-4D37-A2A7-ED590CD704A5}"/>
               </a:ext>
             </a:extLst>
           </p:cNvPr>
@@ -37126,7 +37126,7 @@
           <p:cNvPr id="125" name="c8-ci">
             <a:extLst xmlns:a="http://schemas.openxmlformats.org/drawingml/2006/main">
               <a:ext uri="{FF2B5EF4-FFF2-40B4-BE49-F238E27FC236}">
-                <a16:creationId xmlns:a16="http://schemas.microsoft.com/office/drawing/2014/main" id="{D428F25C-588A-479C-93BE-AEF0CC491B49}"/>
+                <a16:creationId xmlns:a16="http://schemas.microsoft.com/office/drawing/2014/main" id="{28CEF150-A927-4366-B39A-101908980C1A}"/>
               </a:ext>
             </a:extLst>
           </p:cNvPr>
@@ -37157,7 +37157,7 @@
           <p:cNvPr id="126" name="c8-cil">
             <a:extLst xmlns:a="http://schemas.openxmlformats.org/drawingml/2006/main">
               <a:ext uri="{FF2B5EF4-FFF2-40B4-BE49-F238E27FC236}">
-                <a16:creationId xmlns:a16="http://schemas.microsoft.com/office/drawing/2014/main" id="{1E6621BF-E6E7-4C42-9719-247AEAFF5DD9}"/>
+                <a16:creationId xmlns:a16="http://schemas.microsoft.com/office/drawing/2014/main" id="{E5254116-20F0-485A-B5FD-ACEA3FC612F0}"/>
               </a:ext>
             </a:extLst>
           </p:cNvPr>
@@ -37188,7 +37188,7 @@
           <p:cNvPr id="127" name="c8-cih">
             <a:extLst xmlns:a="http://schemas.openxmlformats.org/drawingml/2006/main">
               <a:ext uri="{FF2B5EF4-FFF2-40B4-BE49-F238E27FC236}">
-                <a16:creationId xmlns:a16="http://schemas.microsoft.com/office/drawing/2014/main" id="{CE2C378D-97FD-4CEC-8A63-F4159FDE7116}"/>
+                <a16:creationId xmlns:a16="http://schemas.microsoft.com/office/drawing/2014/main" id="{4837897E-EE6F-4A62-B23D-36CF8E0C60D6}"/>
               </a:ext>
             </a:extLst>
           </p:cNvPr>
@@ -37219,7 +37219,7 @@
           <p:cNvPr id="128" name="sec-c-chip">
             <a:extLst xmlns:a="http://schemas.openxmlformats.org/drawingml/2006/main">
               <a:ext uri="{FF2B5EF4-FFF2-40B4-BE49-F238E27FC236}">
-                <a16:creationId xmlns:a16="http://schemas.microsoft.com/office/drawing/2014/main" id="{AB358BC2-3FD8-48CC-86C3-F028CE62274F}"/>
+                <a16:creationId xmlns:a16="http://schemas.microsoft.com/office/drawing/2014/main" id="{B2EF3B0F-82DF-418C-8071-CC98234F9CE4}"/>
               </a:ext>
             </a:extLst>
           </p:cNvPr>
@@ -37254,7 +37254,7 @@
           <p:cNvPr id="129" name="sec-c-chip-text">
             <a:extLst xmlns:a="http://schemas.openxmlformats.org/drawingml/2006/main">
               <a:ext uri="{FF2B5EF4-FFF2-40B4-BE49-F238E27FC236}">
-                <a16:creationId xmlns:a16="http://schemas.microsoft.com/office/drawing/2014/main" id="{463D931B-367F-4CC9-9D46-739E7BF5262F}"/>
+                <a16:creationId xmlns:a16="http://schemas.microsoft.com/office/drawing/2014/main" id="{AE019A60-E2B8-44AC-B1B2-52A1D5E9FC18}"/>
               </a:ext>
             </a:extLst>
           </p:cNvPr>
@@ -37316,7 +37316,7 @@
           <p:cNvPr id="130" name="sec-c">
             <a:extLst xmlns:a="http://schemas.openxmlformats.org/drawingml/2006/main">
               <a:ext uri="{FF2B5EF4-FFF2-40B4-BE49-F238E27FC236}">
-                <a16:creationId xmlns:a16="http://schemas.microsoft.com/office/drawing/2014/main" id="{0FFD275C-9A7F-48EF-94BE-F2CFBE343F1A}"/>
+                <a16:creationId xmlns:a16="http://schemas.microsoft.com/office/drawing/2014/main" id="{D08D91DB-4D11-4FBA-824B-4107948E5E8B}"/>
               </a:ext>
             </a:extLst>
           </p:cNvPr>
@@ -37378,7 +37378,7 @@
           <p:cNvPr id="131" name="sec-c-sub">
             <a:extLst xmlns:a="http://schemas.openxmlformats.org/drawingml/2006/main">
               <a:ext uri="{FF2B5EF4-FFF2-40B4-BE49-F238E27FC236}">
-                <a16:creationId xmlns:a16="http://schemas.microsoft.com/office/drawing/2014/main" id="{43DBCFB6-1653-493D-80AF-DB2685580149}"/>
+                <a16:creationId xmlns:a16="http://schemas.microsoft.com/office/drawing/2014/main" id="{131098D4-1902-4D2B-9FAE-CA4A98A4088D}"/>
               </a:ext>
             </a:extLst>
           </p:cNvPr>
@@ -37440,7 +37440,7 @@
           <p:cNvPr id="132" name="s-zero">
             <a:extLst xmlns:a="http://schemas.openxmlformats.org/drawingml/2006/main">
               <a:ext uri="{FF2B5EF4-FFF2-40B4-BE49-F238E27FC236}">
-                <a16:creationId xmlns:a16="http://schemas.microsoft.com/office/drawing/2014/main" id="{D28DD3B9-10A6-4B85-90E9-78E46B74AE44}"/>
+                <a16:creationId xmlns:a16="http://schemas.microsoft.com/office/drawing/2014/main" id="{D18B39EB-41ED-4DB9-912F-6CEDE7FE5E11}"/>
               </a:ext>
             </a:extLst>
           </p:cNvPr>
@@ -37471,7 +37471,7 @@
           <p:cNvPr id="133" name="s-scale">
             <a:extLst xmlns:a="http://schemas.openxmlformats.org/drawingml/2006/main">
               <a:ext uri="{FF2B5EF4-FFF2-40B4-BE49-F238E27FC236}">
-                <a16:creationId xmlns:a16="http://schemas.microsoft.com/office/drawing/2014/main" id="{8723068E-9317-42E4-977B-B88F8F0B5CC5}"/>
+                <a16:creationId xmlns:a16="http://schemas.microsoft.com/office/drawing/2014/main" id="{74D0C123-B05D-4056-AB91-72B2649D831E}"/>
               </a:ext>
             </a:extLst>
           </p:cNvPr>
@@ -37502,7 +37502,7 @@
           <p:cNvPr id="134" name="s-grid-0">
             <a:extLst xmlns:a="http://schemas.openxmlformats.org/drawingml/2006/main">
               <a:ext uri="{FF2B5EF4-FFF2-40B4-BE49-F238E27FC236}">
-                <a16:creationId xmlns:a16="http://schemas.microsoft.com/office/drawing/2014/main" id="{FC3252AD-578F-47DD-8118-721325CFA837}"/>
+                <a16:creationId xmlns:a16="http://schemas.microsoft.com/office/drawing/2014/main" id="{ED026DFB-C86D-40A1-BB03-73DB2C7374B6}"/>
               </a:ext>
             </a:extLst>
           </p:cNvPr>
@@ -37533,7 +37533,7 @@
           <p:cNvPr id="135" name="s-lab-0">
             <a:extLst xmlns:a="http://schemas.openxmlformats.org/drawingml/2006/main">
               <a:ext uri="{FF2B5EF4-FFF2-40B4-BE49-F238E27FC236}">
-                <a16:creationId xmlns:a16="http://schemas.microsoft.com/office/drawing/2014/main" id="{F27599F5-214F-48C0-95E9-B90A9AF9E2DE}"/>
+                <a16:creationId xmlns:a16="http://schemas.microsoft.com/office/drawing/2014/main" id="{31EF31BD-6E59-4763-A2C9-03287B5EA47E}"/>
               </a:ext>
             </a:extLst>
           </p:cNvPr>
@@ -37595,7 +37595,7 @@
           <p:cNvPr id="136" name="s-grid-1">
             <a:extLst xmlns:a="http://schemas.openxmlformats.org/drawingml/2006/main">
               <a:ext uri="{FF2B5EF4-FFF2-40B4-BE49-F238E27FC236}">
-                <a16:creationId xmlns:a16="http://schemas.microsoft.com/office/drawing/2014/main" id="{A95FE55F-0E78-43AA-B152-6B789298CFF9}"/>
+                <a16:creationId xmlns:a16="http://schemas.microsoft.com/office/drawing/2014/main" id="{B92791C3-2901-4010-B6A8-E8B5C87DA5B7}"/>
               </a:ext>
             </a:extLst>
           </p:cNvPr>
@@ -37626,7 +37626,7 @@
           <p:cNvPr id="137" name="s-lab-1">
             <a:extLst xmlns:a="http://schemas.openxmlformats.org/drawingml/2006/main">
               <a:ext uri="{FF2B5EF4-FFF2-40B4-BE49-F238E27FC236}">
-                <a16:creationId xmlns:a16="http://schemas.microsoft.com/office/drawing/2014/main" id="{55B7C44E-2560-4B68-A8C6-4DD1339960BD}"/>
+                <a16:creationId xmlns:a16="http://schemas.microsoft.com/office/drawing/2014/main" id="{2F460514-F187-4789-8C38-FB85402221B8}"/>
               </a:ext>
             </a:extLst>
           </p:cNvPr>
@@ -37688,7 +37688,7 @@
           <p:cNvPr id="138" name="s-grid-2">
             <a:extLst xmlns:a="http://schemas.openxmlformats.org/drawingml/2006/main">
               <a:ext uri="{FF2B5EF4-FFF2-40B4-BE49-F238E27FC236}">
-                <a16:creationId xmlns:a16="http://schemas.microsoft.com/office/drawing/2014/main" id="{C12B458F-EA03-4676-A45B-53ED0175C040}"/>
+                <a16:creationId xmlns:a16="http://schemas.microsoft.com/office/drawing/2014/main" id="{DB2AAF5E-27A4-4CEE-A2A5-928128C5AD44}"/>
               </a:ext>
             </a:extLst>
           </p:cNvPr>
@@ -37719,7 +37719,7 @@
           <p:cNvPr id="139" name="s-lab-2">
             <a:extLst xmlns:a="http://schemas.openxmlformats.org/drawingml/2006/main">
               <a:ext uri="{FF2B5EF4-FFF2-40B4-BE49-F238E27FC236}">
-                <a16:creationId xmlns:a16="http://schemas.microsoft.com/office/drawing/2014/main" id="{F37FB015-3649-4717-ABAA-1751AE358AEA}"/>
+                <a16:creationId xmlns:a16="http://schemas.microsoft.com/office/drawing/2014/main" id="{C67609A7-3245-4C4E-BFB7-3767EC4DA269}"/>
               </a:ext>
             </a:extLst>
           </p:cNvPr>
@@ -37781,7 +37781,7 @@
           <p:cNvPr id="140" name="s-grid-3">
             <a:extLst xmlns:a="http://schemas.openxmlformats.org/drawingml/2006/main">
               <a:ext uri="{FF2B5EF4-FFF2-40B4-BE49-F238E27FC236}">
-                <a16:creationId xmlns:a16="http://schemas.microsoft.com/office/drawing/2014/main" id="{E8E30F53-00E6-489A-853A-888F8E2EC915}"/>
+                <a16:creationId xmlns:a16="http://schemas.microsoft.com/office/drawing/2014/main" id="{E4A1C9DD-19B3-4F09-94FD-8DC6B9D9BEAB}"/>
               </a:ext>
             </a:extLst>
           </p:cNvPr>
@@ -37812,7 +37812,7 @@
           <p:cNvPr id="141" name="s-lab-3">
             <a:extLst xmlns:a="http://schemas.openxmlformats.org/drawingml/2006/main">
               <a:ext uri="{FF2B5EF4-FFF2-40B4-BE49-F238E27FC236}">
-                <a16:creationId xmlns:a16="http://schemas.microsoft.com/office/drawing/2014/main" id="{3554B576-6271-46F9-9035-BD6A12D01DF0}"/>
+                <a16:creationId xmlns:a16="http://schemas.microsoft.com/office/drawing/2014/main" id="{2A66EB67-4F48-4E59-85C3-E0A374C7D11B}"/>
               </a:ext>
             </a:extLst>
           </p:cNvPr>
@@ -37874,7 +37874,7 @@
           <p:cNvPr id="142" name="s-grid-4">
             <a:extLst xmlns:a="http://schemas.openxmlformats.org/drawingml/2006/main">
               <a:ext uri="{FF2B5EF4-FFF2-40B4-BE49-F238E27FC236}">
-                <a16:creationId xmlns:a16="http://schemas.microsoft.com/office/drawing/2014/main" id="{931BBA5B-EF8A-4617-B063-8580E7540474}"/>
+                <a16:creationId xmlns:a16="http://schemas.microsoft.com/office/drawing/2014/main" id="{F54A72B7-892F-4380-BE74-88500D6D7993}"/>
               </a:ext>
             </a:extLst>
           </p:cNvPr>
@@ -37905,7 +37905,7 @@
           <p:cNvPr id="143" name="s-lab-4">
             <a:extLst xmlns:a="http://schemas.openxmlformats.org/drawingml/2006/main">
               <a:ext uri="{FF2B5EF4-FFF2-40B4-BE49-F238E27FC236}">
-                <a16:creationId xmlns:a16="http://schemas.microsoft.com/office/drawing/2014/main" id="{4D11BC3C-5E91-4416-83FA-CBB2DEDFD3F7}"/>
+                <a16:creationId xmlns:a16="http://schemas.microsoft.com/office/drawing/2014/main" id="{F0B5982B-034B-43AB-8FFE-A8A439E82BC9}"/>
               </a:ext>
             </a:extLst>
           </p:cNvPr>
@@ -37967,7 +37967,7 @@
           <p:cNvPr id="144" name="s-grid-5">
             <a:extLst xmlns:a="http://schemas.openxmlformats.org/drawingml/2006/main">
               <a:ext uri="{FF2B5EF4-FFF2-40B4-BE49-F238E27FC236}">
-                <a16:creationId xmlns:a16="http://schemas.microsoft.com/office/drawing/2014/main" id="{4F4721B0-6DA0-47B6-8C3E-8D72A6A4A6EA}"/>
+                <a16:creationId xmlns:a16="http://schemas.microsoft.com/office/drawing/2014/main" id="{2CBC8C8F-48EF-4A24-A2AB-3CE945E8DE01}"/>
               </a:ext>
             </a:extLst>
           </p:cNvPr>
@@ -37998,7 +37998,7 @@
           <p:cNvPr id="145" name="s-lab-5">
             <a:extLst xmlns:a="http://schemas.openxmlformats.org/drawingml/2006/main">
               <a:ext uri="{FF2B5EF4-FFF2-40B4-BE49-F238E27FC236}">
-                <a16:creationId xmlns:a16="http://schemas.microsoft.com/office/drawing/2014/main" id="{A0F58308-DF90-4152-A8CE-84A7B67A7970}"/>
+                <a16:creationId xmlns:a16="http://schemas.microsoft.com/office/drawing/2014/main" id="{F9089678-51EB-4994-A38E-8BFDD717F02C}"/>
               </a:ext>
             </a:extLst>
           </p:cNvPr>
@@ -38060,7 +38060,7 @@
           <p:cNvPr id="146" name="s-grid-6">
             <a:extLst xmlns:a="http://schemas.openxmlformats.org/drawingml/2006/main">
               <a:ext uri="{FF2B5EF4-FFF2-40B4-BE49-F238E27FC236}">
-                <a16:creationId xmlns:a16="http://schemas.microsoft.com/office/drawing/2014/main" id="{2998456C-C1F4-4248-B1E2-7F8F43AE0F42}"/>
+                <a16:creationId xmlns:a16="http://schemas.microsoft.com/office/drawing/2014/main" id="{AF382F29-8C69-4236-8161-9107B9CBBCAE}"/>
               </a:ext>
             </a:extLst>
           </p:cNvPr>
@@ -38091,7 +38091,7 @@
           <p:cNvPr id="147" name="s-lab-6">
             <a:extLst xmlns:a="http://schemas.openxmlformats.org/drawingml/2006/main">
               <a:ext uri="{FF2B5EF4-FFF2-40B4-BE49-F238E27FC236}">
-                <a16:creationId xmlns:a16="http://schemas.microsoft.com/office/drawing/2014/main" id="{C76B5946-1277-461C-A7D8-F5E8FB7A31FC}"/>
+                <a16:creationId xmlns:a16="http://schemas.microsoft.com/office/drawing/2014/main" id="{610112B9-F899-4876-8E41-598E841C77EF}"/>
               </a:ext>
             </a:extLst>
           </p:cNvPr>
@@ -38153,7 +38153,7 @@
           <p:cNvPr id="148" name="s-grid-7">
             <a:extLst xmlns:a="http://schemas.openxmlformats.org/drawingml/2006/main">
               <a:ext uri="{FF2B5EF4-FFF2-40B4-BE49-F238E27FC236}">
-                <a16:creationId xmlns:a16="http://schemas.microsoft.com/office/drawing/2014/main" id="{92003127-B470-40A5-84D7-1095FE76A25A}"/>
+                <a16:creationId xmlns:a16="http://schemas.microsoft.com/office/drawing/2014/main" id="{050A1966-5064-485C-ACF0-7B2CE5E10526}"/>
               </a:ext>
             </a:extLst>
           </p:cNvPr>
@@ -38184,7 +38184,7 @@
           <p:cNvPr id="149" name="s-lab-7">
             <a:extLst xmlns:a="http://schemas.openxmlformats.org/drawingml/2006/main">
               <a:ext uri="{FF2B5EF4-FFF2-40B4-BE49-F238E27FC236}">
-                <a16:creationId xmlns:a16="http://schemas.microsoft.com/office/drawing/2014/main" id="{D5C7C9FC-3BC5-4BBD-AD12-1B49A754662C}"/>
+                <a16:creationId xmlns:a16="http://schemas.microsoft.com/office/drawing/2014/main" id="{44386BE0-7669-4456-9088-20392408D2C0}"/>
               </a:ext>
             </a:extLst>
           </p:cNvPr>
@@ -38246,7 +38246,7 @@
           <p:cNvPr id="150" name="s-dot-mpdd-I_TRI-0">
             <a:extLst xmlns:a="http://schemas.openxmlformats.org/drawingml/2006/main">
               <a:ext uri="{FF2B5EF4-FFF2-40B4-BE49-F238E27FC236}">
-                <a16:creationId xmlns:a16="http://schemas.microsoft.com/office/drawing/2014/main" id="{F68FF8E3-6E07-46C2-9F2C-BA34DF999F65}"/>
+                <a16:creationId xmlns:a16="http://schemas.microsoft.com/office/drawing/2014/main" id="{167CC2AC-80AD-4494-BC11-58AE6D6563D6}"/>
               </a:ext>
             </a:extLst>
           </p:cNvPr>
@@ -38281,7 +38281,7 @@
           <p:cNvPr id="151" name="s-dot-mpdd-I_TRI-1">
             <a:extLst xmlns:a="http://schemas.openxmlformats.org/drawingml/2006/main">
               <a:ext uri="{FF2B5EF4-FFF2-40B4-BE49-F238E27FC236}">
-                <a16:creationId xmlns:a16="http://schemas.microsoft.com/office/drawing/2014/main" id="{92C9C6EE-12FB-4434-8B4C-77AAC707FDC7}"/>
+                <a16:creationId xmlns:a16="http://schemas.microsoft.com/office/drawing/2014/main" id="{CAD6F91E-AAA4-4455-ADB0-566517A1C48A}"/>
               </a:ext>
             </a:extLst>
           </p:cNvPr>
@@ -38316,7 +38316,7 @@
           <p:cNvPr id="152" name="s-dot-mpdd-I_TRI-2">
             <a:extLst xmlns:a="http://schemas.openxmlformats.org/drawingml/2006/main">
               <a:ext uri="{FF2B5EF4-FFF2-40B4-BE49-F238E27FC236}">
-                <a16:creationId xmlns:a16="http://schemas.microsoft.com/office/drawing/2014/main" id="{227E5938-6587-4142-A010-373E4BA84B03}"/>
+                <a16:creationId xmlns:a16="http://schemas.microsoft.com/office/drawing/2014/main" id="{D3DA6B6A-3785-4B80-B170-6A842C644291}"/>
               </a:ext>
             </a:extLst>
           </p:cNvPr>
@@ -38351,7 +38351,7 @@
           <p:cNvPr id="153" name="s-dot-mpdd-I_TRI-3">
             <a:extLst xmlns:a="http://schemas.openxmlformats.org/drawingml/2006/main">
               <a:ext uri="{FF2B5EF4-FFF2-40B4-BE49-F238E27FC236}">
-                <a16:creationId xmlns:a16="http://schemas.microsoft.com/office/drawing/2014/main" id="{E85783C3-F096-49E8-8843-8A415D19D3D8}"/>
+                <a16:creationId xmlns:a16="http://schemas.microsoft.com/office/drawing/2014/main" id="{54C11B40-6CD7-4029-8D5F-B1DE00241B0A}"/>
               </a:ext>
             </a:extLst>
           </p:cNvPr>
@@ -38386,7 +38386,7 @@
           <p:cNvPr id="154" name="s-dot-mpdd-I_TRI-4">
             <a:extLst xmlns:a="http://schemas.openxmlformats.org/drawingml/2006/main">
               <a:ext uri="{FF2B5EF4-FFF2-40B4-BE49-F238E27FC236}">
-                <a16:creationId xmlns:a16="http://schemas.microsoft.com/office/drawing/2014/main" id="{0343C834-86F7-468A-A36A-A0514D23BE82}"/>
+                <a16:creationId xmlns:a16="http://schemas.microsoft.com/office/drawing/2014/main" id="{DE27AE93-98F1-427D-90F1-C662ECE4F9D5}"/>
               </a:ext>
             </a:extLst>
           </p:cNvPr>
@@ -38421,7 +38421,7 @@
           <p:cNvPr id="155" name="s-dot-mpdd-I_TRI-5">
             <a:extLst xmlns:a="http://schemas.openxmlformats.org/drawingml/2006/main">
               <a:ext uri="{FF2B5EF4-FFF2-40B4-BE49-F238E27FC236}">
-                <a16:creationId xmlns:a16="http://schemas.microsoft.com/office/drawing/2014/main" id="{1FE2CEF2-9A88-4AF8-94C2-E83A863D9DCE}"/>
+                <a16:creationId xmlns:a16="http://schemas.microsoft.com/office/drawing/2014/main" id="{1D11069C-C7D7-41D6-84FE-342F67341084}"/>
               </a:ext>
             </a:extLst>
           </p:cNvPr>
@@ -38456,7 +38456,7 @@
           <p:cNvPr id="156" name="s-dot-mpdd-I_TRI-6">
             <a:extLst xmlns:a="http://schemas.openxmlformats.org/drawingml/2006/main">
               <a:ext uri="{FF2B5EF4-FFF2-40B4-BE49-F238E27FC236}">
-                <a16:creationId xmlns:a16="http://schemas.microsoft.com/office/drawing/2014/main" id="{C10B456E-0B7E-4CFC-99E9-414202BE2717}"/>
+                <a16:creationId xmlns:a16="http://schemas.microsoft.com/office/drawing/2014/main" id="{DD66A69F-1EFC-4B21-84AB-74B3E31E6FF8}"/>
               </a:ext>
             </a:extLst>
           </p:cNvPr>
@@ -38491,7 +38491,7 @@
           <p:cNvPr id="157" name="s-dot-mpdd-I_TRI-7">
             <a:extLst xmlns:a="http://schemas.openxmlformats.org/drawingml/2006/main">
               <a:ext uri="{FF2B5EF4-FFF2-40B4-BE49-F238E27FC236}">
-                <a16:creationId xmlns:a16="http://schemas.microsoft.com/office/drawing/2014/main" id="{51908981-05E5-440F-BD94-9B4F5022521E}"/>
+                <a16:creationId xmlns:a16="http://schemas.microsoft.com/office/drawing/2014/main" id="{B8846FFD-5335-4343-9D1F-7BE09DD3A2EA}"/>
               </a:ext>
             </a:extLst>
           </p:cNvPr>
@@ -38526,7 +38526,7 @@
           <p:cNvPr id="158" name="s-dot-mpdd-I_BAL-0">
             <a:extLst xmlns:a="http://schemas.openxmlformats.org/drawingml/2006/main">
               <a:ext uri="{FF2B5EF4-FFF2-40B4-BE49-F238E27FC236}">
-                <a16:creationId xmlns:a16="http://schemas.microsoft.com/office/drawing/2014/main" id="{F70CB529-8AFC-4F6A-A29F-B90FBA95B10B}"/>
+                <a16:creationId xmlns:a16="http://schemas.microsoft.com/office/drawing/2014/main" id="{D60DA67A-9F58-4B65-91F6-C2E3CC6C3207}"/>
               </a:ext>
             </a:extLst>
           </p:cNvPr>
@@ -38561,7 +38561,7 @@
           <p:cNvPr id="159" name="s-dot-mpdd-I_BAL-1">
             <a:extLst xmlns:a="http://schemas.openxmlformats.org/drawingml/2006/main">
               <a:ext uri="{FF2B5EF4-FFF2-40B4-BE49-F238E27FC236}">
-                <a16:creationId xmlns:a16="http://schemas.microsoft.com/office/drawing/2014/main" id="{ACE497B7-1A90-483D-AE10-C73A03AE9753}"/>
+                <a16:creationId xmlns:a16="http://schemas.microsoft.com/office/drawing/2014/main" id="{3A783442-ADC6-488E-9881-24EE8096411F}"/>
               </a:ext>
             </a:extLst>
           </p:cNvPr>
@@ -38596,7 +38596,7 @@
           <p:cNvPr id="160" name="s-dot-mpdd-I_BAL-2">
             <a:extLst xmlns:a="http://schemas.openxmlformats.org/drawingml/2006/main">
               <a:ext uri="{FF2B5EF4-FFF2-40B4-BE49-F238E27FC236}">
-                <a16:creationId xmlns:a16="http://schemas.microsoft.com/office/drawing/2014/main" id="{894C0A7C-3303-4091-9C63-C7C7FFAC149A}"/>
+                <a16:creationId xmlns:a16="http://schemas.microsoft.com/office/drawing/2014/main" id="{7C8F81AE-B2B7-4EC1-A9A8-41EA01DC07B7}"/>
               </a:ext>
             </a:extLst>
           </p:cNvPr>
@@ -38631,7 +38631,7 @@
           <p:cNvPr id="161" name="s-dot-mpdd-I_BAL-3">
             <a:extLst xmlns:a="http://schemas.openxmlformats.org/drawingml/2006/main">
               <a:ext uri="{FF2B5EF4-FFF2-40B4-BE49-F238E27FC236}">
-                <a16:creationId xmlns:a16="http://schemas.microsoft.com/office/drawing/2014/main" id="{6FD6C66D-7D4E-4F91-B771-953389140907}"/>
+                <a16:creationId xmlns:a16="http://schemas.microsoft.com/office/drawing/2014/main" id="{323CF039-3526-4115-A116-DF38187E31B7}"/>
               </a:ext>
             </a:extLst>
           </p:cNvPr>
@@ -38666,7 +38666,7 @@
           <p:cNvPr id="162" name="s-dot-mpdd-I_BAL-4">
             <a:extLst xmlns:a="http://schemas.openxmlformats.org/drawingml/2006/main">
               <a:ext uri="{FF2B5EF4-FFF2-40B4-BE49-F238E27FC236}">
-                <a16:creationId xmlns:a16="http://schemas.microsoft.com/office/drawing/2014/main" id="{7EA098FF-90EE-4FDD-9362-8331363168EA}"/>
+                <a16:creationId xmlns:a16="http://schemas.microsoft.com/office/drawing/2014/main" id="{02B5182E-9E96-4C89-ACD6-6BCD4B7EF62E}"/>
               </a:ext>
             </a:extLst>
           </p:cNvPr>
@@ -38701,7 +38701,7 @@
           <p:cNvPr id="163" name="s-dot-mpdd-I_BAL-5">
             <a:extLst xmlns:a="http://schemas.openxmlformats.org/drawingml/2006/main">
               <a:ext uri="{FF2B5EF4-FFF2-40B4-BE49-F238E27FC236}">
-                <a16:creationId xmlns:a16="http://schemas.microsoft.com/office/drawing/2014/main" id="{A0835735-B2F9-4C33-A799-C976AB1A08A2}"/>
+                <a16:creationId xmlns:a16="http://schemas.microsoft.com/office/drawing/2014/main" id="{BA47295C-9734-4622-86BA-5AECB98FE143}"/>
               </a:ext>
             </a:extLst>
           </p:cNvPr>
@@ -38736,7 +38736,7 @@
           <p:cNvPr id="164" name="s-dot-mpdd-I_BAL-6">
             <a:extLst xmlns:a="http://schemas.openxmlformats.org/drawingml/2006/main">
               <a:ext uri="{FF2B5EF4-FFF2-40B4-BE49-F238E27FC236}">
-                <a16:creationId xmlns:a16="http://schemas.microsoft.com/office/drawing/2014/main" id="{D90CB24C-5028-4C10-91CD-A96ACB7658E7}"/>
+                <a16:creationId xmlns:a16="http://schemas.microsoft.com/office/drawing/2014/main" id="{119EAE20-1549-4D6B-BB5D-53FCDF81A4D1}"/>
               </a:ext>
             </a:extLst>
           </p:cNvPr>
@@ -38771,7 +38771,7 @@
           <p:cNvPr id="165" name="s-dot-mpdd-I_BAL-7">
             <a:extLst xmlns:a="http://schemas.openxmlformats.org/drawingml/2006/main">
               <a:ext uri="{FF2B5EF4-FFF2-40B4-BE49-F238E27FC236}">
-                <a16:creationId xmlns:a16="http://schemas.microsoft.com/office/drawing/2014/main" id="{4C88DACD-5B7A-4EE6-A5DE-612AFB116CD3}"/>
+                <a16:creationId xmlns:a16="http://schemas.microsoft.com/office/drawing/2014/main" id="{B76B2507-AC18-48B9-A706-960D5E0E1CBA}"/>
               </a:ext>
             </a:extLst>
           </p:cNvPr>
@@ -38806,7 +38806,7 @@
           <p:cNvPr id="166" name="s-dot-btad-I_TRI-0">
             <a:extLst xmlns:a="http://schemas.openxmlformats.org/drawingml/2006/main">
               <a:ext uri="{FF2B5EF4-FFF2-40B4-BE49-F238E27FC236}">
-                <a16:creationId xmlns:a16="http://schemas.microsoft.com/office/drawing/2014/main" id="{B2A49D4F-85E2-4989-A63D-69A2AAE9663F}"/>
+                <a16:creationId xmlns:a16="http://schemas.microsoft.com/office/drawing/2014/main" id="{42C60D0A-E8E0-43A9-81C8-3E27D33A8150}"/>
               </a:ext>
             </a:extLst>
           </p:cNvPr>
@@ -38841,7 +38841,7 @@
           <p:cNvPr id="167" name="s-dot-btad-I_TRI-1">
             <a:extLst xmlns:a="http://schemas.openxmlformats.org/drawingml/2006/main">
               <a:ext uri="{FF2B5EF4-FFF2-40B4-BE49-F238E27FC236}">
-                <a16:creationId xmlns:a16="http://schemas.microsoft.com/office/drawing/2014/main" id="{7CF69161-0CAA-4AF7-9937-1992BB1D2B68}"/>
+                <a16:creationId xmlns:a16="http://schemas.microsoft.com/office/drawing/2014/main" id="{619F2A20-F2AB-4F34-8D3F-C212B9355E7B}"/>
               </a:ext>
             </a:extLst>
           </p:cNvPr>
@@ -38876,7 +38876,7 @@
           <p:cNvPr id="168" name="s-dot-btad-I_TRI-2">
             <a:extLst xmlns:a="http://schemas.openxmlformats.org/drawingml/2006/main">
               <a:ext uri="{FF2B5EF4-FFF2-40B4-BE49-F238E27FC236}">
-                <a16:creationId xmlns:a16="http://schemas.microsoft.com/office/drawing/2014/main" id="{DBA29D2E-0264-476D-821C-3B6BCB14FCFC}"/>
+                <a16:creationId xmlns:a16="http://schemas.microsoft.com/office/drawing/2014/main" id="{38158779-05E6-4A72-8B33-DBD77759AFD0}"/>
               </a:ext>
             </a:extLst>
           </p:cNvPr>
@@ -38911,7 +38911,7 @@
           <p:cNvPr id="169" name="s-dot-btad-I_TRI-3">
             <a:extLst xmlns:a="http://schemas.openxmlformats.org/drawingml/2006/main">
               <a:ext uri="{FF2B5EF4-FFF2-40B4-BE49-F238E27FC236}">
-                <a16:creationId xmlns:a16="http://schemas.microsoft.com/office/drawing/2014/main" id="{1B9F1ACD-EC7A-4FC3-918A-286DF0E09C00}"/>
+                <a16:creationId xmlns:a16="http://schemas.microsoft.com/office/drawing/2014/main" id="{2BACCAAE-52A5-43D0-963C-B37F8025EBB5}"/>
               </a:ext>
             </a:extLst>
           </p:cNvPr>
@@ -38946,7 +38946,7 @@
           <p:cNvPr id="170" name="s-dot-btad-I_TRI-4">
             <a:extLst xmlns:a="http://schemas.openxmlformats.org/drawingml/2006/main">
               <a:ext uri="{FF2B5EF4-FFF2-40B4-BE49-F238E27FC236}">
-                <a16:creationId xmlns:a16="http://schemas.microsoft.com/office/drawing/2014/main" id="{DCD14B56-5F15-43AE-91B6-7A252834F85F}"/>
+                <a16:creationId xmlns:a16="http://schemas.microsoft.com/office/drawing/2014/main" id="{50FD2FBB-1547-4FD6-A165-3C150F07EBCF}"/>
               </a:ext>
             </a:extLst>
           </p:cNvPr>
@@ -38981,7 +38981,7 @@
           <p:cNvPr id="171" name="s-dot-btad-I_TRI-5">
             <a:extLst xmlns:a="http://schemas.openxmlformats.org/drawingml/2006/main">
               <a:ext uri="{FF2B5EF4-FFF2-40B4-BE49-F238E27FC236}">
-                <a16:creationId xmlns:a16="http://schemas.microsoft.com/office/drawing/2014/main" id="{F63F9E83-DFEF-4AF9-AAE5-21E88D3A3099}"/>
+                <a16:creationId xmlns:a16="http://schemas.microsoft.com/office/drawing/2014/main" id="{C5888677-D6A0-4645-B367-99D36F0D36B5}"/>
               </a:ext>
             </a:extLst>
           </p:cNvPr>
@@ -39016,7 +39016,7 @@
           <p:cNvPr id="172" name="s-dot-btad-I_TRI-6">
             <a:extLst xmlns:a="http://schemas.openxmlformats.org/drawingml/2006/main">
               <a:ext uri="{FF2B5EF4-FFF2-40B4-BE49-F238E27FC236}">
-                <a16:creationId xmlns:a16="http://schemas.microsoft.com/office/drawing/2014/main" id="{FF56461D-DAA3-49EE-8489-F0490D637F34}"/>
+                <a16:creationId xmlns:a16="http://schemas.microsoft.com/office/drawing/2014/main" id="{5C3A0899-6EF4-41B6-8699-9A8EE25E7463}"/>
               </a:ext>
             </a:extLst>
           </p:cNvPr>
@@ -39051,7 +39051,7 @@
           <p:cNvPr id="173" name="s-dot-btad-I_TRI-7">
             <a:extLst xmlns:a="http://schemas.openxmlformats.org/drawingml/2006/main">
               <a:ext uri="{FF2B5EF4-FFF2-40B4-BE49-F238E27FC236}">
-                <a16:creationId xmlns:a16="http://schemas.microsoft.com/office/drawing/2014/main" id="{94949850-3D3E-450C-9892-E5B718EFA2AE}"/>
+                <a16:creationId xmlns:a16="http://schemas.microsoft.com/office/drawing/2014/main" id="{6CD393F0-F179-4471-9065-9117172B9384}"/>
               </a:ext>
             </a:extLst>
           </p:cNvPr>
@@ -39086,7 +39086,7 @@
           <p:cNvPr id="174" name="s-dot-btad-I_BAL-0">
             <a:extLst xmlns:a="http://schemas.openxmlformats.org/drawingml/2006/main">
               <a:ext uri="{FF2B5EF4-FFF2-40B4-BE49-F238E27FC236}">
-                <a16:creationId xmlns:a16="http://schemas.microsoft.com/office/drawing/2014/main" id="{EB1072FD-A98E-43C2-B8DD-62FBD4AD16ED}"/>
+                <a16:creationId xmlns:a16="http://schemas.microsoft.com/office/drawing/2014/main" id="{B703CCE1-6830-481C-BE1B-7C816E8D55BC}"/>
               </a:ext>
             </a:extLst>
           </p:cNvPr>
@@ -39121,7 +39121,7 @@
           <p:cNvPr id="175" name="s-dot-btad-I_BAL-1">
             <a:extLst xmlns:a="http://schemas.openxmlformats.org/drawingml/2006/main">
               <a:ext uri="{FF2B5EF4-FFF2-40B4-BE49-F238E27FC236}">
-                <a16:creationId xmlns:a16="http://schemas.microsoft.com/office/drawing/2014/main" id="{0FC4C5BF-4EB6-417E-BBE9-64F716C6C82D}"/>
+                <a16:creationId xmlns:a16="http://schemas.microsoft.com/office/drawing/2014/main" id="{02201510-5C5C-4C5A-9FD1-D599D14D8E5F}"/>
               </a:ext>
             </a:extLst>
           </p:cNvPr>
@@ -39156,7 +39156,7 @@
           <p:cNvPr id="176" name="s-dot-btad-I_BAL-2">
             <a:extLst xmlns:a="http://schemas.openxmlformats.org/drawingml/2006/main">
               <a:ext uri="{FF2B5EF4-FFF2-40B4-BE49-F238E27FC236}">
-                <a16:creationId xmlns:a16="http://schemas.microsoft.com/office/drawing/2014/main" id="{94D28C29-F224-4FCB-BBF0-13D6ED415D5B}"/>
+                <a16:creationId xmlns:a16="http://schemas.microsoft.com/office/drawing/2014/main" id="{B7B275EC-677F-47E2-A7A5-31DD56CC7C2C}"/>
               </a:ext>
             </a:extLst>
           </p:cNvPr>
@@ -39191,7 +39191,7 @@
           <p:cNvPr id="177" name="s-dot-btad-I_BAL-3">
             <a:extLst xmlns:a="http://schemas.openxmlformats.org/drawingml/2006/main">
               <a:ext uri="{FF2B5EF4-FFF2-40B4-BE49-F238E27FC236}">
-                <a16:creationId xmlns:a16="http://schemas.microsoft.com/office/drawing/2014/main" id="{3C516AAA-A199-4443-9DC3-1658C75BB9B2}"/>
+                <a16:creationId xmlns:a16="http://schemas.microsoft.com/office/drawing/2014/main" id="{D5839BA6-8C11-4BBD-A1EB-AC52C5C34F00}"/>
               </a:ext>
             </a:extLst>
           </p:cNvPr>
@@ -39226,7 +39226,7 @@
           <p:cNvPr id="178" name="s-dot-btad-I_BAL-4">
             <a:extLst xmlns:a="http://schemas.openxmlformats.org/drawingml/2006/main">
               <a:ext uri="{FF2B5EF4-FFF2-40B4-BE49-F238E27FC236}">
-                <a16:creationId xmlns:a16="http://schemas.microsoft.com/office/drawing/2014/main" id="{93EEE24B-B3B5-4DE5-B31D-362DA850070E}"/>
+                <a16:creationId xmlns:a16="http://schemas.microsoft.com/office/drawing/2014/main" id="{6DA1BF4D-50BB-4323-A9E4-856C180CECF6}"/>
               </a:ext>
             </a:extLst>
           </p:cNvPr>
@@ -39261,7 +39261,7 @@
           <p:cNvPr id="179" name="s-dot-btad-I_BAL-5">
             <a:extLst xmlns:a="http://schemas.openxmlformats.org/drawingml/2006/main">
               <a:ext uri="{FF2B5EF4-FFF2-40B4-BE49-F238E27FC236}">
-                <a16:creationId xmlns:a16="http://schemas.microsoft.com/office/drawing/2014/main" id="{C3B03911-3FE6-4470-A6C7-7C6F58DBDF8C}"/>
+                <a16:creationId xmlns:a16="http://schemas.microsoft.com/office/drawing/2014/main" id="{1BA174D2-510A-4C1E-98C6-9BCB15E6E9B0}"/>
               </a:ext>
             </a:extLst>
           </p:cNvPr>
@@ -39296,7 +39296,7 @@
           <p:cNvPr id="180" name="s-dot-btad-I_BAL-6">
             <a:extLst xmlns:a="http://schemas.openxmlformats.org/drawingml/2006/main">
               <a:ext uri="{FF2B5EF4-FFF2-40B4-BE49-F238E27FC236}">
-                <a16:creationId xmlns:a16="http://schemas.microsoft.com/office/drawing/2014/main" id="{9CD3437C-0E31-4661-834C-C2E024ACB6B1}"/>
+                <a16:creationId xmlns:a16="http://schemas.microsoft.com/office/drawing/2014/main" id="{18000AE7-E151-4A03-B4CD-9EC9EA3966DE}"/>
               </a:ext>
             </a:extLst>
           </p:cNvPr>
@@ -39331,7 +39331,7 @@
           <p:cNvPr id="181" name="s-dot-btad-I_BAL-7">
             <a:extLst xmlns:a="http://schemas.openxmlformats.org/drawingml/2006/main">
               <a:ext uri="{FF2B5EF4-FFF2-40B4-BE49-F238E27FC236}">
-                <a16:creationId xmlns:a16="http://schemas.microsoft.com/office/drawing/2014/main" id="{B0350D34-0C30-49E7-90DE-38616E2D73F3}"/>
+                <a16:creationId xmlns:a16="http://schemas.microsoft.com/office/drawing/2014/main" id="{2C085BC4-B570-41AE-8DD4-B0DDF8967EDF}"/>
               </a:ext>
             </a:extLst>
           </p:cNvPr>
@@ -39366,7 +39366,7 @@
           <p:cNvPr id="182" name="s-key-0">
             <a:extLst xmlns:a="http://schemas.openxmlformats.org/drawingml/2006/main">
               <a:ext uri="{FF2B5EF4-FFF2-40B4-BE49-F238E27FC236}">
-                <a16:creationId xmlns:a16="http://schemas.microsoft.com/office/drawing/2014/main" id="{E7C5F1D1-70C2-4441-A96E-E97EF58DFD11}"/>
+                <a16:creationId xmlns:a16="http://schemas.microsoft.com/office/drawing/2014/main" id="{5845F6C4-49FF-4950-9735-0E6BEB4D16F2}"/>
               </a:ext>
             </a:extLst>
           </p:cNvPr>
@@ -39401,7 +39401,7 @@
           <p:cNvPr id="183" name="s-key-lab-0">
             <a:extLst xmlns:a="http://schemas.openxmlformats.org/drawingml/2006/main">
               <a:ext uri="{FF2B5EF4-FFF2-40B4-BE49-F238E27FC236}">
-                <a16:creationId xmlns:a16="http://schemas.microsoft.com/office/drawing/2014/main" id="{ABFBFC60-62B2-45D9-922B-996A2287E570}"/>
+                <a16:creationId xmlns:a16="http://schemas.microsoft.com/office/drawing/2014/main" id="{E8B41618-332E-438F-95CF-C940189D5DC8}"/>
               </a:ext>
             </a:extLst>
           </p:cNvPr>
@@ -39463,7 +39463,7 @@
           <p:cNvPr id="184" name="s-key-1">
             <a:extLst xmlns:a="http://schemas.openxmlformats.org/drawingml/2006/main">
               <a:ext uri="{FF2B5EF4-FFF2-40B4-BE49-F238E27FC236}">
-                <a16:creationId xmlns:a16="http://schemas.microsoft.com/office/drawing/2014/main" id="{2159A449-B122-4B2A-8427-D3F664EDD500}"/>
+                <a16:creationId xmlns:a16="http://schemas.microsoft.com/office/drawing/2014/main" id="{A6FE7C64-7F6E-4960-9234-9C5255769E89}"/>
               </a:ext>
             </a:extLst>
           </p:cNvPr>
@@ -39498,7 +39498,7 @@
           <p:cNvPr id="185" name="s-key-lab-1">
             <a:extLst xmlns:a="http://schemas.openxmlformats.org/drawingml/2006/main">
               <a:ext uri="{FF2B5EF4-FFF2-40B4-BE49-F238E27FC236}">
-                <a16:creationId xmlns:a16="http://schemas.microsoft.com/office/drawing/2014/main" id="{A971AAA1-81C4-49D0-89F8-84DF64B5E02E}"/>
+                <a16:creationId xmlns:a16="http://schemas.microsoft.com/office/drawing/2014/main" id="{6F1AE99A-33EA-4F96-ADE7-26BB04CDB5ED}"/>
               </a:ext>
             </a:extLst>
           </p:cNvPr>
@@ -39560,7 +39560,7 @@
           <p:cNvPr id="186" name="s-key-2">
             <a:extLst xmlns:a="http://schemas.openxmlformats.org/drawingml/2006/main">
               <a:ext uri="{FF2B5EF4-FFF2-40B4-BE49-F238E27FC236}">
-                <a16:creationId xmlns:a16="http://schemas.microsoft.com/office/drawing/2014/main" id="{A266AD45-70B4-47E1-8309-DA1B622AAB67}"/>
+                <a16:creationId xmlns:a16="http://schemas.microsoft.com/office/drawing/2014/main" id="{BED3382F-2FFA-46C4-A67D-F357CCD9C01E}"/>
               </a:ext>
             </a:extLst>
           </p:cNvPr>
@@ -39595,7 +39595,7 @@
           <p:cNvPr id="187" name="s-key-lab-2">
             <a:extLst xmlns:a="http://schemas.openxmlformats.org/drawingml/2006/main">
               <a:ext uri="{FF2B5EF4-FFF2-40B4-BE49-F238E27FC236}">
-                <a16:creationId xmlns:a16="http://schemas.microsoft.com/office/drawing/2014/main" id="{5A827A07-9327-4C8F-8E52-3D4162130923}"/>
+                <a16:creationId xmlns:a16="http://schemas.microsoft.com/office/drawing/2014/main" id="{7C8BB280-2731-4DE5-950A-6145374FE09B}"/>
               </a:ext>
             </a:extLst>
           </p:cNvPr>
@@ -39657,7 +39657,7 @@
           <p:cNvPr id="188" name="s-key-3">
             <a:extLst xmlns:a="http://schemas.openxmlformats.org/drawingml/2006/main">
               <a:ext uri="{FF2B5EF4-FFF2-40B4-BE49-F238E27FC236}">
-                <a16:creationId xmlns:a16="http://schemas.microsoft.com/office/drawing/2014/main" id="{E0701A74-57F0-47C6-A1B8-D08FA1FA640C}"/>
+                <a16:creationId xmlns:a16="http://schemas.microsoft.com/office/drawing/2014/main" id="{189F732A-13FC-4B2C-9FE9-AB3AD9644773}"/>
               </a:ext>
             </a:extLst>
           </p:cNvPr>
@@ -39692,7 +39692,7 @@
           <p:cNvPr id="189" name="s-key-lab-3">
             <a:extLst xmlns:a="http://schemas.openxmlformats.org/drawingml/2006/main">
               <a:ext uri="{FF2B5EF4-FFF2-40B4-BE49-F238E27FC236}">
-                <a16:creationId xmlns:a16="http://schemas.microsoft.com/office/drawing/2014/main" id="{DFD15DA1-B77E-4CEC-B4C3-D60D956BB370}"/>
+                <a16:creationId xmlns:a16="http://schemas.microsoft.com/office/drawing/2014/main" id="{ACBCC57D-CEF7-4C5D-A105-0B94B61124A9}"/>
               </a:ext>
             </a:extLst>
           </p:cNvPr>
@@ -39752,7 +39752,7 @@
     </p:spTree>
     <p:extLst>
       <p:ext uri="{BB962C8B-B14F-4D97-AF65-F5344CB8AC3E}">
-        <p14:creationId xmlns:p14="http://schemas.microsoft.com/office/powerpoint/2010/main" val="1614002776"/>
+        <p14:creationId xmlns:p14="http://schemas.microsoft.com/office/powerpoint/2010/main" val="1451191163"/>
       </p:ext>
     </p:extLst>
   </p:cSld>
@@ -39783,7 +39783,7 @@
           <p:cNvPr id="61" name="band-a">
             <a:extLst xmlns:a="http://schemas.openxmlformats.org/drawingml/2006/main">
               <a:ext uri="{FF2B5EF4-FFF2-40B4-BE49-F238E27FC236}">
-                <a16:creationId xmlns:a16="http://schemas.microsoft.com/office/drawing/2014/main" id="{C5609B63-C4F7-4B57-9D4D-9E45A3843461}"/>
+                <a16:creationId xmlns:a16="http://schemas.microsoft.com/office/drawing/2014/main" id="{274557E4-72B9-4BB5-BDC3-822D49A2932C}"/>
               </a:ext>
             </a:extLst>
           </p:cNvPr>
@@ -39814,7 +39814,7 @@
           <p:cNvPr id="2" name="band-b">
             <a:extLst xmlns:a="http://schemas.openxmlformats.org/drawingml/2006/main">
               <a:ext uri="{FF2B5EF4-FFF2-40B4-BE49-F238E27FC236}">
-                <a16:creationId xmlns:a16="http://schemas.microsoft.com/office/drawing/2014/main" id="{B04B7615-56EB-4E41-8652-96765EA140BA}"/>
+                <a16:creationId xmlns:a16="http://schemas.microsoft.com/office/drawing/2014/main" id="{63CC64B5-3E77-4A87-AE90-4F069A5418CB}"/>
               </a:ext>
             </a:extLst>
           </p:cNvPr>
@@ -39845,7 +39845,7 @@
           <p:cNvPr id="3" name="band-c">
             <a:extLst xmlns:a="http://schemas.openxmlformats.org/drawingml/2006/main">
               <a:ext uri="{FF2B5EF4-FFF2-40B4-BE49-F238E27FC236}">
-                <a16:creationId xmlns:a16="http://schemas.microsoft.com/office/drawing/2014/main" id="{AF39FF41-FACF-4620-B30F-F57DC3CD4A37}"/>
+                <a16:creationId xmlns:a16="http://schemas.microsoft.com/office/drawing/2014/main" id="{81EC6724-736F-420B-B248-6F448FA8EA3A}"/>
               </a:ext>
             </a:extLst>
           </p:cNvPr>
@@ -39876,7 +39876,7 @@
           <p:cNvPr id="4" name="sec-a-chip">
             <a:extLst xmlns:a="http://schemas.openxmlformats.org/drawingml/2006/main">
               <a:ext uri="{FF2B5EF4-FFF2-40B4-BE49-F238E27FC236}">
-                <a16:creationId xmlns:a16="http://schemas.microsoft.com/office/drawing/2014/main" id="{035DD037-820E-442A-A9B2-2279C331BB61}"/>
+                <a16:creationId xmlns:a16="http://schemas.microsoft.com/office/drawing/2014/main" id="{811F6E10-3042-4070-A1A2-4B53D3EDFBB5}"/>
               </a:ext>
             </a:extLst>
           </p:cNvPr>
@@ -39911,7 +39911,7 @@
           <p:cNvPr id="5" name="sec-a-chip-text">
             <a:extLst xmlns:a="http://schemas.openxmlformats.org/drawingml/2006/main">
               <a:ext uri="{FF2B5EF4-FFF2-40B4-BE49-F238E27FC236}">
-                <a16:creationId xmlns:a16="http://schemas.microsoft.com/office/drawing/2014/main" id="{06EC5F76-5242-483D-B451-4AE3D431DBBD}"/>
+                <a16:creationId xmlns:a16="http://schemas.microsoft.com/office/drawing/2014/main" id="{905EF887-4676-4DC1-AD64-468C286DD51B}"/>
               </a:ext>
             </a:extLst>
           </p:cNvPr>
@@ -39973,7 +39973,7 @@
           <p:cNvPr id="6" name="sec-a">
             <a:extLst xmlns:a="http://schemas.openxmlformats.org/drawingml/2006/main">
               <a:ext uri="{FF2B5EF4-FFF2-40B4-BE49-F238E27FC236}">
-                <a16:creationId xmlns:a16="http://schemas.microsoft.com/office/drawing/2014/main" id="{93FEDD9A-717B-424F-9841-31119F6F2B5B}"/>
+                <a16:creationId xmlns:a16="http://schemas.microsoft.com/office/drawing/2014/main" id="{5C3FD395-C080-4DC2-8AF0-D566CA51EB0F}"/>
               </a:ext>
             </a:extLst>
           </p:cNvPr>
@@ -40035,7 +40035,7 @@
           <p:cNvPr id="7" name="sec-a-sub">
             <a:extLst xmlns:a="http://schemas.openxmlformats.org/drawingml/2006/main">
               <a:ext uri="{FF2B5EF4-FFF2-40B4-BE49-F238E27FC236}">
-                <a16:creationId xmlns:a16="http://schemas.microsoft.com/office/drawing/2014/main" id="{3A0AEFBB-F09B-44C8-8AE7-B2B7B276D6CF}"/>
+                <a16:creationId xmlns:a16="http://schemas.microsoft.com/office/drawing/2014/main" id="{30C5DD88-0FAE-4F49-8068-4010B9762B43}"/>
               </a:ext>
             </a:extLst>
           </p:cNvPr>
@@ -40097,7 +40097,7 @@
           <p:cNvPr id="8" name="g0-label">
             <a:extLst xmlns:a="http://schemas.openxmlformats.org/drawingml/2006/main">
               <a:ext uri="{FF2B5EF4-FFF2-40B4-BE49-F238E27FC236}">
-                <a16:creationId xmlns:a16="http://schemas.microsoft.com/office/drawing/2014/main" id="{092332C2-E758-4F34-BC0E-F7BE7A47611F}"/>
+                <a16:creationId xmlns:a16="http://schemas.microsoft.com/office/drawing/2014/main" id="{FF1B58DF-C4FE-4711-8E04-54697663FBB0}"/>
               </a:ext>
             </a:extLst>
           </p:cNvPr>
@@ -40159,7 +40159,7 @@
           <p:cNvPr id="9" name="g0-bar">
             <a:extLst xmlns:a="http://schemas.openxmlformats.org/drawingml/2006/main">
               <a:ext uri="{FF2B5EF4-FFF2-40B4-BE49-F238E27FC236}">
-                <a16:creationId xmlns:a16="http://schemas.microsoft.com/office/drawing/2014/main" id="{A828E1C9-B11B-4CF0-A539-F38EA35FD979}"/>
+                <a16:creationId xmlns:a16="http://schemas.microsoft.com/office/drawing/2014/main" id="{84E9F33C-22A9-4B93-977F-DA9431ECA7D0}"/>
               </a:ext>
             </a:extLst>
           </p:cNvPr>
@@ -40192,7 +40192,7 @@
           <p:cNvPr id="10" name="g0-value">
             <a:extLst xmlns:a="http://schemas.openxmlformats.org/drawingml/2006/main">
               <a:ext uri="{FF2B5EF4-FFF2-40B4-BE49-F238E27FC236}">
-                <a16:creationId xmlns:a16="http://schemas.microsoft.com/office/drawing/2014/main" id="{84AFF41D-26DD-43BB-9BA8-15BB6EA55EA4}"/>
+                <a16:creationId xmlns:a16="http://schemas.microsoft.com/office/drawing/2014/main" id="{1BB697E4-66F5-4EE2-A848-58A40ECE52E4}"/>
               </a:ext>
             </a:extLst>
           </p:cNvPr>
@@ -40254,7 +40254,7 @@
           <p:cNvPr id="11" name="g1-label">
             <a:extLst xmlns:a="http://schemas.openxmlformats.org/drawingml/2006/main">
               <a:ext uri="{FF2B5EF4-FFF2-40B4-BE49-F238E27FC236}">
-                <a16:creationId xmlns:a16="http://schemas.microsoft.com/office/drawing/2014/main" id="{F1B348F0-AC51-4AED-AA5E-5D724FB929FD}"/>
+                <a16:creationId xmlns:a16="http://schemas.microsoft.com/office/drawing/2014/main" id="{8E45998A-589C-445A-B5FE-0995136CDF3E}"/>
               </a:ext>
             </a:extLst>
           </p:cNvPr>
@@ -40316,7 +40316,7 @@
           <p:cNvPr id="12" name="g1-bar">
             <a:extLst xmlns:a="http://schemas.openxmlformats.org/drawingml/2006/main">
               <a:ext uri="{FF2B5EF4-FFF2-40B4-BE49-F238E27FC236}">
-                <a16:creationId xmlns:a16="http://schemas.microsoft.com/office/drawing/2014/main" id="{1601CB6E-2B61-4978-8DDB-935333B18104}"/>
+                <a16:creationId xmlns:a16="http://schemas.microsoft.com/office/drawing/2014/main" id="{BEEB9413-C0F1-4851-977D-6F8A6B6D35A4}"/>
               </a:ext>
             </a:extLst>
           </p:cNvPr>
@@ -40349,7 +40349,7 @@
           <p:cNvPr id="13" name="g1-value">
             <a:extLst xmlns:a="http://schemas.openxmlformats.org/drawingml/2006/main">
               <a:ext uri="{FF2B5EF4-FFF2-40B4-BE49-F238E27FC236}">
-                <a16:creationId xmlns:a16="http://schemas.microsoft.com/office/drawing/2014/main" id="{142C09A7-CA4D-4138-9CA5-7F04F003884B}"/>
+                <a16:creationId xmlns:a16="http://schemas.microsoft.com/office/drawing/2014/main" id="{EE552B6D-B9C5-43F6-AAC9-AA70B1A6E9EC}"/>
               </a:ext>
             </a:extLst>
           </p:cNvPr>
@@ -40411,7 +40411,7 @@
           <p:cNvPr id="14" name="g2-label">
             <a:extLst xmlns:a="http://schemas.openxmlformats.org/drawingml/2006/main">
               <a:ext uri="{FF2B5EF4-FFF2-40B4-BE49-F238E27FC236}">
-                <a16:creationId xmlns:a16="http://schemas.microsoft.com/office/drawing/2014/main" id="{C302F3FD-AD98-4281-9762-7843AFBA2170}"/>
+                <a16:creationId xmlns:a16="http://schemas.microsoft.com/office/drawing/2014/main" id="{64C29330-52D4-470E-B7D6-BEA2547710B9}"/>
               </a:ext>
             </a:extLst>
           </p:cNvPr>
@@ -40495,7 +40495,7 @@
           <p:cNvPr id="15" name="g2-bar">
             <a:extLst xmlns:a="http://schemas.openxmlformats.org/drawingml/2006/main">
               <a:ext uri="{FF2B5EF4-FFF2-40B4-BE49-F238E27FC236}">
-                <a16:creationId xmlns:a16="http://schemas.microsoft.com/office/drawing/2014/main" id="{CEF3FC08-4516-46BD-B7FE-D64C59CD72FB}"/>
+                <a16:creationId xmlns:a16="http://schemas.microsoft.com/office/drawing/2014/main" id="{B10E7721-D834-47E7-9E98-E098514B9570}"/>
               </a:ext>
             </a:extLst>
           </p:cNvPr>
@@ -40528,7 +40528,7 @@
           <p:cNvPr id="16" name="g2-value">
             <a:extLst xmlns:a="http://schemas.openxmlformats.org/drawingml/2006/main">
               <a:ext uri="{FF2B5EF4-FFF2-40B4-BE49-F238E27FC236}">
-                <a16:creationId xmlns:a16="http://schemas.microsoft.com/office/drawing/2014/main" id="{298CEB52-076C-4D8E-B072-F7A34E69BFC4}"/>
+                <a16:creationId xmlns:a16="http://schemas.microsoft.com/office/drawing/2014/main" id="{681E380B-F972-418F-AF77-61D2C6331059}"/>
               </a:ext>
             </a:extLst>
           </p:cNvPr>
@@ -40590,7 +40590,7 @@
           <p:cNvPr id="17" name="g3-label">
             <a:extLst xmlns:a="http://schemas.openxmlformats.org/drawingml/2006/main">
               <a:ext uri="{FF2B5EF4-FFF2-40B4-BE49-F238E27FC236}">
-                <a16:creationId xmlns:a16="http://schemas.microsoft.com/office/drawing/2014/main" id="{6F9C094A-419D-4161-A29D-C518E475CE19}"/>
+                <a16:creationId xmlns:a16="http://schemas.microsoft.com/office/drawing/2014/main" id="{594DC307-E024-4A0F-AAEB-DAB80EAAFE96}"/>
               </a:ext>
             </a:extLst>
           </p:cNvPr>
@@ -40652,7 +40652,7 @@
           <p:cNvPr id="18" name="g-na">
             <a:extLst xmlns:a="http://schemas.openxmlformats.org/drawingml/2006/main">
               <a:ext uri="{FF2B5EF4-FFF2-40B4-BE49-F238E27FC236}">
-                <a16:creationId xmlns:a16="http://schemas.microsoft.com/office/drawing/2014/main" id="{439D4BA9-CD0F-4CB7-ADFD-638ECF849536}"/>
+                <a16:creationId xmlns:a16="http://schemas.microsoft.com/office/drawing/2014/main" id="{489BD819-86C7-48BB-A08B-1F63F35C01B0}"/>
               </a:ext>
             </a:extLst>
           </p:cNvPr>
@@ -40685,7 +40685,7 @@
           <p:cNvPr id="19" name="g-na-note">
             <a:extLst xmlns:a="http://schemas.openxmlformats.org/drawingml/2006/main">
               <a:ext uri="{FF2B5EF4-FFF2-40B4-BE49-F238E27FC236}">
-                <a16:creationId xmlns:a16="http://schemas.microsoft.com/office/drawing/2014/main" id="{C43667F4-43F6-4632-B229-D169EE5B9B7F}"/>
+                <a16:creationId xmlns:a16="http://schemas.microsoft.com/office/drawing/2014/main" id="{B25AC70C-2832-4231-AB1C-16584661400D}"/>
               </a:ext>
             </a:extLst>
           </p:cNvPr>
@@ -40747,7 +40747,7 @@
           <p:cNvPr id="20" name="g-note">
             <a:extLst xmlns:a="http://schemas.openxmlformats.org/drawingml/2006/main">
               <a:ext uri="{FF2B5EF4-FFF2-40B4-BE49-F238E27FC236}">
-                <a16:creationId xmlns:a16="http://schemas.microsoft.com/office/drawing/2014/main" id="{204415FC-DD51-46ED-ABFA-A1F8D8BC290C}"/>
+                <a16:creationId xmlns:a16="http://schemas.microsoft.com/office/drawing/2014/main" id="{B58C7E3C-FA5C-43F7-A044-FB3E2CC0B119}"/>
               </a:ext>
             </a:extLst>
           </p:cNvPr>
@@ -40831,7 +40831,7 @@
           <p:cNvPr id="21" name="sec-b-chip">
             <a:extLst xmlns:a="http://schemas.openxmlformats.org/drawingml/2006/main">
               <a:ext uri="{FF2B5EF4-FFF2-40B4-BE49-F238E27FC236}">
-                <a16:creationId xmlns:a16="http://schemas.microsoft.com/office/drawing/2014/main" id="{F6C93122-C6D8-4F50-A515-C70AFE9538D6}"/>
+                <a16:creationId xmlns:a16="http://schemas.microsoft.com/office/drawing/2014/main" id="{5C74EE40-5D38-44E3-89E0-1DD56AD42AD1}"/>
               </a:ext>
             </a:extLst>
           </p:cNvPr>
@@ -40866,7 +40866,7 @@
           <p:cNvPr id="22" name="sec-b-chip-text">
             <a:extLst xmlns:a="http://schemas.openxmlformats.org/drawingml/2006/main">
               <a:ext uri="{FF2B5EF4-FFF2-40B4-BE49-F238E27FC236}">
-                <a16:creationId xmlns:a16="http://schemas.microsoft.com/office/drawing/2014/main" id="{D0AE63A6-D00E-4906-96F7-353623E18207}"/>
+                <a16:creationId xmlns:a16="http://schemas.microsoft.com/office/drawing/2014/main" id="{EDAED1A3-F335-4B6D-92A7-61AB3CEE643B}"/>
               </a:ext>
             </a:extLst>
           </p:cNvPr>
@@ -40928,7 +40928,7 @@
           <p:cNvPr id="23" name="sec-b">
             <a:extLst xmlns:a="http://schemas.openxmlformats.org/drawingml/2006/main">
               <a:ext uri="{FF2B5EF4-FFF2-40B4-BE49-F238E27FC236}">
-                <a16:creationId xmlns:a16="http://schemas.microsoft.com/office/drawing/2014/main" id="{ED227136-683C-4D83-B4FD-3E3542DD9267}"/>
+                <a16:creationId xmlns:a16="http://schemas.microsoft.com/office/drawing/2014/main" id="{2201C1B6-0F6E-4A99-AAC9-9F9CA0EF2A77}"/>
               </a:ext>
             </a:extLst>
           </p:cNvPr>
@@ -40990,7 +40990,7 @@
           <p:cNvPr id="24" name="sec-b-sub">
             <a:extLst xmlns:a="http://schemas.openxmlformats.org/drawingml/2006/main">
               <a:ext uri="{FF2B5EF4-FFF2-40B4-BE49-F238E27FC236}">
-                <a16:creationId xmlns:a16="http://schemas.microsoft.com/office/drawing/2014/main" id="{EA917554-1590-4942-B32A-DDBA88EFE9BA}"/>
+                <a16:creationId xmlns:a16="http://schemas.microsoft.com/office/drawing/2014/main" id="{D390EA4F-19C9-4FAA-A517-912B9231B402}"/>
               </a:ext>
             </a:extLst>
           </p:cNvPr>
@@ -41074,7 +41074,7 @@
           <p:cNvPr id="25" name="r0-label">
             <a:extLst xmlns:a="http://schemas.openxmlformats.org/drawingml/2006/main">
               <a:ext uri="{FF2B5EF4-FFF2-40B4-BE49-F238E27FC236}">
-                <a16:creationId xmlns:a16="http://schemas.microsoft.com/office/drawing/2014/main" id="{CDE4EBC2-2FED-4AC7-8B66-982F217249BD}"/>
+                <a16:creationId xmlns:a16="http://schemas.microsoft.com/office/drawing/2014/main" id="{EA72EA03-0CEA-412C-BFA4-A9C1C5A2E91D}"/>
               </a:ext>
             </a:extLst>
           </p:cNvPr>
@@ -41136,7 +41136,7 @@
           <p:cNvPr id="26" name="r0-bar">
             <a:extLst xmlns:a="http://schemas.openxmlformats.org/drawingml/2006/main">
               <a:ext uri="{FF2B5EF4-FFF2-40B4-BE49-F238E27FC236}">
-                <a16:creationId xmlns:a16="http://schemas.microsoft.com/office/drawing/2014/main" id="{CFA8560B-EDB1-41A0-8EE8-BB27B112A396}"/>
+                <a16:creationId xmlns:a16="http://schemas.microsoft.com/office/drawing/2014/main" id="{75E567FB-5C40-4D1C-BA8E-246994BBD0E9}"/>
               </a:ext>
             </a:extLst>
           </p:cNvPr>
@@ -41169,7 +41169,7 @@
           <p:cNvPr id="27" name="r0-value">
             <a:extLst xmlns:a="http://schemas.openxmlformats.org/drawingml/2006/main">
               <a:ext uri="{FF2B5EF4-FFF2-40B4-BE49-F238E27FC236}">
-                <a16:creationId xmlns:a16="http://schemas.microsoft.com/office/drawing/2014/main" id="{8A63E6DF-579F-4FC9-BEC7-8B17DF3A5A0C}"/>
+                <a16:creationId xmlns:a16="http://schemas.microsoft.com/office/drawing/2014/main" id="{95FE09D3-2BF5-4493-A969-2A8FEB77293A}"/>
               </a:ext>
             </a:extLst>
           </p:cNvPr>
@@ -41231,7 +41231,7 @@
           <p:cNvPr id="28" name="r1-label">
             <a:extLst xmlns:a="http://schemas.openxmlformats.org/drawingml/2006/main">
               <a:ext uri="{FF2B5EF4-FFF2-40B4-BE49-F238E27FC236}">
-                <a16:creationId xmlns:a16="http://schemas.microsoft.com/office/drawing/2014/main" id="{5E3646A5-ED23-4313-96BD-FCB586631015}"/>
+                <a16:creationId xmlns:a16="http://schemas.microsoft.com/office/drawing/2014/main" id="{5FB76582-6FE5-4024-9432-14B8685C2FC4}"/>
               </a:ext>
             </a:extLst>
           </p:cNvPr>
@@ -41293,7 +41293,7 @@
           <p:cNvPr id="29" name="r1-bar">
             <a:extLst xmlns:a="http://schemas.openxmlformats.org/drawingml/2006/main">
               <a:ext uri="{FF2B5EF4-FFF2-40B4-BE49-F238E27FC236}">
-                <a16:creationId xmlns:a16="http://schemas.microsoft.com/office/drawing/2014/main" id="{99E193D6-EEF3-4D6A-956D-8DCF5F9D15FE}"/>
+                <a16:creationId xmlns:a16="http://schemas.microsoft.com/office/drawing/2014/main" id="{723C42FA-6A39-404F-A5C8-12A6479BD838}"/>
               </a:ext>
             </a:extLst>
           </p:cNvPr>
@@ -41326,7 +41326,7 @@
           <p:cNvPr id="30" name="r1-value">
             <a:extLst xmlns:a="http://schemas.openxmlformats.org/drawingml/2006/main">
               <a:ext uri="{FF2B5EF4-FFF2-40B4-BE49-F238E27FC236}">
-                <a16:creationId xmlns:a16="http://schemas.microsoft.com/office/drawing/2014/main" id="{402C4C10-420B-4985-9E32-867CCA0E896D}"/>
+                <a16:creationId xmlns:a16="http://schemas.microsoft.com/office/drawing/2014/main" id="{231188F5-4DC0-4EB2-8688-A6AFE2FFEFE2}"/>
               </a:ext>
             </a:extLst>
           </p:cNvPr>
@@ -41388,7 +41388,7 @@
           <p:cNvPr id="31" name="r2-label">
             <a:extLst xmlns:a="http://schemas.openxmlformats.org/drawingml/2006/main">
               <a:ext uri="{FF2B5EF4-FFF2-40B4-BE49-F238E27FC236}">
-                <a16:creationId xmlns:a16="http://schemas.microsoft.com/office/drawing/2014/main" id="{288BA5E7-7444-4F26-AC95-00759F0C7AAB}"/>
+                <a16:creationId xmlns:a16="http://schemas.microsoft.com/office/drawing/2014/main" id="{1D011339-B63E-4248-977A-540B88B2FF52}"/>
               </a:ext>
             </a:extLst>
           </p:cNvPr>
@@ -41450,7 +41450,7 @@
           <p:cNvPr id="32" name="r2-bar">
             <a:extLst xmlns:a="http://schemas.openxmlformats.org/drawingml/2006/main">
               <a:ext uri="{FF2B5EF4-FFF2-40B4-BE49-F238E27FC236}">
-                <a16:creationId xmlns:a16="http://schemas.microsoft.com/office/drawing/2014/main" id="{8817D8D6-ED14-42F9-B18C-BDCD186176B1}"/>
+                <a16:creationId xmlns:a16="http://schemas.microsoft.com/office/drawing/2014/main" id="{A2E6DCA3-2DA6-468F-9E24-0E498C3DF840}"/>
               </a:ext>
             </a:extLst>
           </p:cNvPr>
@@ -41483,7 +41483,7 @@
           <p:cNvPr id="33" name="r2-value">
             <a:extLst xmlns:a="http://schemas.openxmlformats.org/drawingml/2006/main">
               <a:ext uri="{FF2B5EF4-FFF2-40B4-BE49-F238E27FC236}">
-                <a16:creationId xmlns:a16="http://schemas.microsoft.com/office/drawing/2014/main" id="{C011B9C8-9C5D-4A26-A30E-D7F53D86C8DE}"/>
+                <a16:creationId xmlns:a16="http://schemas.microsoft.com/office/drawing/2014/main" id="{8AC53F8D-53C6-48E6-9B7B-2E6D259CAD08}"/>
               </a:ext>
             </a:extLst>
           </p:cNvPr>
@@ -41545,7 +41545,7 @@
           <p:cNvPr id="34" name="r3-label">
             <a:extLst xmlns:a="http://schemas.openxmlformats.org/drawingml/2006/main">
               <a:ext uri="{FF2B5EF4-FFF2-40B4-BE49-F238E27FC236}">
-                <a16:creationId xmlns:a16="http://schemas.microsoft.com/office/drawing/2014/main" id="{34ACDBF7-8976-4178-A678-C15A458AD6A2}"/>
+                <a16:creationId xmlns:a16="http://schemas.microsoft.com/office/drawing/2014/main" id="{8B727EF2-1C63-4D94-BF96-E9B70E511780}"/>
               </a:ext>
             </a:extLst>
           </p:cNvPr>
@@ -41607,7 +41607,7 @@
           <p:cNvPr id="35" name="r3-bar">
             <a:extLst xmlns:a="http://schemas.openxmlformats.org/drawingml/2006/main">
               <a:ext uri="{FF2B5EF4-FFF2-40B4-BE49-F238E27FC236}">
-                <a16:creationId xmlns:a16="http://schemas.microsoft.com/office/drawing/2014/main" id="{FEECD6B0-3C6F-4EEB-9FE8-E3577AACDCA7}"/>
+                <a16:creationId xmlns:a16="http://schemas.microsoft.com/office/drawing/2014/main" id="{4C6645BA-0D8B-47BF-900A-13DA5CAB71B3}"/>
               </a:ext>
             </a:extLst>
           </p:cNvPr>
@@ -41640,7 +41640,7 @@
           <p:cNvPr id="36" name="r3-value">
             <a:extLst xmlns:a="http://schemas.openxmlformats.org/drawingml/2006/main">
               <a:ext uri="{FF2B5EF4-FFF2-40B4-BE49-F238E27FC236}">
-                <a16:creationId xmlns:a16="http://schemas.microsoft.com/office/drawing/2014/main" id="{7D551EFA-DC75-465D-A0DA-BE7167440917}"/>
+                <a16:creationId xmlns:a16="http://schemas.microsoft.com/office/drawing/2014/main" id="{D6CAE524-C981-4701-9150-98CEB5F66619}"/>
               </a:ext>
             </a:extLst>
           </p:cNvPr>
@@ -41702,7 +41702,7 @@
           <p:cNvPr id="37" name="sec-c-chip">
             <a:extLst xmlns:a="http://schemas.openxmlformats.org/drawingml/2006/main">
               <a:ext uri="{FF2B5EF4-FFF2-40B4-BE49-F238E27FC236}">
-                <a16:creationId xmlns:a16="http://schemas.microsoft.com/office/drawing/2014/main" id="{8FD52D30-0265-4588-A5DA-CDDB1D5DFD21}"/>
+                <a16:creationId xmlns:a16="http://schemas.microsoft.com/office/drawing/2014/main" id="{3D8D5E81-36C9-49CC-9C40-DA3A14E5F448}"/>
               </a:ext>
             </a:extLst>
           </p:cNvPr>
@@ -41737,7 +41737,7 @@
           <p:cNvPr id="38" name="sec-c-chip-text">
             <a:extLst xmlns:a="http://schemas.openxmlformats.org/drawingml/2006/main">
               <a:ext uri="{FF2B5EF4-FFF2-40B4-BE49-F238E27FC236}">
-                <a16:creationId xmlns:a16="http://schemas.microsoft.com/office/drawing/2014/main" id="{141DE574-3CFC-408F-ABD3-A09FFFF0ACE5}"/>
+                <a16:creationId xmlns:a16="http://schemas.microsoft.com/office/drawing/2014/main" id="{C0CB683B-DC27-4F3E-B1AE-FE34BA842627}"/>
               </a:ext>
             </a:extLst>
           </p:cNvPr>
@@ -41799,7 +41799,7 @@
           <p:cNvPr id="39" name="sec-c">
             <a:extLst xmlns:a="http://schemas.openxmlformats.org/drawingml/2006/main">
               <a:ext uri="{FF2B5EF4-FFF2-40B4-BE49-F238E27FC236}">
-                <a16:creationId xmlns:a16="http://schemas.microsoft.com/office/drawing/2014/main" id="{2DFEFD2E-D21B-4A2A-AA16-2D3AB14002A8}"/>
+                <a16:creationId xmlns:a16="http://schemas.microsoft.com/office/drawing/2014/main" id="{A68C38CF-677D-4A80-8BCA-757C199F08FF}"/>
               </a:ext>
             </a:extLst>
           </p:cNvPr>
@@ -41861,7 +41861,7 @@
           <p:cNvPr id="40" name="sec-c-sub">
             <a:extLst xmlns:a="http://schemas.openxmlformats.org/drawingml/2006/main">
               <a:ext uri="{FF2B5EF4-FFF2-40B4-BE49-F238E27FC236}">
-                <a16:creationId xmlns:a16="http://schemas.microsoft.com/office/drawing/2014/main" id="{FE26D478-3C1A-44B5-80F6-ADAD4FEE3BB8}"/>
+                <a16:creationId xmlns:a16="http://schemas.microsoft.com/office/drawing/2014/main" id="{17C7DE4A-C7FA-407A-B701-A61D6C0DDEF1}"/>
               </a:ext>
             </a:extLst>
           </p:cNvPr>
@@ -41945,7 +41945,7 @@
           <p:cNvPr id="41" name="t0-label">
             <a:extLst xmlns:a="http://schemas.openxmlformats.org/drawingml/2006/main">
               <a:ext uri="{FF2B5EF4-FFF2-40B4-BE49-F238E27FC236}">
-                <a16:creationId xmlns:a16="http://schemas.microsoft.com/office/drawing/2014/main" id="{4CA90881-5044-46D1-BE24-9F3164729592}"/>
+                <a16:creationId xmlns:a16="http://schemas.microsoft.com/office/drawing/2014/main" id="{C044BBAB-41AA-48B8-B8E4-C393D51A3F13}"/>
               </a:ext>
             </a:extLst>
           </p:cNvPr>
@@ -42007,7 +42007,7 @@
           <p:cNvPr id="42" name="t0-bank">
             <a:extLst xmlns:a="http://schemas.openxmlformats.org/drawingml/2006/main">
               <a:ext uri="{FF2B5EF4-FFF2-40B4-BE49-F238E27FC236}">
-                <a16:creationId xmlns:a16="http://schemas.microsoft.com/office/drawing/2014/main" id="{F0001410-B4BB-473A-949F-0AA23C896A11}"/>
+                <a16:creationId xmlns:a16="http://schemas.microsoft.com/office/drawing/2014/main" id="{F8728B23-1775-46FB-AF5C-B2F8C9574CE1}"/>
               </a:ext>
             </a:extLst>
           </p:cNvPr>
@@ -42038,7 +42038,7 @@
           <p:cNvPr id="43" name="t0-retrieval">
             <a:extLst xmlns:a="http://schemas.openxmlformats.org/drawingml/2006/main">
               <a:ext uri="{FF2B5EF4-FFF2-40B4-BE49-F238E27FC236}">
-                <a16:creationId xmlns:a16="http://schemas.microsoft.com/office/drawing/2014/main" id="{A2026BFC-436E-497C-8B19-19228AAE4DC9}"/>
+                <a16:creationId xmlns:a16="http://schemas.microsoft.com/office/drawing/2014/main" id="{9F15D5D2-E03A-47C1-9B37-F7CDF5C3323B}"/>
               </a:ext>
             </a:extLst>
           </p:cNvPr>
@@ -42069,7 +42069,7 @@
           <p:cNvPr id="44" name="t0-retrieval-t">
             <a:extLst xmlns:a="http://schemas.openxmlformats.org/drawingml/2006/main">
               <a:ext uri="{FF2B5EF4-FFF2-40B4-BE49-F238E27FC236}">
-                <a16:creationId xmlns:a16="http://schemas.microsoft.com/office/drawing/2014/main" id="{ABBF5581-94B9-4121-80FF-4C2860261E7B}"/>
+                <a16:creationId xmlns:a16="http://schemas.microsoft.com/office/drawing/2014/main" id="{8ABA808B-12F3-44AB-B627-5DD9474BF63E}"/>
               </a:ext>
             </a:extLst>
           </p:cNvPr>
@@ -42131,7 +42131,7 @@
           <p:cNvPr id="45" name="t0-evaluation">
             <a:extLst xmlns:a="http://schemas.openxmlformats.org/drawingml/2006/main">
               <a:ext uri="{FF2B5EF4-FFF2-40B4-BE49-F238E27FC236}">
-                <a16:creationId xmlns:a16="http://schemas.microsoft.com/office/drawing/2014/main" id="{E3D1F05A-B448-4C09-822D-18696F9D622E}"/>
+                <a16:creationId xmlns:a16="http://schemas.microsoft.com/office/drawing/2014/main" id="{8983EB03-CF4C-44DE-93E9-977C56C9D54F}"/>
               </a:ext>
             </a:extLst>
           </p:cNvPr>
@@ -42162,7 +42162,7 @@
           <p:cNvPr id="46" name="t0-total">
             <a:extLst xmlns:a="http://schemas.openxmlformats.org/drawingml/2006/main">
               <a:ext uri="{FF2B5EF4-FFF2-40B4-BE49-F238E27FC236}">
-                <a16:creationId xmlns:a16="http://schemas.microsoft.com/office/drawing/2014/main" id="{10E64DC5-8C53-49B4-A7AE-928C6AAC66FD}"/>
+                <a16:creationId xmlns:a16="http://schemas.microsoft.com/office/drawing/2014/main" id="{87193CA4-8421-451A-8FF7-313D0CAC6492}"/>
               </a:ext>
             </a:extLst>
           </p:cNvPr>
@@ -42235,7 +42235,7 @@
           <p:cNvPr id="47" name="t1-label">
             <a:extLst xmlns:a="http://schemas.openxmlformats.org/drawingml/2006/main">
               <a:ext uri="{FF2B5EF4-FFF2-40B4-BE49-F238E27FC236}">
-                <a16:creationId xmlns:a16="http://schemas.microsoft.com/office/drawing/2014/main" id="{C3AE5BFA-16D9-4A68-A950-BC9B39559B86}"/>
+                <a16:creationId xmlns:a16="http://schemas.microsoft.com/office/drawing/2014/main" id="{484AA99A-7D32-4030-B7CC-A335B69FA16F}"/>
               </a:ext>
             </a:extLst>
           </p:cNvPr>
@@ -42297,7 +42297,7 @@
           <p:cNvPr id="48" name="t1-bank">
             <a:extLst xmlns:a="http://schemas.openxmlformats.org/drawingml/2006/main">
               <a:ext uri="{FF2B5EF4-FFF2-40B4-BE49-F238E27FC236}">
-                <a16:creationId xmlns:a16="http://schemas.microsoft.com/office/drawing/2014/main" id="{FB11C2C1-6906-440A-800B-974A2FDBE098}"/>
+                <a16:creationId xmlns:a16="http://schemas.microsoft.com/office/drawing/2014/main" id="{8DB98E64-0437-48F6-915F-6768629A116C}"/>
               </a:ext>
             </a:extLst>
           </p:cNvPr>
@@ -42328,7 +42328,7 @@
           <p:cNvPr id="49" name="t1-retrieval">
             <a:extLst xmlns:a="http://schemas.openxmlformats.org/drawingml/2006/main">
               <a:ext uri="{FF2B5EF4-FFF2-40B4-BE49-F238E27FC236}">
-                <a16:creationId xmlns:a16="http://schemas.microsoft.com/office/drawing/2014/main" id="{C4DE33AB-1AE8-4E2A-9F02-B81AB908F340}"/>
+                <a16:creationId xmlns:a16="http://schemas.microsoft.com/office/drawing/2014/main" id="{90A08D0C-7769-43D7-BD60-4AB651028920}"/>
               </a:ext>
             </a:extLst>
           </p:cNvPr>
@@ -42359,7 +42359,7 @@
           <p:cNvPr id="50" name="t1-retrieval-t">
             <a:extLst xmlns:a="http://schemas.openxmlformats.org/drawingml/2006/main">
               <a:ext uri="{FF2B5EF4-FFF2-40B4-BE49-F238E27FC236}">
-                <a16:creationId xmlns:a16="http://schemas.microsoft.com/office/drawing/2014/main" id="{134B7217-A69A-4DB7-80F6-B169E93314EC}"/>
+                <a16:creationId xmlns:a16="http://schemas.microsoft.com/office/drawing/2014/main" id="{A5B070BB-BE78-4A1C-916E-AA47BB6F9D98}"/>
               </a:ext>
             </a:extLst>
           </p:cNvPr>
@@ -42421,7 +42421,7 @@
           <p:cNvPr id="51" name="t1-evaluation">
             <a:extLst xmlns:a="http://schemas.openxmlformats.org/drawingml/2006/main">
               <a:ext uri="{FF2B5EF4-FFF2-40B4-BE49-F238E27FC236}">
-                <a16:creationId xmlns:a16="http://schemas.microsoft.com/office/drawing/2014/main" id="{44199D40-8223-4ADE-8810-940389F62688}"/>
+                <a16:creationId xmlns:a16="http://schemas.microsoft.com/office/drawing/2014/main" id="{4E78E880-3728-4909-A1F1-F757FD57457A}"/>
               </a:ext>
             </a:extLst>
           </p:cNvPr>
@@ -42452,7 +42452,7 @@
           <p:cNvPr id="52" name="t1-total">
             <a:extLst xmlns:a="http://schemas.openxmlformats.org/drawingml/2006/main">
               <a:ext uri="{FF2B5EF4-FFF2-40B4-BE49-F238E27FC236}">
-                <a16:creationId xmlns:a16="http://schemas.microsoft.com/office/drawing/2014/main" id="{C9C53140-73CE-4917-9250-A0A56ECFDD58}"/>
+                <a16:creationId xmlns:a16="http://schemas.microsoft.com/office/drawing/2014/main" id="{71DB3FDB-D747-43C8-BBE8-93FC0A22417B}"/>
               </a:ext>
             </a:extLst>
           </p:cNvPr>
@@ -42525,7 +42525,7 @@
           <p:cNvPr id="53" name="t2-label">
             <a:extLst xmlns:a="http://schemas.openxmlformats.org/drawingml/2006/main">
               <a:ext uri="{FF2B5EF4-FFF2-40B4-BE49-F238E27FC236}">
-                <a16:creationId xmlns:a16="http://schemas.microsoft.com/office/drawing/2014/main" id="{532A43E5-5030-46C7-8F20-1AD73DF7F3D0}"/>
+                <a16:creationId xmlns:a16="http://schemas.microsoft.com/office/drawing/2014/main" id="{E234FCBE-046F-4F87-BFCD-175DC7D393CC}"/>
               </a:ext>
             </a:extLst>
           </p:cNvPr>
@@ -42587,7 +42587,7 @@
           <p:cNvPr id="54" name="t2-retrieval">
             <a:extLst xmlns:a="http://schemas.openxmlformats.org/drawingml/2006/main">
               <a:ext uri="{FF2B5EF4-FFF2-40B4-BE49-F238E27FC236}">
-                <a16:creationId xmlns:a16="http://schemas.microsoft.com/office/drawing/2014/main" id="{09339952-0586-4D34-8720-FCE9C8899352}"/>
+                <a16:creationId xmlns:a16="http://schemas.microsoft.com/office/drawing/2014/main" id="{ACF3DFDC-17EE-499F-AC00-BB6DF37D5F8A}"/>
               </a:ext>
             </a:extLst>
           </p:cNvPr>
@@ -42618,7 +42618,7 @@
           <p:cNvPr id="55" name="t2-retrieval-t">
             <a:extLst xmlns:a="http://schemas.openxmlformats.org/drawingml/2006/main">
               <a:ext uri="{FF2B5EF4-FFF2-40B4-BE49-F238E27FC236}">
-                <a16:creationId xmlns:a16="http://schemas.microsoft.com/office/drawing/2014/main" id="{7EF4EC39-AB31-4E26-8420-2E9998F0D2A5}"/>
+                <a16:creationId xmlns:a16="http://schemas.microsoft.com/office/drawing/2014/main" id="{1649A971-2B41-43B5-A5C6-D85D83F03E95}"/>
               </a:ext>
             </a:extLst>
           </p:cNvPr>
@@ -42680,7 +42680,7 @@
           <p:cNvPr id="56" name="t2-total">
             <a:extLst xmlns:a="http://schemas.openxmlformats.org/drawingml/2006/main">
               <a:ext uri="{FF2B5EF4-FFF2-40B4-BE49-F238E27FC236}">
-                <a16:creationId xmlns:a16="http://schemas.microsoft.com/office/drawing/2014/main" id="{6D4078E2-625C-4607-BAAA-1940190CF499}"/>
+                <a16:creationId xmlns:a16="http://schemas.microsoft.com/office/drawing/2014/main" id="{44CB67EC-7FA2-47AC-8040-EEDDC3F01ABF}"/>
               </a:ext>
             </a:extLst>
           </p:cNvPr>
@@ -42753,7 +42753,7 @@
           <p:cNvPr id="57" name="t3-label">
             <a:extLst xmlns:a="http://schemas.openxmlformats.org/drawingml/2006/main">
               <a:ext uri="{FF2B5EF4-FFF2-40B4-BE49-F238E27FC236}">
-                <a16:creationId xmlns:a16="http://schemas.microsoft.com/office/drawing/2014/main" id="{A33477D9-0DE2-4AB7-874F-2879DAF3593E}"/>
+                <a16:creationId xmlns:a16="http://schemas.microsoft.com/office/drawing/2014/main" id="{34F4240E-FCE1-47B1-A0B8-335567BA8C7B}"/>
               </a:ext>
             </a:extLst>
           </p:cNvPr>
@@ -42815,7 +42815,7 @@
           <p:cNvPr id="58" name="t3-retrieval">
             <a:extLst xmlns:a="http://schemas.openxmlformats.org/drawingml/2006/main">
               <a:ext uri="{FF2B5EF4-FFF2-40B4-BE49-F238E27FC236}">
-                <a16:creationId xmlns:a16="http://schemas.microsoft.com/office/drawing/2014/main" id="{FAF24179-BCD5-4FB2-9548-58EF3B4C3860}"/>
+                <a16:creationId xmlns:a16="http://schemas.microsoft.com/office/drawing/2014/main" id="{A730228D-530C-4935-8BA7-8927043F0534}"/>
               </a:ext>
             </a:extLst>
           </p:cNvPr>
@@ -42846,7 +42846,7 @@
           <p:cNvPr id="59" name="t3-retrieval-t">
             <a:extLst xmlns:a="http://schemas.openxmlformats.org/drawingml/2006/main">
               <a:ext uri="{FF2B5EF4-FFF2-40B4-BE49-F238E27FC236}">
-                <a16:creationId xmlns:a16="http://schemas.microsoft.com/office/drawing/2014/main" id="{4307ECCA-ECBD-41E2-80CC-54E47184516A}"/>
+                <a16:creationId xmlns:a16="http://schemas.microsoft.com/office/drawing/2014/main" id="{F1C882A1-DDA4-406D-BBEF-0B3C007E272F}"/>
               </a:ext>
             </a:extLst>
           </p:cNvPr>
@@ -42908,7 +42908,7 @@
           <p:cNvPr id="60" name="t3-total">
             <a:extLst xmlns:a="http://schemas.openxmlformats.org/drawingml/2006/main">
               <a:ext uri="{FF2B5EF4-FFF2-40B4-BE49-F238E27FC236}">
-                <a16:creationId xmlns:a16="http://schemas.microsoft.com/office/drawing/2014/main" id="{C1BBD402-DD07-4E1D-9FB2-A9A5C876BDDA}"/>
+                <a16:creationId xmlns:a16="http://schemas.microsoft.com/office/drawing/2014/main" id="{EAC0DBB2-6374-43E6-864D-955A2D27CC6F}"/>
               </a:ext>
             </a:extLst>
           </p:cNvPr>
@@ -42979,7 +42979,7 @@
     </p:spTree>
     <p:extLst>
       <p:ext uri="{BB962C8B-B14F-4D97-AF65-F5344CB8AC3E}">
-        <p14:creationId xmlns:p14="http://schemas.microsoft.com/office/powerpoint/2010/main" val="895691002"/>
+        <p14:creationId xmlns:p14="http://schemas.microsoft.com/office/powerpoint/2010/main" val="196420157"/>
       </p:ext>
     </p:extLst>
   </p:cSld>
@@ -43010,7 +43010,7 @@
           <p:cNvPr id="70" name="band-a">
             <a:extLst xmlns:a="http://schemas.openxmlformats.org/drawingml/2006/main">
               <a:ext uri="{FF2B5EF4-FFF2-40B4-BE49-F238E27FC236}">
-                <a16:creationId xmlns:a16="http://schemas.microsoft.com/office/drawing/2014/main" id="{9E0E427F-0248-40E8-924B-58291321237D}"/>
+                <a16:creationId xmlns:a16="http://schemas.microsoft.com/office/drawing/2014/main" id="{DAFF06F2-2CDF-4556-B9C9-97B92E62D26C}"/>
               </a:ext>
             </a:extLst>
           </p:cNvPr>
@@ -43041,7 +43041,7 @@
           <p:cNvPr id="2" name="band-b">
             <a:extLst xmlns:a="http://schemas.openxmlformats.org/drawingml/2006/main">
               <a:ext uri="{FF2B5EF4-FFF2-40B4-BE49-F238E27FC236}">
-                <a16:creationId xmlns:a16="http://schemas.microsoft.com/office/drawing/2014/main" id="{8593E753-D4A8-457D-BD3A-6A887CA3FC41}"/>
+                <a16:creationId xmlns:a16="http://schemas.microsoft.com/office/drawing/2014/main" id="{BAE3878C-42B1-46D2-9214-5606D92BEE0E}"/>
               </a:ext>
             </a:extLst>
           </p:cNvPr>
@@ -43072,7 +43072,7 @@
           <p:cNvPr id="3" name="band-c">
             <a:extLst xmlns:a="http://schemas.openxmlformats.org/drawingml/2006/main">
               <a:ext uri="{FF2B5EF4-FFF2-40B4-BE49-F238E27FC236}">
-                <a16:creationId xmlns:a16="http://schemas.microsoft.com/office/drawing/2014/main" id="{9CF03FFE-628D-4B92-BE7B-BD03F25612B9}"/>
+                <a16:creationId xmlns:a16="http://schemas.microsoft.com/office/drawing/2014/main" id="{433C5407-4614-48BC-AA73-6F9F2F41A0D3}"/>
               </a:ext>
             </a:extLst>
           </p:cNvPr>
@@ -43103,7 +43103,7 @@
           <p:cNvPr id="4" name="sec-a-chip">
             <a:extLst xmlns:a="http://schemas.openxmlformats.org/drawingml/2006/main">
               <a:ext uri="{FF2B5EF4-FFF2-40B4-BE49-F238E27FC236}">
-                <a16:creationId xmlns:a16="http://schemas.microsoft.com/office/drawing/2014/main" id="{D05C1DE1-00B1-4E4A-8DAE-0850DAAD0C28}"/>
+                <a16:creationId xmlns:a16="http://schemas.microsoft.com/office/drawing/2014/main" id="{A4535C19-FEA7-409E-ABBD-884627A058B6}"/>
               </a:ext>
             </a:extLst>
           </p:cNvPr>
@@ -43138,7 +43138,7 @@
           <p:cNvPr id="5" name="sec-a-chip-text">
             <a:extLst xmlns:a="http://schemas.openxmlformats.org/drawingml/2006/main">
               <a:ext uri="{FF2B5EF4-FFF2-40B4-BE49-F238E27FC236}">
-                <a16:creationId xmlns:a16="http://schemas.microsoft.com/office/drawing/2014/main" id="{8563E9C1-8A75-4437-A148-D76DD926A967}"/>
+                <a16:creationId xmlns:a16="http://schemas.microsoft.com/office/drawing/2014/main" id="{E3DB11BE-6478-464E-9EEE-95BB1E925077}"/>
               </a:ext>
             </a:extLst>
           </p:cNvPr>
@@ -43200,7 +43200,7 @@
           <p:cNvPr id="6" name="sec-a">
             <a:extLst xmlns:a="http://schemas.openxmlformats.org/drawingml/2006/main">
               <a:ext uri="{FF2B5EF4-FFF2-40B4-BE49-F238E27FC236}">
-                <a16:creationId xmlns:a16="http://schemas.microsoft.com/office/drawing/2014/main" id="{10464C6B-D005-4C1F-966F-DAD8C850CAE0}"/>
+                <a16:creationId xmlns:a16="http://schemas.microsoft.com/office/drawing/2014/main" id="{A387F546-8F24-49F3-B969-1B615BACE399}"/>
               </a:ext>
             </a:extLst>
           </p:cNvPr>
@@ -43262,7 +43262,7 @@
           <p:cNvPr id="7" name="enc-B">
             <a:extLst xmlns:a="http://schemas.openxmlformats.org/drawingml/2006/main">
               <a:ext uri="{FF2B5EF4-FFF2-40B4-BE49-F238E27FC236}">
-                <a16:creationId xmlns:a16="http://schemas.microsoft.com/office/drawing/2014/main" id="{3B0D35D4-20D4-47D8-82D4-6276ECD84BAB}"/>
+                <a16:creationId xmlns:a16="http://schemas.microsoft.com/office/drawing/2014/main" id="{80CC7D28-396C-4359-9C50-E422DACB7EF7}"/>
               </a:ext>
             </a:extLst>
           </p:cNvPr>
@@ -43297,7 +43297,7 @@
           <p:cNvPr id="8" name="enc-B-tag">
             <a:extLst xmlns:a="http://schemas.openxmlformats.org/drawingml/2006/main">
               <a:ext uri="{FF2B5EF4-FFF2-40B4-BE49-F238E27FC236}">
-                <a16:creationId xmlns:a16="http://schemas.microsoft.com/office/drawing/2014/main" id="{6A6F8B92-EF63-4F30-A3AE-73AAD2B678FC}"/>
+                <a16:creationId xmlns:a16="http://schemas.microsoft.com/office/drawing/2014/main" id="{809A94BF-C856-4258-BDB4-215457A69A74}"/>
               </a:ext>
             </a:extLst>
           </p:cNvPr>
@@ -43332,7 +43332,7 @@
           <p:cNvPr id="9" name="enc-B-tag-text">
             <a:extLst xmlns:a="http://schemas.openxmlformats.org/drawingml/2006/main">
               <a:ext uri="{FF2B5EF4-FFF2-40B4-BE49-F238E27FC236}">
-                <a16:creationId xmlns:a16="http://schemas.microsoft.com/office/drawing/2014/main" id="{C1499C3B-61C0-4D27-99C2-3CB52ED5DA70}"/>
+                <a16:creationId xmlns:a16="http://schemas.microsoft.com/office/drawing/2014/main" id="{A1FAAA0F-024D-4E07-BBFE-EEFC565679E4}"/>
               </a:ext>
             </a:extLst>
           </p:cNvPr>
@@ -43394,7 +43394,7 @@
           <p:cNvPr id="10" name="enc-B-title">
             <a:extLst xmlns:a="http://schemas.openxmlformats.org/drawingml/2006/main">
               <a:ext uri="{FF2B5EF4-FFF2-40B4-BE49-F238E27FC236}">
-                <a16:creationId xmlns:a16="http://schemas.microsoft.com/office/drawing/2014/main" id="{17DDCE70-D36E-41E3-8850-2686D1B3238F}"/>
+                <a16:creationId xmlns:a16="http://schemas.microsoft.com/office/drawing/2014/main" id="{0CF0E435-0AAB-46F6-81F0-39CF73E7CFAA}"/>
               </a:ext>
             </a:extLst>
           </p:cNvPr>
@@ -43467,7 +43467,7 @@
           <p:cNvPr id="11" name="enc-B-r0">
             <a:extLst xmlns:a="http://schemas.openxmlformats.org/drawingml/2006/main">
               <a:ext uri="{FF2B5EF4-FFF2-40B4-BE49-F238E27FC236}">
-                <a16:creationId xmlns:a16="http://schemas.microsoft.com/office/drawing/2014/main" id="{06E65BC9-8D04-4CB6-9DBF-24BFD4A20E1D}"/>
+                <a16:creationId xmlns:a16="http://schemas.microsoft.com/office/drawing/2014/main" id="{7E8B78C9-85EC-4460-8EC4-484CF847B11D}"/>
               </a:ext>
             </a:extLst>
           </p:cNvPr>
@@ -43502,7 +43502,7 @@
           <p:cNvPr id="12" name="enc-B-r0-t">
             <a:extLst xmlns:a="http://schemas.openxmlformats.org/drawingml/2006/main">
               <a:ext uri="{FF2B5EF4-FFF2-40B4-BE49-F238E27FC236}">
-                <a16:creationId xmlns:a16="http://schemas.microsoft.com/office/drawing/2014/main" id="{305FCCFC-4644-49C2-91F6-B0E34F105043}"/>
+                <a16:creationId xmlns:a16="http://schemas.microsoft.com/office/drawing/2014/main" id="{F12D9F15-1472-4B25-98FE-5676555C9758}"/>
               </a:ext>
             </a:extLst>
           </p:cNvPr>
@@ -43586,7 +43586,7 @@
           <p:cNvPr id="13" name="enc-B-r1">
             <a:extLst xmlns:a="http://schemas.openxmlformats.org/drawingml/2006/main">
               <a:ext uri="{FF2B5EF4-FFF2-40B4-BE49-F238E27FC236}">
-                <a16:creationId xmlns:a16="http://schemas.microsoft.com/office/drawing/2014/main" id="{2DAFD988-8C72-4601-98F7-24710861F972}"/>
+                <a16:creationId xmlns:a16="http://schemas.microsoft.com/office/drawing/2014/main" id="{10D53D75-8E2C-4E5F-ABC4-6151CF3FF888}"/>
               </a:ext>
             </a:extLst>
           </p:cNvPr>
@@ -43621,7 +43621,7 @@
           <p:cNvPr id="14" name="enc-B-r1-t">
             <a:extLst xmlns:a="http://schemas.openxmlformats.org/drawingml/2006/main">
               <a:ext uri="{FF2B5EF4-FFF2-40B4-BE49-F238E27FC236}">
-                <a16:creationId xmlns:a16="http://schemas.microsoft.com/office/drawing/2014/main" id="{D0785822-5A96-4CD9-84E0-CE6AB5FDD8B3}"/>
+                <a16:creationId xmlns:a16="http://schemas.microsoft.com/office/drawing/2014/main" id="{437517D6-8CC3-4CBD-A83E-235CFC9C5AD4}"/>
               </a:ext>
             </a:extLst>
           </p:cNvPr>
@@ -43683,7 +43683,7 @@
           <p:cNvPr id="15" name="enc-B-r2">
             <a:extLst xmlns:a="http://schemas.openxmlformats.org/drawingml/2006/main">
               <a:ext uri="{FF2B5EF4-FFF2-40B4-BE49-F238E27FC236}">
-                <a16:creationId xmlns:a16="http://schemas.microsoft.com/office/drawing/2014/main" id="{B1ED36F9-14DD-4BE2-9645-0ED7AE2CE0B3}"/>
+                <a16:creationId xmlns:a16="http://schemas.microsoft.com/office/drawing/2014/main" id="{8B83A6CE-FC16-4440-A075-34235E2038E4}"/>
               </a:ext>
             </a:extLst>
           </p:cNvPr>
@@ -43718,7 +43718,7 @@
           <p:cNvPr id="16" name="enc-B-r2-t">
             <a:extLst xmlns:a="http://schemas.openxmlformats.org/drawingml/2006/main">
               <a:ext uri="{FF2B5EF4-FFF2-40B4-BE49-F238E27FC236}">
-                <a16:creationId xmlns:a16="http://schemas.microsoft.com/office/drawing/2014/main" id="{7DC7D215-5763-459A-A211-09C20EE77E35}"/>
+                <a16:creationId xmlns:a16="http://schemas.microsoft.com/office/drawing/2014/main" id="{97C5FB41-5932-4EDF-ADB4-01DD86AA7FA2}"/>
               </a:ext>
             </a:extLst>
           </p:cNvPr>
@@ -43780,7 +43780,7 @@
           <p:cNvPr id="17" name="enc-B-r3">
             <a:extLst xmlns:a="http://schemas.openxmlformats.org/drawingml/2006/main">
               <a:ext uri="{FF2B5EF4-FFF2-40B4-BE49-F238E27FC236}">
-                <a16:creationId xmlns:a16="http://schemas.microsoft.com/office/drawing/2014/main" id="{F08DA06C-8277-4EF2-809A-3DF9429A5FC4}"/>
+                <a16:creationId xmlns:a16="http://schemas.microsoft.com/office/drawing/2014/main" id="{A1E87F1A-6888-4D79-8F8E-0F2924308325}"/>
               </a:ext>
             </a:extLst>
           </p:cNvPr>
@@ -43815,7 +43815,7 @@
           <p:cNvPr id="18" name="enc-B-r3-t">
             <a:extLst xmlns:a="http://schemas.openxmlformats.org/drawingml/2006/main">
               <a:ext uri="{FF2B5EF4-FFF2-40B4-BE49-F238E27FC236}">
-                <a16:creationId xmlns:a16="http://schemas.microsoft.com/office/drawing/2014/main" id="{7921B994-2B43-4CB1-AD0B-1E399B35DF6D}"/>
+                <a16:creationId xmlns:a16="http://schemas.microsoft.com/office/drawing/2014/main" id="{D1DFD0A2-6717-4DBC-8CA0-918193010CB0}"/>
               </a:ext>
             </a:extLst>
           </p:cNvPr>
@@ -43899,7 +43899,7 @@
           <p:cNvPr id="19" name="enc-B-common">
             <a:extLst xmlns:a="http://schemas.openxmlformats.org/drawingml/2006/main">
               <a:ext uri="{FF2B5EF4-FFF2-40B4-BE49-F238E27FC236}">
-                <a16:creationId xmlns:a16="http://schemas.microsoft.com/office/drawing/2014/main" id="{529EE6F8-7CA8-4ADA-A6B6-2DFFEB96F9D1}"/>
+                <a16:creationId xmlns:a16="http://schemas.microsoft.com/office/drawing/2014/main" id="{E9AD0F7D-ABEB-44F9-A8D6-A7ACFE207529}"/>
               </a:ext>
             </a:extLst>
           </p:cNvPr>
@@ -43961,7 +43961,7 @@
           <p:cNvPr id="20" name="enc-C">
             <a:extLst xmlns:a="http://schemas.openxmlformats.org/drawingml/2006/main">
               <a:ext uri="{FF2B5EF4-FFF2-40B4-BE49-F238E27FC236}">
-                <a16:creationId xmlns:a16="http://schemas.microsoft.com/office/drawing/2014/main" id="{EC419313-2EAA-4796-9F4A-B3CA169B8FE4}"/>
+                <a16:creationId xmlns:a16="http://schemas.microsoft.com/office/drawing/2014/main" id="{F2209B6B-954A-4EED-A009-393E5A3BA1C8}"/>
               </a:ext>
             </a:extLst>
           </p:cNvPr>
@@ -43996,7 +43996,7 @@
           <p:cNvPr id="21" name="enc-C-tag">
             <a:extLst xmlns:a="http://schemas.openxmlformats.org/drawingml/2006/main">
               <a:ext uri="{FF2B5EF4-FFF2-40B4-BE49-F238E27FC236}">
-                <a16:creationId xmlns:a16="http://schemas.microsoft.com/office/drawing/2014/main" id="{77B60703-87CF-48DB-9BA7-99BB179FFF0D}"/>
+                <a16:creationId xmlns:a16="http://schemas.microsoft.com/office/drawing/2014/main" id="{ED048BB4-3585-4529-AAC2-D5ED858E9991}"/>
               </a:ext>
             </a:extLst>
           </p:cNvPr>
@@ -44031,7 +44031,7 @@
           <p:cNvPr id="22" name="enc-C-tag-text">
             <a:extLst xmlns:a="http://schemas.openxmlformats.org/drawingml/2006/main">
               <a:ext uri="{FF2B5EF4-FFF2-40B4-BE49-F238E27FC236}">
-                <a16:creationId xmlns:a16="http://schemas.microsoft.com/office/drawing/2014/main" id="{2C1D57B2-E098-4E56-9CAC-4807256C7729}"/>
+                <a16:creationId xmlns:a16="http://schemas.microsoft.com/office/drawing/2014/main" id="{BD67E437-A5F4-4F5C-A1FE-825E162A6B1A}"/>
               </a:ext>
             </a:extLst>
           </p:cNvPr>
@@ -44093,7 +44093,7 @@
           <p:cNvPr id="23" name="enc-C-title">
             <a:extLst xmlns:a="http://schemas.openxmlformats.org/drawingml/2006/main">
               <a:ext uri="{FF2B5EF4-FFF2-40B4-BE49-F238E27FC236}">
-                <a16:creationId xmlns:a16="http://schemas.microsoft.com/office/drawing/2014/main" id="{D94440BA-3530-4E92-B3A1-2C16B8265E67}"/>
+                <a16:creationId xmlns:a16="http://schemas.microsoft.com/office/drawing/2014/main" id="{70B7D4F9-E692-444E-9A19-1226879BF8D3}"/>
               </a:ext>
             </a:extLst>
           </p:cNvPr>
@@ -44155,7 +44155,7 @@
           <p:cNvPr id="24" name="enc-C-r0">
             <a:extLst xmlns:a="http://schemas.openxmlformats.org/drawingml/2006/main">
               <a:ext uri="{FF2B5EF4-FFF2-40B4-BE49-F238E27FC236}">
-                <a16:creationId xmlns:a16="http://schemas.microsoft.com/office/drawing/2014/main" id="{580FBC3D-0455-49BD-8F10-E447AFC2CC3F}"/>
+                <a16:creationId xmlns:a16="http://schemas.microsoft.com/office/drawing/2014/main" id="{CDBD9947-79CB-4B83-A619-4348B30A5FB1}"/>
               </a:ext>
             </a:extLst>
           </p:cNvPr>
@@ -44190,7 +44190,7 @@
           <p:cNvPr id="25" name="enc-C-r0-t">
             <a:extLst xmlns:a="http://schemas.openxmlformats.org/drawingml/2006/main">
               <a:ext uri="{FF2B5EF4-FFF2-40B4-BE49-F238E27FC236}">
-                <a16:creationId xmlns:a16="http://schemas.microsoft.com/office/drawing/2014/main" id="{EBBBDD59-B72C-4E95-A035-5BE13314FE15}"/>
+                <a16:creationId xmlns:a16="http://schemas.microsoft.com/office/drawing/2014/main" id="{F0AE3CC8-36B7-49C1-8B88-6D79E3F3F933}"/>
               </a:ext>
             </a:extLst>
           </p:cNvPr>
@@ -44274,7 +44274,7 @@
           <p:cNvPr id="26" name="enc-C-r1">
             <a:extLst xmlns:a="http://schemas.openxmlformats.org/drawingml/2006/main">
               <a:ext uri="{FF2B5EF4-FFF2-40B4-BE49-F238E27FC236}">
-                <a16:creationId xmlns:a16="http://schemas.microsoft.com/office/drawing/2014/main" id="{B980621C-4A52-472D-9D78-4974DC22A617}"/>
+                <a16:creationId xmlns:a16="http://schemas.microsoft.com/office/drawing/2014/main" id="{9B461AB8-32AC-4F6D-AD4A-0D00DB04750C}"/>
               </a:ext>
             </a:extLst>
           </p:cNvPr>
@@ -44309,7 +44309,7 @@
           <p:cNvPr id="27" name="enc-C-r1-t">
             <a:extLst xmlns:a="http://schemas.openxmlformats.org/drawingml/2006/main">
               <a:ext uri="{FF2B5EF4-FFF2-40B4-BE49-F238E27FC236}">
-                <a16:creationId xmlns:a16="http://schemas.microsoft.com/office/drawing/2014/main" id="{0DD9A0A4-752D-4A54-9E55-F37F5CFD281B}"/>
+                <a16:creationId xmlns:a16="http://schemas.microsoft.com/office/drawing/2014/main" id="{45820AFE-5A9C-4E4E-A0FC-9C3FF278248B}"/>
               </a:ext>
             </a:extLst>
           </p:cNvPr>
@@ -44371,7 +44371,7 @@
           <p:cNvPr id="28" name="enc-C-r2">
             <a:extLst xmlns:a="http://schemas.openxmlformats.org/drawingml/2006/main">
               <a:ext uri="{FF2B5EF4-FFF2-40B4-BE49-F238E27FC236}">
-                <a16:creationId xmlns:a16="http://schemas.microsoft.com/office/drawing/2014/main" id="{CE91BDDA-C387-4436-847B-3945B00A64CD}"/>
+                <a16:creationId xmlns:a16="http://schemas.microsoft.com/office/drawing/2014/main" id="{970D9A04-D586-484C-BB4A-0DA46A023B7D}"/>
               </a:ext>
             </a:extLst>
           </p:cNvPr>
@@ -44406,7 +44406,7 @@
           <p:cNvPr id="29" name="enc-C-r2-t">
             <a:extLst xmlns:a="http://schemas.openxmlformats.org/drawingml/2006/main">
               <a:ext uri="{FF2B5EF4-FFF2-40B4-BE49-F238E27FC236}">
-                <a16:creationId xmlns:a16="http://schemas.microsoft.com/office/drawing/2014/main" id="{36BED4F9-3FD2-4625-A046-56B8F2BAB9B0}"/>
+                <a16:creationId xmlns:a16="http://schemas.microsoft.com/office/drawing/2014/main" id="{8E74D4BF-B163-4B70-9F34-DF1760F51091}"/>
               </a:ext>
             </a:extLst>
           </p:cNvPr>
@@ -44468,7 +44468,7 @@
           <p:cNvPr id="30" name="enc-C-r3">
             <a:extLst xmlns:a="http://schemas.openxmlformats.org/drawingml/2006/main">
               <a:ext uri="{FF2B5EF4-FFF2-40B4-BE49-F238E27FC236}">
-                <a16:creationId xmlns:a16="http://schemas.microsoft.com/office/drawing/2014/main" id="{985A32EE-19EA-463F-9ECA-1CD0A895B82F}"/>
+                <a16:creationId xmlns:a16="http://schemas.microsoft.com/office/drawing/2014/main" id="{48474BAB-2C4E-4D69-81E0-B69FCC616668}"/>
               </a:ext>
             </a:extLst>
           </p:cNvPr>
@@ -44503,7 +44503,7 @@
           <p:cNvPr id="31" name="enc-C-r3-t">
             <a:extLst xmlns:a="http://schemas.openxmlformats.org/drawingml/2006/main">
               <a:ext uri="{FF2B5EF4-FFF2-40B4-BE49-F238E27FC236}">
-                <a16:creationId xmlns:a16="http://schemas.microsoft.com/office/drawing/2014/main" id="{62E5D7E2-4CB8-49E0-9A3F-81D10E402E41}"/>
+                <a16:creationId xmlns:a16="http://schemas.microsoft.com/office/drawing/2014/main" id="{F322BB5E-1F84-4C54-BB4D-C51913546D65}"/>
               </a:ext>
             </a:extLst>
           </p:cNvPr>
@@ -44576,7 +44576,7 @@
           <p:cNvPr id="32" name="enc-C-common">
             <a:extLst xmlns:a="http://schemas.openxmlformats.org/drawingml/2006/main">
               <a:ext uri="{FF2B5EF4-FFF2-40B4-BE49-F238E27FC236}">
-                <a16:creationId xmlns:a16="http://schemas.microsoft.com/office/drawing/2014/main" id="{94E213C9-2582-47BB-BC53-0F1473E5EFD4}"/>
+                <a16:creationId xmlns:a16="http://schemas.microsoft.com/office/drawing/2014/main" id="{0F4EA203-DCB5-4354-A09F-85C8307C71BB}"/>
               </a:ext>
             </a:extLst>
           </p:cNvPr>
@@ -44682,7 +44682,7 @@
           <p:cNvPr id="33" name="enc-S">
             <a:extLst xmlns:a="http://schemas.openxmlformats.org/drawingml/2006/main">
               <a:ext uri="{FF2B5EF4-FFF2-40B4-BE49-F238E27FC236}">
-                <a16:creationId xmlns:a16="http://schemas.microsoft.com/office/drawing/2014/main" id="{DE08204F-DC43-4D8D-9EB1-09467FB72843}"/>
+                <a16:creationId xmlns:a16="http://schemas.microsoft.com/office/drawing/2014/main" id="{BA77F6D9-474B-49E8-96ED-91146FB54BF3}"/>
               </a:ext>
             </a:extLst>
           </p:cNvPr>
@@ -44717,7 +44717,7 @@
           <p:cNvPr id="34" name="enc-S-tag">
             <a:extLst xmlns:a="http://schemas.openxmlformats.org/drawingml/2006/main">
               <a:ext uri="{FF2B5EF4-FFF2-40B4-BE49-F238E27FC236}">
-                <a16:creationId xmlns:a16="http://schemas.microsoft.com/office/drawing/2014/main" id="{8307F65B-DC4E-441A-A5A9-B15EC18E4F20}"/>
+                <a16:creationId xmlns:a16="http://schemas.microsoft.com/office/drawing/2014/main" id="{BC7CF697-102F-42C6-B027-486D3367ABDB}"/>
               </a:ext>
             </a:extLst>
           </p:cNvPr>
@@ -44752,7 +44752,7 @@
           <p:cNvPr id="35" name="enc-S-tag-text">
             <a:extLst xmlns:a="http://schemas.openxmlformats.org/drawingml/2006/main">
               <a:ext uri="{FF2B5EF4-FFF2-40B4-BE49-F238E27FC236}">
-                <a16:creationId xmlns:a16="http://schemas.microsoft.com/office/drawing/2014/main" id="{146AB9D0-9D9D-43B4-8FE5-6C89ACC1C3F6}"/>
+                <a16:creationId xmlns:a16="http://schemas.microsoft.com/office/drawing/2014/main" id="{BA1BC7A0-F513-4BB1-B743-BF96F4A706E9}"/>
               </a:ext>
             </a:extLst>
           </p:cNvPr>
@@ -44814,7 +44814,7 @@
           <p:cNvPr id="36" name="enc-S-title">
             <a:extLst xmlns:a="http://schemas.openxmlformats.org/drawingml/2006/main">
               <a:ext uri="{FF2B5EF4-FFF2-40B4-BE49-F238E27FC236}">
-                <a16:creationId xmlns:a16="http://schemas.microsoft.com/office/drawing/2014/main" id="{CACA2E17-C587-4817-9767-E067BF3A9F45}"/>
+                <a16:creationId xmlns:a16="http://schemas.microsoft.com/office/drawing/2014/main" id="{18F581B9-E479-4056-AFBD-D29EBA646CE7}"/>
               </a:ext>
             </a:extLst>
           </p:cNvPr>
@@ -44887,7 +44887,7 @@
           <p:cNvPr id="37" name="enc-S-r0">
             <a:extLst xmlns:a="http://schemas.openxmlformats.org/drawingml/2006/main">
               <a:ext uri="{FF2B5EF4-FFF2-40B4-BE49-F238E27FC236}">
-                <a16:creationId xmlns:a16="http://schemas.microsoft.com/office/drawing/2014/main" id="{ABEF07C8-929D-4D6C-A364-C21651CE5D66}"/>
+                <a16:creationId xmlns:a16="http://schemas.microsoft.com/office/drawing/2014/main" id="{FAE1A0D4-9E1F-4061-88DF-E0876C766F46}"/>
               </a:ext>
             </a:extLst>
           </p:cNvPr>
@@ -44922,7 +44922,7 @@
           <p:cNvPr id="38" name="enc-S-r0-t">
             <a:extLst xmlns:a="http://schemas.openxmlformats.org/drawingml/2006/main">
               <a:ext uri="{FF2B5EF4-FFF2-40B4-BE49-F238E27FC236}">
-                <a16:creationId xmlns:a16="http://schemas.microsoft.com/office/drawing/2014/main" id="{7801AFDF-E770-45E0-ADA5-A6B628866598}"/>
+                <a16:creationId xmlns:a16="http://schemas.microsoft.com/office/drawing/2014/main" id="{8F698951-EA52-4C58-A99C-AE6A4FAD5900}"/>
               </a:ext>
             </a:extLst>
           </p:cNvPr>
@@ -45006,7 +45006,7 @@
           <p:cNvPr id="39" name="enc-S-r1">
             <a:extLst xmlns:a="http://schemas.openxmlformats.org/drawingml/2006/main">
               <a:ext uri="{FF2B5EF4-FFF2-40B4-BE49-F238E27FC236}">
-                <a16:creationId xmlns:a16="http://schemas.microsoft.com/office/drawing/2014/main" id="{B373BFB7-C620-4310-A0B1-38A8EDF7E788}"/>
+                <a16:creationId xmlns:a16="http://schemas.microsoft.com/office/drawing/2014/main" id="{D000ACDB-ED8D-4CBF-A3E8-EE6285A0B085}"/>
               </a:ext>
             </a:extLst>
           </p:cNvPr>
@@ -45041,7 +45041,7 @@
           <p:cNvPr id="40" name="enc-S-r1-t">
             <a:extLst xmlns:a="http://schemas.openxmlformats.org/drawingml/2006/main">
               <a:ext uri="{FF2B5EF4-FFF2-40B4-BE49-F238E27FC236}">
-                <a16:creationId xmlns:a16="http://schemas.microsoft.com/office/drawing/2014/main" id="{4FA6014A-9803-465B-85E4-475593996F05}"/>
+                <a16:creationId xmlns:a16="http://schemas.microsoft.com/office/drawing/2014/main" id="{C0E719F3-4AEC-4372-AA4F-A13EAA00DF38}"/>
               </a:ext>
             </a:extLst>
           </p:cNvPr>
@@ -45114,7 +45114,7 @@
           <p:cNvPr id="41" name="enc-S-r2">
             <a:extLst xmlns:a="http://schemas.openxmlformats.org/drawingml/2006/main">
               <a:ext uri="{FF2B5EF4-FFF2-40B4-BE49-F238E27FC236}">
-                <a16:creationId xmlns:a16="http://schemas.microsoft.com/office/drawing/2014/main" id="{9ECF4EC0-5D76-45F6-B43A-5BAD77CD362F}"/>
+                <a16:creationId xmlns:a16="http://schemas.microsoft.com/office/drawing/2014/main" id="{D99886C1-FD3A-4F5D-B7AA-0A86795E1B2F}"/>
               </a:ext>
             </a:extLst>
           </p:cNvPr>
@@ -45149,7 +45149,7 @@
           <p:cNvPr id="42" name="enc-S-r2-t">
             <a:extLst xmlns:a="http://schemas.openxmlformats.org/drawingml/2006/main">
               <a:ext uri="{FF2B5EF4-FFF2-40B4-BE49-F238E27FC236}">
-                <a16:creationId xmlns:a16="http://schemas.microsoft.com/office/drawing/2014/main" id="{6724AEAD-1BB0-43D3-9E52-F3AD3931D733}"/>
+                <a16:creationId xmlns:a16="http://schemas.microsoft.com/office/drawing/2014/main" id="{A4F948B8-888A-4320-B40E-A6A8E884D5DD}"/>
               </a:ext>
             </a:extLst>
           </p:cNvPr>
@@ -45211,7 +45211,7 @@
           <p:cNvPr id="43" name="enc-S-r3">
             <a:extLst xmlns:a="http://schemas.openxmlformats.org/drawingml/2006/main">
               <a:ext uri="{FF2B5EF4-FFF2-40B4-BE49-F238E27FC236}">
-                <a16:creationId xmlns:a16="http://schemas.microsoft.com/office/drawing/2014/main" id="{6D3D16DB-2E29-45BD-B726-74C051ACC5C6}"/>
+                <a16:creationId xmlns:a16="http://schemas.microsoft.com/office/drawing/2014/main" id="{9A32E3F0-A582-4F99-875F-84FAB936724D}"/>
               </a:ext>
             </a:extLst>
           </p:cNvPr>
@@ -45246,7 +45246,7 @@
           <p:cNvPr id="44" name="enc-S-r3-t">
             <a:extLst xmlns:a="http://schemas.openxmlformats.org/drawingml/2006/main">
               <a:ext uri="{FF2B5EF4-FFF2-40B4-BE49-F238E27FC236}">
-                <a16:creationId xmlns:a16="http://schemas.microsoft.com/office/drawing/2014/main" id="{EEA7850E-2276-4849-8E95-CEB2CF7F6C80}"/>
+                <a16:creationId xmlns:a16="http://schemas.microsoft.com/office/drawing/2014/main" id="{3058C977-E514-48E7-B7C1-5B5869F8D546}"/>
               </a:ext>
             </a:extLst>
           </p:cNvPr>
@@ -45330,7 +45330,7 @@
           <p:cNvPr id="45" name="enc-S-common">
             <a:extLst xmlns:a="http://schemas.openxmlformats.org/drawingml/2006/main">
               <a:ext uri="{FF2B5EF4-FFF2-40B4-BE49-F238E27FC236}">
-                <a16:creationId xmlns:a16="http://schemas.microsoft.com/office/drawing/2014/main" id="{096933F9-3EF3-49D9-A60A-95B90709826E}"/>
+                <a16:creationId xmlns:a16="http://schemas.microsoft.com/office/drawing/2014/main" id="{222FA7B8-92EB-4A81-943A-5819EA7E9AC4}"/>
               </a:ext>
             </a:extLst>
           </p:cNvPr>
@@ -45392,7 +45392,7 @@
           <p:cNvPr id="46" name="enc-D">
             <a:extLst xmlns:a="http://schemas.openxmlformats.org/drawingml/2006/main">
               <a:ext uri="{FF2B5EF4-FFF2-40B4-BE49-F238E27FC236}">
-                <a16:creationId xmlns:a16="http://schemas.microsoft.com/office/drawing/2014/main" id="{86E192BD-CFCB-4A72-94B8-DF44BB4A772E}"/>
+                <a16:creationId xmlns:a16="http://schemas.microsoft.com/office/drawing/2014/main" id="{41B4F46C-858B-4B62-9B5B-1A895CF34884}"/>
               </a:ext>
             </a:extLst>
           </p:cNvPr>
@@ -45427,7 +45427,7 @@
           <p:cNvPr id="47" name="enc-D-tag">
             <a:extLst xmlns:a="http://schemas.openxmlformats.org/drawingml/2006/main">
               <a:ext uri="{FF2B5EF4-FFF2-40B4-BE49-F238E27FC236}">
-                <a16:creationId xmlns:a16="http://schemas.microsoft.com/office/drawing/2014/main" id="{D12AF122-76DD-49E7-B69C-ADCC4ECD65D8}"/>
+                <a16:creationId xmlns:a16="http://schemas.microsoft.com/office/drawing/2014/main" id="{663E68FB-C523-4B50-8805-96575EE8D748}"/>
               </a:ext>
             </a:extLst>
           </p:cNvPr>
@@ -45462,7 +45462,7 @@
           <p:cNvPr id="48" name="enc-D-tag-text">
             <a:extLst xmlns:a="http://schemas.openxmlformats.org/drawingml/2006/main">
               <a:ext uri="{FF2B5EF4-FFF2-40B4-BE49-F238E27FC236}">
-                <a16:creationId xmlns:a16="http://schemas.microsoft.com/office/drawing/2014/main" id="{FACD01C5-F92A-4028-8C7B-A6A98F765CB9}"/>
+                <a16:creationId xmlns:a16="http://schemas.microsoft.com/office/drawing/2014/main" id="{6642E01C-A5E5-49AE-8A79-46E1061F0096}"/>
               </a:ext>
             </a:extLst>
           </p:cNvPr>
@@ -45524,7 +45524,7 @@
           <p:cNvPr id="49" name="enc-D-title">
             <a:extLst xmlns:a="http://schemas.openxmlformats.org/drawingml/2006/main">
               <a:ext uri="{FF2B5EF4-FFF2-40B4-BE49-F238E27FC236}">
-                <a16:creationId xmlns:a16="http://schemas.microsoft.com/office/drawing/2014/main" id="{483565EB-613A-479D-8E4F-7B2A7F74FE14}"/>
+                <a16:creationId xmlns:a16="http://schemas.microsoft.com/office/drawing/2014/main" id="{7D2B25D7-A2B9-4CC8-8865-F7B7D8DA14CC}"/>
               </a:ext>
             </a:extLst>
           </p:cNvPr>
@@ -45586,7 +45586,7 @@
           <p:cNvPr id="50" name="enc-D-r0">
             <a:extLst xmlns:a="http://schemas.openxmlformats.org/drawingml/2006/main">
               <a:ext uri="{FF2B5EF4-FFF2-40B4-BE49-F238E27FC236}">
-                <a16:creationId xmlns:a16="http://schemas.microsoft.com/office/drawing/2014/main" id="{EA0A2CC2-7B1B-41D7-8CDA-2A4E5BD7BF7E}"/>
+                <a16:creationId xmlns:a16="http://schemas.microsoft.com/office/drawing/2014/main" id="{BB206220-A04A-45DB-8B1A-8EDECEE2B975}"/>
               </a:ext>
             </a:extLst>
           </p:cNvPr>
@@ -45621,7 +45621,7 @@
           <p:cNvPr id="51" name="enc-D-r0-t">
             <a:extLst xmlns:a="http://schemas.openxmlformats.org/drawingml/2006/main">
               <a:ext uri="{FF2B5EF4-FFF2-40B4-BE49-F238E27FC236}">
-                <a16:creationId xmlns:a16="http://schemas.microsoft.com/office/drawing/2014/main" id="{99233BBE-D14B-40A6-9A7B-12DF73627383}"/>
+                <a16:creationId xmlns:a16="http://schemas.microsoft.com/office/drawing/2014/main" id="{F8DC1C59-4360-4DDE-A0AA-EDB7BDEC5BB9}"/>
               </a:ext>
             </a:extLst>
           </p:cNvPr>
@@ -45683,7 +45683,7 @@
           <p:cNvPr id="52" name="enc-D-r1">
             <a:extLst xmlns:a="http://schemas.openxmlformats.org/drawingml/2006/main">
               <a:ext uri="{FF2B5EF4-FFF2-40B4-BE49-F238E27FC236}">
-                <a16:creationId xmlns:a16="http://schemas.microsoft.com/office/drawing/2014/main" id="{A14C34EB-88D4-440E-9812-8E72A8EC0D36}"/>
+                <a16:creationId xmlns:a16="http://schemas.microsoft.com/office/drawing/2014/main" id="{3BCB5DA2-E0FB-453E-B9D7-9053DB8F22A5}"/>
               </a:ext>
             </a:extLst>
           </p:cNvPr>
@@ -45718,7 +45718,7 @@
           <p:cNvPr id="53" name="enc-D-r1-t">
             <a:extLst xmlns:a="http://schemas.openxmlformats.org/drawingml/2006/main">
               <a:ext uri="{FF2B5EF4-FFF2-40B4-BE49-F238E27FC236}">
-                <a16:creationId xmlns:a16="http://schemas.microsoft.com/office/drawing/2014/main" id="{44CA172C-5840-469E-8B44-1095C2EC7F01}"/>
+                <a16:creationId xmlns:a16="http://schemas.microsoft.com/office/drawing/2014/main" id="{79ABD861-97E8-4B7E-ADF5-2BC6EB1C495A}"/>
               </a:ext>
             </a:extLst>
           </p:cNvPr>
@@ -45780,7 +45780,7 @@
           <p:cNvPr id="54" name="enc-D-r2">
             <a:extLst xmlns:a="http://schemas.openxmlformats.org/drawingml/2006/main">
               <a:ext uri="{FF2B5EF4-FFF2-40B4-BE49-F238E27FC236}">
-                <a16:creationId xmlns:a16="http://schemas.microsoft.com/office/drawing/2014/main" id="{6B9A94E1-A758-4D8D-9C1E-E9D55EBBCC0E}"/>
+                <a16:creationId xmlns:a16="http://schemas.microsoft.com/office/drawing/2014/main" id="{7D77CB2F-9D62-40C2-9F9C-0CA6BA173F6B}"/>
               </a:ext>
             </a:extLst>
           </p:cNvPr>
@@ -45815,7 +45815,7 @@
           <p:cNvPr id="55" name="enc-D-r2-t">
             <a:extLst xmlns:a="http://schemas.openxmlformats.org/drawingml/2006/main">
               <a:ext uri="{FF2B5EF4-FFF2-40B4-BE49-F238E27FC236}">
-                <a16:creationId xmlns:a16="http://schemas.microsoft.com/office/drawing/2014/main" id="{4D015B4E-18A1-467B-9F23-F2E7AB55101C}"/>
+                <a16:creationId xmlns:a16="http://schemas.microsoft.com/office/drawing/2014/main" id="{21964179-145C-43E6-95D9-2585D08873A3}"/>
               </a:ext>
             </a:extLst>
           </p:cNvPr>
@@ -45921,7 +45921,7 @@
           <p:cNvPr id="56" name="enc-D-r3">
             <a:extLst xmlns:a="http://schemas.openxmlformats.org/drawingml/2006/main">
               <a:ext uri="{FF2B5EF4-FFF2-40B4-BE49-F238E27FC236}">
-                <a16:creationId xmlns:a16="http://schemas.microsoft.com/office/drawing/2014/main" id="{26E044AD-CE65-4EEE-99C6-84B984465509}"/>
+                <a16:creationId xmlns:a16="http://schemas.microsoft.com/office/drawing/2014/main" id="{2F1610BC-C18E-4F01-AE2D-8EFBB3E740F5}"/>
               </a:ext>
             </a:extLst>
           </p:cNvPr>
@@ -45956,7 +45956,7 @@
           <p:cNvPr id="57" name="enc-D-r3-t">
             <a:extLst xmlns:a="http://schemas.openxmlformats.org/drawingml/2006/main">
               <a:ext uri="{FF2B5EF4-FFF2-40B4-BE49-F238E27FC236}">
-                <a16:creationId xmlns:a16="http://schemas.microsoft.com/office/drawing/2014/main" id="{6095BFFC-F4DB-494B-A0A5-EDB579C0AC6C}"/>
+                <a16:creationId xmlns:a16="http://schemas.microsoft.com/office/drawing/2014/main" id="{C0F8E58C-3BA3-48C4-9EBA-D358191B34F7}"/>
               </a:ext>
             </a:extLst>
           </p:cNvPr>
@@ -46040,7 +46040,7 @@
           <p:cNvPr id="58" name="enc-D-common">
             <a:extLst xmlns:a="http://schemas.openxmlformats.org/drawingml/2006/main">
               <a:ext uri="{FF2B5EF4-FFF2-40B4-BE49-F238E27FC236}">
-                <a16:creationId xmlns:a16="http://schemas.microsoft.com/office/drawing/2014/main" id="{1A86A2F7-ED52-4122-81A3-632BBFC87D80}"/>
+                <a16:creationId xmlns:a16="http://schemas.microsoft.com/office/drawing/2014/main" id="{B622E6B0-278F-4CD3-A17D-6FD410B0F572}"/>
               </a:ext>
             </a:extLst>
           </p:cNvPr>
@@ -46146,7 +46146,7 @@
           <p:cNvPr id="59" name="sec-b-chip">
             <a:extLst xmlns:a="http://schemas.openxmlformats.org/drawingml/2006/main">
               <a:ext uri="{FF2B5EF4-FFF2-40B4-BE49-F238E27FC236}">
-                <a16:creationId xmlns:a16="http://schemas.microsoft.com/office/drawing/2014/main" id="{814BD048-DB37-43AC-9FBE-7EF40291C089}"/>
+                <a16:creationId xmlns:a16="http://schemas.microsoft.com/office/drawing/2014/main" id="{F6FF8A73-FF4A-458F-BF77-FF1DAF5091F9}"/>
               </a:ext>
             </a:extLst>
           </p:cNvPr>
@@ -46181,7 +46181,7 @@
           <p:cNvPr id="60" name="sec-b-chip-text">
             <a:extLst xmlns:a="http://schemas.openxmlformats.org/drawingml/2006/main">
               <a:ext uri="{FF2B5EF4-FFF2-40B4-BE49-F238E27FC236}">
-                <a16:creationId xmlns:a16="http://schemas.microsoft.com/office/drawing/2014/main" id="{ECFBC5DB-E1C0-4BBA-9720-2EF5C6FF2EFE}"/>
+                <a16:creationId xmlns:a16="http://schemas.microsoft.com/office/drawing/2014/main" id="{AF617F13-615D-462C-A8C1-5B69A613BCF7}"/>
               </a:ext>
             </a:extLst>
           </p:cNvPr>
@@ -46243,7 +46243,7 @@
           <p:cNvPr id="61" name="sec-b">
             <a:extLst xmlns:a="http://schemas.openxmlformats.org/drawingml/2006/main">
               <a:ext uri="{FF2B5EF4-FFF2-40B4-BE49-F238E27FC236}">
-                <a16:creationId xmlns:a16="http://schemas.microsoft.com/office/drawing/2014/main" id="{2F0D0848-2ABA-4072-8A10-BA376DE1A686}"/>
+                <a16:creationId xmlns:a16="http://schemas.microsoft.com/office/drawing/2014/main" id="{EEE5B47E-2B81-44BB-BFD3-2DFF03F45DB9}"/>
               </a:ext>
             </a:extLst>
           </p:cNvPr>
@@ -46305,7 +46305,7 @@
           <p:cNvPr id="62" name="b-facts">
             <a:extLst xmlns:a="http://schemas.openxmlformats.org/drawingml/2006/main">
               <a:ext uri="{FF2B5EF4-FFF2-40B4-BE49-F238E27FC236}">
-                <a16:creationId xmlns:a16="http://schemas.microsoft.com/office/drawing/2014/main" id="{DD1E85DE-C5DA-4AC5-A3A5-E4304FA27A9B}"/>
+                <a16:creationId xmlns:a16="http://schemas.microsoft.com/office/drawing/2014/main" id="{555E149D-1C9C-4E70-9237-BC126CB2E07F}"/>
               </a:ext>
             </a:extLst>
           </p:cNvPr>
@@ -46509,7 +46509,7 @@
           <p:cNvPr id="63" name="sec-c-chip">
             <a:extLst xmlns:a="http://schemas.openxmlformats.org/drawingml/2006/main">
               <a:ext uri="{FF2B5EF4-FFF2-40B4-BE49-F238E27FC236}">
-                <a16:creationId xmlns:a16="http://schemas.microsoft.com/office/drawing/2014/main" id="{30314B35-DCD1-4C8E-B1F8-7591DD2747D5}"/>
+                <a16:creationId xmlns:a16="http://schemas.microsoft.com/office/drawing/2014/main" id="{BC8A8BE0-B801-4DAD-BB89-90A2D0D8257B}"/>
               </a:ext>
             </a:extLst>
           </p:cNvPr>
@@ -46544,7 +46544,7 @@
           <p:cNvPr id="64" name="sec-c-chip-text">
             <a:extLst xmlns:a="http://schemas.openxmlformats.org/drawingml/2006/main">
               <a:ext uri="{FF2B5EF4-FFF2-40B4-BE49-F238E27FC236}">
-                <a16:creationId xmlns:a16="http://schemas.microsoft.com/office/drawing/2014/main" id="{25853909-9D73-4D23-8D2F-BDB7015F0DD1}"/>
+                <a16:creationId xmlns:a16="http://schemas.microsoft.com/office/drawing/2014/main" id="{8B91AE9A-57E0-4634-BC08-06A9362547E5}"/>
               </a:ext>
             </a:extLst>
           </p:cNvPr>
@@ -46606,7 +46606,7 @@
           <p:cNvPr id="65" name="sec-c">
             <a:extLst xmlns:a="http://schemas.openxmlformats.org/drawingml/2006/main">
               <a:ext uri="{FF2B5EF4-FFF2-40B4-BE49-F238E27FC236}">
-                <a16:creationId xmlns:a16="http://schemas.microsoft.com/office/drawing/2014/main" id="{980FF399-EEB7-4C54-B705-FE5CC645C636}"/>
+                <a16:creationId xmlns:a16="http://schemas.microsoft.com/office/drawing/2014/main" id="{CF09BA86-26F9-4864-ADC8-A96A8AAEB48E}"/>
               </a:ext>
             </a:extLst>
           </p:cNvPr>
@@ -46668,7 +46668,7 @@
           <p:cNvPr id="66" name="frozen-0">
             <a:extLst xmlns:a="http://schemas.openxmlformats.org/drawingml/2006/main">
               <a:ext uri="{FF2B5EF4-FFF2-40B4-BE49-F238E27FC236}">
-                <a16:creationId xmlns:a16="http://schemas.microsoft.com/office/drawing/2014/main" id="{F016B9E3-16DF-402A-BEA2-1DB793A0967A}"/>
+                <a16:creationId xmlns:a16="http://schemas.microsoft.com/office/drawing/2014/main" id="{C9FD951B-8FE9-4E84-AD97-D1B817187B65}"/>
               </a:ext>
             </a:extLst>
           </p:cNvPr>
@@ -46730,7 +46730,7 @@
           <p:cNvPr id="67" name="frozen-1">
             <a:extLst xmlns:a="http://schemas.openxmlformats.org/drawingml/2006/main">
               <a:ext uri="{FF2B5EF4-FFF2-40B4-BE49-F238E27FC236}">
-                <a16:creationId xmlns:a16="http://schemas.microsoft.com/office/drawing/2014/main" id="{A3CDE1FE-A886-4EB8-86C4-8918AB4E827D}"/>
+                <a16:creationId xmlns:a16="http://schemas.microsoft.com/office/drawing/2014/main" id="{5D96B81D-F2C9-4980-8B05-C9FB627B3F1E}"/>
               </a:ext>
             </a:extLst>
           </p:cNvPr>
@@ -46902,7 +46902,7 @@
           <p:cNvPr id="68" name="frozen-2">
             <a:extLst xmlns:a="http://schemas.openxmlformats.org/drawingml/2006/main">
               <a:ext uri="{FF2B5EF4-FFF2-40B4-BE49-F238E27FC236}">
-                <a16:creationId xmlns:a16="http://schemas.microsoft.com/office/drawing/2014/main" id="{30204CA4-B9B5-4EA9-84A5-9A63C06B5F04}"/>
+                <a16:creationId xmlns:a16="http://schemas.microsoft.com/office/drawing/2014/main" id="{7A677680-694A-4A5A-9297-D7A5113D08A1}"/>
               </a:ext>
             </a:extLst>
           </p:cNvPr>
@@ -46964,7 +46964,7 @@
           <p:cNvPr id="69" name="frozen-3">
             <a:extLst xmlns:a="http://schemas.openxmlformats.org/drawingml/2006/main">
               <a:ext uri="{FF2B5EF4-FFF2-40B4-BE49-F238E27FC236}">
-                <a16:creationId xmlns:a16="http://schemas.microsoft.com/office/drawing/2014/main" id="{EFEBF327-DAC4-45F0-A60B-1C6089CCA158}"/>
+                <a16:creationId xmlns:a16="http://schemas.microsoft.com/office/drawing/2014/main" id="{B46C456A-BC61-461A-94FE-B4DC340A8A8C}"/>
               </a:ext>
             </a:extLst>
           </p:cNvPr>
@@ -47024,7 +47024,7 @@
     </p:spTree>
     <p:extLst>
       <p:ext uri="{BB962C8B-B14F-4D97-AF65-F5344CB8AC3E}">
-        <p14:creationId xmlns:p14="http://schemas.microsoft.com/office/powerpoint/2010/main" val="12865195"/>
+        <p14:creationId xmlns:p14="http://schemas.microsoft.com/office/powerpoint/2010/main" val="1148804914"/>
       </p:ext>
     </p:extLst>
   </p:cSld>
